--- a/Улей — презентация для преакселератора ВШМ.pptx
+++ b/Улей — презентация для преакселератора ВШМ.pptx
@@ -117,32 +117,32 @@
   <p:extLst>
     <p:ext uri="{521415D9-36F7-43E2-AB2F-B90AF26B5E84}">
       <p14:sectionLst xmlns:p14="http://schemas.microsoft.com/office/powerpoint/2010/main">
-        <p14:section name="Обложка" id="{7e1322e4-9a6b-53a3-8175-697c6cd93551}">
+        <p14:section name="Обложка" id="{96170764-bae3-f99e-3fb7-f01198326fcd}">
           <p14:sldIdLst>
             <p14:sldId id="256"/>
           </p14:sldIdLst>
         </p14:section>
-        <p14:section name="Проблема и решение" id="{2f18ed33-ec65-3736-2194-3ed39500d320}">
+        <p14:section name="Проблема и решение" id="{4e8bf2c2-077f-c35d-742c-1209220c4038}">
           <p14:sldIdLst>
             <p14:sldId id="257"/>
             <p14:sldId id="258"/>
             <p14:sldId id="259"/>
           </p14:sldIdLst>
         </p14:section>
-        <p14:section name="Клиенты и рынок" id="{71132cd3-4733-d07c-337c-c003d1ab51ba}">
+        <p14:section name="Клиенты и рынок" id="{a011f3f0-4751-078d-fe05-80796da333e2}">
           <p14:sldIdLst>
             <p14:sldId id="260"/>
             <p14:sldId id="261"/>
             <p14:sldId id="262"/>
           </p14:sldIdLst>
         </p14:section>
-        <p14:section name="Экономика и риски" id="{09073639-ac86-ed1e-6882-0f913d9e6f58}">
+        <p14:section name="Экономика и риски" id="{340bb762-18c8-deca-a147-ac6572e05697}">
           <p14:sldIdLst>
             <p14:sldId id="263"/>
             <p14:sldId id="264"/>
           </p14:sldIdLst>
         </p14:section>
-        <p14:section name="План и команда" id="{526a5f94-00da-899d-d549-384d220b3cc1}">
+        <p14:section name="План и команда" id="{203ef852-f951-9f3a-5836-f3719006b1c6}">
           <p14:sldIdLst>
             <p14:sldId id="265"/>
             <p14:sldId id="266"/>
@@ -640,7 +640,7 @@
           <a:p>
             <a:r>
               <a:rPr lang="en-US" dirty="0"/>
-              <a:t>План на полгода построен как последовательная проверка. Первый месяц — оценка идеи: двадцать проблемных интервью с потенциальными клиентами, изучение оборудования у пятнадцати потенциальных владельцев, анализ предложений конкурентов, предварительная экономика, требования к будущему MVP и поиск технической экспертизы. Второй и третий месяцы — проверка возможности пилота, если у нас будут нужные ресурсы: выбираем первую целевую задачу, делаем простой технический прототип, тестируем несколько видеокарт, проверяем работоспособность и стоимость вычислений и ищем пилотных клиентов. Первые оплаченные задания — желательный, но не обязательный результат. Четвёртый–шестой месяцы — развитие по результатам: улучшаем прототип, проводим дополнительные испытания, проверяем платёжеспособный спрос и корректируем экономику. В конце принимаем решение: развивать проект, сменить направление или отказаться от гипотезы, если она нежизнеспособна. Бюджет на три месяца — предварительно от 100 до 700 тысяч рублей, конкретные затраты зависят от объёма разработки и привлечения специалистов. Интервью, изучение оборудования, анализ цен и финмодель делаем сами; внешние специалисты нужны для прототипа и юридической оценки. Грант «Студенческий стартап» — возможный источник, получение не гарантировано.</a:t>
+              <a:t>План на полгода построен как последовательная проверка. Первый месяц — оценка идеи: двадцать проблемных интервью с потенциальными клиентами, где выясняем не только интерес, но и сколько GPU-часов в месяц им нужно и какую цену часа они готовы платить; разговоры с пятнадцатью потенциальными владельцами — не только о модели видеокарты, но и о том, когда она доступна, во что обходится и на каких условиях её можно подключить, и какое минимальное вознаграждение их устроит. Плюс анализ предложений конкурентов, требования к будущему MVP и поиск технической экспертизы. Второй и третий месяцы — проверка возможности пилота, если у нас будут нужные ресурсы: выбираем первую целевую задачу, делаем простой технический прототип, тестируем несколько видеокарт, проверяем работоспособность и стоимость вычислений и ищем пилотных клиентов. Первые оплаченные задания — желательный, но не обязательный результат. Четвёртый–шестой месяцы — развитие по результатам: улучшаем прототип, проводим дополнительные испытания, проверяем платёжеспособный спрос и корректируем экономику. В конце принимаем решение: развивать проект, сменить направление или отказаться от гипотезы, если она нежизнеспособна. Бюджет на три месяца — предварительно от 100 до 700 тысяч рублей на проверку гипотез и ограниченный прототип; конкретные затраты зависят от объёма разработки и привлечения специалистов. Это не те 250 тысяч рублей в месяц, что на слайде с экономикой: там условные постоянные расходы работающего сервиса на более зрелой стадии. Выхода в ноль за три месяца мы не обещаем.Интервью, изучение оборудования, анализ цен и финмодель делаем сами; внешние специалисты нужны для прототипа и юридической оценки. Грант «Студенческий стартап» — возможный источник, получение не гарантировано.</a:t>
             </a:r>
             <a:endParaRPr lang="en-US" dirty="0"/>
           </a:p>
@@ -816,7 +816,7 @@
           <a:p>
             <a:r>
               <a:rPr lang="en-US" dirty="0"/>
-              <a:t>С одной стороны, вычислительная мощность имеет понятную рыночную цену. Час аренды игровой видеокарты RTX 3090 в российских облаках стоит около 70 рублей: у immers.cloud — от 70,7 рубля в базовой конфигурации, средняя цена по обзору tproger — около 67 рублей. Круглосуточная аренда такой карты обходится примерно в 50 тысяч рублей в месяц. С другой стороны, есть уже купленное оборудование, которое загружено не полностью. В 2022 году Ethereum, крупнейшая монета для майнинга на видеокартах, перешёл на другой механизм и перестал использовать майнинг. С тех пор доход от майнинга на видеокартах зависит от модели карты, тарифа на электричество и курса монет, и для части владельцев он невысок. Мы не утверждаем, что майнинг убыточен для всех; наша гипотеза в том, что часть ферм и игровых ПК можно загрузить полезной работой.</a:t>
+              <a:t>С одной стороны, вычислительная мощность имеет понятную рыночную цену. Час аренды игровой видеокарты RTX 3090 в облаке Immers.cloud стоит от 63 до 71 рубля в зависимости от конфигурации процессора и памяти: например, 63,15 рубля с 4 vCPU и 8 ГБ памяти, 66,76 рубля с 8 vCPU и 16 ГБ. Круглосуточная аренда такой карты обходится примерно в 45–50 тысяч рублей в месяц. У других провайдеров и на распределённых площадках бывает дешевле — это разберём на слайде с конкурентами. С другой стороны, есть уже купленное оборудование, которое загружено не полностью. В 2022 году Ethereum, крупнейшая монета для майнинга на видеокартах, перешёл на другой механизм и перестал использовать майнинг. С тех пор доход от майнинга на видеокартах зависит от модели карты, тарифа на электричество и курса монет, и для части владельцев он невысок. Мы не утверждаем, что майнинг убыточен для всех; наша гипотеза в том, что часть ферм и игровых ПК можно загрузить полезной работой.</a:t>
             </a:r>
             <a:endParaRPr lang="en-US" dirty="0"/>
           </a:p>
@@ -992,7 +992,7 @@
           <a:p>
             <a:r>
               <a:rPr lang="en-US" dirty="0"/>
-              <a:t>Как это выглядит для клиента. Первое: команда запрашивает видеокарту с нужным объёмом памяти на нужное число часов. Второе: Улей подбирает свободную подходящую карту у владельца. Третье: команда запускает на ней свою задачу, а Улей учитывает часы работы. Четвёртое: команда платит за часы, владелец получает вознаграждение, Улей — свою долю. Расчётный сценарий, а не коммерческое предложение: лаборатории нужно обработать большой набор изображений готовой моделью, это около ста часов работы карты с 24 гигабайтами памяти. Данные делятся на части, поэтому если работу прервали, часть можно запустить заново. По нашей целевой цене это четыре тысячи рублей; по типичным облачным тарифам 67–87 рублей за час — от 6700 до 8700 рублей. На рынке есть предложения и от 40 рублей за час, поэтому экономию мы не обещаем. На старте подходят задачи, которые можно разбить на части или повторить. Длительное обучение модели можно прерывать, только если сохраняется промежуточное состояние, — это проверим в пилоте. Срочные задачи и работу на нескольких картах сразу пока не берём.</a:t>
+              <a:t>Как это выглядит для клиента. Первое: команда запрашивает видеокарту с нужным объёмом памяти на нужное число часов. Второе: Улей подбирает свободную подходящую карту у владельца. Третье: команда запускает на ней свою задачу, а Улей учитывает часы работы. Четвёртое: команда платит за часы, владелец получает вознаграждение, Улей — свою долю. Расчётный сценарий, а не коммерческое предложение: лаборатории нужно обработать большой набор изображений готовой моделью, это около ста часов работы карты с 24 гигабайтами памяти. Данные делятся на части, поэтому если работу прервали, часть можно запустить заново. По нашей целевой цене это четыре тысячи рублей, но 40 рублей за час — цель, пилотом она не подтверждена. В облаке Immers.cloud RTX 3090 стоит 63–71 рубль за час, то есть 6300–7100 рублей за такую задачу, и в эту цену входят процессор, память, диск и гарантии доступности дата-центра. Конфигурации не полностью сопоставимы: у Улья процессор, память и надёжность зависят от оборудования владельца. При этом распределённые площадки — Тераферма, Vast.ai, SaladCloud — уже предлагают RTX 3090 заметно дешевле 40 рублей за час. Поэтому экономию для любого клиента мы не обещаем: преимущество по цене предстоит проверить. На старте подходят задачи, которые можно разбить на части или повторить. Длительное обучение модели можно прерывать, только если сохраняется промежуточное состояние, — это проверим в пилоте. Срочные задачи и работу на нескольких картах сразу пока не берём.</a:t>
             </a:r>
             <a:endParaRPr lang="en-US" dirty="0"/>
           </a:p>
@@ -1256,7 +1256,7 @@
           <a:p>
             <a:r>
               <a:rPr lang="en-US" dirty="0"/>
-              <a:t>Сравниваем сопоставимое: RTX 3090 с 24 гигабайтами памяти, почасовая аренда, тарифы 2026 года. Российские GPU-облака — Selectel, Cloud.ru, immers.cloud — берут за такой час около 67–71 рубля по типичным тарифам, и на рынке есть предложения от 40 рублей. Они работают в рублях и по договору, у них дата-центры и гарантии доступности, а для несрочных задач у части облаков есть прерываемые машины, например в Yandex Cloud. Зарубежные площадки вроде Vast.ai и Salad дешевле — около 11–13 центов за час RTX 3090, а прерываемая аренда ещё дешевле, — но расчёты в долларах, и российские карты там обычно не проходят. Поэтому низкая цена сама по себе не наше преимущество. Улей проверяет гипотезу: можно ли за счёт уже существующего оборудования предоставлять недорогие GPU-мощности именно для несрочных задач. Надёжность и удобство подключения нам ещё предстоит создать и доказать.</a:t>
+              <a:t>Сравниваем RTX 3090 с 24 гигабайтами памяти при почасовой аренде, но это не полностью взаимозаменяемые продукты. Российские GPU-облака, например Immers.cloud, берут 63–71 рубль за час, и в цену входят процессор, память, диск, дата-центр и гарантии доступности; у других облачных провайдеров встречаются цены ниже. Самый близкий к нам по модели российский игрок — Тераферма: она сдаёт в аренду видеокарты частных владельцев и предлагает владельцам сдать свою карту. На её страницах опубликованы цены RTX 3090 примерно от 22 до 31 рубля за час, но они расходятся между страницами и условиями оплаты, а наличие карт нужно проверять. Зарубежные площадки ещё дешевле: RunPod — 22 цента в Community Cloud и 50 центов в Secure Cloud, SaladCloud — от 9 до 17 центов в зависимости от приоритета, у Vast.ai цена зависит от хоста. Но расчёты там в долларах, российские карты обычно не проходят, а надёжность зависит от хоста и тарифа. Поэтому мы не называем Улей самым дешёвым или уникальным. Мы проверяем, можно ли создать конкурентоспособный российский сервис GPU-вычислений на базе простаивающего оборудования, с приоритетом на доступные мощности для небольших команд и несрочных задач.</a:t>
             </a:r>
             <a:endParaRPr lang="en-US" dirty="0"/>
           </a:p>
@@ -1344,7 +1344,7 @@
           <a:p>
             <a:r>
               <a:rPr lang="en-US" dirty="0"/>
-              <a:t>Экономика одной видеокарты. Клиент платит 40 рублей за оплаченный час. 20 рублей получает владелец, электричество он оплачивает сам — по нашей оценке два-три рубля в час, но это зависит от потребления системы и местного тарифа. 4,4 рубля — предварительная оценка наших переменных расходов: налог по упрощёнке 6%, то есть 2,4 рубля, плюс эквайринг и поддержка, около двух рублей. Гарантировать, что этого хватит, мы не можем. Остаётся 15,6 рубля — это не прибыль, а вклад в покрытие постоянных расходов. Важно различать доступность карты и платную загрузку. Базовый сценарий рассчитан на круглосуточно доступную карту на ферме с 50% платной загрузкой: это 360 оплаченных часов в месяц и 5616 рублей маржинального дохода с карты. Тогда постоянные расходы около 250 тысяч рублей в месяц покрывают примерно 45 карт. Домашний компьютер доступен, скажем, восемь часов в сутки: при той же загрузке это 120 оплаченных часов, 1872 рубля с карты, и для тех же расходов нужно около 134 карт. Это иллюстративные сценарии, не прогноз и не гарантированная точка безубыточности: реальная экономика зависит от доступности, спроса, простоев, перезапусков и затрат на инфраструктуру. Для ориентира: при расходах 500 тысяч нужно около 90 карт фермы, при 1,7–2,2 миллиона — около 300–390.</a:t>
+              <a:t>Экономика одной видеокарты — предварительный расчёт, а не достигнутый результат. Базовый сценарий: клиент платит 40 рублей за оплаченный час, 20 рублей получает владелец, 4,4 рубля — наши переменные расходы: налог по УСН «Доходы» 6%, то есть 2,4 рубля, и прочие расходы около двух рублей. Остаётся 15,6 рубля на постоянные расходы и прибыль. Электричество, а также процессор, память, накопитель и подключение к сети обеспечивает владелец, и эти затраты в два рубля не входят; электричество, по нашей оценке, стоит ему два-три рубля в час. Но базовый тариф — только один возможный сценарий. Конкуренты платят владельцам меньше: Тераферма публикует ставки около 11,8–13,6 рубля за оплаченный час RTX 3090 — это ориентир, а не подтверждённый доход владельцев. Поэтому мы считаем ещё два сценария: 35 рублей клиенту и 16 владельцу, и 30 рублей клиенту и 14 владельцу. Формула одна: цена умножить на 0,94, минус выплата владельцу, минус два рубля. Получается 15,6, 14,9 и 12,2 рубля маржинального дохода с часа. Это допущения: юридическая структура и налоговая модель ещё не определены, а при росте оборота может появиться НДС. Если карта на ферме доступна круглосуточно и оплачена половину времени, это 360 часов в месяц, и для 250 тысяч постоянных расходов нужно около 45, 47 или 57 карт. Домашний компьютер, доступный восемь часов в сутки, даёт втрое меньше часов, и карт понадобится втрое больше — около 134 в базовом сценарии. Но для бизнеса важнее не число карт, а объём продаж: в базовом сценарии нужно продать около 16 тысяч GPU-часов в месяц, это примерно 160 заказов по 100 часов. Такой спрос не подтверждён — его мы и проверяем. 250 тысяч рублей в месяц — условные постоянные расходы работающего сервиса на более зрелой стадии, а не бюджет пилота.</a:t>
             </a:r>
             <a:endParaRPr lang="en-US" dirty="0"/>
           </a:p>
@@ -1432,7 +1432,7 @@
           <a:p>
             <a:r>
               <a:rPr lang="en-US" dirty="0"/>
-              <a:t>Шесть рисков, три ключевых выделены. Первый — техническая реализуемость: сможем ли мы дать клиенту стабильную вычислительную среду на чужом оборудовании. Проверяем на нескольких картах: как задача запускается, что происходит при сбое и можно ли её перезапустить. Второй — платёжеспособный спрос: двадцать проблемных интервью, и сигналом считаем готовность заплатить за пилот. Третий — конкурентоспособная себестоимость: даже если карта простаивает, владелец может не согласиться предоставлять её по цене, при которой Улей остаётся выгодным клиенту. Это обсуждаем с пятнадцатью владельцами и считаем их затраты. Четвёртый — право и защита данных: изоляция задач снижает риск, но не гарантирует конфиденциальность, поэтому в пилоте используем тестовые и неконфиденциальные данные, а юридическую сторону проверяем отдельно. Пятый — подходящее оборудование: если у владельцев мало карт с нужной памятью, пересматриваем направление. Шестой — нет технического специалиста: без него мы не подтвердим технические гипотезы. Ищем специалиста или наставника через программу и профильные сообщества, но понимаем, что это не гарантировано.</a:t>
+              <a:t>Шесть рисков, три ключевых выделены. Первый — техническая реализуемость: сможем ли мы дать клиенту стабильную вычислительную среду на чужом оборудовании. Проверяем на нескольких картах: как задача запускается, что происходит при сбое и можно ли её перезапустить. Второй — платёжеспособный спрос, и здесь важен объём продаж: даже если карт подключено достаточно, оплаченных часов может не хватить. Базовому сценарию нужно около 16 тысяч часов в месяц, поэтому в двадцати интервью выясняем не только интерес, но и сколько часов в месяц команда готова покупать и по какой цене. Третий — конкурентоспособная себестоимость и ценовая конкуренция: уже есть площадки, которые сдают RTX 3090 дешевле нашей целевой цены, а владелец может не согласиться на выплату, при которой Улей остаётся конкурентным. Это обсуждаем с пятнадцатью владельцами и считаем их затраты. Четвёртый — право и защита данных: изоляция задач снижает риск, но не гарантирует конфиденциальность, поэтому в пилоте используем тестовые и неконфиденциальные данные, а юридическую сторону проверяем отдельно. Пятый — подходящее оборудование: если у владельцев мало карт с нужной памятью, пересматриваем направление. Шестой — нет технического специалиста: без него мы не подтвердим технические гипотезы. Ищем специалиста или наставника через программу и профильные сообщества, но понимаем, что это не гарантировано.</a:t>
             </a:r>
             <a:endParaRPr lang="en-US" dirty="0"/>
           </a:p>
@@ -2252,12 +2252,12 @@
         </p:nvSpPr>
         <p:spPr>
           <a:xfrm>
-            <a:off x="815975" y="1504057"/>
-            <a:ext cx="3414216" cy="2529284"/>
+            <a:off x="815975" y="1448891"/>
+            <a:ext cx="3414216" cy="2632075"/>
           </a:xfrm>
           <a:prstGeom prst="roundRect">
             <a:avLst>
-              <a:gd name="adj" fmla="val 6025"/>
+              <a:gd name="adj" fmla="val 5790"/>
             </a:avLst>
           </a:prstGeom>
           <a:solidFill>
@@ -2279,7 +2279,7 @@
         </p:nvSpPr>
         <p:spPr>
           <a:xfrm>
-            <a:off x="1022350" y="1634232"/>
+            <a:off x="1022350" y="1579066"/>
             <a:ext cx="3091510" cy="266700"/>
           </a:xfrm>
           <a:prstGeom prst="rect">
@@ -2318,7 +2318,7 @@
         </p:nvSpPr>
         <p:spPr>
           <a:xfrm>
-            <a:off x="1022350" y="1900932"/>
+            <a:off x="1022350" y="1833066"/>
             <a:ext cx="3091510" cy="234950"/>
           </a:xfrm>
           <a:prstGeom prst="rect">
@@ -2357,7 +2357,7 @@
         </p:nvSpPr>
         <p:spPr>
           <a:xfrm>
-            <a:off x="1022350" y="2159298"/>
+            <a:off x="1022350" y="2078732"/>
             <a:ext cx="3001466" cy="0"/>
           </a:xfrm>
           <a:prstGeom prst="line">
@@ -2380,7 +2380,7 @@
         </p:nvSpPr>
         <p:spPr>
           <a:xfrm>
-            <a:off x="1022350" y="2194223"/>
+            <a:off x="1022350" y="2100957"/>
             <a:ext cx="3091510" cy="234950"/>
           </a:xfrm>
           <a:prstGeom prst="rect">
@@ -2405,7 +2405,7 @@
                 <a:ea typeface="+mn-lt" pitchFamily="34" charset="-122"/>
                 <a:cs typeface="+mn-lt" pitchFamily="34" charset="-120"/>
               </a:rPr>
-              <a:t>20 проблемных интервью</a:t>
+              <a:t>20 интервью: интерес и объём часов</a:t>
             </a:r>
             <a:endParaRPr lang="en-US" sz="1200" dirty="0"/>
           </a:p>
@@ -2419,7 +2419,7 @@
         </p:nvSpPr>
         <p:spPr>
           <a:xfrm>
-            <a:off x="1022350" y="2452588"/>
+            <a:off x="1022350" y="2346623"/>
             <a:ext cx="3001466" cy="0"/>
           </a:xfrm>
           <a:prstGeom prst="line">
@@ -2442,7 +2442,7 @@
         </p:nvSpPr>
         <p:spPr>
           <a:xfrm>
-            <a:off x="1022350" y="2487513"/>
+            <a:off x="1022350" y="2368848"/>
             <a:ext cx="3091510" cy="234950"/>
           </a:xfrm>
           <a:prstGeom prst="rect">
@@ -2467,7 +2467,7 @@
                 <a:ea typeface="+mn-lt" pitchFamily="34" charset="-122"/>
                 <a:cs typeface="+mn-lt" pitchFamily="34" charset="-120"/>
               </a:rPr>
-              <a:t>Оборудование у 15 владельцев</a:t>
+              <a:t>Цена часа, которую готовы платить</a:t>
             </a:r>
             <a:endParaRPr lang="en-US" sz="1200" dirty="0"/>
           </a:p>
@@ -2481,7 +2481,7 @@
         </p:nvSpPr>
         <p:spPr>
           <a:xfrm>
-            <a:off x="1022350" y="2745879"/>
+            <a:off x="1022350" y="2614513"/>
             <a:ext cx="3001466" cy="0"/>
           </a:xfrm>
           <a:prstGeom prst="line">
@@ -2504,7 +2504,7 @@
         </p:nvSpPr>
         <p:spPr>
           <a:xfrm>
-            <a:off x="1022350" y="2780804"/>
+            <a:off x="1022350" y="2636738"/>
             <a:ext cx="3091510" cy="234950"/>
           </a:xfrm>
           <a:prstGeom prst="rect">
@@ -2529,7 +2529,7 @@
                 <a:ea typeface="+mn-lt" pitchFamily="34" charset="-122"/>
                 <a:cs typeface="+mn-lt" pitchFamily="34" charset="-120"/>
               </a:rPr>
-              <a:t>Анализ предложений конкурентов</a:t>
+              <a:t>15 владельцев: доступность, расходы</a:t>
             </a:r>
             <a:endParaRPr lang="en-US" sz="1200" dirty="0"/>
           </a:p>
@@ -2543,7 +2543,7 @@
         </p:nvSpPr>
         <p:spPr>
           <a:xfrm>
-            <a:off x="1022350" y="3039170"/>
+            <a:off x="1022350" y="2882404"/>
             <a:ext cx="3001466" cy="0"/>
           </a:xfrm>
           <a:prstGeom prst="line">
@@ -2566,7 +2566,7 @@
         </p:nvSpPr>
         <p:spPr>
           <a:xfrm>
-            <a:off x="1022350" y="3074095"/>
+            <a:off x="1022350" y="2904629"/>
             <a:ext cx="3091510" cy="234950"/>
           </a:xfrm>
           <a:prstGeom prst="rect">
@@ -2591,7 +2591,7 @@
                 <a:ea typeface="+mn-lt" pitchFamily="34" charset="-122"/>
                 <a:cs typeface="+mn-lt" pitchFamily="34" charset="-120"/>
               </a:rPr>
-              <a:t>Предварительная экономика</a:t>
+              <a:t>Минимальная выплата владельцам</a:t>
             </a:r>
             <a:endParaRPr lang="en-US" sz="1200" dirty="0"/>
           </a:p>
@@ -2605,7 +2605,7 @@
         </p:nvSpPr>
         <p:spPr>
           <a:xfrm>
-            <a:off x="1022350" y="3332460"/>
+            <a:off x="1022350" y="3150295"/>
             <a:ext cx="3001466" cy="0"/>
           </a:xfrm>
           <a:prstGeom prst="line">
@@ -2628,7 +2628,7 @@
         </p:nvSpPr>
         <p:spPr>
           <a:xfrm>
-            <a:off x="1022350" y="3367385"/>
+            <a:off x="1022350" y="3172520"/>
             <a:ext cx="3091510" cy="234950"/>
           </a:xfrm>
           <a:prstGeom prst="rect">
@@ -2653,7 +2653,7 @@
                 <a:ea typeface="+mn-lt" pitchFamily="34" charset="-122"/>
                 <a:cs typeface="+mn-lt" pitchFamily="34" charset="-120"/>
               </a:rPr>
-              <a:t>Требования к MVP</a:t>
+              <a:t>Анализ предложений конкурентов</a:t>
             </a:r>
             <a:endParaRPr lang="en-US" sz="1200" dirty="0"/>
           </a:p>
@@ -2667,7 +2667,7 @@
         </p:nvSpPr>
         <p:spPr>
           <a:xfrm>
-            <a:off x="1022350" y="3625751"/>
+            <a:off x="1022350" y="3418185"/>
             <a:ext cx="3001466" cy="0"/>
           </a:xfrm>
           <a:prstGeom prst="line">
@@ -2690,7 +2690,7 @@
         </p:nvSpPr>
         <p:spPr>
           <a:xfrm>
-            <a:off x="1022350" y="3660676"/>
+            <a:off x="1022350" y="3440410"/>
             <a:ext cx="3091510" cy="234950"/>
           </a:xfrm>
           <a:prstGeom prst="rect">
@@ -2715,7 +2715,7 @@
                 <a:ea typeface="+mn-lt" pitchFamily="34" charset="-122"/>
                 <a:cs typeface="+mn-lt" pitchFamily="34" charset="-120"/>
               </a:rPr>
-              <a:t>Поиск технической экспертизы</a:t>
+              <a:t>Требования к MVP</a:t>
             </a:r>
             <a:endParaRPr lang="en-US" sz="1200" dirty="0"/>
           </a:p>
@@ -2729,12 +2729,74 @@
         </p:nvSpPr>
         <p:spPr>
           <a:xfrm>
-            <a:off x="4388941" y="1504057"/>
-            <a:ext cx="3414216" cy="2529284"/>
+            <a:off x="1022350" y="3686076"/>
+            <a:ext cx="3001466" cy="0"/>
+          </a:xfrm>
+          <a:prstGeom prst="line">
+            <a:avLst/>
+          </a:prstGeom>
+          <a:noFill/>
+          <a:ln w="6350">
+            <a:solidFill>
+              <a:srgbClr val="E2D7C5"/>
+            </a:solidFill>
+            <a:prstDash val="solid"/>
+          </a:ln>
+        </p:spPr>
+      </p:sp>
+      <p:sp>
+        <p:nvSpPr>
+          <p:cNvPr id="19" name="Text 17"/>
+          <p:cNvSpPr txBox="1"/>
+          <p:nvPr/>
+        </p:nvSpPr>
+        <p:spPr>
+          <a:xfrm>
+            <a:off x="1022350" y="3708301"/>
+            <a:ext cx="3091510" cy="234950"/>
+          </a:xfrm>
+          <a:prstGeom prst="rect">
+            <a:avLst/>
+          </a:prstGeom>
+          <a:noFill/>
+          <a:ln/>
+        </p:spPr>
+        <p:txBody>
+          <a:bodyPr wrap="square" lIns="0" tIns="0" rIns="0" bIns="0" rtlCol="0" anchor="ctr"/>
+          <a:lstStyle/>
+          <a:p>
+            <a:pPr algn="l" indent="0" marL="0">
+              <a:buNone/>
+            </a:pPr>
+            <a:r>
+              <a:rPr lang="ru-RU" altLang="en-US" sz="1200" dirty="0">
+                <a:solidFill>
+                  <a:schemeClr val="tx2"/>
+                </a:solidFill>
+                <a:latin typeface="+mn-lt" pitchFamily="34" charset="0"/>
+                <a:ea typeface="+mn-lt" pitchFamily="34" charset="-122"/>
+                <a:cs typeface="+mn-lt" pitchFamily="34" charset="-120"/>
+              </a:rPr>
+              <a:t>Поиск технической экспертизы</a:t>
+            </a:r>
+            <a:endParaRPr lang="en-US" sz="1200" dirty="0"/>
+          </a:p>
+        </p:txBody>
+      </p:sp>
+      <p:sp>
+        <p:nvSpPr>
+          <p:cNvPr id="20" name="Shape 18"/>
+          <p:cNvSpPr/>
+          <p:nvPr/>
+        </p:nvSpPr>
+        <p:spPr>
+          <a:xfrm>
+            <a:off x="4388941" y="1448891"/>
+            <a:ext cx="3414216" cy="2632075"/>
           </a:xfrm>
           <a:prstGeom prst="roundRect">
             <a:avLst>
-              <a:gd name="adj" fmla="val 6025"/>
+              <a:gd name="adj" fmla="val 5790"/>
             </a:avLst>
           </a:prstGeom>
           <a:solidFill>
@@ -2750,13 +2812,13 @@
       </p:sp>
       <p:sp>
         <p:nvSpPr>
-          <p:cNvPr id="19" name="Text 17"/>
-          <p:cNvSpPr txBox="1"/>
-          <p:nvPr/>
-        </p:nvSpPr>
-        <p:spPr>
-          <a:xfrm>
-            <a:off x="4595316" y="1634232"/>
+          <p:cNvPr id="21" name="Text 19"/>
+          <p:cNvSpPr txBox="1"/>
+          <p:nvPr/>
+        </p:nvSpPr>
+        <p:spPr>
+          <a:xfrm>
+            <a:off x="4595316" y="1579066"/>
             <a:ext cx="3091510" cy="266700"/>
           </a:xfrm>
           <a:prstGeom prst="rect">
@@ -2789,13 +2851,13 @@
       </p:sp>
       <p:sp>
         <p:nvSpPr>
-          <p:cNvPr id="20" name="Text 18"/>
-          <p:cNvSpPr txBox="1"/>
-          <p:nvPr/>
-        </p:nvSpPr>
-        <p:spPr>
-          <a:xfrm>
-            <a:off x="4595316" y="1900932"/>
+          <p:cNvPr id="22" name="Text 20"/>
+          <p:cNvSpPr txBox="1"/>
+          <p:nvPr/>
+        </p:nvSpPr>
+        <p:spPr>
+          <a:xfrm>
+            <a:off x="4595316" y="1833066"/>
             <a:ext cx="3091510" cy="234950"/>
           </a:xfrm>
           <a:prstGeom prst="rect">
@@ -2828,13 +2890,13 @@
       </p:sp>
       <p:sp>
         <p:nvSpPr>
-          <p:cNvPr id="21" name="Shape 19"/>
+          <p:cNvPr id="23" name="Shape 21"/>
           <p:cNvSpPr/>
           <p:nvPr/>
         </p:nvSpPr>
         <p:spPr>
           <a:xfrm>
-            <a:off x="4595316" y="2159298"/>
+            <a:off x="4595316" y="2078732"/>
             <a:ext cx="3001466" cy="0"/>
           </a:xfrm>
           <a:prstGeom prst="line">
@@ -2851,13 +2913,13 @@
       </p:sp>
       <p:sp>
         <p:nvSpPr>
-          <p:cNvPr id="22" name="Text 20"/>
-          <p:cNvSpPr txBox="1"/>
-          <p:nvPr/>
-        </p:nvSpPr>
-        <p:spPr>
-          <a:xfrm>
-            <a:off x="4595316" y="2194223"/>
+          <p:cNvPr id="24" name="Text 22"/>
+          <p:cNvSpPr txBox="1"/>
+          <p:nvPr/>
+        </p:nvSpPr>
+        <p:spPr>
+          <a:xfrm>
+            <a:off x="4595316" y="2100957"/>
             <a:ext cx="3091510" cy="234950"/>
           </a:xfrm>
           <a:prstGeom prst="rect">
@@ -2890,13 +2952,13 @@
       </p:sp>
       <p:sp>
         <p:nvSpPr>
-          <p:cNvPr id="23" name="Shape 21"/>
+          <p:cNvPr id="25" name="Shape 23"/>
           <p:cNvSpPr/>
           <p:nvPr/>
         </p:nvSpPr>
         <p:spPr>
           <a:xfrm>
-            <a:off x="4595316" y="2452588"/>
+            <a:off x="4595316" y="2346623"/>
             <a:ext cx="3001466" cy="0"/>
           </a:xfrm>
           <a:prstGeom prst="line">
@@ -2913,13 +2975,13 @@
       </p:sp>
       <p:sp>
         <p:nvSpPr>
-          <p:cNvPr id="24" name="Text 22"/>
-          <p:cNvSpPr txBox="1"/>
-          <p:nvPr/>
-        </p:nvSpPr>
-        <p:spPr>
-          <a:xfrm>
-            <a:off x="4595316" y="2487513"/>
+          <p:cNvPr id="26" name="Text 24"/>
+          <p:cNvSpPr txBox="1"/>
+          <p:nvPr/>
+        </p:nvSpPr>
+        <p:spPr>
+          <a:xfrm>
+            <a:off x="4595316" y="2368848"/>
             <a:ext cx="3091510" cy="234950"/>
           </a:xfrm>
           <a:prstGeom prst="rect">
@@ -2952,13 +3014,13 @@
       </p:sp>
       <p:sp>
         <p:nvSpPr>
-          <p:cNvPr id="25" name="Shape 23"/>
+          <p:cNvPr id="27" name="Shape 25"/>
           <p:cNvSpPr/>
           <p:nvPr/>
         </p:nvSpPr>
         <p:spPr>
           <a:xfrm>
-            <a:off x="4595316" y="2745879"/>
+            <a:off x="4595316" y="2614513"/>
             <a:ext cx="3001466" cy="0"/>
           </a:xfrm>
           <a:prstGeom prst="line">
@@ -2975,13 +3037,13 @@
       </p:sp>
       <p:sp>
         <p:nvSpPr>
-          <p:cNvPr id="26" name="Text 24"/>
-          <p:cNvSpPr txBox="1"/>
-          <p:nvPr/>
-        </p:nvSpPr>
-        <p:spPr>
-          <a:xfrm>
-            <a:off x="4595316" y="2780804"/>
+          <p:cNvPr id="28" name="Text 26"/>
+          <p:cNvSpPr txBox="1"/>
+          <p:nvPr/>
+        </p:nvSpPr>
+        <p:spPr>
+          <a:xfrm>
+            <a:off x="4595316" y="2636738"/>
             <a:ext cx="3091510" cy="234950"/>
           </a:xfrm>
           <a:prstGeom prst="rect">
@@ -3014,13 +3076,13 @@
       </p:sp>
       <p:sp>
         <p:nvSpPr>
-          <p:cNvPr id="27" name="Shape 25"/>
+          <p:cNvPr id="29" name="Shape 27"/>
           <p:cNvSpPr/>
           <p:nvPr/>
         </p:nvSpPr>
         <p:spPr>
           <a:xfrm>
-            <a:off x="4595316" y="3039170"/>
+            <a:off x="4595316" y="2882404"/>
             <a:ext cx="3001466" cy="0"/>
           </a:xfrm>
           <a:prstGeom prst="line">
@@ -3037,13 +3099,13 @@
       </p:sp>
       <p:sp>
         <p:nvSpPr>
-          <p:cNvPr id="28" name="Text 26"/>
-          <p:cNvSpPr txBox="1"/>
-          <p:nvPr/>
-        </p:nvSpPr>
-        <p:spPr>
-          <a:xfrm>
-            <a:off x="4595316" y="3074095"/>
+          <p:cNvPr id="30" name="Text 28"/>
+          <p:cNvSpPr txBox="1"/>
+          <p:nvPr/>
+        </p:nvSpPr>
+        <p:spPr>
+          <a:xfrm>
+            <a:off x="4595316" y="2904629"/>
             <a:ext cx="3091510" cy="234950"/>
           </a:xfrm>
           <a:prstGeom prst="rect">
@@ -3076,13 +3138,13 @@
       </p:sp>
       <p:sp>
         <p:nvSpPr>
-          <p:cNvPr id="29" name="Shape 27"/>
+          <p:cNvPr id="31" name="Shape 29"/>
           <p:cNvSpPr/>
           <p:nvPr/>
         </p:nvSpPr>
         <p:spPr>
           <a:xfrm>
-            <a:off x="4595316" y="3332460"/>
+            <a:off x="4595316" y="3150295"/>
             <a:ext cx="3001466" cy="0"/>
           </a:xfrm>
           <a:prstGeom prst="line">
@@ -3099,13 +3161,13 @@
       </p:sp>
       <p:sp>
         <p:nvSpPr>
-          <p:cNvPr id="30" name="Text 28"/>
-          <p:cNvSpPr txBox="1"/>
-          <p:nvPr/>
-        </p:nvSpPr>
-        <p:spPr>
-          <a:xfrm>
-            <a:off x="4595316" y="3367385"/>
+          <p:cNvPr id="32" name="Text 30"/>
+          <p:cNvSpPr txBox="1"/>
+          <p:nvPr/>
+        </p:nvSpPr>
+        <p:spPr>
+          <a:xfrm>
+            <a:off x="4595316" y="3172520"/>
             <a:ext cx="3091510" cy="234950"/>
           </a:xfrm>
           <a:prstGeom prst="rect">
@@ -3138,13 +3200,13 @@
       </p:sp>
       <p:sp>
         <p:nvSpPr>
-          <p:cNvPr id="31" name="Shape 29"/>
+          <p:cNvPr id="33" name="Shape 31"/>
           <p:cNvSpPr/>
           <p:nvPr/>
         </p:nvSpPr>
         <p:spPr>
           <a:xfrm>
-            <a:off x="4595316" y="3625751"/>
+            <a:off x="4595316" y="3418185"/>
             <a:ext cx="3001466" cy="0"/>
           </a:xfrm>
           <a:prstGeom prst="line">
@@ -3161,13 +3223,13 @@
       </p:sp>
       <p:sp>
         <p:nvSpPr>
-          <p:cNvPr id="32" name="Text 30"/>
-          <p:cNvSpPr txBox="1"/>
-          <p:nvPr/>
-        </p:nvSpPr>
-        <p:spPr>
-          <a:xfrm>
-            <a:off x="4595316" y="3660676"/>
+          <p:cNvPr id="34" name="Text 32"/>
+          <p:cNvSpPr txBox="1"/>
+          <p:nvPr/>
+        </p:nvSpPr>
+        <p:spPr>
+          <a:xfrm>
+            <a:off x="4595316" y="3440410"/>
             <a:ext cx="3091510" cy="234950"/>
           </a:xfrm>
           <a:prstGeom prst="rect">
@@ -3200,18 +3262,18 @@
       </p:sp>
       <p:sp>
         <p:nvSpPr>
-          <p:cNvPr id="33" name="Shape 31"/>
+          <p:cNvPr id="35" name="Shape 33"/>
           <p:cNvSpPr/>
           <p:nvPr/>
         </p:nvSpPr>
         <p:spPr>
           <a:xfrm>
-            <a:off x="7961908" y="1504057"/>
-            <a:ext cx="3414216" cy="2529284"/>
+            <a:off x="7961908" y="1448891"/>
+            <a:ext cx="3414216" cy="2632075"/>
           </a:xfrm>
           <a:prstGeom prst="roundRect">
             <a:avLst>
-              <a:gd name="adj" fmla="val 6025"/>
+              <a:gd name="adj" fmla="val 5790"/>
             </a:avLst>
           </a:prstGeom>
           <a:solidFill>
@@ -3227,13 +3289,13 @@
       </p:sp>
       <p:sp>
         <p:nvSpPr>
-          <p:cNvPr id="34" name="Text 32"/>
-          <p:cNvSpPr txBox="1"/>
-          <p:nvPr/>
-        </p:nvSpPr>
-        <p:spPr>
-          <a:xfrm>
-            <a:off x="8168283" y="1634232"/>
+          <p:cNvPr id="36" name="Text 34"/>
+          <p:cNvSpPr txBox="1"/>
+          <p:nvPr/>
+        </p:nvSpPr>
+        <p:spPr>
+          <a:xfrm>
+            <a:off x="8168283" y="1579066"/>
             <a:ext cx="3091510" cy="266700"/>
           </a:xfrm>
           <a:prstGeom prst="rect">
@@ -3266,13 +3328,13 @@
       </p:sp>
       <p:sp>
         <p:nvSpPr>
-          <p:cNvPr id="35" name="Text 33"/>
-          <p:cNvSpPr txBox="1"/>
-          <p:nvPr/>
-        </p:nvSpPr>
-        <p:spPr>
-          <a:xfrm>
-            <a:off x="8168283" y="1900932"/>
+          <p:cNvPr id="37" name="Text 35"/>
+          <p:cNvSpPr txBox="1"/>
+          <p:nvPr/>
+        </p:nvSpPr>
+        <p:spPr>
+          <a:xfrm>
+            <a:off x="8168283" y="1833066"/>
             <a:ext cx="3091510" cy="234950"/>
           </a:xfrm>
           <a:prstGeom prst="rect">
@@ -3305,13 +3367,13 @@
       </p:sp>
       <p:sp>
         <p:nvSpPr>
-          <p:cNvPr id="36" name="Shape 34"/>
+          <p:cNvPr id="38" name="Shape 36"/>
           <p:cNvSpPr/>
           <p:nvPr/>
         </p:nvSpPr>
         <p:spPr>
           <a:xfrm>
-            <a:off x="8168283" y="2159298"/>
+            <a:off x="8168283" y="2078732"/>
             <a:ext cx="3001466" cy="0"/>
           </a:xfrm>
           <a:prstGeom prst="line">
@@ -3328,13 +3390,13 @@
       </p:sp>
       <p:sp>
         <p:nvSpPr>
-          <p:cNvPr id="37" name="Text 35"/>
-          <p:cNvSpPr txBox="1"/>
-          <p:nvPr/>
-        </p:nvSpPr>
-        <p:spPr>
-          <a:xfrm>
-            <a:off x="8168283" y="2194223"/>
+          <p:cNvPr id="39" name="Text 37"/>
+          <p:cNvSpPr txBox="1"/>
+          <p:nvPr/>
+        </p:nvSpPr>
+        <p:spPr>
+          <a:xfrm>
+            <a:off x="8168283" y="2100957"/>
             <a:ext cx="3091510" cy="234950"/>
           </a:xfrm>
           <a:prstGeom prst="rect">
@@ -3367,13 +3429,13 @@
       </p:sp>
       <p:sp>
         <p:nvSpPr>
-          <p:cNvPr id="38" name="Shape 36"/>
+          <p:cNvPr id="40" name="Shape 38"/>
           <p:cNvSpPr/>
           <p:nvPr/>
         </p:nvSpPr>
         <p:spPr>
           <a:xfrm>
-            <a:off x="8168283" y="2452588"/>
+            <a:off x="8168283" y="2346623"/>
             <a:ext cx="3001466" cy="0"/>
           </a:xfrm>
           <a:prstGeom prst="line">
@@ -3390,13 +3452,13 @@
       </p:sp>
       <p:sp>
         <p:nvSpPr>
-          <p:cNvPr id="39" name="Text 37"/>
-          <p:cNvSpPr txBox="1"/>
-          <p:nvPr/>
-        </p:nvSpPr>
-        <p:spPr>
-          <a:xfrm>
-            <a:off x="8168283" y="2487513"/>
+          <p:cNvPr id="41" name="Text 39"/>
+          <p:cNvSpPr txBox="1"/>
+          <p:nvPr/>
+        </p:nvSpPr>
+        <p:spPr>
+          <a:xfrm>
+            <a:off x="8168283" y="2368848"/>
             <a:ext cx="3091510" cy="234950"/>
           </a:xfrm>
           <a:prstGeom prst="rect">
@@ -3429,13 +3491,13 @@
       </p:sp>
       <p:sp>
         <p:nvSpPr>
-          <p:cNvPr id="40" name="Shape 38"/>
+          <p:cNvPr id="42" name="Shape 40"/>
           <p:cNvSpPr/>
           <p:nvPr/>
         </p:nvSpPr>
         <p:spPr>
           <a:xfrm>
-            <a:off x="8168283" y="2745879"/>
+            <a:off x="8168283" y="2614513"/>
             <a:ext cx="3001466" cy="0"/>
           </a:xfrm>
           <a:prstGeom prst="line">
@@ -3452,13 +3514,13 @@
       </p:sp>
       <p:sp>
         <p:nvSpPr>
-          <p:cNvPr id="41" name="Text 39"/>
-          <p:cNvSpPr txBox="1"/>
-          <p:nvPr/>
-        </p:nvSpPr>
-        <p:spPr>
-          <a:xfrm>
-            <a:off x="8168283" y="2780804"/>
+          <p:cNvPr id="43" name="Text 41"/>
+          <p:cNvSpPr txBox="1"/>
+          <p:nvPr/>
+        </p:nvSpPr>
+        <p:spPr>
+          <a:xfrm>
+            <a:off x="8168283" y="2636738"/>
             <a:ext cx="3091510" cy="234950"/>
           </a:xfrm>
           <a:prstGeom prst="rect">
@@ -3491,13 +3553,13 @@
       </p:sp>
       <p:sp>
         <p:nvSpPr>
-          <p:cNvPr id="42" name="Shape 40"/>
+          <p:cNvPr id="44" name="Shape 42"/>
           <p:cNvSpPr/>
           <p:nvPr/>
         </p:nvSpPr>
         <p:spPr>
           <a:xfrm>
-            <a:off x="8168283" y="3039170"/>
+            <a:off x="8168283" y="2882404"/>
             <a:ext cx="3001466" cy="0"/>
           </a:xfrm>
           <a:prstGeom prst="line">
@@ -3514,13 +3576,13 @@
       </p:sp>
       <p:sp>
         <p:nvSpPr>
-          <p:cNvPr id="43" name="Text 41"/>
-          <p:cNvSpPr txBox="1"/>
-          <p:nvPr/>
-        </p:nvSpPr>
-        <p:spPr>
-          <a:xfrm>
-            <a:off x="8168283" y="3074095"/>
+          <p:cNvPr id="45" name="Text 43"/>
+          <p:cNvSpPr txBox="1"/>
+          <p:nvPr/>
+        </p:nvSpPr>
+        <p:spPr>
+          <a:xfrm>
+            <a:off x="8168283" y="2904629"/>
             <a:ext cx="3091510" cy="234950"/>
           </a:xfrm>
           <a:prstGeom prst="rect">
@@ -3553,13 +3615,13 @@
       </p:sp>
       <p:sp>
         <p:nvSpPr>
-          <p:cNvPr id="44" name="Shape 42"/>
+          <p:cNvPr id="46" name="Shape 44"/>
           <p:cNvSpPr/>
           <p:nvPr/>
         </p:nvSpPr>
         <p:spPr>
           <a:xfrm>
-            <a:off x="8168283" y="3332460"/>
+            <a:off x="8168283" y="3150295"/>
             <a:ext cx="3001466" cy="0"/>
           </a:xfrm>
           <a:prstGeom prst="line">
@@ -3576,13 +3638,13 @@
       </p:sp>
       <p:sp>
         <p:nvSpPr>
-          <p:cNvPr id="45" name="Text 43"/>
-          <p:cNvSpPr txBox="1"/>
-          <p:nvPr/>
-        </p:nvSpPr>
-        <p:spPr>
-          <a:xfrm>
-            <a:off x="8168283" y="3386435"/>
+          <p:cNvPr id="47" name="Text 45"/>
+          <p:cNvSpPr txBox="1"/>
+          <p:nvPr/>
+        </p:nvSpPr>
+        <p:spPr>
+          <a:xfrm>
+            <a:off x="8168283" y="3191570"/>
             <a:ext cx="3091510" cy="407591"/>
           </a:xfrm>
           <a:prstGeom prst="rect">
@@ -3636,18 +3698,18 @@
       </p:sp>
       <p:sp>
         <p:nvSpPr>
-          <p:cNvPr id="46" name="Shape 44"/>
+          <p:cNvPr id="48" name="Shape 46"/>
           <p:cNvSpPr/>
           <p:nvPr/>
         </p:nvSpPr>
         <p:spPr>
           <a:xfrm>
-            <a:off x="812800" y="4333478"/>
-            <a:ext cx="10566400" cy="1711722"/>
+            <a:off x="812800" y="4325938"/>
+            <a:ext cx="10566400" cy="1719263"/>
           </a:xfrm>
           <a:prstGeom prst="roundRect">
             <a:avLst>
-              <a:gd name="adj" fmla="val 8903"/>
+              <a:gd name="adj" fmla="val 8864"/>
             </a:avLst>
           </a:prstGeom>
           <a:solidFill>
@@ -3658,13 +3720,13 @@
       </p:sp>
       <p:sp>
         <p:nvSpPr>
-          <p:cNvPr id="47" name="Text 45"/>
-          <p:cNvSpPr txBox="1"/>
-          <p:nvPr/>
-        </p:nvSpPr>
-        <p:spPr>
-          <a:xfrm>
-            <a:off x="1066800" y="4447778"/>
+          <p:cNvPr id="49" name="Text 47"/>
+          <p:cNvSpPr txBox="1"/>
+          <p:nvPr/>
+        </p:nvSpPr>
+        <p:spPr>
+          <a:xfrm>
+            <a:off x="1066800" y="4440238"/>
             <a:ext cx="2747010" cy="406400"/>
           </a:xfrm>
           <a:prstGeom prst="rect">
@@ -3697,14 +3759,14 @@
       </p:sp>
       <p:sp>
         <p:nvSpPr>
-          <p:cNvPr id="48" name="Text 46"/>
-          <p:cNvSpPr txBox="1"/>
-          <p:nvPr/>
-        </p:nvSpPr>
-        <p:spPr>
-          <a:xfrm>
-            <a:off x="1066800" y="4871938"/>
-            <a:ext cx="2747010" cy="620911"/>
+          <p:cNvPr id="50" name="Text 48"/>
+          <p:cNvSpPr txBox="1"/>
+          <p:nvPr/>
+        </p:nvSpPr>
+        <p:spPr>
+          <a:xfrm>
+            <a:off x="1066800" y="4864398"/>
+            <a:ext cx="2747010" cy="1032272"/>
           </a:xfrm>
           <a:prstGeom prst="rect">
             <a:avLst/>
@@ -3731,7 +3793,7 @@
                 <a:ea typeface="+mn-lt" pitchFamily="34" charset="-122"/>
                 <a:cs typeface="+mn-lt" pitchFamily="34" charset="-120"/>
               </a:rPr>
-              <a:t>на три месяца, предварительно: </a:t>
+              <a:t>на три месяца: проверка гипотез и </a:t>
             </a:r>
             <a:br/>
             <a:pPr algn="l" indent="0" marL="0">
@@ -3749,7 +3811,7 @@
                 <a:ea typeface="+mn-lt" pitchFamily="34" charset="-122"/>
                 <a:cs typeface="+mn-lt" pitchFamily="34" charset="-120"/>
               </a:rPr>
-              <a:t>зависит от объёма разработки и </a:t>
+              <a:t>ограниченный прототип, </a:t>
             </a:r>
             <a:br/>
             <a:pPr algn="l" indent="0" marL="0">
@@ -3767,7 +3829,43 @@
                 <a:ea typeface="+mn-lt" pitchFamily="34" charset="-122"/>
                 <a:cs typeface="+mn-lt" pitchFamily="34" charset="-120"/>
               </a:rPr>
-              <a:t>привлечения специалистов</a:t>
+              <a:t>предварительно. 250 тыс. ₽ в месяц </a:t>
+            </a:r>
+            <a:br/>
+            <a:pPr algn="l" indent="0" marL="0">
+              <a:lnSpc>
+                <a:spcPts val="1620"/>
+              </a:lnSpc>
+              <a:buNone/>
+            </a:pPr>
+            <a:r>
+              <a:rPr lang="ru-RU" altLang="en-US" sz="1200" dirty="0">
+                <a:solidFill>
+                  <a:schemeClr val="bg1"/>
+                </a:solidFill>
+                <a:latin typeface="+mn-lt" pitchFamily="34" charset="0"/>
+                <a:ea typeface="+mn-lt" pitchFamily="34" charset="-122"/>
+                <a:cs typeface="+mn-lt" pitchFamily="34" charset="-120"/>
+              </a:rPr>
+              <a:t>в расчёте экономики — модель </a:t>
+            </a:r>
+            <a:br/>
+            <a:pPr algn="l" indent="0" marL="0">
+              <a:lnSpc>
+                <a:spcPts val="1620"/>
+              </a:lnSpc>
+              <a:buNone/>
+            </a:pPr>
+            <a:r>
+              <a:rPr lang="ru-RU" altLang="en-US" sz="1200" dirty="0">
+                <a:solidFill>
+                  <a:schemeClr val="bg1"/>
+                </a:solidFill>
+                <a:latin typeface="+mn-lt" pitchFamily="34" charset="0"/>
+                <a:ea typeface="+mn-lt" pitchFamily="34" charset="-122"/>
+                <a:cs typeface="+mn-lt" pitchFamily="34" charset="-120"/>
+              </a:rPr>
+              <a:t>работающего сервиса</a:t>
             </a:r>
             <a:endParaRPr lang="en-US" sz="1200" dirty="0"/>
           </a:p>
@@ -3775,13 +3873,13 @@
       </p:sp>
       <p:sp>
         <p:nvSpPr>
-          <p:cNvPr id="49" name="Shape 47"/>
+          <p:cNvPr id="51" name="Shape 49"/>
           <p:cNvSpPr/>
           <p:nvPr/>
         </p:nvSpPr>
         <p:spPr>
           <a:xfrm>
-            <a:off x="3987800" y="4489053"/>
+            <a:off x="3987800" y="4481513"/>
             <a:ext cx="3441700" cy="0"/>
           </a:xfrm>
           <a:prstGeom prst="line">
@@ -3798,14 +3896,14 @@
       </p:sp>
       <p:sp>
         <p:nvSpPr>
-          <p:cNvPr id="50" name="Text 48"/>
-          <p:cNvSpPr txBox="1"/>
-          <p:nvPr/>
-        </p:nvSpPr>
-        <p:spPr>
-          <a:xfrm>
-            <a:off x="3987800" y="4523978"/>
-            <a:ext cx="1873444" cy="234950"/>
+          <p:cNvPr id="52" name="Text 50"/>
+          <p:cNvSpPr txBox="1"/>
+          <p:nvPr/>
+        </p:nvSpPr>
+        <p:spPr>
+          <a:xfrm>
+            <a:off x="3987800" y="4516438"/>
+            <a:ext cx="1873342" cy="234950"/>
           </a:xfrm>
           <a:prstGeom prst="rect">
             <a:avLst/>
@@ -3837,14 +3935,14 @@
       </p:sp>
       <p:sp>
         <p:nvSpPr>
-          <p:cNvPr id="51" name="Text 49"/>
-          <p:cNvSpPr txBox="1"/>
-          <p:nvPr/>
-        </p:nvSpPr>
-        <p:spPr>
-          <a:xfrm>
-            <a:off x="6605687" y="4523978"/>
-            <a:ext cx="874613" cy="234950"/>
+          <p:cNvPr id="53" name="Text 51"/>
+          <p:cNvSpPr txBox="1"/>
+          <p:nvPr/>
+        </p:nvSpPr>
+        <p:spPr>
+          <a:xfrm>
+            <a:off x="6608763" y="4516438"/>
+            <a:ext cx="871538" cy="234950"/>
           </a:xfrm>
           <a:prstGeom prst="rect">
             <a:avLst/>
@@ -3876,13 +3974,13 @@
       </p:sp>
       <p:sp>
         <p:nvSpPr>
-          <p:cNvPr id="52" name="Shape 50"/>
+          <p:cNvPr id="54" name="Shape 52"/>
           <p:cNvSpPr/>
           <p:nvPr/>
         </p:nvSpPr>
         <p:spPr>
           <a:xfrm>
-            <a:off x="3987800" y="4795044"/>
+            <a:off x="3987800" y="4787503"/>
             <a:ext cx="3441700" cy="0"/>
           </a:xfrm>
           <a:prstGeom prst="line">
@@ -3899,13 +3997,13 @@
       </p:sp>
       <p:sp>
         <p:nvSpPr>
-          <p:cNvPr id="53" name="Text 51"/>
-          <p:cNvSpPr txBox="1"/>
-          <p:nvPr/>
-        </p:nvSpPr>
-        <p:spPr>
-          <a:xfrm>
-            <a:off x="3987800" y="4829969"/>
+          <p:cNvPr id="55" name="Text 53"/>
+          <p:cNvSpPr txBox="1"/>
+          <p:nvPr/>
+        </p:nvSpPr>
+        <p:spPr>
+          <a:xfrm>
+            <a:off x="3987800" y="4822428"/>
             <a:ext cx="527149" cy="234950"/>
           </a:xfrm>
           <a:prstGeom prst="rect">
@@ -3938,14 +4036,14 @@
       </p:sp>
       <p:sp>
         <p:nvSpPr>
-          <p:cNvPr id="54" name="Text 52"/>
-          <p:cNvSpPr txBox="1"/>
-          <p:nvPr/>
-        </p:nvSpPr>
-        <p:spPr>
-          <a:xfrm>
-            <a:off x="6622256" y="4829969"/>
-            <a:ext cx="858044" cy="234950"/>
+          <p:cNvPr id="56" name="Text 54"/>
+          <p:cNvSpPr txBox="1"/>
+          <p:nvPr/>
+        </p:nvSpPr>
+        <p:spPr>
+          <a:xfrm>
+            <a:off x="6625332" y="4822428"/>
+            <a:ext cx="854968" cy="234950"/>
           </a:xfrm>
           <a:prstGeom prst="rect">
             <a:avLst/>
@@ -3977,13 +4075,13 @@
       </p:sp>
       <p:sp>
         <p:nvSpPr>
-          <p:cNvPr id="55" name="Shape 53"/>
+          <p:cNvPr id="57" name="Shape 55"/>
           <p:cNvSpPr/>
           <p:nvPr/>
         </p:nvSpPr>
         <p:spPr>
           <a:xfrm>
-            <a:off x="3987800" y="5101034"/>
+            <a:off x="3987800" y="5093494"/>
             <a:ext cx="3441700" cy="0"/>
           </a:xfrm>
           <a:prstGeom prst="line">
@@ -4000,13 +4098,13 @@
       </p:sp>
       <p:sp>
         <p:nvSpPr>
-          <p:cNvPr id="56" name="Text 54"/>
-          <p:cNvSpPr txBox="1"/>
-          <p:nvPr/>
-        </p:nvSpPr>
-        <p:spPr>
-          <a:xfrm>
-            <a:off x="3987800" y="5135959"/>
+          <p:cNvPr id="58" name="Text 56"/>
+          <p:cNvSpPr txBox="1"/>
+          <p:nvPr/>
+        </p:nvSpPr>
+        <p:spPr>
+          <a:xfrm>
+            <a:off x="3987800" y="5128419"/>
             <a:ext cx="1926177" cy="234950"/>
           </a:xfrm>
           <a:prstGeom prst="rect">
@@ -4039,14 +4137,14 @@
       </p:sp>
       <p:sp>
         <p:nvSpPr>
-          <p:cNvPr id="57" name="Text 55"/>
-          <p:cNvSpPr txBox="1"/>
-          <p:nvPr/>
-        </p:nvSpPr>
-        <p:spPr>
-          <a:xfrm>
-            <a:off x="6608465" y="5135959"/>
-            <a:ext cx="871835" cy="234950"/>
+          <p:cNvPr id="59" name="Text 57"/>
+          <p:cNvSpPr txBox="1"/>
+          <p:nvPr/>
+        </p:nvSpPr>
+        <p:spPr>
+          <a:xfrm>
+            <a:off x="6611541" y="5128419"/>
+            <a:ext cx="868759" cy="234950"/>
           </a:xfrm>
           <a:prstGeom prst="rect">
             <a:avLst/>
@@ -4078,13 +4176,13 @@
       </p:sp>
       <p:sp>
         <p:nvSpPr>
-          <p:cNvPr id="58" name="Shape 56"/>
+          <p:cNvPr id="60" name="Shape 58"/>
           <p:cNvSpPr/>
           <p:nvPr/>
         </p:nvSpPr>
         <p:spPr>
           <a:xfrm>
-            <a:off x="3987800" y="5407025"/>
+            <a:off x="3987800" y="5399484"/>
             <a:ext cx="3441700" cy="0"/>
           </a:xfrm>
           <a:prstGeom prst="line">
@@ -4101,13 +4199,13 @@
       </p:sp>
       <p:sp>
         <p:nvSpPr>
-          <p:cNvPr id="59" name="Text 57"/>
-          <p:cNvSpPr txBox="1"/>
-          <p:nvPr/>
-        </p:nvSpPr>
-        <p:spPr>
-          <a:xfrm>
-            <a:off x="3987800" y="5441950"/>
+          <p:cNvPr id="61" name="Text 59"/>
+          <p:cNvSpPr txBox="1"/>
+          <p:nvPr/>
+        </p:nvSpPr>
+        <p:spPr>
+          <a:xfrm>
+            <a:off x="3987800" y="5434409"/>
             <a:ext cx="2418452" cy="234950"/>
           </a:xfrm>
           <a:prstGeom prst="rect">
@@ -4140,14 +4238,14 @@
       </p:sp>
       <p:sp>
         <p:nvSpPr>
-          <p:cNvPr id="60" name="Text 58"/>
-          <p:cNvSpPr txBox="1"/>
-          <p:nvPr/>
-        </p:nvSpPr>
-        <p:spPr>
-          <a:xfrm>
-            <a:off x="6528891" y="5441950"/>
-            <a:ext cx="951409" cy="234950"/>
+          <p:cNvPr id="62" name="Text 60"/>
+          <p:cNvSpPr txBox="1"/>
+          <p:nvPr/>
+        </p:nvSpPr>
+        <p:spPr>
+          <a:xfrm>
+            <a:off x="6531967" y="5434409"/>
+            <a:ext cx="948333" cy="234950"/>
           </a:xfrm>
           <a:prstGeom prst="rect">
             <a:avLst/>
@@ -4179,13 +4277,13 @@
       </p:sp>
       <p:sp>
         <p:nvSpPr>
-          <p:cNvPr id="61" name="Text 59"/>
-          <p:cNvSpPr txBox="1"/>
-          <p:nvPr/>
-        </p:nvSpPr>
-        <p:spPr>
-          <a:xfrm>
-            <a:off x="7683500" y="4485878"/>
+          <p:cNvPr id="63" name="Text 61"/>
+          <p:cNvSpPr txBox="1"/>
+          <p:nvPr/>
+        </p:nvSpPr>
+        <p:spPr>
+          <a:xfrm>
+            <a:off x="7683500" y="4478338"/>
             <a:ext cx="3544951" cy="426641"/>
           </a:xfrm>
           <a:prstGeom prst="rect">
@@ -4256,13 +4354,13 @@
       </p:sp>
       <p:sp>
         <p:nvSpPr>
-          <p:cNvPr id="62" name="Text 60"/>
-          <p:cNvSpPr txBox="1"/>
-          <p:nvPr/>
-        </p:nvSpPr>
-        <p:spPr>
-          <a:xfrm>
-            <a:off x="7683500" y="4976019"/>
+          <p:cNvPr id="64" name="Text 62"/>
+          <p:cNvSpPr txBox="1"/>
+          <p:nvPr/>
+        </p:nvSpPr>
+        <p:spPr>
+          <a:xfrm>
+            <a:off x="7683500" y="4968478"/>
             <a:ext cx="3544951" cy="426641"/>
           </a:xfrm>
           <a:prstGeom prst="rect">
@@ -4333,13 +4431,13 @@
       </p:sp>
       <p:sp>
         <p:nvSpPr>
-          <p:cNvPr id="63" name="Text 61"/>
-          <p:cNvSpPr txBox="1"/>
-          <p:nvPr/>
-        </p:nvSpPr>
-        <p:spPr>
-          <a:xfrm>
-            <a:off x="7683500" y="5466159"/>
+          <p:cNvPr id="65" name="Text 63"/>
+          <p:cNvSpPr txBox="1"/>
+          <p:nvPr/>
+        </p:nvSpPr>
+        <p:spPr>
+          <a:xfrm>
+            <a:off x="7683500" y="5458619"/>
             <a:ext cx="3544951" cy="426641"/>
           </a:xfrm>
           <a:prstGeom prst="rect">
@@ -5436,7 +5534,7 @@
                 <a:ea typeface="+mj-lt" pitchFamily="34" charset="-122"/>
                 <a:cs typeface="+mj-lt" pitchFamily="34" charset="-120"/>
               </a:rPr>
-              <a:t>Мы хотим использовать преакселератор, чтобы проверить спрос, экономику и </a:t>
+              <a:t>Мы хотим использовать преакселератор, чтобы проверить спрос, экономику и техническую </a:t>
             </a:r>
             <a:br/>
             <a:pPr algn="l" indent="0" marL="0">
@@ -5454,7 +5552,7 @@
                 <a:ea typeface="+mj-lt" pitchFamily="34" charset="-122"/>
                 <a:cs typeface="+mj-lt" pitchFamily="34" charset="-120"/>
               </a:rPr>
-              <a:t>техническую реализуемость «Улья» — и на основе результатов решить, стоит ли развивать </a:t>
+              <a:t>реализуемость «Улья» — и на основе результатов решить, стоит ли развивать проект </a:t>
             </a:r>
             <a:br/>
             <a:pPr algn="l" indent="0" marL="0">
@@ -5472,7 +5570,7 @@
                 <a:ea typeface="+mj-lt" pitchFamily="34" charset="-122"/>
                 <a:cs typeface="+mj-lt" pitchFamily="34" charset="-120"/>
               </a:rPr>
-              <a:t>проект дальше.</a:t>
+              <a:t>дальше.</a:t>
             </a:r>
             <a:endParaRPr lang="en-US" sz="1400" dirty="0"/>
           </a:p>
@@ -5574,7 +5672,7 @@
                 <a:ea typeface="+mj-lt" pitchFamily="34" charset="-122"/>
                 <a:cs typeface="+mj-lt" pitchFamily="34" charset="-120"/>
               </a:rPr>
-              <a:t>≈70 ₽</a:t>
+              <a:t>63–71 ₽</a:t>
             </a:r>
             <a:endParaRPr lang="en-US" sz="5200" dirty="0"/>
           </a:p>
@@ -5588,20 +5686,23 @@
         </p:nvSpPr>
         <p:spPr>
           <a:xfrm>
-            <a:off x="812800" y="2885579"/>
-            <a:ext cx="4807268" cy="304800"/>
-          </a:xfrm>
-          <a:prstGeom prst="rect">
-            <a:avLst/>
-          </a:prstGeom>
-          <a:noFill/>
-          <a:ln/>
-        </p:spPr>
-        <p:txBody>
-          <a:bodyPr wrap="square" lIns="0" tIns="0" rIns="0" bIns="0" rtlCol="0" anchor="ctr"/>
-          <a:lstStyle/>
-          <a:p>
-            <a:pPr algn="l" indent="0" marL="0">
+            <a:off x="812800" y="2910979"/>
+            <a:ext cx="4807268" cy="543520"/>
+          </a:xfrm>
+          <a:prstGeom prst="rect">
+            <a:avLst/>
+          </a:prstGeom>
+          <a:noFill/>
+          <a:ln/>
+        </p:spPr>
+        <p:txBody>
+          <a:bodyPr wrap="square" lIns="0" tIns="0" rIns="0" bIns="0" rtlCol="0" anchor="t"/>
+          <a:lstStyle/>
+          <a:p>
+            <a:pPr algn="l" indent="0" marL="0">
+              <a:lnSpc>
+                <a:spcPts val="2080"/>
+              </a:lnSpc>
               <a:buNone/>
             </a:pPr>
             <a:r>
@@ -5613,7 +5714,25 @@
                 <a:ea typeface="+mn-lt" pitchFamily="34" charset="-122"/>
                 <a:cs typeface="+mn-lt" pitchFamily="34" charset="-120"/>
               </a:rPr>
-              <a:t>за час аренды RTX 3090 в российском облаке</a:t>
+              <a:t>за час аренды RTX 3090 в облаке </a:t>
+            </a:r>
+            <a:br/>
+            <a:pPr algn="l" indent="0" marL="0">
+              <a:lnSpc>
+                <a:spcPts val="2080"/>
+              </a:lnSpc>
+              <a:buNone/>
+            </a:pPr>
+            <a:r>
+              <a:rPr lang="ru-RU" altLang="en-US" sz="1600" b="1" dirty="0">
+                <a:solidFill>
+                  <a:schemeClr val="tx2"/>
+                </a:solidFill>
+                <a:latin typeface="+mn-lt" pitchFamily="34" charset="0"/>
+                <a:ea typeface="+mn-lt" pitchFamily="34" charset="-122"/>
+                <a:cs typeface="+mn-lt" pitchFamily="34" charset="-120"/>
+              </a:rPr>
+              <a:t>Immers.cloud</a:t>
             </a:r>
             <a:endParaRPr lang="en-US" sz="1600" dirty="0"/>
           </a:p>
@@ -5627,8 +5746,8 @@
         </p:nvSpPr>
         <p:spPr>
           <a:xfrm>
-            <a:off x="812800" y="3302099"/>
-            <a:ext cx="4807268" cy="497681"/>
+            <a:off x="812800" y="3566220"/>
+            <a:ext cx="4807268" cy="746522"/>
           </a:xfrm>
           <a:prstGeom prst="rect">
             <a:avLst/>
@@ -5655,7 +5774,7 @@
                 <a:ea typeface="+mn-lt" pitchFamily="34" charset="-122"/>
                 <a:cs typeface="+mn-lt" pitchFamily="34" charset="-120"/>
               </a:rPr>
-              <a:t>Круглосуточная аренда такой карты — около 50 тыс. ₽ </a:t>
+              <a:t>Круглосуточная аренда такой карты — около 45–50 </a:t>
             </a:r>
             <a:br/>
             <a:pPr algn="l" indent="0" marL="0">
@@ -5673,7 +5792,25 @@
                 <a:ea typeface="+mn-lt" pitchFamily="34" charset="-122"/>
                 <a:cs typeface="+mn-lt" pitchFamily="34" charset="-120"/>
               </a:rPr>
-              <a:t>в месяц. Для небольших команд это заметные деньги.</a:t>
+              <a:t>тыс. ₽ в месяц. Для небольших команд это заметные </a:t>
+            </a:r>
+            <a:br/>
+            <a:pPr algn="l" indent="0" marL="0">
+              <a:lnSpc>
+                <a:spcPts val="1960"/>
+              </a:lnSpc>
+              <a:buNone/>
+            </a:pPr>
+            <a:r>
+              <a:rPr lang="ru-RU" altLang="en-US" sz="1400" dirty="0">
+                <a:solidFill>
+                  <a:schemeClr val="accent6"/>
+                </a:solidFill>
+                <a:latin typeface="+mn-lt" pitchFamily="34" charset="0"/>
+                <a:ea typeface="+mn-lt" pitchFamily="34" charset="-122"/>
+                <a:cs typeface="+mn-lt" pitchFamily="34" charset="-120"/>
+              </a:rPr>
+              <a:t>деньги.</a:t>
             </a:r>
             <a:endParaRPr lang="en-US" sz="1400" dirty="0"/>
           </a:p>
@@ -5969,7 +6106,7 @@
                 <a:ea typeface="+mn-lt" pitchFamily="34" charset="-122"/>
                 <a:cs typeface="+mn-lt" pitchFamily="34" charset="-120"/>
               </a:rPr>
-              <a:t>Цены: immers.cloud, обзор tproger, 2026. Ethereum: переход на proof-of-stake, сентябрь 2022</a:t>
+              <a:t>Цены: immers.cloud, октябрь 2026. Ethereum: переход на proof-of-stake, сентябрь 2022</a:t>
             </a:r>
             <a:endParaRPr lang="en-US" sz="1200" dirty="0"/>
           </a:p>
@@ -6518,7 +6655,7 @@
         <p:spPr>
           <a:xfrm>
             <a:off x="5067300" y="2085280"/>
-            <a:ext cx="2119122" cy="1155402"/>
+            <a:ext cx="2119122" cy="924322"/>
           </a:xfrm>
           <a:prstGeom prst="rect">
             <a:avLst/>
@@ -6563,7 +6700,7 @@
                 <a:ea typeface="+mn-lt" pitchFamily="34" charset="-122"/>
                 <a:cs typeface="+mn-lt" pitchFamily="34" charset="-120"/>
               </a:rPr>
-              <a:t>оборудование, </a:t>
+              <a:t>оборудование, подбирает </a:t>
             </a:r>
             <a:br/>
             <a:pPr algn="l" indent="0" marL="0">
@@ -6581,7 +6718,7 @@
                 <a:ea typeface="+mn-lt" pitchFamily="34" charset="-122"/>
                 <a:cs typeface="+mn-lt" pitchFamily="34" charset="-120"/>
               </a:rPr>
-              <a:t>подбирает карту под </a:t>
+              <a:t>карту под запрос и </a:t>
             </a:r>
             <a:br/>
             <a:pPr algn="l" indent="0" marL="0">
@@ -6599,25 +6736,7 @@
                 <a:ea typeface="+mn-lt" pitchFamily="34" charset="-122"/>
                 <a:cs typeface="+mn-lt" pitchFamily="34" charset="-120"/>
               </a:rPr>
-              <a:t>запрос и учитывает часы </a:t>
-            </a:r>
-            <a:br/>
-            <a:pPr algn="l" indent="0" marL="0">
-              <a:lnSpc>
-                <a:spcPts val="1820"/>
-              </a:lnSpc>
-              <a:buNone/>
-            </a:pPr>
-            <a:r>
-              <a:rPr lang="ru-RU" altLang="en-US" sz="1300" dirty="0">
-                <a:solidFill>
-                  <a:srgbClr val="3B2A0E"/>
-                </a:solidFill>
-                <a:latin typeface="+mn-lt" pitchFamily="34" charset="0"/>
-                <a:ea typeface="+mn-lt" pitchFamily="34" charset="-122"/>
-                <a:cs typeface="+mn-lt" pitchFamily="34" charset="-120"/>
-              </a:rPr>
-              <a:t>работы</a:t>
+              <a:t>учитывает часы работы</a:t>
             </a:r>
             <a:endParaRPr lang="en-US" sz="1300" dirty="0"/>
           </a:p>
@@ -7330,12 +7449,12 @@
         </p:nvSpPr>
         <p:spPr>
           <a:xfrm>
-            <a:off x="815975" y="1429246"/>
-            <a:ext cx="2520950" cy="1647031"/>
+            <a:off x="815975" y="1400076"/>
+            <a:ext cx="2520950" cy="1596231"/>
           </a:xfrm>
           <a:prstGeom prst="roundRect">
             <a:avLst>
-              <a:gd name="adj" fmla="val 9253"/>
+              <a:gd name="adj" fmla="val 9547"/>
             </a:avLst>
           </a:prstGeom>
           <a:solidFill>
@@ -7357,7 +7476,7 @@
         </p:nvSpPr>
         <p:spPr>
           <a:xfrm>
-            <a:off x="1022350" y="1610221"/>
+            <a:off x="996950" y="1555651"/>
             <a:ext cx="330200" cy="330200"/>
           </a:xfrm>
           <a:prstGeom prst="ellipse">
@@ -7377,7 +7496,7 @@
         </p:nvSpPr>
         <p:spPr>
           <a:xfrm>
-            <a:off x="1145580" y="1661021"/>
+            <a:off x="1120180" y="1606451"/>
             <a:ext cx="134541" cy="228600"/>
           </a:xfrm>
           <a:prstGeom prst="rect">
@@ -7416,8 +7535,8 @@
         </p:nvSpPr>
         <p:spPr>
           <a:xfrm>
-            <a:off x="1022350" y="2042021"/>
-            <a:ext cx="2171446" cy="853281"/>
+            <a:off x="996950" y="1987451"/>
+            <a:ext cx="2223770" cy="853281"/>
           </a:xfrm>
           <a:prstGeom prst="rect">
             <a:avLst/>
@@ -7512,12 +7631,12 @@
         </p:nvSpPr>
         <p:spPr>
           <a:xfrm>
-            <a:off x="3495675" y="1429246"/>
-            <a:ext cx="2520950" cy="1647031"/>
+            <a:off x="3495675" y="1400076"/>
+            <a:ext cx="2520950" cy="1596231"/>
           </a:xfrm>
           <a:prstGeom prst="roundRect">
             <a:avLst>
-              <a:gd name="adj" fmla="val 9253"/>
+              <a:gd name="adj" fmla="val 9547"/>
             </a:avLst>
           </a:prstGeom>
           <a:solidFill>
@@ -7539,7 +7658,7 @@
         </p:nvSpPr>
         <p:spPr>
           <a:xfrm>
-            <a:off x="3702050" y="1610221"/>
+            <a:off x="3676650" y="1555651"/>
             <a:ext cx="330200" cy="330200"/>
           </a:xfrm>
           <a:prstGeom prst="ellipse">
@@ -7559,7 +7678,7 @@
         </p:nvSpPr>
         <p:spPr>
           <a:xfrm>
-            <a:off x="3799185" y="1661021"/>
+            <a:off x="3773785" y="1606451"/>
             <a:ext cx="186730" cy="228600"/>
           </a:xfrm>
           <a:prstGeom prst="rect">
@@ -7598,8 +7717,8 @@
         </p:nvSpPr>
         <p:spPr>
           <a:xfrm>
-            <a:off x="3702050" y="2042021"/>
-            <a:ext cx="2171446" cy="639961"/>
+            <a:off x="3676650" y="1987451"/>
+            <a:ext cx="2223770" cy="639961"/>
           </a:xfrm>
           <a:prstGeom prst="rect">
             <a:avLst/>
@@ -7676,12 +7795,12 @@
         </p:nvSpPr>
         <p:spPr>
           <a:xfrm>
-            <a:off x="6175375" y="1429246"/>
-            <a:ext cx="2520950" cy="1647031"/>
+            <a:off x="6175375" y="1400076"/>
+            <a:ext cx="2520950" cy="1596231"/>
           </a:xfrm>
           <a:prstGeom prst="roundRect">
             <a:avLst>
-              <a:gd name="adj" fmla="val 9253"/>
+              <a:gd name="adj" fmla="val 9547"/>
             </a:avLst>
           </a:prstGeom>
           <a:solidFill>
@@ -7703,7 +7822,7 @@
         </p:nvSpPr>
         <p:spPr>
           <a:xfrm>
-            <a:off x="6381750" y="1610221"/>
+            <a:off x="6356350" y="1555651"/>
             <a:ext cx="330200" cy="330200"/>
           </a:xfrm>
           <a:prstGeom prst="ellipse">
@@ -7723,7 +7842,7 @@
         </p:nvSpPr>
         <p:spPr>
           <a:xfrm>
-            <a:off x="6478290" y="1661021"/>
+            <a:off x="6452890" y="1606451"/>
             <a:ext cx="187920" cy="228600"/>
           </a:xfrm>
           <a:prstGeom prst="rect">
@@ -7762,8 +7881,8 @@
         </p:nvSpPr>
         <p:spPr>
           <a:xfrm>
-            <a:off x="6381750" y="2042021"/>
-            <a:ext cx="2171446" cy="639961"/>
+            <a:off x="6356350" y="1987451"/>
+            <a:ext cx="2223770" cy="639961"/>
           </a:xfrm>
           <a:prstGeom prst="rect">
             <a:avLst/>
@@ -7840,12 +7959,12 @@
         </p:nvSpPr>
         <p:spPr>
           <a:xfrm>
-            <a:off x="8855075" y="1429246"/>
-            <a:ext cx="2520950" cy="1647031"/>
+            <a:off x="8855075" y="1400076"/>
+            <a:ext cx="2520950" cy="1596231"/>
           </a:xfrm>
           <a:prstGeom prst="roundRect">
             <a:avLst>
-              <a:gd name="adj" fmla="val 9253"/>
+              <a:gd name="adj" fmla="val 9547"/>
             </a:avLst>
           </a:prstGeom>
           <a:solidFill>
@@ -7867,7 +7986,7 @@
         </p:nvSpPr>
         <p:spPr>
           <a:xfrm>
-            <a:off x="9061450" y="1610221"/>
+            <a:off x="9036050" y="1555651"/>
             <a:ext cx="330200" cy="330200"/>
           </a:xfrm>
           <a:prstGeom prst="ellipse">
@@ -7887,7 +8006,7 @@
         </p:nvSpPr>
         <p:spPr>
           <a:xfrm>
-            <a:off x="9156700" y="1661021"/>
+            <a:off x="9131300" y="1606451"/>
             <a:ext cx="190500" cy="228600"/>
           </a:xfrm>
           <a:prstGeom prst="rect">
@@ -7926,8 +8045,8 @@
         </p:nvSpPr>
         <p:spPr>
           <a:xfrm>
-            <a:off x="9061450" y="2042021"/>
-            <a:ext cx="2171446" cy="853281"/>
+            <a:off x="9036050" y="1987451"/>
+            <a:ext cx="2223770" cy="853281"/>
           </a:xfrm>
           <a:prstGeom prst="rect">
             <a:avLst/>
@@ -8022,12 +8141,12 @@
         </p:nvSpPr>
         <p:spPr>
           <a:xfrm>
-            <a:off x="812800" y="3301603"/>
-            <a:ext cx="5528072" cy="2743498"/>
+            <a:off x="812800" y="3192463"/>
+            <a:ext cx="5812730" cy="2852638"/>
           </a:xfrm>
           <a:prstGeom prst="roundRect">
             <a:avLst>
-              <a:gd name="adj" fmla="val 6481"/>
+              <a:gd name="adj" fmla="val 6233"/>
             </a:avLst>
           </a:prstGeom>
           <a:solidFill>
@@ -8044,8 +8163,8 @@
         </p:nvSpPr>
         <p:spPr>
           <a:xfrm>
-            <a:off x="1066800" y="3479403"/>
-            <a:ext cx="5170674" cy="260350"/>
+            <a:off x="1066800" y="3344863"/>
+            <a:ext cx="5457130" cy="260350"/>
           </a:xfrm>
           <a:prstGeom prst="rect">
             <a:avLst/>
@@ -8083,8 +8202,8 @@
         </p:nvSpPr>
         <p:spPr>
           <a:xfrm>
-            <a:off x="1066800" y="3812778"/>
-            <a:ext cx="5170674" cy="853281"/>
+            <a:off x="1066800" y="3665538"/>
+            <a:ext cx="5457130" cy="639961"/>
           </a:xfrm>
           <a:prstGeom prst="rect">
             <a:avLst/>
@@ -8111,7 +8230,7 @@
                 <a:ea typeface="+mn-lt" pitchFamily="34" charset="-122"/>
                 <a:cs typeface="+mn-lt" pitchFamily="34" charset="-120"/>
               </a:rPr>
-              <a:t>Лаборатории нужно обработать большой набор изображений </a:t>
+              <a:t>Лаборатории нужно обработать набор изображений готовой моделью — </a:t>
             </a:r>
             <a:br/>
             <a:pPr algn="l" indent="0" marL="0">
@@ -8129,7 +8248,7 @@
                 <a:ea typeface="+mn-lt" pitchFamily="34" charset="-122"/>
                 <a:cs typeface="+mn-lt" pitchFamily="34" charset="-120"/>
               </a:rPr>
-              <a:t>готовой моделью — около 100 часов работы карты с 24 ГБ памяти. </a:t>
+              <a:t>около 100 часов работы карты с 24 ГБ памяти. Прерванную часть можно </a:t>
             </a:r>
             <a:br/>
             <a:pPr algn="l" indent="0" marL="0">
@@ -8147,24 +8266,6 @@
                 <a:ea typeface="+mn-lt" pitchFamily="34" charset="-122"/>
                 <a:cs typeface="+mn-lt" pitchFamily="34" charset="-120"/>
               </a:rPr>
-              <a:t>Данные делятся на части, поэтому прерванную часть можно </a:t>
-            </a:r>
-            <a:br/>
-            <a:pPr algn="l" indent="0" marL="0">
-              <a:lnSpc>
-                <a:spcPts val="1680"/>
-              </a:lnSpc>
-              <a:buNone/>
-            </a:pPr>
-            <a:r>
-              <a:rPr lang="ru-RU" altLang="en-US" sz="1200" dirty="0">
-                <a:solidFill>
-                  <a:schemeClr val="bg1"/>
-                </a:solidFill>
-                <a:latin typeface="+mn-lt" pitchFamily="34" charset="0"/>
-                <a:ea typeface="+mn-lt" pitchFamily="34" charset="-122"/>
-                <a:cs typeface="+mn-lt" pitchFamily="34" charset="-120"/>
-              </a:rPr>
               <a:t>запустить заново.</a:t>
             </a:r>
             <a:endParaRPr lang="en-US" sz="1200" dirty="0"/>
@@ -8179,8 +8280,8 @@
         </p:nvSpPr>
         <p:spPr>
           <a:xfrm>
-            <a:off x="1066800" y="4710509"/>
-            <a:ext cx="1655366" cy="406400"/>
+            <a:off x="1066800" y="4337248"/>
+            <a:ext cx="2223770" cy="406400"/>
           </a:xfrm>
           <a:prstGeom prst="rect">
             <a:avLst/>
@@ -8218,20 +8319,23 @@
         </p:nvSpPr>
         <p:spPr>
           <a:xfrm>
-            <a:off x="1066800" y="5098435"/>
-            <a:ext cx="1655366" cy="238760"/>
-          </a:xfrm>
-          <a:prstGeom prst="rect">
-            <a:avLst/>
-          </a:prstGeom>
-          <a:noFill/>
-          <a:ln/>
-        </p:spPr>
-        <p:txBody>
-          <a:bodyPr wrap="square" lIns="0" tIns="0" rIns="0" bIns="0" rtlCol="0" anchor="ctr"/>
-          <a:lstStyle/>
-          <a:p>
-            <a:pPr algn="l" indent="0" marL="0">
+            <a:off x="1066800" y="4739779"/>
+            <a:ext cx="2223770" cy="415230"/>
+          </a:xfrm>
+          <a:prstGeom prst="rect">
+            <a:avLst/>
+          </a:prstGeom>
+          <a:noFill/>
+          <a:ln/>
+        </p:spPr>
+        <p:txBody>
+          <a:bodyPr wrap="square" lIns="0" tIns="0" rIns="0" bIns="0" rtlCol="0" anchor="t"/>
+          <a:lstStyle/>
+          <a:p>
+            <a:pPr algn="l" indent="0" marL="0">
+              <a:lnSpc>
+                <a:spcPts val="1620"/>
+              </a:lnSpc>
               <a:buNone/>
             </a:pPr>
             <a:r>
@@ -8243,7 +8347,25 @@
                 <a:ea typeface="+mn-lt" pitchFamily="34" charset="-122"/>
                 <a:cs typeface="+mn-lt" pitchFamily="34" charset="-120"/>
               </a:rPr>
-              <a:t>цель Улья: 100 ч × 40 ₽</a:t>
+              <a:t>цель Улья: 100 ч × 40 ₽, </a:t>
+            </a:r>
+            <a:br/>
+            <a:pPr algn="l" indent="0" marL="0">
+              <a:lnSpc>
+                <a:spcPts val="1620"/>
+              </a:lnSpc>
+              <a:buNone/>
+            </a:pPr>
+            <a:r>
+              <a:rPr lang="ru-RU" altLang="en-US" sz="1200" dirty="0">
+                <a:solidFill>
+                  <a:schemeClr val="accent5"/>
+                </a:solidFill>
+                <a:latin typeface="+mn-lt" pitchFamily="34" charset="0"/>
+                <a:ea typeface="+mn-lt" pitchFamily="34" charset="-122"/>
+                <a:cs typeface="+mn-lt" pitchFamily="34" charset="-120"/>
+              </a:rPr>
+              <a:t>пилотом не подтверждена</a:t>
             </a:r>
             <a:endParaRPr lang="en-US" sz="1200" dirty="0"/>
           </a:p>
@@ -8257,8 +8379,8 @@
         </p:nvSpPr>
         <p:spPr>
           <a:xfrm>
-            <a:off x="2925366" y="4710509"/>
-            <a:ext cx="2777464" cy="406400"/>
+            <a:off x="3479800" y="4337248"/>
+            <a:ext cx="2978482" cy="406400"/>
           </a:xfrm>
           <a:prstGeom prst="rect">
             <a:avLst/>
@@ -8282,7 +8404,7 @@
                 <a:ea typeface="+mj-lt" pitchFamily="34" charset="-122"/>
                 <a:cs typeface="+mj-lt" pitchFamily="34" charset="-120"/>
               </a:rPr>
-              <a:t>6 700–8 700 ₽</a:t>
+              <a:t>6 300–7 100 ₽</a:t>
             </a:r>
             <a:endParaRPr lang="en-US" sz="2400" dirty="0"/>
           </a:p>
@@ -8296,20 +8418,23 @@
         </p:nvSpPr>
         <p:spPr>
           <a:xfrm>
-            <a:off x="2925366" y="5098435"/>
-            <a:ext cx="2777464" cy="238760"/>
-          </a:xfrm>
-          <a:prstGeom prst="rect">
-            <a:avLst/>
-          </a:prstGeom>
-          <a:noFill/>
-          <a:ln/>
-        </p:spPr>
-        <p:txBody>
-          <a:bodyPr wrap="square" lIns="0" tIns="0" rIns="0" bIns="0" rtlCol="0" anchor="ctr"/>
-          <a:lstStyle/>
-          <a:p>
-            <a:pPr algn="l" indent="0" marL="0">
+            <a:off x="3479800" y="4739779"/>
+            <a:ext cx="2978482" cy="415230"/>
+          </a:xfrm>
+          <a:prstGeom prst="rect">
+            <a:avLst/>
+          </a:prstGeom>
+          <a:noFill/>
+          <a:ln/>
+        </p:spPr>
+        <p:txBody>
+          <a:bodyPr wrap="square" lIns="0" tIns="0" rIns="0" bIns="0" rtlCol="0" anchor="t"/>
+          <a:lstStyle/>
+          <a:p>
+            <a:pPr algn="l" indent="0" marL="0">
+              <a:lnSpc>
+                <a:spcPts val="1620"/>
+              </a:lnSpc>
               <a:buNone/>
             </a:pPr>
             <a:r>
@@ -8321,7 +8446,25 @@
                 <a:ea typeface="+mn-lt" pitchFamily="34" charset="-122"/>
                 <a:cs typeface="+mn-lt" pitchFamily="34" charset="-120"/>
               </a:rPr>
-              <a:t>по типичным тарифам 67–87 ₽ за час</a:t>
+              <a:t>GPU-облако Immers.cloud: 63–71 ₽ за </a:t>
+            </a:r>
+            <a:br/>
+            <a:pPr algn="l" indent="0" marL="0">
+              <a:lnSpc>
+                <a:spcPts val="1620"/>
+              </a:lnSpc>
+              <a:buNone/>
+            </a:pPr>
+            <a:r>
+              <a:rPr lang="ru-RU" altLang="en-US" sz="1200" dirty="0">
+                <a:solidFill>
+                  <a:schemeClr val="accent5"/>
+                </a:solidFill>
+                <a:latin typeface="+mn-lt" pitchFamily="34" charset="0"/>
+                <a:ea typeface="+mn-lt" pitchFamily="34" charset="-122"/>
+                <a:cs typeface="+mn-lt" pitchFamily="34" charset="-120"/>
+              </a:rPr>
+              <a:t>час, в цену входят vCPU, RAM и диск</a:t>
             </a:r>
             <a:endParaRPr lang="en-US" sz="1200" dirty="0"/>
           </a:p>
@@ -8335,8 +8478,8 @@
         </p:nvSpPr>
         <p:spPr>
           <a:xfrm>
-            <a:off x="1066800" y="5415260"/>
-            <a:ext cx="5170674" cy="426641"/>
+            <a:off x="1066800" y="5227340"/>
+            <a:ext cx="5457130" cy="639961"/>
           </a:xfrm>
           <a:prstGeom prst="rect">
             <a:avLst/>
@@ -8357,13 +8500,13 @@
             <a:r>
               <a:rPr lang="ru-RU" altLang="en-US" sz="1200" dirty="0">
                 <a:solidFill>
-                  <a:schemeClr val="accent5"/>
-                </a:solidFill>
-                <a:latin typeface="+mn-lt" pitchFamily="34" charset="0"/>
-                <a:ea typeface="+mn-lt" pitchFamily="34" charset="-122"/>
-                <a:cs typeface="+mn-lt" pitchFamily="34" charset="-120"/>
-              </a:rPr>
-              <a:t>На рынке есть предложения и от 40 ₽ за час, поэтому экономия не </a:t>
+                  <a:schemeClr val="bg1"/>
+                </a:solidFill>
+                <a:latin typeface="+mn-lt" pitchFamily="34" charset="0"/>
+                <a:ea typeface="+mn-lt" pitchFamily="34" charset="-122"/>
+                <a:cs typeface="+mn-lt" pitchFamily="34" charset="-120"/>
+              </a:rPr>
+              <a:t>Целевая цена конкурентна относительно части облачных предложений, </a:t>
             </a:r>
             <a:br/>
             <a:pPr algn="l" indent="0" marL="0">
@@ -8375,13 +8518,31 @@
             <a:r>
               <a:rPr lang="ru-RU" altLang="en-US" sz="1200" dirty="0">
                 <a:solidFill>
-                  <a:schemeClr val="accent5"/>
-                </a:solidFill>
-                <a:latin typeface="+mn-lt" pitchFamily="34" charset="0"/>
-                <a:ea typeface="+mn-lt" pitchFamily="34" charset="-122"/>
-                <a:cs typeface="+mn-lt" pitchFamily="34" charset="-120"/>
-              </a:rPr>
-              <a:t>гарантирована.</a:t>
+                  <a:schemeClr val="bg1"/>
+                </a:solidFill>
+                <a:latin typeface="+mn-lt" pitchFamily="34" charset="0"/>
+                <a:ea typeface="+mn-lt" pitchFamily="34" charset="-122"/>
+                <a:cs typeface="+mn-lt" pitchFamily="34" charset="-120"/>
+              </a:rPr>
+              <a:t>но на рынке есть более дешёвые распределённые площадки. </a:t>
+            </a:r>
+            <a:br/>
+            <a:pPr algn="l" indent="0" marL="0">
+              <a:lnSpc>
+                <a:spcPts val="1680"/>
+              </a:lnSpc>
+              <a:buNone/>
+            </a:pPr>
+            <a:r>
+              <a:rPr lang="ru-RU" altLang="en-US" sz="1200" b="1" dirty="0">
+                <a:solidFill>
+                  <a:schemeClr val="bg1"/>
+                </a:solidFill>
+                <a:latin typeface="+mn-lt" pitchFamily="34" charset="0"/>
+                <a:ea typeface="+mn-lt" pitchFamily="34" charset="-122"/>
+                <a:cs typeface="+mn-lt" pitchFamily="34" charset="-120"/>
+              </a:rPr>
+              <a:t>Преимущество по цене предстоит проверить.</a:t>
             </a:r>
             <a:endParaRPr lang="en-US" sz="1200" dirty="0"/>
           </a:p>
@@ -8395,12 +8556,12 @@
         </p:nvSpPr>
         <p:spPr>
           <a:xfrm>
-            <a:off x="6496447" y="3304778"/>
-            <a:ext cx="4879578" cy="2737148"/>
+            <a:off x="6781105" y="3195638"/>
+            <a:ext cx="4594920" cy="2846288"/>
           </a:xfrm>
           <a:prstGeom prst="roundRect">
             <a:avLst>
-              <a:gd name="adj" fmla="val 6496"/>
+              <a:gd name="adj" fmla="val 6247"/>
             </a:avLst>
           </a:prstGeom>
           <a:solidFill>
@@ -8422,8 +8583,8 @@
         </p:nvSpPr>
         <p:spPr>
           <a:xfrm>
-            <a:off x="6753622" y="3485753"/>
-            <a:ext cx="4496185" cy="260350"/>
+            <a:off x="7038280" y="3376613"/>
+            <a:ext cx="4202987" cy="260350"/>
           </a:xfrm>
           <a:prstGeom prst="rect">
             <a:avLst/>
@@ -8461,8 +8622,8 @@
         </p:nvSpPr>
         <p:spPr>
           <a:xfrm>
-            <a:off x="6753622" y="3819128"/>
-            <a:ext cx="4496185" cy="639961"/>
+            <a:off x="7038280" y="3709988"/>
+            <a:ext cx="4202987" cy="639961"/>
           </a:xfrm>
           <a:prstGeom prst="rect">
             <a:avLst/>
@@ -8506,7 +8667,7 @@
                 <a:ea typeface="+mn-lt" pitchFamily="34" charset="-122"/>
                 <a:cs typeface="+mn-lt" pitchFamily="34" charset="-120"/>
               </a:rPr>
-              <a:t> задачи, которые можно разбить на части или </a:t>
+              <a:t> задачи, которые можно разбить на части </a:t>
             </a:r>
             <a:br/>
             <a:pPr algn="l" indent="0" marL="0">
@@ -8524,7 +8685,7 @@
                 <a:ea typeface="+mn-lt" pitchFamily="34" charset="-122"/>
                 <a:cs typeface="+mn-lt" pitchFamily="34" charset="-120"/>
               </a:rPr>
-              <a:t>повторить, — обработка наборов данных, серии коротких </a:t>
+              <a:t>или повторить, — обработка наборов данных, серии </a:t>
             </a:r>
             <a:br/>
             <a:pPr algn="l" indent="0" marL="0">
@@ -8542,7 +8703,7 @@
                 <a:ea typeface="+mn-lt" pitchFamily="34" charset="-122"/>
                 <a:cs typeface="+mn-lt" pitchFamily="34" charset="-120"/>
               </a:rPr>
-              <a:t>экспериментов.</a:t>
+              <a:t>коротких экспериментов.</a:t>
             </a:r>
             <a:endParaRPr lang="en-US" sz="1200" dirty="0"/>
           </a:p>
@@ -8556,8 +8717,8 @@
         </p:nvSpPr>
         <p:spPr>
           <a:xfrm>
-            <a:off x="6753622" y="4547989"/>
-            <a:ext cx="4496185" cy="426641"/>
+            <a:off x="7038280" y="4438848"/>
+            <a:ext cx="4202987" cy="426641"/>
           </a:xfrm>
           <a:prstGeom prst="rect">
             <a:avLst/>
@@ -8633,8 +8794,8 @@
         </p:nvSpPr>
         <p:spPr>
           <a:xfrm>
-            <a:off x="6753622" y="5063530"/>
-            <a:ext cx="4496185" cy="426641"/>
+            <a:off x="7038280" y="4954389"/>
+            <a:ext cx="4202987" cy="426641"/>
           </a:xfrm>
           <a:prstGeom prst="rect">
             <a:avLst/>
@@ -8678,7 +8839,7 @@
                 <a:ea typeface="+mn-lt" pitchFamily="34" charset="-122"/>
                 <a:cs typeface="+mn-lt" pitchFamily="34" charset="-120"/>
               </a:rPr>
-              <a:t> срочные задачи и работа на нескольких картах </a:t>
+              <a:t> срочные задачи и работа на нескольких </a:t>
             </a:r>
             <a:br/>
             <a:pPr algn="l" indent="0" marL="0">
@@ -8696,7 +8857,7 @@
                 <a:ea typeface="+mn-lt" pitchFamily="34" charset="-122"/>
                 <a:cs typeface="+mn-lt" pitchFamily="34" charset="-120"/>
               </a:rPr>
-              <a:t>сразу.</a:t>
+              <a:t>картах сразу.</a:t>
             </a:r>
             <a:endParaRPr lang="en-US" sz="1200" dirty="0"/>
           </a:p>
@@ -10581,24 +10742,27 @@
         </p:nvSpPr>
         <p:spPr>
           <a:xfrm>
-            <a:off x="2717800" y="1532731"/>
-            <a:ext cx="2755697" cy="247650"/>
-          </a:xfrm>
-          <a:prstGeom prst="rect">
-            <a:avLst/>
-          </a:prstGeom>
-          <a:noFill/>
-          <a:ln/>
-        </p:spPr>
-        <p:txBody>
-          <a:bodyPr wrap="square" lIns="0" tIns="0" rIns="0" bIns="0" rtlCol="0" anchor="ctr"/>
-          <a:lstStyle/>
-          <a:p>
-            <a:pPr algn="l" indent="0" marL="0">
-              <a:buNone/>
-            </a:pPr>
-            <a:r>
-              <a:rPr lang="ru-RU" altLang="en-US" sz="1400" dirty="0">
+            <a:off x="2324100" y="1579761"/>
+            <a:ext cx="2125663" cy="393005"/>
+          </a:xfrm>
+          <a:prstGeom prst="rect">
+            <a:avLst/>
+          </a:prstGeom>
+          <a:noFill/>
+          <a:ln/>
+        </p:spPr>
+        <p:txBody>
+          <a:bodyPr wrap="square" lIns="0" tIns="0" rIns="0" bIns="0" rtlCol="0" anchor="t"/>
+          <a:lstStyle/>
+          <a:p>
+            <a:pPr algn="l" indent="0" marL="0">
+              <a:lnSpc>
+                <a:spcPts val="1495"/>
+              </a:lnSpc>
+              <a:buNone/>
+            </a:pPr>
+            <a:r>
+              <a:rPr lang="ru-RU" altLang="en-US" sz="1300" dirty="0">
                 <a:solidFill>
                   <a:schemeClr val="bg1"/>
                 </a:solidFill>
@@ -10606,80 +10770,17 @@
                 <a:ea typeface="+mj-lt" pitchFamily="34" charset="-122"/>
                 <a:cs typeface="+mj-lt" pitchFamily="34" charset="-120"/>
               </a:rPr>
-              <a:t>Облака в России</a:t>
-            </a:r>
-            <a:endParaRPr lang="en-US" sz="1400" dirty="0"/>
-          </a:p>
-        </p:txBody>
-      </p:sp>
-      <p:sp>
-        <p:nvSpPr>
-          <p:cNvPr id="4" name="Text 2"/>
-          <p:cNvSpPr txBox="1"/>
-          <p:nvPr/>
-        </p:nvSpPr>
-        <p:spPr>
-          <a:xfrm>
-            <a:off x="2717800" y="1747917"/>
-            <a:ext cx="2755697" cy="238760"/>
-          </a:xfrm>
-          <a:prstGeom prst="rect">
-            <a:avLst/>
-          </a:prstGeom>
-          <a:noFill/>
-          <a:ln/>
-        </p:spPr>
-        <p:txBody>
-          <a:bodyPr wrap="square" lIns="0" tIns="0" rIns="0" bIns="0" rtlCol="0" anchor="ctr"/>
-          <a:lstStyle/>
-          <a:p>
-            <a:pPr algn="l" indent="0" marL="0">
-              <a:buNone/>
-            </a:pPr>
-            <a:r>
-              <a:rPr lang="ru-RU" altLang="en-US" sz="1200" dirty="0">
-                <a:solidFill>
-                  <a:schemeClr val="accent5"/>
-                </a:solidFill>
-                <a:latin typeface="+mn-lt" pitchFamily="34" charset="0"/>
-                <a:ea typeface="+mn-lt" pitchFamily="34" charset="-122"/>
-                <a:cs typeface="+mn-lt" pitchFamily="34" charset="-120"/>
-              </a:rPr>
-              <a:t>Selectel, Cloud.ru, immers.cloud</a:t>
-            </a:r>
-            <a:endParaRPr lang="en-US" sz="1200" dirty="0"/>
-          </a:p>
-        </p:txBody>
-      </p:sp>
-      <p:sp>
-        <p:nvSpPr>
-          <p:cNvPr id="5" name="Text 3"/>
-          <p:cNvSpPr txBox="1"/>
-          <p:nvPr/>
-        </p:nvSpPr>
-        <p:spPr>
-          <a:xfrm>
-            <a:off x="5647234" y="1558131"/>
-            <a:ext cx="2755697" cy="426641"/>
-          </a:xfrm>
-          <a:prstGeom prst="rect">
-            <a:avLst/>
-          </a:prstGeom>
-          <a:noFill/>
-          <a:ln/>
-        </p:spPr>
-        <p:txBody>
-          <a:bodyPr wrap="square" lIns="0" tIns="0" rIns="0" bIns="0" rtlCol="0" anchor="t"/>
-          <a:lstStyle/>
-          <a:p>
-            <a:pPr algn="l" indent="0" marL="0">
-              <a:lnSpc>
-                <a:spcPts val="1610"/>
-              </a:lnSpc>
-              <a:buNone/>
-            </a:pPr>
-            <a:r>
-              <a:rPr lang="ru-RU" altLang="en-US" sz="1400" dirty="0">
+              <a:t>Российские </a:t>
+            </a:r>
+            <a:br/>
+            <a:pPr algn="l" indent="0" marL="0">
+              <a:lnSpc>
+                <a:spcPts val="1495"/>
+              </a:lnSpc>
+              <a:buNone/>
+            </a:pPr>
+            <a:r>
+              <a:rPr lang="ru-RU" altLang="en-US" sz="1300" dirty="0">
                 <a:solidFill>
                   <a:schemeClr val="bg1"/>
                 </a:solidFill>
@@ -10687,17 +10788,80 @@
                 <a:ea typeface="+mj-lt" pitchFamily="34" charset="-122"/>
                 <a:cs typeface="+mj-lt" pitchFamily="34" charset="-120"/>
               </a:rPr>
-              <a:t>Зарубежные </a:t>
-            </a:r>
-            <a:br/>
-            <a:pPr algn="l" indent="0" marL="0">
-              <a:lnSpc>
-                <a:spcPts val="1610"/>
-              </a:lnSpc>
-              <a:buNone/>
-            </a:pPr>
-            <a:r>
-              <a:rPr lang="ru-RU" altLang="en-US" sz="1400" dirty="0">
+              <a:t>GPU-облака</a:t>
+            </a:r>
+            <a:endParaRPr lang="en-US" sz="1300" dirty="0"/>
+          </a:p>
+        </p:txBody>
+      </p:sp>
+      <p:sp>
+        <p:nvSpPr>
+          <p:cNvPr id="4" name="Text 2"/>
+          <p:cNvSpPr txBox="1"/>
+          <p:nvPr/>
+        </p:nvSpPr>
+        <p:spPr>
+          <a:xfrm>
+            <a:off x="2324100" y="1978422"/>
+            <a:ext cx="2125663" cy="234950"/>
+          </a:xfrm>
+          <a:prstGeom prst="rect">
+            <a:avLst/>
+          </a:prstGeom>
+          <a:noFill/>
+          <a:ln/>
+        </p:spPr>
+        <p:txBody>
+          <a:bodyPr wrap="square" lIns="0" tIns="0" rIns="0" bIns="0" rtlCol="0" anchor="ctr"/>
+          <a:lstStyle/>
+          <a:p>
+            <a:pPr algn="l" indent="0" marL="0">
+              <a:buNone/>
+            </a:pPr>
+            <a:r>
+              <a:rPr lang="ru-RU" altLang="en-US" sz="1200" dirty="0">
+                <a:solidFill>
+                  <a:schemeClr val="accent5"/>
+                </a:solidFill>
+                <a:latin typeface="+mn-lt" pitchFamily="34" charset="0"/>
+                <a:ea typeface="+mn-lt" pitchFamily="34" charset="-122"/>
+                <a:cs typeface="+mn-lt" pitchFamily="34" charset="-120"/>
+              </a:rPr>
+              <a:t>Immers.cloud и другие</a:t>
+            </a:r>
+            <a:endParaRPr lang="en-US" sz="1200" dirty="0"/>
+          </a:p>
+        </p:txBody>
+      </p:sp>
+      <p:sp>
+        <p:nvSpPr>
+          <p:cNvPr id="5" name="Text 3"/>
+          <p:cNvSpPr txBox="1"/>
+          <p:nvPr/>
+        </p:nvSpPr>
+        <p:spPr>
+          <a:xfrm>
+            <a:off x="4616450" y="1579761"/>
+            <a:ext cx="2125663" cy="582811"/>
+          </a:xfrm>
+          <a:prstGeom prst="rect">
+            <a:avLst/>
+          </a:prstGeom>
+          <a:noFill/>
+          <a:ln/>
+        </p:spPr>
+        <p:txBody>
+          <a:bodyPr wrap="square" lIns="0" tIns="0" rIns="0" bIns="0" rtlCol="0" anchor="t"/>
+          <a:lstStyle/>
+          <a:p>
+            <a:pPr algn="l" indent="0" marL="0">
+              <a:lnSpc>
+                <a:spcPts val="1495"/>
+              </a:lnSpc>
+              <a:buNone/>
+            </a:pPr>
+            <a:r>
+              <a:rPr lang="ru-RU" altLang="en-US" sz="1300" dirty="0">
                 <a:solidFill>
                   <a:schemeClr val="bg1"/>
                 </a:solidFill>
@@ -10705,9 +10869,45 @@
                 <a:ea typeface="+mj-lt" pitchFamily="34" charset="-122"/>
                 <a:cs typeface="+mj-lt" pitchFamily="34" charset="-120"/>
               </a:rPr>
+              <a:t>Российские </a:t>
+            </a:r>
+            <a:br/>
+            <a:pPr algn="l" indent="0" marL="0">
+              <a:lnSpc>
+                <a:spcPts val="1495"/>
+              </a:lnSpc>
+              <a:buNone/>
+            </a:pPr>
+            <a:r>
+              <a:rPr lang="ru-RU" altLang="en-US" sz="1300" dirty="0">
+                <a:solidFill>
+                  <a:schemeClr val="bg1"/>
+                </a:solidFill>
+                <a:latin typeface="+mj-lt" pitchFamily="34" charset="0"/>
+                <a:ea typeface="+mj-lt" pitchFamily="34" charset="-122"/>
+                <a:cs typeface="+mj-lt" pitchFamily="34" charset="-120"/>
+              </a:rPr>
+              <a:t>распределённые </a:t>
+            </a:r>
+            <a:br/>
+            <a:pPr algn="l" indent="0" marL="0">
+              <a:lnSpc>
+                <a:spcPts val="1495"/>
+              </a:lnSpc>
+              <a:buNone/>
+            </a:pPr>
+            <a:r>
+              <a:rPr lang="ru-RU" altLang="en-US" sz="1300" dirty="0">
+                <a:solidFill>
+                  <a:schemeClr val="bg1"/>
+                </a:solidFill>
+                <a:latin typeface="+mj-lt" pitchFamily="34" charset="0"/>
+                <a:ea typeface="+mj-lt" pitchFamily="34" charset="-122"/>
+                <a:cs typeface="+mj-lt" pitchFamily="34" charset="-120"/>
+              </a:rPr>
               <a:t>площадки</a:t>
             </a:r>
-            <a:endParaRPr lang="en-US" sz="1400" dirty="0"/>
+            <a:endParaRPr lang="en-US" sz="1300" dirty="0"/>
           </a:p>
         </p:txBody>
       </p:sp>
@@ -10719,8 +10919,8 @@
         </p:nvSpPr>
         <p:spPr>
           <a:xfrm>
-            <a:off x="5647234" y="1952308"/>
-            <a:ext cx="2755697" cy="238760"/>
+            <a:off x="4616450" y="2168227"/>
+            <a:ext cx="2125663" cy="234950"/>
           </a:xfrm>
           <a:prstGeom prst="rect">
             <a:avLst/>
@@ -10744,7 +10944,7 @@
                 <a:ea typeface="+mn-lt" pitchFamily="34" charset="-122"/>
                 <a:cs typeface="+mn-lt" pitchFamily="34" charset="-120"/>
               </a:rPr>
-              <a:t>Vast.ai, Salad</a:t>
+              <a:t>Тераферма</a:t>
             </a:r>
             <a:endParaRPr lang="en-US" sz="1200" dirty="0"/>
           </a:p>
@@ -10752,14 +10952,134 @@
       </p:sp>
       <p:sp>
         <p:nvSpPr>
-          <p:cNvPr id="7" name="Shape 5"/>
+          <p:cNvPr id="7" name="Text 5"/>
+          <p:cNvSpPr txBox="1"/>
+          <p:nvPr/>
+        </p:nvSpPr>
+        <p:spPr>
+          <a:xfrm>
+            <a:off x="6908800" y="1579761"/>
+            <a:ext cx="2125663" cy="393005"/>
+          </a:xfrm>
+          <a:prstGeom prst="rect">
+            <a:avLst/>
+          </a:prstGeom>
+          <a:noFill/>
+          <a:ln/>
+        </p:spPr>
+        <p:txBody>
+          <a:bodyPr wrap="square" lIns="0" tIns="0" rIns="0" bIns="0" rtlCol="0" anchor="t"/>
+          <a:lstStyle/>
+          <a:p>
+            <a:pPr algn="l" indent="0" marL="0">
+              <a:lnSpc>
+                <a:spcPts val="1495"/>
+              </a:lnSpc>
+              <a:buNone/>
+            </a:pPr>
+            <a:r>
+              <a:rPr lang="ru-RU" altLang="en-US" sz="1300" dirty="0">
+                <a:solidFill>
+                  <a:schemeClr val="bg1"/>
+                </a:solidFill>
+                <a:latin typeface="+mj-lt" pitchFamily="34" charset="0"/>
+                <a:ea typeface="+mj-lt" pitchFamily="34" charset="-122"/>
+                <a:cs typeface="+mj-lt" pitchFamily="34" charset="-120"/>
+              </a:rPr>
+              <a:t>Зарубежные </a:t>
+            </a:r>
+            <a:br/>
+            <a:pPr algn="l" indent="0" marL="0">
+              <a:lnSpc>
+                <a:spcPts val="1495"/>
+              </a:lnSpc>
+              <a:buNone/>
+            </a:pPr>
+            <a:r>
+              <a:rPr lang="ru-RU" altLang="en-US" sz="1300" dirty="0">
+                <a:solidFill>
+                  <a:schemeClr val="bg1"/>
+                </a:solidFill>
+                <a:latin typeface="+mj-lt" pitchFamily="34" charset="0"/>
+                <a:ea typeface="+mj-lt" pitchFamily="34" charset="-122"/>
+                <a:cs typeface="+mj-lt" pitchFamily="34" charset="-120"/>
+              </a:rPr>
+              <a:t>GPU-площадки</a:t>
+            </a:r>
+            <a:endParaRPr lang="en-US" sz="1300" dirty="0"/>
+          </a:p>
+        </p:txBody>
+      </p:sp>
+      <p:sp>
+        <p:nvSpPr>
+          <p:cNvPr id="8" name="Text 6"/>
+          <p:cNvSpPr txBox="1"/>
+          <p:nvPr/>
+        </p:nvSpPr>
+        <p:spPr>
+          <a:xfrm>
+            <a:off x="6908800" y="1997472"/>
+            <a:ext cx="2125663" cy="407591"/>
+          </a:xfrm>
+          <a:prstGeom prst="rect">
+            <a:avLst/>
+          </a:prstGeom>
+          <a:noFill/>
+          <a:ln/>
+        </p:spPr>
+        <p:txBody>
+          <a:bodyPr wrap="square" lIns="0" tIns="0" rIns="0" bIns="0" rtlCol="0" anchor="t"/>
+          <a:lstStyle/>
+          <a:p>
+            <a:pPr algn="l" indent="0" marL="0">
+              <a:lnSpc>
+                <a:spcPts val="1560"/>
+              </a:lnSpc>
+              <a:buNone/>
+            </a:pPr>
+            <a:r>
+              <a:rPr lang="ru-RU" altLang="en-US" sz="1200" dirty="0">
+                <a:solidFill>
+                  <a:schemeClr val="accent5"/>
+                </a:solidFill>
+                <a:latin typeface="+mn-lt" pitchFamily="34" charset="0"/>
+                <a:ea typeface="+mn-lt" pitchFamily="34" charset="-122"/>
+                <a:cs typeface="+mn-lt" pitchFamily="34" charset="-120"/>
+              </a:rPr>
+              <a:t>Vast.ai, RunPod Community, </a:t>
+            </a:r>
+            <a:br/>
+            <a:pPr algn="l" indent="0" marL="0">
+              <a:lnSpc>
+                <a:spcPts val="1560"/>
+              </a:lnSpc>
+              <a:buNone/>
+            </a:pPr>
+            <a:r>
+              <a:rPr lang="ru-RU" altLang="en-US" sz="1200" dirty="0">
+                <a:solidFill>
+                  <a:schemeClr val="accent5"/>
+                </a:solidFill>
+                <a:latin typeface="+mn-lt" pitchFamily="34" charset="0"/>
+                <a:ea typeface="+mn-lt" pitchFamily="34" charset="-122"/>
+                <a:cs typeface="+mn-lt" pitchFamily="34" charset="-120"/>
+              </a:rPr>
+              <a:t>SaladCloud</a:t>
+            </a:r>
+            <a:endParaRPr lang="en-US" sz="1200" dirty="0"/>
+          </a:p>
+        </p:txBody>
+      </p:sp>
+      <p:sp>
+        <p:nvSpPr>
+          <p:cNvPr id="9" name="Shape 7"/>
           <p:cNvSpPr/>
           <p:nvPr/>
         </p:nvSpPr>
         <p:spPr>
           <a:xfrm>
-            <a:off x="8449667" y="1558131"/>
-            <a:ext cx="2929434" cy="711002"/>
+            <a:off x="9086850" y="1452761"/>
+            <a:ext cx="2292350" cy="1029692"/>
           </a:xfrm>
           <a:prstGeom prst="round2SameRect">
             <a:avLst/>
@@ -10772,14 +11092,14 @@
       </p:sp>
       <p:sp>
         <p:nvSpPr>
-          <p:cNvPr id="8" name="Text 6"/>
-          <p:cNvSpPr txBox="1"/>
-          <p:nvPr/>
-        </p:nvSpPr>
-        <p:spPr>
-          <a:xfrm>
-            <a:off x="8576667" y="1659731"/>
-            <a:ext cx="2755697" cy="247650"/>
+          <p:cNvPr id="10" name="Text 8"/>
+          <p:cNvSpPr txBox="1"/>
+          <p:nvPr/>
+        </p:nvSpPr>
+        <p:spPr>
+          <a:xfrm>
+            <a:off x="9201150" y="1554361"/>
+            <a:ext cx="2125663" cy="228600"/>
           </a:xfrm>
           <a:prstGeom prst="rect">
             <a:avLst/>
@@ -10795,7 +11115,7 @@
               <a:buNone/>
             </a:pPr>
             <a:r>
-              <a:rPr lang="ru-RU" altLang="en-US" sz="1400" dirty="0">
+              <a:rPr lang="ru-RU" altLang="en-US" sz="1300" dirty="0">
                 <a:solidFill>
                   <a:schemeClr val="accent1"/>
                 </a:solidFill>
@@ -10805,20 +11125,20 @@
               </a:rPr>
               <a:t>Улей</a:t>
             </a:r>
-            <a:endParaRPr lang="en-US" sz="1400" dirty="0"/>
-          </a:p>
-        </p:txBody>
-      </p:sp>
-      <p:sp>
-        <p:nvSpPr>
-          <p:cNvPr id="9" name="Text 7"/>
-          <p:cNvSpPr txBox="1"/>
-          <p:nvPr/>
-        </p:nvSpPr>
-        <p:spPr>
-          <a:xfrm>
-            <a:off x="8576667" y="1874917"/>
-            <a:ext cx="2755697" cy="238760"/>
+            <a:endParaRPr lang="en-US" sz="1300" dirty="0"/>
+          </a:p>
+        </p:txBody>
+      </p:sp>
+      <p:sp>
+        <p:nvSpPr>
+          <p:cNvPr id="11" name="Text 9"/>
+          <p:cNvSpPr txBox="1"/>
+          <p:nvPr/>
+        </p:nvSpPr>
+        <p:spPr>
+          <a:xfrm>
+            <a:off x="9201150" y="1788616"/>
+            <a:ext cx="2125663" cy="234950"/>
           </a:xfrm>
           <a:prstGeom prst="rect">
             <a:avLst/>
@@ -10842,7 +11162,7 @@
                 <a:ea typeface="+mn-lt" pitchFamily="34" charset="-122"/>
                 <a:cs typeface="+mn-lt" pitchFamily="34" charset="-120"/>
               </a:rPr>
-              <a:t>что проверяем</a:t>
+              <a:t>наша гипотеза</a:t>
             </a:r>
             <a:endParaRPr lang="en-US" sz="1200" dirty="0"/>
           </a:p>
@@ -10850,14 +11170,14 @@
       </p:sp>
       <p:sp>
         <p:nvSpPr>
-          <p:cNvPr id="10" name="Shape 8"/>
+          <p:cNvPr id="12" name="Shape 10"/>
           <p:cNvSpPr/>
           <p:nvPr/>
         </p:nvSpPr>
         <p:spPr>
           <a:xfrm>
-            <a:off x="812800" y="2272308"/>
-            <a:ext cx="1778000" cy="0"/>
+            <a:off x="812800" y="2485628"/>
+            <a:ext cx="1397000" cy="0"/>
           </a:xfrm>
           <a:prstGeom prst="line">
             <a:avLst/>
@@ -10873,26 +11193,29 @@
       </p:sp>
       <p:sp>
         <p:nvSpPr>
-          <p:cNvPr id="11" name="Text 9"/>
-          <p:cNvSpPr txBox="1"/>
-          <p:nvPr/>
-        </p:nvSpPr>
-        <p:spPr>
-          <a:xfrm>
-            <a:off x="812800" y="2332633"/>
-            <a:ext cx="1701800" cy="234950"/>
-          </a:xfrm>
-          <a:prstGeom prst="rect">
-            <a:avLst/>
-          </a:prstGeom>
-          <a:noFill/>
-          <a:ln/>
-        </p:spPr>
-        <p:txBody>
-          <a:bodyPr wrap="square" lIns="0" tIns="0" rIns="0" bIns="0" rtlCol="0" anchor="ctr"/>
-          <a:lstStyle/>
-          <a:p>
-            <a:pPr algn="l" indent="0" marL="0">
+          <p:cNvPr id="13" name="Text 11"/>
+          <p:cNvSpPr txBox="1"/>
+          <p:nvPr/>
+        </p:nvSpPr>
+        <p:spPr>
+          <a:xfrm>
+            <a:off x="812800" y="2565003"/>
+            <a:ext cx="1333500" cy="407591"/>
+          </a:xfrm>
+          <a:prstGeom prst="rect">
+            <a:avLst/>
+          </a:prstGeom>
+          <a:noFill/>
+          <a:ln/>
+        </p:spPr>
+        <p:txBody>
+          <a:bodyPr wrap="square" lIns="0" tIns="0" rIns="0" bIns="0" rtlCol="0" anchor="t"/>
+          <a:lstStyle/>
+          <a:p>
+            <a:pPr algn="l" indent="0" marL="0">
+              <a:lnSpc>
+                <a:spcPts val="1560"/>
+              </a:lnSpc>
               <a:buNone/>
             </a:pPr>
             <a:r>
@@ -10904,7 +11227,25 @@
                 <a:ea typeface="+mn-lt" pitchFamily="34" charset="-122"/>
                 <a:cs typeface="+mn-lt" pitchFamily="34" charset="-120"/>
               </a:rPr>
-              <a:t>Цена часа RTX 3090</a:t>
+              <a:t>Цена RTX 3090 </a:t>
+            </a:r>
+            <a:br/>
+            <a:pPr algn="l" indent="0" marL="0">
+              <a:lnSpc>
+                <a:spcPts val="1560"/>
+              </a:lnSpc>
+              <a:buNone/>
+            </a:pPr>
+            <a:r>
+              <a:rPr lang="ru-RU" altLang="en-US" sz="1200" b="1" dirty="0">
+                <a:solidFill>
+                  <a:schemeClr val="accent5"/>
+                </a:solidFill>
+                <a:latin typeface="+mn-lt" pitchFamily="34" charset="0"/>
+                <a:ea typeface="+mn-lt" pitchFamily="34" charset="-122"/>
+                <a:cs typeface="+mn-lt" pitchFamily="34" charset="-120"/>
+              </a:rPr>
+              <a:t>за час</a:t>
             </a:r>
             <a:endParaRPr lang="en-US" sz="1200" dirty="0"/>
           </a:p>
@@ -10912,14 +11253,14 @@
       </p:sp>
       <p:sp>
         <p:nvSpPr>
-          <p:cNvPr id="12" name="Shape 10"/>
+          <p:cNvPr id="14" name="Shape 12"/>
           <p:cNvSpPr/>
           <p:nvPr/>
         </p:nvSpPr>
         <p:spPr>
           <a:xfrm>
-            <a:off x="2590800" y="2272308"/>
-            <a:ext cx="2929434" cy="0"/>
+            <a:off x="2209800" y="2485628"/>
+            <a:ext cx="2292350" cy="0"/>
           </a:xfrm>
           <a:prstGeom prst="line">
             <a:avLst/>
@@ -10935,14 +11276,14 @@
       </p:sp>
       <p:sp>
         <p:nvSpPr>
-          <p:cNvPr id="13" name="Text 11"/>
-          <p:cNvSpPr txBox="1"/>
-          <p:nvPr/>
-        </p:nvSpPr>
-        <p:spPr>
-          <a:xfrm>
-            <a:off x="2717800" y="2351683"/>
-            <a:ext cx="2755697" cy="407591"/>
+          <p:cNvPr id="15" name="Text 13"/>
+          <p:cNvSpPr txBox="1"/>
+          <p:nvPr/>
+        </p:nvSpPr>
+        <p:spPr>
+          <a:xfrm>
+            <a:off x="2324100" y="2565003"/>
+            <a:ext cx="2125663" cy="605631"/>
           </a:xfrm>
           <a:prstGeom prst="rect">
             <a:avLst/>
@@ -10969,7 +11310,7 @@
                 <a:ea typeface="+mn-lt" pitchFamily="34" charset="-122"/>
                 <a:cs typeface="+mn-lt" pitchFamily="34" charset="-120"/>
               </a:rPr>
-              <a:t>≈67–71 ₽ по типичным тарифам, есть </a:t>
+              <a:t>63–71 ₽ у Immers.cloud, у </a:t>
             </a:r>
             <a:br/>
             <a:pPr algn="l" indent="0" marL="0">
@@ -10987,7 +11328,25 @@
                 <a:ea typeface="+mn-lt" pitchFamily="34" charset="-122"/>
                 <a:cs typeface="+mn-lt" pitchFamily="34" charset="-120"/>
               </a:rPr>
-              <a:t>предложения от 40 ₽</a:t>
+              <a:t>других облаков бывает </a:t>
+            </a:r>
+            <a:br/>
+            <a:pPr algn="l" indent="0" marL="0">
+              <a:lnSpc>
+                <a:spcPts val="1560"/>
+              </a:lnSpc>
+              <a:buNone/>
+            </a:pPr>
+            <a:r>
+              <a:rPr lang="ru-RU" altLang="en-US" sz="1200" dirty="0">
+                <a:solidFill>
+                  <a:schemeClr val="bg1"/>
+                </a:solidFill>
+                <a:latin typeface="+mn-lt" pitchFamily="34" charset="0"/>
+                <a:ea typeface="+mn-lt" pitchFamily="34" charset="-122"/>
+                <a:cs typeface="+mn-lt" pitchFamily="34" charset="-120"/>
+              </a:rPr>
+              <a:t>дешевле</a:t>
             </a:r>
             <a:endParaRPr lang="en-US" sz="1200" dirty="0"/>
           </a:p>
@@ -10995,14 +11354,14 @@
       </p:sp>
       <p:sp>
         <p:nvSpPr>
-          <p:cNvPr id="14" name="Shape 12"/>
+          <p:cNvPr id="16" name="Shape 14"/>
           <p:cNvSpPr/>
           <p:nvPr/>
         </p:nvSpPr>
         <p:spPr>
           <a:xfrm>
-            <a:off x="5520234" y="2272308"/>
-            <a:ext cx="2929434" cy="0"/>
+            <a:off x="4502150" y="2485628"/>
+            <a:ext cx="2292350" cy="0"/>
           </a:xfrm>
           <a:prstGeom prst="line">
             <a:avLst/>
@@ -11018,14 +11377,14 @@
       </p:sp>
       <p:sp>
         <p:nvSpPr>
-          <p:cNvPr id="15" name="Text 13"/>
-          <p:cNvSpPr txBox="1"/>
-          <p:nvPr/>
-        </p:nvSpPr>
-        <p:spPr>
-          <a:xfrm>
-            <a:off x="5647234" y="2351683"/>
-            <a:ext cx="2755697" cy="407591"/>
+          <p:cNvPr id="17" name="Text 15"/>
+          <p:cNvSpPr txBox="1"/>
+          <p:nvPr/>
+        </p:nvSpPr>
+        <p:spPr>
+          <a:xfrm>
+            <a:off x="4616450" y="2565003"/>
+            <a:ext cx="2125663" cy="407591"/>
           </a:xfrm>
           <a:prstGeom prst="rect">
             <a:avLst/>
@@ -11052,7 +11411,7 @@
                 <a:ea typeface="+mn-lt" pitchFamily="34" charset="-122"/>
                 <a:cs typeface="+mn-lt" pitchFamily="34" charset="-120"/>
               </a:rPr>
-              <a:t>≈$0,11–0,13, прерываемая аренда </a:t>
+              <a:t>≈22–31 ₽ в опубликованных </a:t>
             </a:r>
             <a:br/>
             <a:pPr algn="l" indent="0" marL="0">
@@ -11070,7 +11429,7 @@
                 <a:ea typeface="+mn-lt" pitchFamily="34" charset="-122"/>
                 <a:cs typeface="+mn-lt" pitchFamily="34" charset="-120"/>
               </a:rPr>
-              <a:t>дешевле</a:t>
+              <a:t>предложениях</a:t>
             </a:r>
             <a:endParaRPr lang="en-US" sz="1200" dirty="0"/>
           </a:p>
@@ -11078,34 +11437,14 @@
       </p:sp>
       <p:sp>
         <p:nvSpPr>
-          <p:cNvPr id="16" name="Shape 14"/>
+          <p:cNvPr id="18" name="Shape 16"/>
           <p:cNvSpPr/>
           <p:nvPr/>
         </p:nvSpPr>
         <p:spPr>
           <a:xfrm>
-            <a:off x="8449667" y="2269133"/>
-            <a:ext cx="2929434" cy="554831"/>
-          </a:xfrm>
-          <a:prstGeom prst="rect">
-            <a:avLst/>
-          </a:prstGeom>
-          <a:solidFill>
-            <a:schemeClr val="accent3"/>
-          </a:solidFill>
-          <a:ln/>
-        </p:spPr>
-      </p:sp>
-      <p:sp>
-        <p:nvSpPr>
-          <p:cNvPr id="17" name="Shape 15"/>
-          <p:cNvSpPr/>
-          <p:nvPr/>
-        </p:nvSpPr>
-        <p:spPr>
-          <a:xfrm>
-            <a:off x="8449667" y="2272308"/>
-            <a:ext cx="2929434" cy="0"/>
+            <a:off x="6794500" y="2485628"/>
+            <a:ext cx="2292350" cy="0"/>
           </a:xfrm>
           <a:prstGeom prst="line">
             <a:avLst/>
@@ -11121,38 +11460,77 @@
       </p:sp>
       <p:sp>
         <p:nvSpPr>
-          <p:cNvPr id="18" name="Text 16"/>
-          <p:cNvSpPr txBox="1"/>
-          <p:nvPr/>
-        </p:nvSpPr>
-        <p:spPr>
-          <a:xfrm>
-            <a:off x="8576667" y="2332633"/>
-            <a:ext cx="2755697" cy="234950"/>
-          </a:xfrm>
-          <a:prstGeom prst="rect">
-            <a:avLst/>
-          </a:prstGeom>
-          <a:noFill/>
-          <a:ln/>
-        </p:spPr>
-        <p:txBody>
-          <a:bodyPr wrap="square" lIns="0" tIns="0" rIns="0" bIns="0" rtlCol="0" anchor="ctr"/>
-          <a:lstStyle/>
-          <a:p>
-            <a:pPr algn="l" indent="0" marL="0">
-              <a:buNone/>
-            </a:pPr>
-            <a:r>
-              <a:rPr lang="ru-RU" altLang="en-US" sz="1200" b="1" dirty="0">
-                <a:solidFill>
-                  <a:schemeClr val="accent1"/>
-                </a:solidFill>
-                <a:latin typeface="+mn-lt" pitchFamily="34" charset="0"/>
-                <a:ea typeface="+mn-lt" pitchFamily="34" charset="-122"/>
-                <a:cs typeface="+mn-lt" pitchFamily="34" charset="-120"/>
-              </a:rPr>
-              <a:t>Цель — около 40 ₽</a:t>
+          <p:cNvPr id="19" name="Text 17"/>
+          <p:cNvSpPr txBox="1"/>
+          <p:nvPr/>
+        </p:nvSpPr>
+        <p:spPr>
+          <a:xfrm>
+            <a:off x="6908800" y="2565003"/>
+            <a:ext cx="2125663" cy="605631"/>
+          </a:xfrm>
+          <a:prstGeom prst="rect">
+            <a:avLst/>
+          </a:prstGeom>
+          <a:noFill/>
+          <a:ln/>
+        </p:spPr>
+        <p:txBody>
+          <a:bodyPr wrap="square" lIns="0" tIns="0" rIns="0" bIns="0" rtlCol="0" anchor="t"/>
+          <a:lstStyle/>
+          <a:p>
+            <a:pPr algn="l" indent="0" marL="0">
+              <a:lnSpc>
+                <a:spcPts val="1560"/>
+              </a:lnSpc>
+              <a:buNone/>
+            </a:pPr>
+            <a:r>
+              <a:rPr lang="ru-RU" altLang="en-US" sz="1200" dirty="0">
+                <a:solidFill>
+                  <a:schemeClr val="bg1"/>
+                </a:solidFill>
+                <a:latin typeface="+mn-lt" pitchFamily="34" charset="0"/>
+                <a:ea typeface="+mn-lt" pitchFamily="34" charset="-122"/>
+                <a:cs typeface="+mn-lt" pitchFamily="34" charset="-120"/>
+              </a:rPr>
+              <a:t>RunPod $0,22–0,50, </a:t>
+            </a:r>
+            <a:br/>
+            <a:pPr algn="l" indent="0" marL="0">
+              <a:lnSpc>
+                <a:spcPts val="1560"/>
+              </a:lnSpc>
+              <a:buNone/>
+            </a:pPr>
+            <a:r>
+              <a:rPr lang="ru-RU" altLang="en-US" sz="1200" dirty="0">
+                <a:solidFill>
+                  <a:schemeClr val="bg1"/>
+                </a:solidFill>
+                <a:latin typeface="+mn-lt" pitchFamily="34" charset="0"/>
+                <a:ea typeface="+mn-lt" pitchFamily="34" charset="-122"/>
+                <a:cs typeface="+mn-lt" pitchFamily="34" charset="-120"/>
+              </a:rPr>
+              <a:t>SaladCloud $0,09–0,17, </a:t>
+            </a:r>
+            <a:br/>
+            <a:pPr algn="l" indent="0" marL="0">
+              <a:lnSpc>
+                <a:spcPts val="1560"/>
+              </a:lnSpc>
+              <a:buNone/>
+            </a:pPr>
+            <a:r>
+              <a:rPr lang="ru-RU" altLang="en-US" sz="1200" dirty="0">
+                <a:solidFill>
+                  <a:schemeClr val="bg1"/>
+                </a:solidFill>
+                <a:latin typeface="+mn-lt" pitchFamily="34" charset="0"/>
+                <a:ea typeface="+mn-lt" pitchFamily="34" charset="-122"/>
+                <a:cs typeface="+mn-lt" pitchFamily="34" charset="-120"/>
+              </a:rPr>
+              <a:t>Vast.ai — по хосту</a:t>
             </a:r>
             <a:endParaRPr lang="en-US" sz="1200" dirty="0"/>
           </a:p>
@@ -11160,14 +11538,34 @@
       </p:sp>
       <p:sp>
         <p:nvSpPr>
-          <p:cNvPr id="19" name="Shape 17"/>
+          <p:cNvPr id="20" name="Shape 18"/>
           <p:cNvSpPr/>
           <p:nvPr/>
         </p:nvSpPr>
         <p:spPr>
           <a:xfrm>
-            <a:off x="812800" y="2827139"/>
-            <a:ext cx="1778000" cy="0"/>
+            <a:off x="9086850" y="2482453"/>
+            <a:ext cx="2292350" cy="752872"/>
+          </a:xfrm>
+          <a:prstGeom prst="rect">
+            <a:avLst/>
+          </a:prstGeom>
+          <a:solidFill>
+            <a:schemeClr val="accent3"/>
+          </a:solidFill>
+          <a:ln/>
+        </p:spPr>
+      </p:sp>
+      <p:sp>
+        <p:nvSpPr>
+          <p:cNvPr id="21" name="Shape 19"/>
+          <p:cNvSpPr/>
+          <p:nvPr/>
+        </p:nvSpPr>
+        <p:spPr>
+          <a:xfrm>
+            <a:off x="9086850" y="2485628"/>
+            <a:ext cx="2292350" cy="0"/>
           </a:xfrm>
           <a:prstGeom prst="line">
             <a:avLst/>
@@ -11183,14 +11581,14 @@
       </p:sp>
       <p:sp>
         <p:nvSpPr>
-          <p:cNvPr id="20" name="Text 18"/>
-          <p:cNvSpPr txBox="1"/>
-          <p:nvPr/>
-        </p:nvSpPr>
-        <p:spPr>
-          <a:xfrm>
-            <a:off x="812800" y="2906514"/>
-            <a:ext cx="1701800" cy="407591"/>
+          <p:cNvPr id="22" name="Text 20"/>
+          <p:cNvSpPr txBox="1"/>
+          <p:nvPr/>
+        </p:nvSpPr>
+        <p:spPr>
+          <a:xfrm>
+            <a:off x="9201150" y="2565003"/>
+            <a:ext cx="2125663" cy="407591"/>
           </a:xfrm>
           <a:prstGeom prst="rect">
             <a:avLst/>
@@ -11211,13 +11609,13 @@
             <a:r>
               <a:rPr lang="ru-RU" altLang="en-US" sz="1200" b="1" dirty="0">
                 <a:solidFill>
-                  <a:schemeClr val="accent5"/>
-                </a:solidFill>
-                <a:latin typeface="+mn-lt" pitchFamily="34" charset="0"/>
-                <a:ea typeface="+mn-lt" pitchFamily="34" charset="-122"/>
-                <a:cs typeface="+mn-lt" pitchFamily="34" charset="-120"/>
-              </a:rPr>
-              <a:t>Работа в России и </a:t>
+                  <a:schemeClr val="accent1"/>
+                </a:solidFill>
+                <a:latin typeface="+mn-lt" pitchFamily="34" charset="0"/>
+                <a:ea typeface="+mn-lt" pitchFamily="34" charset="-122"/>
+                <a:cs typeface="+mn-lt" pitchFamily="34" charset="-120"/>
+              </a:rPr>
+              <a:t>Цель — 40 ₽, не </a:t>
             </a:r>
             <a:br/>
             <a:pPr algn="l" indent="0" marL="0">
@@ -11229,13 +11627,13 @@
             <a:r>
               <a:rPr lang="ru-RU" altLang="en-US" sz="1200" b="1" dirty="0">
                 <a:solidFill>
-                  <a:schemeClr val="accent5"/>
-                </a:solidFill>
-                <a:latin typeface="+mn-lt" pitchFamily="34" charset="0"/>
-                <a:ea typeface="+mn-lt" pitchFamily="34" charset="-122"/>
-                <a:cs typeface="+mn-lt" pitchFamily="34" charset="-120"/>
-              </a:rPr>
-              <a:t>оплата</a:t>
+                  <a:schemeClr val="accent1"/>
+                </a:solidFill>
+                <a:latin typeface="+mn-lt" pitchFamily="34" charset="0"/>
+                <a:ea typeface="+mn-lt" pitchFamily="34" charset="-122"/>
+                <a:cs typeface="+mn-lt" pitchFamily="34" charset="-120"/>
+              </a:rPr>
+              <a:t>подтверждена</a:t>
             </a:r>
             <a:endParaRPr lang="en-US" sz="1200" dirty="0"/>
           </a:p>
@@ -11243,14 +11641,14 @@
       </p:sp>
       <p:sp>
         <p:nvSpPr>
-          <p:cNvPr id="21" name="Shape 19"/>
+          <p:cNvPr id="23" name="Shape 21"/>
           <p:cNvSpPr/>
           <p:nvPr/>
         </p:nvSpPr>
         <p:spPr>
           <a:xfrm>
-            <a:off x="2590800" y="2827139"/>
-            <a:ext cx="2929434" cy="0"/>
+            <a:off x="812800" y="3238500"/>
+            <a:ext cx="1397000" cy="0"/>
           </a:xfrm>
           <a:prstGeom prst="line">
             <a:avLst/>
@@ -11266,38 +11664,59 @@
       </p:sp>
       <p:sp>
         <p:nvSpPr>
-          <p:cNvPr id="22" name="Text 20"/>
-          <p:cNvSpPr txBox="1"/>
-          <p:nvPr/>
-        </p:nvSpPr>
-        <p:spPr>
-          <a:xfrm>
-            <a:off x="2717800" y="2887464"/>
-            <a:ext cx="2755697" cy="234950"/>
-          </a:xfrm>
-          <a:prstGeom prst="rect">
-            <a:avLst/>
-          </a:prstGeom>
-          <a:noFill/>
-          <a:ln/>
-        </p:spPr>
-        <p:txBody>
-          <a:bodyPr wrap="square" lIns="0" tIns="0" rIns="0" bIns="0" rtlCol="0" anchor="ctr"/>
-          <a:lstStyle/>
-          <a:p>
-            <a:pPr algn="l" indent="0" marL="0">
-              <a:buNone/>
-            </a:pPr>
-            <a:r>
-              <a:rPr lang="ru-RU" altLang="en-US" sz="1200" dirty="0">
-                <a:solidFill>
-                  <a:schemeClr val="bg1"/>
-                </a:solidFill>
-                <a:latin typeface="+mn-lt" pitchFamily="34" charset="0"/>
-                <a:ea typeface="+mn-lt" pitchFamily="34" charset="-122"/>
-                <a:cs typeface="+mn-lt" pitchFamily="34" charset="-120"/>
-              </a:rPr>
-              <a:t>Да, в рублях, по договору</a:t>
+          <p:cNvPr id="24" name="Text 22"/>
+          <p:cNvSpPr txBox="1"/>
+          <p:nvPr/>
+        </p:nvSpPr>
+        <p:spPr>
+          <a:xfrm>
+            <a:off x="812800" y="3317875"/>
+            <a:ext cx="1333500" cy="407591"/>
+          </a:xfrm>
+          <a:prstGeom prst="rect">
+            <a:avLst/>
+          </a:prstGeom>
+          <a:noFill/>
+          <a:ln/>
+        </p:spPr>
+        <p:txBody>
+          <a:bodyPr wrap="square" lIns="0" tIns="0" rIns="0" bIns="0" rtlCol="0" anchor="t"/>
+          <a:lstStyle/>
+          <a:p>
+            <a:pPr algn="l" indent="0" marL="0">
+              <a:lnSpc>
+                <a:spcPts val="1560"/>
+              </a:lnSpc>
+              <a:buNone/>
+            </a:pPr>
+            <a:r>
+              <a:rPr lang="ru-RU" altLang="en-US" sz="1200" b="1" dirty="0">
+                <a:solidFill>
+                  <a:schemeClr val="accent5"/>
+                </a:solidFill>
+                <a:latin typeface="+mn-lt" pitchFamily="34" charset="0"/>
+                <a:ea typeface="+mn-lt" pitchFamily="34" charset="-122"/>
+                <a:cs typeface="+mn-lt" pitchFamily="34" charset="-120"/>
+              </a:rPr>
+              <a:t>Оплата из </a:t>
+            </a:r>
+            <a:br/>
+            <a:pPr algn="l" indent="0" marL="0">
+              <a:lnSpc>
+                <a:spcPts val="1560"/>
+              </a:lnSpc>
+              <a:buNone/>
+            </a:pPr>
+            <a:r>
+              <a:rPr lang="ru-RU" altLang="en-US" sz="1200" b="1" dirty="0">
+                <a:solidFill>
+                  <a:schemeClr val="accent5"/>
+                </a:solidFill>
+                <a:latin typeface="+mn-lt" pitchFamily="34" charset="0"/>
+                <a:ea typeface="+mn-lt" pitchFamily="34" charset="-122"/>
+                <a:cs typeface="+mn-lt" pitchFamily="34" charset="-120"/>
+              </a:rPr>
+              <a:t>России</a:t>
             </a:r>
             <a:endParaRPr lang="en-US" sz="1200" dirty="0"/>
           </a:p>
@@ -11305,14 +11724,14 @@
       </p:sp>
       <p:sp>
         <p:nvSpPr>
-          <p:cNvPr id="23" name="Shape 21"/>
+          <p:cNvPr id="25" name="Shape 23"/>
           <p:cNvSpPr/>
           <p:nvPr/>
         </p:nvSpPr>
         <p:spPr>
           <a:xfrm>
-            <a:off x="5520234" y="2827139"/>
-            <a:ext cx="2929434" cy="0"/>
+            <a:off x="2209800" y="3238500"/>
+            <a:ext cx="2292350" cy="0"/>
           </a:xfrm>
           <a:prstGeom prst="line">
             <a:avLst/>
@@ -11328,29 +11747,26 @@
       </p:sp>
       <p:sp>
         <p:nvSpPr>
-          <p:cNvPr id="24" name="Text 22"/>
-          <p:cNvSpPr txBox="1"/>
-          <p:nvPr/>
-        </p:nvSpPr>
-        <p:spPr>
-          <a:xfrm>
-            <a:off x="5647234" y="2906514"/>
-            <a:ext cx="2755697" cy="407591"/>
-          </a:xfrm>
-          <a:prstGeom prst="rect">
-            <a:avLst/>
-          </a:prstGeom>
-          <a:noFill/>
-          <a:ln/>
-        </p:spPr>
-        <p:txBody>
-          <a:bodyPr wrap="square" lIns="0" tIns="0" rIns="0" bIns="0" rtlCol="0" anchor="t"/>
-          <a:lstStyle/>
-          <a:p>
-            <a:pPr algn="l" indent="0" marL="0">
-              <a:lnSpc>
-                <a:spcPts val="1560"/>
-              </a:lnSpc>
+          <p:cNvPr id="26" name="Text 24"/>
+          <p:cNvSpPr txBox="1"/>
+          <p:nvPr/>
+        </p:nvSpPr>
+        <p:spPr>
+          <a:xfrm>
+            <a:off x="2324100" y="3298825"/>
+            <a:ext cx="2125663" cy="234950"/>
+          </a:xfrm>
+          <a:prstGeom prst="rect">
+            <a:avLst/>
+          </a:prstGeom>
+          <a:noFill/>
+          <a:ln/>
+        </p:spPr>
+        <p:txBody>
+          <a:bodyPr wrap="square" lIns="0" tIns="0" rIns="0" bIns="0" rtlCol="0" anchor="ctr"/>
+          <a:lstStyle/>
+          <a:p>
+            <a:pPr algn="l" indent="0" marL="0">
               <a:buNone/>
             </a:pPr>
             <a:r>
@@ -11362,25 +11778,7 @@
                 <a:ea typeface="+mn-lt" pitchFamily="34" charset="-122"/>
                 <a:cs typeface="+mn-lt" pitchFamily="34" charset="-120"/>
               </a:rPr>
-              <a:t>В долларах; российские карты </a:t>
-            </a:r>
-            <a:br/>
-            <a:pPr algn="l" indent="0" marL="0">
-              <a:lnSpc>
-                <a:spcPts val="1560"/>
-              </a:lnSpc>
-              <a:buNone/>
-            </a:pPr>
-            <a:r>
-              <a:rPr lang="ru-RU" altLang="en-US" sz="1200" dirty="0">
-                <a:solidFill>
-                  <a:schemeClr val="bg1"/>
-                </a:solidFill>
-                <a:latin typeface="+mn-lt" pitchFamily="34" charset="0"/>
-                <a:ea typeface="+mn-lt" pitchFamily="34" charset="-122"/>
-                <a:cs typeface="+mn-lt" pitchFamily="34" charset="-120"/>
-              </a:rPr>
-              <a:t>обычно не проходят</a:t>
+              <a:t>В рублях, по договору</a:t>
             </a:r>
             <a:endParaRPr lang="en-US" sz="1200" dirty="0"/>
           </a:p>
@@ -11388,34 +11786,14 @@
       </p:sp>
       <p:sp>
         <p:nvSpPr>
-          <p:cNvPr id="25" name="Shape 23"/>
+          <p:cNvPr id="27" name="Shape 25"/>
           <p:cNvSpPr/>
           <p:nvPr/>
         </p:nvSpPr>
         <p:spPr>
           <a:xfrm>
-            <a:off x="8449667" y="2823964"/>
-            <a:ext cx="2929434" cy="554831"/>
-          </a:xfrm>
-          <a:prstGeom prst="rect">
-            <a:avLst/>
-          </a:prstGeom>
-          <a:solidFill>
-            <a:schemeClr val="accent3"/>
-          </a:solidFill>
-          <a:ln/>
-        </p:spPr>
-      </p:sp>
-      <p:sp>
-        <p:nvSpPr>
-          <p:cNvPr id="26" name="Shape 24"/>
-          <p:cNvSpPr/>
-          <p:nvPr/>
-        </p:nvSpPr>
-        <p:spPr>
-          <a:xfrm>
-            <a:off x="8449667" y="2827139"/>
-            <a:ext cx="2929434" cy="0"/>
+            <a:off x="4502150" y="3238500"/>
+            <a:ext cx="2292350" cy="0"/>
           </a:xfrm>
           <a:prstGeom prst="line">
             <a:avLst/>
@@ -11431,14 +11809,14 @@
       </p:sp>
       <p:sp>
         <p:nvSpPr>
-          <p:cNvPr id="27" name="Text 25"/>
-          <p:cNvSpPr txBox="1"/>
-          <p:nvPr/>
-        </p:nvSpPr>
-        <p:spPr>
-          <a:xfrm>
-            <a:off x="8576667" y="2887464"/>
-            <a:ext cx="2755697" cy="234950"/>
+          <p:cNvPr id="28" name="Text 26"/>
+          <p:cNvSpPr txBox="1"/>
+          <p:nvPr/>
+        </p:nvSpPr>
+        <p:spPr>
+          <a:xfrm>
+            <a:off x="4616450" y="3298825"/>
+            <a:ext cx="2125663" cy="234950"/>
           </a:xfrm>
           <a:prstGeom prst="rect">
             <a:avLst/>
@@ -11454,15 +11832,15 @@
               <a:buNone/>
             </a:pPr>
             <a:r>
-              <a:rPr lang="ru-RU" altLang="en-US" sz="1200" b="1" dirty="0">
-                <a:solidFill>
-                  <a:schemeClr val="accent1"/>
-                </a:solidFill>
-                <a:latin typeface="+mn-lt" pitchFamily="34" charset="0"/>
-                <a:ea typeface="+mn-lt" pitchFamily="34" charset="-122"/>
-                <a:cs typeface="+mn-lt" pitchFamily="34" charset="-120"/>
-              </a:rPr>
-              <a:t>Да, в рублях</a:t>
+              <a:rPr lang="ru-RU" altLang="en-US" sz="1200" dirty="0">
+                <a:solidFill>
+                  <a:schemeClr val="bg1"/>
+                </a:solidFill>
+                <a:latin typeface="+mn-lt" pitchFamily="34" charset="0"/>
+                <a:ea typeface="+mn-lt" pitchFamily="34" charset="-122"/>
+                <a:cs typeface="+mn-lt" pitchFamily="34" charset="-120"/>
+              </a:rPr>
+              <a:t>В рублях</a:t>
             </a:r>
             <a:endParaRPr lang="en-US" sz="1200" dirty="0"/>
           </a:p>
@@ -11470,14 +11848,14 @@
       </p:sp>
       <p:sp>
         <p:nvSpPr>
-          <p:cNvPr id="28" name="Shape 26"/>
+          <p:cNvPr id="29" name="Shape 27"/>
           <p:cNvSpPr/>
           <p:nvPr/>
         </p:nvSpPr>
         <p:spPr>
           <a:xfrm>
-            <a:off x="812800" y="3381970"/>
-            <a:ext cx="1778000" cy="0"/>
+            <a:off x="6794500" y="3238500"/>
+            <a:ext cx="2292350" cy="0"/>
           </a:xfrm>
           <a:prstGeom prst="line">
             <a:avLst/>
@@ -11493,38 +11871,59 @@
       </p:sp>
       <p:sp>
         <p:nvSpPr>
-          <p:cNvPr id="29" name="Text 27"/>
-          <p:cNvSpPr txBox="1"/>
-          <p:nvPr/>
-        </p:nvSpPr>
-        <p:spPr>
-          <a:xfrm>
-            <a:off x="812800" y="3442295"/>
-            <a:ext cx="1701800" cy="234950"/>
-          </a:xfrm>
-          <a:prstGeom prst="rect">
-            <a:avLst/>
-          </a:prstGeom>
-          <a:noFill/>
-          <a:ln/>
-        </p:spPr>
-        <p:txBody>
-          <a:bodyPr wrap="square" lIns="0" tIns="0" rIns="0" bIns="0" rtlCol="0" anchor="ctr"/>
-          <a:lstStyle/>
-          <a:p>
-            <a:pPr algn="l" indent="0" marL="0">
-              <a:buNone/>
-            </a:pPr>
-            <a:r>
-              <a:rPr lang="ru-RU" altLang="en-US" sz="1200" b="1" dirty="0">
-                <a:solidFill>
-                  <a:schemeClr val="accent5"/>
-                </a:solidFill>
-                <a:latin typeface="+mn-lt" pitchFamily="34" charset="0"/>
-                <a:ea typeface="+mn-lt" pitchFamily="34" charset="-122"/>
-                <a:cs typeface="+mn-lt" pitchFamily="34" charset="-120"/>
-              </a:rPr>
-              <a:t>Надёжность</a:t>
+          <p:cNvPr id="30" name="Text 28"/>
+          <p:cNvSpPr txBox="1"/>
+          <p:nvPr/>
+        </p:nvSpPr>
+        <p:spPr>
+          <a:xfrm>
+            <a:off x="6908800" y="3317875"/>
+            <a:ext cx="2125663" cy="407591"/>
+          </a:xfrm>
+          <a:prstGeom prst="rect">
+            <a:avLst/>
+          </a:prstGeom>
+          <a:noFill/>
+          <a:ln/>
+        </p:spPr>
+        <p:txBody>
+          <a:bodyPr wrap="square" lIns="0" tIns="0" rIns="0" bIns="0" rtlCol="0" anchor="t"/>
+          <a:lstStyle/>
+          <a:p>
+            <a:pPr algn="l" indent="0" marL="0">
+              <a:lnSpc>
+                <a:spcPts val="1560"/>
+              </a:lnSpc>
+              <a:buNone/>
+            </a:pPr>
+            <a:r>
+              <a:rPr lang="ru-RU" altLang="en-US" sz="1200" dirty="0">
+                <a:solidFill>
+                  <a:schemeClr val="bg1"/>
+                </a:solidFill>
+                <a:latin typeface="+mn-lt" pitchFamily="34" charset="0"/>
+                <a:ea typeface="+mn-lt" pitchFamily="34" charset="-122"/>
+                <a:cs typeface="+mn-lt" pitchFamily="34" charset="-120"/>
+              </a:rPr>
+              <a:t>В долларах; российские </a:t>
+            </a:r>
+            <a:br/>
+            <a:pPr algn="l" indent="0" marL="0">
+              <a:lnSpc>
+                <a:spcPts val="1560"/>
+              </a:lnSpc>
+              <a:buNone/>
+            </a:pPr>
+            <a:r>
+              <a:rPr lang="ru-RU" altLang="en-US" sz="1200" dirty="0">
+                <a:solidFill>
+                  <a:schemeClr val="bg1"/>
+                </a:solidFill>
+                <a:latin typeface="+mn-lt" pitchFamily="34" charset="0"/>
+                <a:ea typeface="+mn-lt" pitchFamily="34" charset="-122"/>
+                <a:cs typeface="+mn-lt" pitchFamily="34" charset="-120"/>
+              </a:rPr>
+              <a:t>карты обычно не проходят</a:t>
             </a:r>
             <a:endParaRPr lang="en-US" sz="1200" dirty="0"/>
           </a:p>
@@ -11532,14 +11931,34 @@
       </p:sp>
       <p:sp>
         <p:nvSpPr>
-          <p:cNvPr id="30" name="Shape 28"/>
+          <p:cNvPr id="31" name="Shape 29"/>
           <p:cNvSpPr/>
           <p:nvPr/>
         </p:nvSpPr>
         <p:spPr>
           <a:xfrm>
-            <a:off x="2590800" y="3381970"/>
-            <a:ext cx="2929434" cy="0"/>
+            <a:off x="9086850" y="3235325"/>
+            <a:ext cx="2292350" cy="554831"/>
+          </a:xfrm>
+          <a:prstGeom prst="rect">
+            <a:avLst/>
+          </a:prstGeom>
+          <a:solidFill>
+            <a:schemeClr val="accent3"/>
+          </a:solidFill>
+          <a:ln/>
+        </p:spPr>
+      </p:sp>
+      <p:sp>
+        <p:nvSpPr>
+          <p:cNvPr id="32" name="Shape 30"/>
+          <p:cNvSpPr/>
+          <p:nvPr/>
+        </p:nvSpPr>
+        <p:spPr>
+          <a:xfrm>
+            <a:off x="9086850" y="3238500"/>
+            <a:ext cx="2292350" cy="0"/>
           </a:xfrm>
           <a:prstGeom prst="line">
             <a:avLst/>
@@ -11555,14 +11974,14 @@
       </p:sp>
       <p:sp>
         <p:nvSpPr>
-          <p:cNvPr id="31" name="Text 29"/>
-          <p:cNvSpPr txBox="1"/>
-          <p:nvPr/>
-        </p:nvSpPr>
-        <p:spPr>
-          <a:xfrm>
-            <a:off x="2717800" y="3442295"/>
-            <a:ext cx="2755697" cy="234950"/>
+          <p:cNvPr id="33" name="Text 31"/>
+          <p:cNvSpPr txBox="1"/>
+          <p:nvPr/>
+        </p:nvSpPr>
+        <p:spPr>
+          <a:xfrm>
+            <a:off x="9201150" y="3298825"/>
+            <a:ext cx="2125663" cy="234950"/>
           </a:xfrm>
           <a:prstGeom prst="rect">
             <a:avLst/>
@@ -11578,15 +11997,15 @@
               <a:buNone/>
             </a:pPr>
             <a:r>
-              <a:rPr lang="ru-RU" altLang="en-US" sz="1200" dirty="0">
-                <a:solidFill>
-                  <a:schemeClr val="bg1"/>
-                </a:solidFill>
-                <a:latin typeface="+mn-lt" pitchFamily="34" charset="0"/>
-                <a:ea typeface="+mn-lt" pitchFamily="34" charset="-122"/>
-                <a:cs typeface="+mn-lt" pitchFamily="34" charset="-120"/>
-              </a:rPr>
-              <a:t>Дата-центры, гарантии доступности</a:t>
+              <a:rPr lang="ru-RU" altLang="en-US" sz="1200" b="1" dirty="0">
+                <a:solidFill>
+                  <a:schemeClr val="accent1"/>
+                </a:solidFill>
+                <a:latin typeface="+mn-lt" pitchFamily="34" charset="0"/>
+                <a:ea typeface="+mn-lt" pitchFamily="34" charset="-122"/>
+                <a:cs typeface="+mn-lt" pitchFamily="34" charset="-120"/>
+              </a:rPr>
+              <a:t>В рублях</a:t>
             </a:r>
             <a:endParaRPr lang="en-US" sz="1200" dirty="0"/>
           </a:p>
@@ -11594,14 +12013,14 @@
       </p:sp>
       <p:sp>
         <p:nvSpPr>
-          <p:cNvPr id="32" name="Shape 30"/>
+          <p:cNvPr id="34" name="Shape 32"/>
           <p:cNvSpPr/>
           <p:nvPr/>
         </p:nvSpPr>
         <p:spPr>
           <a:xfrm>
-            <a:off x="5520234" y="3381970"/>
-            <a:ext cx="2929434" cy="0"/>
+            <a:off x="812800" y="3793331"/>
+            <a:ext cx="1397000" cy="0"/>
           </a:xfrm>
           <a:prstGeom prst="line">
             <a:avLst/>
@@ -11617,14 +12036,14 @@
       </p:sp>
       <p:sp>
         <p:nvSpPr>
-          <p:cNvPr id="33" name="Text 31"/>
-          <p:cNvSpPr txBox="1"/>
-          <p:nvPr/>
-        </p:nvSpPr>
-        <p:spPr>
-          <a:xfrm>
-            <a:off x="5647234" y="3461345"/>
-            <a:ext cx="2755697" cy="407591"/>
+          <p:cNvPr id="35" name="Text 33"/>
+          <p:cNvSpPr txBox="1"/>
+          <p:nvPr/>
+        </p:nvSpPr>
+        <p:spPr>
+          <a:xfrm>
+            <a:off x="812800" y="3872706"/>
+            <a:ext cx="1333500" cy="407591"/>
           </a:xfrm>
           <a:prstGeom prst="rect">
             <a:avLst/>
@@ -11643,15 +12062,15 @@
               <a:buNone/>
             </a:pPr>
             <a:r>
-              <a:rPr lang="ru-RU" altLang="en-US" sz="1200" dirty="0">
-                <a:solidFill>
-                  <a:schemeClr val="bg1"/>
-                </a:solidFill>
-                <a:latin typeface="+mn-lt" pitchFamily="34" charset="0"/>
-                <a:ea typeface="+mn-lt" pitchFamily="34" charset="-122"/>
-                <a:cs typeface="+mn-lt" pitchFamily="34" charset="-120"/>
-              </a:rPr>
-              <a:t>Зависит от хоста, есть проверенные </a:t>
+              <a:rPr lang="ru-RU" altLang="en-US" sz="1200" b="1" dirty="0">
+                <a:solidFill>
+                  <a:schemeClr val="accent5"/>
+                </a:solidFill>
+                <a:latin typeface="+mn-lt" pitchFamily="34" charset="0"/>
+                <a:ea typeface="+mn-lt" pitchFamily="34" charset="-122"/>
+                <a:cs typeface="+mn-lt" pitchFamily="34" charset="-120"/>
+              </a:rPr>
+              <a:t>Надёжность и </a:t>
             </a:r>
             <a:br/>
             <a:pPr algn="l" indent="0" marL="0">
@@ -11661,15 +12080,15 @@
               <a:buNone/>
             </a:pPr>
             <a:r>
-              <a:rPr lang="ru-RU" altLang="en-US" sz="1200" dirty="0">
-                <a:solidFill>
-                  <a:schemeClr val="bg1"/>
-                </a:solidFill>
-                <a:latin typeface="+mn-lt" pitchFamily="34" charset="0"/>
-                <a:ea typeface="+mn-lt" pitchFamily="34" charset="-122"/>
-                <a:cs typeface="+mn-lt" pitchFamily="34" charset="-120"/>
-              </a:rPr>
-              <a:t>дата-центры</a:t>
+              <a:rPr lang="ru-RU" altLang="en-US" sz="1200" b="1" dirty="0">
+                <a:solidFill>
+                  <a:schemeClr val="accent5"/>
+                </a:solidFill>
+                <a:latin typeface="+mn-lt" pitchFamily="34" charset="0"/>
+                <a:ea typeface="+mn-lt" pitchFamily="34" charset="-122"/>
+                <a:cs typeface="+mn-lt" pitchFamily="34" charset="-120"/>
+              </a:rPr>
+              <a:t>ограничения</a:t>
             </a:r>
             <a:endParaRPr lang="en-US" sz="1200" dirty="0"/>
           </a:p>
@@ -11677,34 +12096,14 @@
       </p:sp>
       <p:sp>
         <p:nvSpPr>
-          <p:cNvPr id="34" name="Shape 32"/>
+          <p:cNvPr id="36" name="Shape 34"/>
           <p:cNvSpPr/>
           <p:nvPr/>
         </p:nvSpPr>
         <p:spPr>
           <a:xfrm>
-            <a:off x="8449667" y="3378795"/>
-            <a:ext cx="2929434" cy="554831"/>
-          </a:xfrm>
-          <a:prstGeom prst="rect">
-            <a:avLst/>
-          </a:prstGeom>
-          <a:solidFill>
-            <a:schemeClr val="accent3"/>
-          </a:solidFill>
-          <a:ln/>
-        </p:spPr>
-      </p:sp>
-      <p:sp>
-        <p:nvSpPr>
-          <p:cNvPr id="35" name="Shape 33"/>
-          <p:cNvSpPr/>
-          <p:nvPr/>
-        </p:nvSpPr>
-        <p:spPr>
-          <a:xfrm>
-            <a:off x="8449667" y="3381970"/>
-            <a:ext cx="2929434" cy="0"/>
+            <a:off x="2209800" y="3793331"/>
+            <a:ext cx="2292350" cy="0"/>
           </a:xfrm>
           <a:prstGeom prst="line">
             <a:avLst/>
@@ -11720,14 +12119,14 @@
       </p:sp>
       <p:sp>
         <p:nvSpPr>
-          <p:cNvPr id="36" name="Text 34"/>
-          <p:cNvSpPr txBox="1"/>
-          <p:nvPr/>
-        </p:nvSpPr>
-        <p:spPr>
-          <a:xfrm>
-            <a:off x="8576667" y="3461345"/>
-            <a:ext cx="2755697" cy="407591"/>
+          <p:cNvPr id="37" name="Text 35"/>
+          <p:cNvSpPr txBox="1"/>
+          <p:nvPr/>
+        </p:nvSpPr>
+        <p:spPr>
+          <a:xfrm>
+            <a:off x="2324100" y="3872706"/>
+            <a:ext cx="2125663" cy="407591"/>
           </a:xfrm>
           <a:prstGeom prst="rect">
             <a:avLst/>
@@ -11746,15 +12145,15 @@
               <a:buNone/>
             </a:pPr>
             <a:r>
-              <a:rPr lang="ru-RU" altLang="en-US" sz="1200" b="1" dirty="0">
-                <a:solidFill>
-                  <a:schemeClr val="accent1"/>
-                </a:solidFill>
-                <a:latin typeface="+mn-lt" pitchFamily="34" charset="0"/>
-                <a:ea typeface="+mn-lt" pitchFamily="34" charset="-122"/>
-                <a:cs typeface="+mn-lt" pitchFamily="34" charset="-120"/>
-              </a:rPr>
-              <a:t>Не проверена — ключевой вопрос </a:t>
+              <a:rPr lang="ru-RU" altLang="en-US" sz="1200" dirty="0">
+                <a:solidFill>
+                  <a:schemeClr val="bg1"/>
+                </a:solidFill>
+                <a:latin typeface="+mn-lt" pitchFamily="34" charset="0"/>
+                <a:ea typeface="+mn-lt" pitchFamily="34" charset="-122"/>
+                <a:cs typeface="+mn-lt" pitchFamily="34" charset="-120"/>
+              </a:rPr>
+              <a:t>Дата-центры, гарантии </a:t>
             </a:r>
             <a:br/>
             <a:pPr algn="l" indent="0" marL="0">
@@ -11764,15 +12163,15 @@
               <a:buNone/>
             </a:pPr>
             <a:r>
-              <a:rPr lang="ru-RU" altLang="en-US" sz="1200" b="1" dirty="0">
-                <a:solidFill>
-                  <a:schemeClr val="accent1"/>
-                </a:solidFill>
-                <a:latin typeface="+mn-lt" pitchFamily="34" charset="0"/>
-                <a:ea typeface="+mn-lt" pitchFamily="34" charset="-122"/>
-                <a:cs typeface="+mn-lt" pitchFamily="34" charset="-120"/>
-              </a:rPr>
-              <a:t>пилота</a:t>
+              <a:rPr lang="ru-RU" altLang="en-US" sz="1200" dirty="0">
+                <a:solidFill>
+                  <a:schemeClr val="bg1"/>
+                </a:solidFill>
+                <a:latin typeface="+mn-lt" pitchFamily="34" charset="0"/>
+                <a:ea typeface="+mn-lt" pitchFamily="34" charset="-122"/>
+                <a:cs typeface="+mn-lt" pitchFamily="34" charset="-120"/>
+              </a:rPr>
+              <a:t>доступности</a:t>
             </a:r>
             <a:endParaRPr lang="en-US" sz="1200" dirty="0"/>
           </a:p>
@@ -11780,14 +12179,14 @@
       </p:sp>
       <p:sp>
         <p:nvSpPr>
-          <p:cNvPr id="37" name="Shape 35"/>
+          <p:cNvPr id="38" name="Shape 36"/>
           <p:cNvSpPr/>
           <p:nvPr/>
         </p:nvSpPr>
         <p:spPr>
           <a:xfrm>
-            <a:off x="812800" y="3936802"/>
-            <a:ext cx="1778000" cy="0"/>
+            <a:off x="4502150" y="3793331"/>
+            <a:ext cx="2292350" cy="0"/>
           </a:xfrm>
           <a:prstGeom prst="line">
             <a:avLst/>
@@ -11803,38 +12202,59 @@
       </p:sp>
       <p:sp>
         <p:nvSpPr>
-          <p:cNvPr id="38" name="Text 36"/>
-          <p:cNvSpPr txBox="1"/>
-          <p:nvPr/>
-        </p:nvSpPr>
-        <p:spPr>
-          <a:xfrm>
-            <a:off x="812800" y="3997127"/>
-            <a:ext cx="1701800" cy="234950"/>
-          </a:xfrm>
-          <a:prstGeom prst="rect">
-            <a:avLst/>
-          </a:prstGeom>
-          <a:noFill/>
-          <a:ln/>
-        </p:spPr>
-        <p:txBody>
-          <a:bodyPr wrap="square" lIns="0" tIns="0" rIns="0" bIns="0" rtlCol="0" anchor="ctr"/>
-          <a:lstStyle/>
-          <a:p>
-            <a:pPr algn="l" indent="0" marL="0">
-              <a:buNone/>
-            </a:pPr>
-            <a:r>
-              <a:rPr lang="ru-RU" altLang="en-US" sz="1200" b="1" dirty="0">
-                <a:solidFill>
-                  <a:schemeClr val="accent5"/>
-                </a:solidFill>
-                <a:latin typeface="+mn-lt" pitchFamily="34" charset="0"/>
-                <a:ea typeface="+mn-lt" pitchFamily="34" charset="-122"/>
-                <a:cs typeface="+mn-lt" pitchFamily="34" charset="-120"/>
-              </a:rPr>
-              <a:t>Несрочные задачи</a:t>
+          <p:cNvPr id="39" name="Text 37"/>
+          <p:cNvSpPr txBox="1"/>
+          <p:nvPr/>
+        </p:nvSpPr>
+        <p:spPr>
+          <a:xfrm>
+            <a:off x="4616450" y="3872706"/>
+            <a:ext cx="2125663" cy="407591"/>
+          </a:xfrm>
+          <a:prstGeom prst="rect">
+            <a:avLst/>
+          </a:prstGeom>
+          <a:noFill/>
+          <a:ln/>
+        </p:spPr>
+        <p:txBody>
+          <a:bodyPr wrap="square" lIns="0" tIns="0" rIns="0" bIns="0" rtlCol="0" anchor="t"/>
+          <a:lstStyle/>
+          <a:p>
+            <a:pPr algn="l" indent="0" marL="0">
+              <a:lnSpc>
+                <a:spcPts val="1560"/>
+              </a:lnSpc>
+              <a:buNone/>
+            </a:pPr>
+            <a:r>
+              <a:rPr lang="ru-RU" altLang="en-US" sz="1200" dirty="0">
+                <a:solidFill>
+                  <a:schemeClr val="bg1"/>
+                </a:solidFill>
+                <a:latin typeface="+mn-lt" pitchFamily="34" charset="0"/>
+                <a:ea typeface="+mn-lt" pitchFamily="34" charset="-122"/>
+                <a:cs typeface="+mn-lt" pitchFamily="34" charset="-120"/>
+              </a:rPr>
+              <a:t>Зависит от владельца, </a:t>
+            </a:r>
+            <a:br/>
+            <a:pPr algn="l" indent="0" marL="0">
+              <a:lnSpc>
+                <a:spcPts val="1560"/>
+              </a:lnSpc>
+              <a:buNone/>
+            </a:pPr>
+            <a:r>
+              <a:rPr lang="ru-RU" altLang="en-US" sz="1200" dirty="0">
+                <a:solidFill>
+                  <a:schemeClr val="bg1"/>
+                </a:solidFill>
+                <a:latin typeface="+mn-lt" pitchFamily="34" charset="0"/>
+                <a:ea typeface="+mn-lt" pitchFamily="34" charset="-122"/>
+                <a:cs typeface="+mn-lt" pitchFamily="34" charset="-120"/>
+              </a:rPr>
+              <a:t>наличие нужно проверять</a:t>
             </a:r>
             <a:endParaRPr lang="en-US" sz="1200" dirty="0"/>
           </a:p>
@@ -11842,14 +12262,14 @@
       </p:sp>
       <p:sp>
         <p:nvSpPr>
-          <p:cNvPr id="39" name="Shape 37"/>
+          <p:cNvPr id="40" name="Shape 38"/>
           <p:cNvSpPr/>
           <p:nvPr/>
         </p:nvSpPr>
         <p:spPr>
           <a:xfrm>
-            <a:off x="2590800" y="3936802"/>
-            <a:ext cx="2929434" cy="0"/>
+            <a:off x="6794500" y="3793331"/>
+            <a:ext cx="2292350" cy="0"/>
           </a:xfrm>
           <a:prstGeom prst="line">
             <a:avLst/>
@@ -11865,14 +12285,14 @@
       </p:sp>
       <p:sp>
         <p:nvSpPr>
-          <p:cNvPr id="40" name="Text 38"/>
-          <p:cNvSpPr txBox="1"/>
-          <p:nvPr/>
-        </p:nvSpPr>
-        <p:spPr>
-          <a:xfrm>
-            <a:off x="2717800" y="4016177"/>
-            <a:ext cx="2755697" cy="407591"/>
+          <p:cNvPr id="41" name="Text 39"/>
+          <p:cNvSpPr txBox="1"/>
+          <p:nvPr/>
+        </p:nvSpPr>
+        <p:spPr>
+          <a:xfrm>
+            <a:off x="6908800" y="3872706"/>
+            <a:ext cx="2125663" cy="407591"/>
           </a:xfrm>
           <a:prstGeom prst="rect">
             <a:avLst/>
@@ -11899,7 +12319,7 @@
                 <a:ea typeface="+mn-lt" pitchFamily="34" charset="-122"/>
                 <a:cs typeface="+mn-lt" pitchFamily="34" charset="-120"/>
               </a:rPr>
-              <a:t>Есть прерываемые машины, </a:t>
+              <a:t>Зависит от хоста и тарифа, </a:t>
             </a:r>
             <a:br/>
             <a:pPr algn="l" indent="0" marL="0">
@@ -11917,7 +12337,7 @@
                 <a:ea typeface="+mn-lt" pitchFamily="34" charset="-122"/>
                 <a:cs typeface="+mn-lt" pitchFamily="34" charset="-120"/>
               </a:rPr>
-              <a:t>например в Yandex Cloud</a:t>
+              <a:t>возможны прерывания</a:t>
             </a:r>
             <a:endParaRPr lang="en-US" sz="1200" dirty="0"/>
           </a:p>
@@ -11925,14 +12345,34 @@
       </p:sp>
       <p:sp>
         <p:nvSpPr>
-          <p:cNvPr id="41" name="Shape 39"/>
+          <p:cNvPr id="42" name="Shape 40"/>
           <p:cNvSpPr/>
           <p:nvPr/>
         </p:nvSpPr>
         <p:spPr>
           <a:xfrm>
-            <a:off x="5520234" y="3936802"/>
-            <a:ext cx="2929434" cy="0"/>
+            <a:off x="9086850" y="3790156"/>
+            <a:ext cx="2292350" cy="554831"/>
+          </a:xfrm>
+          <a:prstGeom prst="rect">
+            <a:avLst/>
+          </a:prstGeom>
+          <a:solidFill>
+            <a:schemeClr val="accent3"/>
+          </a:solidFill>
+          <a:ln/>
+        </p:spPr>
+      </p:sp>
+      <p:sp>
+        <p:nvSpPr>
+          <p:cNvPr id="43" name="Shape 41"/>
+          <p:cNvSpPr/>
+          <p:nvPr/>
+        </p:nvSpPr>
+        <p:spPr>
+          <a:xfrm>
+            <a:off x="9086850" y="3793331"/>
+            <a:ext cx="2292350" cy="0"/>
           </a:xfrm>
           <a:prstGeom prst="line">
             <a:avLst/>
@@ -11948,38 +12388,59 @@
       </p:sp>
       <p:sp>
         <p:nvSpPr>
-          <p:cNvPr id="42" name="Text 40"/>
-          <p:cNvSpPr txBox="1"/>
-          <p:nvPr/>
-        </p:nvSpPr>
-        <p:spPr>
-          <a:xfrm>
-            <a:off x="5647234" y="3997127"/>
-            <a:ext cx="2755697" cy="234950"/>
-          </a:xfrm>
-          <a:prstGeom prst="rect">
-            <a:avLst/>
-          </a:prstGeom>
-          <a:noFill/>
-          <a:ln/>
-        </p:spPr>
-        <p:txBody>
-          <a:bodyPr wrap="square" lIns="0" tIns="0" rIns="0" bIns="0" rtlCol="0" anchor="ctr"/>
-          <a:lstStyle/>
-          <a:p>
-            <a:pPr algn="l" indent="0" marL="0">
-              <a:buNone/>
-            </a:pPr>
-            <a:r>
-              <a:rPr lang="ru-RU" altLang="en-US" sz="1200" dirty="0">
-                <a:solidFill>
-                  <a:schemeClr val="bg1"/>
-                </a:solidFill>
-                <a:latin typeface="+mn-lt" pitchFamily="34" charset="0"/>
-                <a:ea typeface="+mn-lt" pitchFamily="34" charset="-122"/>
-                <a:cs typeface="+mn-lt" pitchFamily="34" charset="-120"/>
-              </a:rPr>
-              <a:t>Есть дешёвая прерываемая аренда</a:t>
+          <p:cNvPr id="44" name="Text 42"/>
+          <p:cNvSpPr txBox="1"/>
+          <p:nvPr/>
+        </p:nvSpPr>
+        <p:spPr>
+          <a:xfrm>
+            <a:off x="9201150" y="3872706"/>
+            <a:ext cx="2125663" cy="407591"/>
+          </a:xfrm>
+          <a:prstGeom prst="rect">
+            <a:avLst/>
+          </a:prstGeom>
+          <a:noFill/>
+          <a:ln/>
+        </p:spPr>
+        <p:txBody>
+          <a:bodyPr wrap="square" lIns="0" tIns="0" rIns="0" bIns="0" rtlCol="0" anchor="t"/>
+          <a:lstStyle/>
+          <a:p>
+            <a:pPr algn="l" indent="0" marL="0">
+              <a:lnSpc>
+                <a:spcPts val="1560"/>
+              </a:lnSpc>
+              <a:buNone/>
+            </a:pPr>
+            <a:r>
+              <a:rPr lang="ru-RU" altLang="en-US" sz="1200" b="1" dirty="0">
+                <a:solidFill>
+                  <a:schemeClr val="accent1"/>
+                </a:solidFill>
+                <a:latin typeface="+mn-lt" pitchFamily="34" charset="0"/>
+                <a:ea typeface="+mn-lt" pitchFamily="34" charset="-122"/>
+                <a:cs typeface="+mn-lt" pitchFamily="34" charset="-120"/>
+              </a:rPr>
+              <a:t>Не проверена — ключевой </a:t>
+            </a:r>
+            <a:br/>
+            <a:pPr algn="l" indent="0" marL="0">
+              <a:lnSpc>
+                <a:spcPts val="1560"/>
+              </a:lnSpc>
+              <a:buNone/>
+            </a:pPr>
+            <a:r>
+              <a:rPr lang="ru-RU" altLang="en-US" sz="1200" b="1" dirty="0">
+                <a:solidFill>
+                  <a:schemeClr val="accent1"/>
+                </a:solidFill>
+                <a:latin typeface="+mn-lt" pitchFamily="34" charset="0"/>
+                <a:ea typeface="+mn-lt" pitchFamily="34" charset="-122"/>
+                <a:cs typeface="+mn-lt" pitchFamily="34" charset="-120"/>
+              </a:rPr>
+              <a:t>вопрос пилота</a:t>
             </a:r>
             <a:endParaRPr lang="en-US" sz="1200" dirty="0"/>
           </a:p>
@@ -11987,34 +12448,14 @@
       </p:sp>
       <p:sp>
         <p:nvSpPr>
-          <p:cNvPr id="43" name="Shape 41"/>
+          <p:cNvPr id="45" name="Shape 43"/>
           <p:cNvSpPr/>
           <p:nvPr/>
         </p:nvSpPr>
         <p:spPr>
           <a:xfrm>
-            <a:off x="8449667" y="3933627"/>
-            <a:ext cx="2929434" cy="554831"/>
-          </a:xfrm>
-          <a:prstGeom prst="rect">
-            <a:avLst/>
-          </a:prstGeom>
-          <a:solidFill>
-            <a:schemeClr val="accent3"/>
-          </a:solidFill>
-          <a:ln/>
-        </p:spPr>
-      </p:sp>
-      <p:sp>
-        <p:nvSpPr>
-          <p:cNvPr id="44" name="Shape 42"/>
-          <p:cNvSpPr/>
-          <p:nvPr/>
-        </p:nvSpPr>
-        <p:spPr>
-          <a:xfrm>
-            <a:off x="8449667" y="3936802"/>
-            <a:ext cx="2929434" cy="0"/>
+            <a:off x="812800" y="4348163"/>
+            <a:ext cx="1397000" cy="0"/>
           </a:xfrm>
           <a:prstGeom prst="line">
             <a:avLst/>
@@ -12030,14 +12471,14 @@
       </p:sp>
       <p:sp>
         <p:nvSpPr>
-          <p:cNvPr id="45" name="Text 43"/>
-          <p:cNvSpPr txBox="1"/>
-          <p:nvPr/>
-        </p:nvSpPr>
-        <p:spPr>
-          <a:xfrm>
-            <a:off x="8576667" y="4016177"/>
-            <a:ext cx="2755697" cy="407591"/>
+          <p:cNvPr id="46" name="Text 44"/>
+          <p:cNvSpPr txBox="1"/>
+          <p:nvPr/>
+        </p:nvSpPr>
+        <p:spPr>
+          <a:xfrm>
+            <a:off x="812800" y="4427538"/>
+            <a:ext cx="1333500" cy="407591"/>
           </a:xfrm>
           <a:prstGeom prst="rect">
             <a:avLst/>
@@ -12058,13 +12499,13 @@
             <a:r>
               <a:rPr lang="ru-RU" altLang="en-US" sz="1200" b="1" dirty="0">
                 <a:solidFill>
-                  <a:schemeClr val="accent1"/>
-                </a:solidFill>
-                <a:latin typeface="+mn-lt" pitchFamily="34" charset="0"/>
-                <a:ea typeface="+mn-lt" pitchFamily="34" charset="-122"/>
-                <a:cs typeface="+mn-lt" pitchFamily="34" charset="-120"/>
-              </a:rPr>
-              <a:t>Основная специализация — </a:t>
+                  <a:schemeClr val="accent5"/>
+                </a:solidFill>
+                <a:latin typeface="+mn-lt" pitchFamily="34" charset="0"/>
+                <a:ea typeface="+mn-lt" pitchFamily="34" charset="-122"/>
+                <a:cs typeface="+mn-lt" pitchFamily="34" charset="-120"/>
+              </a:rPr>
+              <a:t>Как выдаются </a:t>
             </a:r>
             <a:br/>
             <a:pPr algn="l" indent="0" marL="0">
@@ -12076,13 +12517,13 @@
             <a:r>
               <a:rPr lang="ru-RU" altLang="en-US" sz="1200" b="1" dirty="0">
                 <a:solidFill>
-                  <a:schemeClr val="accent1"/>
-                </a:solidFill>
-                <a:latin typeface="+mn-lt" pitchFamily="34" charset="0"/>
-                <a:ea typeface="+mn-lt" pitchFamily="34" charset="-122"/>
-                <a:cs typeface="+mn-lt" pitchFamily="34" charset="-120"/>
-              </a:rPr>
-              <a:t>гипотеза</a:t>
+                  <a:schemeClr val="accent5"/>
+                </a:solidFill>
+                <a:latin typeface="+mn-lt" pitchFamily="34" charset="0"/>
+                <a:ea typeface="+mn-lt" pitchFamily="34" charset="-122"/>
+                <a:cs typeface="+mn-lt" pitchFamily="34" charset="-120"/>
+              </a:rPr>
+              <a:t>ресурсы</a:t>
             </a:r>
             <a:endParaRPr lang="en-US" sz="1200" dirty="0"/>
           </a:p>
@@ -12090,14 +12531,14 @@
       </p:sp>
       <p:sp>
         <p:nvSpPr>
-          <p:cNvPr id="46" name="Shape 44"/>
+          <p:cNvPr id="47" name="Shape 45"/>
           <p:cNvSpPr/>
           <p:nvPr/>
         </p:nvSpPr>
         <p:spPr>
           <a:xfrm>
-            <a:off x="812800" y="4491633"/>
-            <a:ext cx="1778000" cy="0"/>
+            <a:off x="2209800" y="4348163"/>
+            <a:ext cx="2292350" cy="0"/>
           </a:xfrm>
           <a:prstGeom prst="line">
             <a:avLst/>
@@ -12113,38 +12554,59 @@
       </p:sp>
       <p:sp>
         <p:nvSpPr>
-          <p:cNvPr id="47" name="Text 45"/>
-          <p:cNvSpPr txBox="1"/>
-          <p:nvPr/>
-        </p:nvSpPr>
-        <p:spPr>
-          <a:xfrm>
-            <a:off x="812800" y="4551958"/>
-            <a:ext cx="1701800" cy="234950"/>
-          </a:xfrm>
-          <a:prstGeom prst="rect">
-            <a:avLst/>
-          </a:prstGeom>
-          <a:noFill/>
-          <a:ln/>
-        </p:spPr>
-        <p:txBody>
-          <a:bodyPr wrap="square" lIns="0" tIns="0" rIns="0" bIns="0" rtlCol="0" anchor="ctr"/>
-          <a:lstStyle/>
-          <a:p>
-            <a:pPr algn="l" indent="0" marL="0">
-              <a:buNone/>
-            </a:pPr>
-            <a:r>
-              <a:rPr lang="ru-RU" altLang="en-US" sz="1200" b="1" dirty="0">
-                <a:solidFill>
-                  <a:schemeClr val="accent5"/>
-                </a:solidFill>
-                <a:latin typeface="+mn-lt" pitchFamily="34" charset="0"/>
-                <a:ea typeface="+mn-lt" pitchFamily="34" charset="-122"/>
-                <a:cs typeface="+mn-lt" pitchFamily="34" charset="-120"/>
-              </a:rPr>
-              <a:t>Подключение</a:t>
+          <p:cNvPr id="48" name="Text 46"/>
+          <p:cNvSpPr txBox="1"/>
+          <p:nvPr/>
+        </p:nvSpPr>
+        <p:spPr>
+          <a:xfrm>
+            <a:off x="2324100" y="4427538"/>
+            <a:ext cx="2125663" cy="407591"/>
+          </a:xfrm>
+          <a:prstGeom prst="rect">
+            <a:avLst/>
+          </a:prstGeom>
+          <a:noFill/>
+          <a:ln/>
+        </p:spPr>
+        <p:txBody>
+          <a:bodyPr wrap="square" lIns="0" tIns="0" rIns="0" bIns="0" rtlCol="0" anchor="t"/>
+          <a:lstStyle/>
+          <a:p>
+            <a:pPr algn="l" indent="0" marL="0">
+              <a:lnSpc>
+                <a:spcPts val="1560"/>
+              </a:lnSpc>
+              <a:buNone/>
+            </a:pPr>
+            <a:r>
+              <a:rPr lang="ru-RU" altLang="en-US" sz="1200" dirty="0">
+                <a:solidFill>
+                  <a:schemeClr val="bg1"/>
+                </a:solidFill>
+                <a:latin typeface="+mn-lt" pitchFamily="34" charset="0"/>
+                <a:ea typeface="+mn-lt" pitchFamily="34" charset="-122"/>
+                <a:cs typeface="+mn-lt" pitchFamily="34" charset="-120"/>
+              </a:rPr>
+              <a:t>Готовые серверы: vCPU, </a:t>
+            </a:r>
+            <a:br/>
+            <a:pPr algn="l" indent="0" marL="0">
+              <a:lnSpc>
+                <a:spcPts val="1560"/>
+              </a:lnSpc>
+              <a:buNone/>
+            </a:pPr>
+            <a:r>
+              <a:rPr lang="ru-RU" altLang="en-US" sz="1200" dirty="0">
+                <a:solidFill>
+                  <a:schemeClr val="bg1"/>
+                </a:solidFill>
+                <a:latin typeface="+mn-lt" pitchFamily="34" charset="0"/>
+                <a:ea typeface="+mn-lt" pitchFamily="34" charset="-122"/>
+                <a:cs typeface="+mn-lt" pitchFamily="34" charset="-120"/>
+              </a:rPr>
+              <a:t>RAM, диск, поддержка</a:t>
             </a:r>
             <a:endParaRPr lang="en-US" sz="1200" dirty="0"/>
           </a:p>
@@ -12152,14 +12614,14 @@
       </p:sp>
       <p:sp>
         <p:nvSpPr>
-          <p:cNvPr id="48" name="Shape 46"/>
+          <p:cNvPr id="49" name="Shape 47"/>
           <p:cNvSpPr/>
           <p:nvPr/>
         </p:nvSpPr>
         <p:spPr>
           <a:xfrm>
-            <a:off x="2590800" y="4491633"/>
-            <a:ext cx="2929434" cy="0"/>
+            <a:off x="4502150" y="4348163"/>
+            <a:ext cx="2292350" cy="0"/>
           </a:xfrm>
           <a:prstGeom prst="line">
             <a:avLst/>
@@ -12175,26 +12637,29 @@
       </p:sp>
       <p:sp>
         <p:nvSpPr>
-          <p:cNvPr id="49" name="Text 47"/>
-          <p:cNvSpPr txBox="1"/>
-          <p:nvPr/>
-        </p:nvSpPr>
-        <p:spPr>
-          <a:xfrm>
-            <a:off x="2717800" y="4551958"/>
-            <a:ext cx="2755697" cy="234950"/>
-          </a:xfrm>
-          <a:prstGeom prst="rect">
-            <a:avLst/>
-          </a:prstGeom>
-          <a:noFill/>
-          <a:ln/>
-        </p:spPr>
-        <p:txBody>
-          <a:bodyPr wrap="square" lIns="0" tIns="0" rIns="0" bIns="0" rtlCol="0" anchor="ctr"/>
-          <a:lstStyle/>
-          <a:p>
-            <a:pPr algn="l" indent="0" marL="0">
+          <p:cNvPr id="50" name="Text 48"/>
+          <p:cNvSpPr txBox="1"/>
+          <p:nvPr/>
+        </p:nvSpPr>
+        <p:spPr>
+          <a:xfrm>
+            <a:off x="4616450" y="4427538"/>
+            <a:ext cx="2125663" cy="407591"/>
+          </a:xfrm>
+          <a:prstGeom prst="rect">
+            <a:avLst/>
+          </a:prstGeom>
+          <a:noFill/>
+          <a:ln/>
+        </p:spPr>
+        <p:txBody>
+          <a:bodyPr wrap="square" lIns="0" tIns="0" rIns="0" bIns="0" rtlCol="0" anchor="t"/>
+          <a:lstStyle/>
+          <a:p>
+            <a:pPr algn="l" indent="0" marL="0">
+              <a:lnSpc>
+                <a:spcPts val="1560"/>
+              </a:lnSpc>
               <a:buNone/>
             </a:pPr>
             <a:r>
@@ -12206,7 +12671,25 @@
                 <a:ea typeface="+mn-lt" pitchFamily="34" charset="-122"/>
                 <a:cs typeface="+mn-lt" pitchFamily="34" charset="-120"/>
               </a:rPr>
-              <a:t>Готовые серверы и поддержка</a:t>
+              <a:t>Карты частных владельцев, </a:t>
+            </a:r>
+            <a:br/>
+            <a:pPr algn="l" indent="0" marL="0">
+              <a:lnSpc>
+                <a:spcPts val="1560"/>
+              </a:lnSpc>
+              <a:buNone/>
+            </a:pPr>
+            <a:r>
+              <a:rPr lang="ru-RU" altLang="en-US" sz="1200" dirty="0">
+                <a:solidFill>
+                  <a:schemeClr val="bg1"/>
+                </a:solidFill>
+                <a:latin typeface="+mn-lt" pitchFamily="34" charset="0"/>
+                <a:ea typeface="+mn-lt" pitchFamily="34" charset="-122"/>
+                <a:cs typeface="+mn-lt" pitchFamily="34" charset="-120"/>
+              </a:rPr>
+              <a:t>можно сдать свою</a:t>
             </a:r>
             <a:endParaRPr lang="en-US" sz="1200" dirty="0"/>
           </a:p>
@@ -12214,14 +12697,14 @@
       </p:sp>
       <p:sp>
         <p:nvSpPr>
-          <p:cNvPr id="50" name="Shape 48"/>
+          <p:cNvPr id="51" name="Shape 49"/>
           <p:cNvSpPr/>
           <p:nvPr/>
         </p:nvSpPr>
         <p:spPr>
           <a:xfrm>
-            <a:off x="5520234" y="4491633"/>
-            <a:ext cx="2929434" cy="0"/>
+            <a:off x="6794500" y="4348163"/>
+            <a:ext cx="2292350" cy="0"/>
           </a:xfrm>
           <a:prstGeom prst="line">
             <a:avLst/>
@@ -12237,14 +12720,14 @@
       </p:sp>
       <p:sp>
         <p:nvSpPr>
-          <p:cNvPr id="51" name="Text 49"/>
-          <p:cNvSpPr txBox="1"/>
-          <p:nvPr/>
-        </p:nvSpPr>
-        <p:spPr>
-          <a:xfrm>
-            <a:off x="5647234" y="4571008"/>
-            <a:ext cx="2755697" cy="407591"/>
+          <p:cNvPr id="52" name="Text 50"/>
+          <p:cNvSpPr txBox="1"/>
+          <p:nvPr/>
+        </p:nvSpPr>
+        <p:spPr>
+          <a:xfrm>
+            <a:off x="6908800" y="4427538"/>
+            <a:ext cx="2125663" cy="407591"/>
           </a:xfrm>
           <a:prstGeom prst="rect">
             <a:avLst/>
@@ -12271,7 +12754,7 @@
                 <a:ea typeface="+mn-lt" pitchFamily="34" charset="-122"/>
                 <a:cs typeface="+mn-lt" pitchFamily="34" charset="-120"/>
               </a:rPr>
-              <a:t>Самообслуживание, нужна </a:t>
+              <a:t>Самообслуживание: </a:t>
             </a:r>
             <a:br/>
             <a:pPr algn="l" indent="0" marL="0">
@@ -12289,7 +12772,7 @@
                 <a:ea typeface="+mn-lt" pitchFamily="34" charset="-122"/>
                 <a:cs typeface="+mn-lt" pitchFamily="34" charset="-120"/>
               </a:rPr>
-              <a:t>настройка</a:t>
+              <a:t>инстансы и контейнеры</a:t>
             </a:r>
             <a:endParaRPr lang="en-US" sz="1200" dirty="0"/>
           </a:p>
@@ -12297,14 +12780,14 @@
       </p:sp>
       <p:sp>
         <p:nvSpPr>
-          <p:cNvPr id="52" name="Shape 50"/>
+          <p:cNvPr id="53" name="Shape 51"/>
           <p:cNvSpPr/>
           <p:nvPr/>
         </p:nvSpPr>
         <p:spPr>
           <a:xfrm rot="10800000">
-            <a:off x="8449667" y="4488458"/>
-            <a:ext cx="2929434" cy="554831"/>
+            <a:off x="9086850" y="4344988"/>
+            <a:ext cx="2292350" cy="554831"/>
           </a:xfrm>
           <a:prstGeom prst="round2SameRect">
             <a:avLst/>
@@ -12317,14 +12800,14 @@
       </p:sp>
       <p:sp>
         <p:nvSpPr>
-          <p:cNvPr id="53" name="Shape 51"/>
+          <p:cNvPr id="54" name="Shape 52"/>
           <p:cNvSpPr/>
           <p:nvPr/>
         </p:nvSpPr>
         <p:spPr>
           <a:xfrm>
-            <a:off x="8449667" y="4491633"/>
-            <a:ext cx="2929434" cy="0"/>
+            <a:off x="9086850" y="4348163"/>
+            <a:ext cx="2292350" cy="0"/>
           </a:xfrm>
           <a:prstGeom prst="line">
             <a:avLst/>
@@ -12340,26 +12823,29 @@
       </p:sp>
       <p:sp>
         <p:nvSpPr>
-          <p:cNvPr id="54" name="Text 52"/>
-          <p:cNvSpPr txBox="1"/>
-          <p:nvPr/>
-        </p:nvSpPr>
-        <p:spPr>
-          <a:xfrm>
-            <a:off x="8576667" y="4551958"/>
-            <a:ext cx="2755697" cy="234950"/>
-          </a:xfrm>
-          <a:prstGeom prst="rect">
-            <a:avLst/>
-          </a:prstGeom>
-          <a:noFill/>
-          <a:ln/>
-        </p:spPr>
-        <p:txBody>
-          <a:bodyPr wrap="square" lIns="0" tIns="0" rIns="0" bIns="0" rtlCol="0" anchor="ctr"/>
-          <a:lstStyle/>
-          <a:p>
-            <a:pPr algn="l" indent="0" marL="0">
+          <p:cNvPr id="55" name="Text 53"/>
+          <p:cNvSpPr txBox="1"/>
+          <p:nvPr/>
+        </p:nvSpPr>
+        <p:spPr>
+          <a:xfrm>
+            <a:off x="9201150" y="4427538"/>
+            <a:ext cx="2125663" cy="407591"/>
+          </a:xfrm>
+          <a:prstGeom prst="rect">
+            <a:avLst/>
+          </a:prstGeom>
+          <a:noFill/>
+          <a:ln/>
+        </p:spPr>
+        <p:txBody>
+          <a:bodyPr wrap="square" lIns="0" tIns="0" rIns="0" bIns="0" rtlCol="0" anchor="t"/>
+          <a:lstStyle/>
+          <a:p>
+            <a:pPr algn="l" indent="0" marL="0">
+              <a:lnSpc>
+                <a:spcPts val="1560"/>
+              </a:lnSpc>
               <a:buNone/>
             </a:pPr>
             <a:r>
@@ -12371,7 +12857,25 @@
                 <a:ea typeface="+mn-lt" pitchFamily="34" charset="-122"/>
                 <a:cs typeface="+mn-lt" pitchFamily="34" charset="-120"/>
               </a:rPr>
-              <a:t>Предстоит создать</a:t>
+              <a:t>Несрочные задачи </a:t>
+            </a:r>
+            <a:br/>
+            <a:pPr algn="l" indent="0" marL="0">
+              <a:lnSpc>
+                <a:spcPts val="1560"/>
+              </a:lnSpc>
+              <a:buNone/>
+            </a:pPr>
+            <a:r>
+              <a:rPr lang="ru-RU" altLang="en-US" sz="1200" b="1" dirty="0">
+                <a:solidFill>
+                  <a:schemeClr val="accent1"/>
+                </a:solidFill>
+                <a:latin typeface="+mn-lt" pitchFamily="34" charset="0"/>
+                <a:ea typeface="+mn-lt" pitchFamily="34" charset="-122"/>
+                <a:cs typeface="+mn-lt" pitchFamily="34" charset="-120"/>
+              </a:rPr>
+              <a:t>небольших команд</a:t>
             </a:r>
             <a:endParaRPr lang="en-US" sz="1200" dirty="0"/>
           </a:p>
@@ -12379,13 +12883,13 @@
       </p:sp>
       <p:sp>
         <p:nvSpPr>
-          <p:cNvPr id="55" name="Text 53"/>
-          <p:cNvSpPr txBox="1"/>
-          <p:nvPr/>
-        </p:nvSpPr>
-        <p:spPr>
-          <a:xfrm>
-            <a:off x="812800" y="5397500"/>
+          <p:cNvPr id="56" name="Text 54"/>
+          <p:cNvSpPr txBox="1"/>
+          <p:nvPr/>
+        </p:nvSpPr>
+        <p:spPr>
+          <a:xfrm>
+            <a:off x="812800" y="5148659"/>
             <a:ext cx="10718800" cy="444500"/>
           </a:xfrm>
           <a:prstGeom prst="rect">
@@ -12413,7 +12917,7 @@
                 <a:ea typeface="+mj-lt" pitchFamily="34" charset="-122"/>
                 <a:cs typeface="+mj-lt" pitchFamily="34" charset="-120"/>
               </a:rPr>
-              <a:t>Улей проверяет, можно ли предоставлять недорогие GPU-мощности для несрочных задач </a:t>
+              <a:t>Улей проверяет, можно ли создать конкурентоспособный российский сервис </a:t>
             </a:r>
             <a:br/>
             <a:pPr algn="l" indent="0" marL="0">
@@ -12431,7 +12935,24 @@
                 <a:ea typeface="+mj-lt" pitchFamily="34" charset="-122"/>
                 <a:cs typeface="+mj-lt" pitchFamily="34" charset="-120"/>
               </a:rPr>
-              <a:t>за счёт уже существующего оборудования.</a:t>
+              <a:t>GPU-вычислений</a:t>
+            </a:r>
+            <a:pPr algn="l" indent="0" marL="0">
+              <a:lnSpc>
+                <a:spcPts val="1750"/>
+              </a:lnSpc>
+              <a:buNone/>
+            </a:pPr>
+            <a:r>
+              <a:rPr lang="ru-RU" altLang="en-US" sz="1400" dirty="0">
+                <a:solidFill>
+                  <a:schemeClr val="accent1"/>
+                </a:solidFill>
+                <a:latin typeface="+mj-lt" pitchFamily="34" charset="0"/>
+                <a:ea typeface="+mj-lt" pitchFamily="34" charset="-122"/>
+                <a:cs typeface="+mj-lt" pitchFamily="34" charset="-120"/>
+              </a:rPr>
+              <a:t> на базе простаивающего оборудования.</a:t>
             </a:r>
             <a:endParaRPr lang="en-US" sz="1400" dirty="0"/>
           </a:p>
@@ -12439,7 +12960,46 @@
       </p:sp>
       <p:sp>
         <p:nvSpPr>
-          <p:cNvPr id="56" name="Text 54"/>
+          <p:cNvPr id="57" name="Text 55"/>
+          <p:cNvSpPr txBox="1"/>
+          <p:nvPr/>
+        </p:nvSpPr>
+        <p:spPr>
+          <a:xfrm>
+            <a:off x="812800" y="5624909"/>
+            <a:ext cx="10718800" cy="234950"/>
+          </a:xfrm>
+          <a:prstGeom prst="rect">
+            <a:avLst/>
+          </a:prstGeom>
+          <a:noFill/>
+          <a:ln/>
+        </p:spPr>
+        <p:txBody>
+          <a:bodyPr wrap="square" lIns="0" tIns="0" rIns="0" bIns="0" rtlCol="0" anchor="ctr"/>
+          <a:lstStyle/>
+          <a:p>
+            <a:pPr algn="l" indent="0" marL="0">
+              <a:buNone/>
+            </a:pPr>
+            <a:r>
+              <a:rPr lang="ru-RU" altLang="en-US" sz="1200" dirty="0">
+                <a:solidFill>
+                  <a:schemeClr val="bg1"/>
+                </a:solidFill>
+                <a:latin typeface="+mn-lt" pitchFamily="34" charset="0"/>
+                <a:ea typeface="+mn-lt" pitchFamily="34" charset="-122"/>
+                <a:cs typeface="+mn-lt" pitchFamily="34" charset="-120"/>
+              </a:rPr>
+              <a:t>Приоритет — доступные мощности для небольших команд и несрочных задач.</a:t>
+            </a:r>
+            <a:endParaRPr lang="en-US" sz="1200" dirty="0"/>
+          </a:p>
+        </p:txBody>
+      </p:sp>
+      <p:sp>
+        <p:nvSpPr>
+          <p:cNvPr id="58" name="Text 56"/>
           <p:cNvSpPr txBox="1"/>
           <p:nvPr/>
         </p:nvSpPr>
@@ -12470,7 +13030,7 @@
                 <a:ea typeface="+mn-lt" pitchFamily="34" charset="-122"/>
                 <a:cs typeface="+mn-lt" pitchFamily="34" charset="-120"/>
               </a:rPr>
-              <a:t>RTX 3090, 24 ГБ, почасовая аренда, 2026: immers.cloud, tproger, intelion.cloud, computeprices.com, Yandex Cloud</a:t>
+              <a:t>RTX 3090, 24 ГБ, почасово, октябрь 2026: immers.cloud, teraferma.io, runpod.io, salad.com, vast.ai. CPU, RAM и диск различаются</a:t>
             </a:r>
             <a:endParaRPr lang="en-US" sz="1200" dirty="0"/>
           </a:p>
@@ -12547,7 +13107,7 @@
         </p:nvSpPr>
         <p:spPr>
           <a:xfrm>
-            <a:off x="812800" y="1554758"/>
+            <a:off x="812800" y="1370112"/>
             <a:ext cx="10718800" cy="304800"/>
           </a:xfrm>
           <a:prstGeom prst="rect">
@@ -12572,7 +13132,7 @@
                 <a:ea typeface="+mn-lt" pitchFamily="34" charset="-122"/>
                 <a:cs typeface="+mn-lt" pitchFamily="34" charset="-120"/>
               </a:rPr>
-              <a:t>Один оплаченный час видеокарты — 40 ₽</a:t>
+              <a:t>Базовый сценарий: один оплаченный час видеокарты — 40 ₽</a:t>
             </a:r>
             <a:endParaRPr lang="en-US" sz="1600" dirty="0"/>
           </a:p>
@@ -12586,12 +13146,12 @@
         </p:nvSpPr>
         <p:spPr>
           <a:xfrm>
-            <a:off x="812800" y="1933178"/>
-            <a:ext cx="5384800" cy="457200"/>
+            <a:off x="812800" y="1748532"/>
+            <a:ext cx="5384800" cy="406400"/>
           </a:xfrm>
           <a:prstGeom prst="roundRect">
             <a:avLst>
-              <a:gd name="adj" fmla="val 22222"/>
+              <a:gd name="adj" fmla="val 25000"/>
             </a:avLst>
           </a:prstGeom>
           <a:solidFill>
@@ -12608,7 +13168,7 @@
         </p:nvSpPr>
         <p:spPr>
           <a:xfrm>
-            <a:off x="965200" y="2031008"/>
+            <a:off x="965200" y="1820962"/>
             <a:ext cx="1319609" cy="254000"/>
           </a:xfrm>
           <a:prstGeom prst="rect">
@@ -12647,12 +13207,12 @@
         </p:nvSpPr>
         <p:spPr>
           <a:xfrm>
-            <a:off x="7156450" y="1933178"/>
-            <a:ext cx="4222750" cy="457200"/>
+            <a:off x="7156450" y="1748532"/>
+            <a:ext cx="4222750" cy="406400"/>
           </a:xfrm>
           <a:prstGeom prst="roundRect">
             <a:avLst>
-              <a:gd name="adj" fmla="val 22222"/>
+              <a:gd name="adj" fmla="val 25000"/>
             </a:avLst>
           </a:prstGeom>
           <a:solidFill>
@@ -12669,7 +13229,7 @@
         </p:nvSpPr>
         <p:spPr>
           <a:xfrm>
-            <a:off x="7410450" y="2031008"/>
+            <a:off x="7410450" y="1820962"/>
             <a:ext cx="3632839" cy="254000"/>
           </a:xfrm>
           <a:prstGeom prst="rect">
@@ -12708,8 +13268,8 @@
         </p:nvSpPr>
         <p:spPr>
           <a:xfrm>
-            <a:off x="6096000" y="1933178"/>
-            <a:ext cx="1162050" cy="457200"/>
+            <a:off x="6096000" y="1748532"/>
+            <a:ext cx="1162050" cy="406400"/>
           </a:xfrm>
           <a:prstGeom prst="rect">
             <a:avLst/>
@@ -12728,7 +13288,7 @@
         </p:nvSpPr>
         <p:spPr>
           <a:xfrm>
-            <a:off x="6197600" y="2031008"/>
+            <a:off x="6197600" y="1820962"/>
             <a:ext cx="444698" cy="254000"/>
           </a:xfrm>
           <a:prstGeom prst="rect">
@@ -12767,23 +13327,20 @@
         </p:nvSpPr>
         <p:spPr>
           <a:xfrm>
-            <a:off x="812800" y="2479278"/>
-            <a:ext cx="10718800" cy="426641"/>
-          </a:xfrm>
-          <a:prstGeom prst="rect">
-            <a:avLst/>
-          </a:prstGeom>
-          <a:noFill/>
-          <a:ln/>
-        </p:spPr>
-        <p:txBody>
-          <a:bodyPr wrap="square" lIns="0" tIns="0" rIns="0" bIns="0" rtlCol="0" anchor="t"/>
-          <a:lstStyle/>
-          <a:p>
-            <a:pPr algn="l" indent="0" marL="0">
-              <a:lnSpc>
-                <a:spcPts val="1680"/>
-              </a:lnSpc>
+            <a:off x="812800" y="2229227"/>
+            <a:ext cx="10718800" cy="238760"/>
+          </a:xfrm>
+          <a:prstGeom prst="rect">
+            <a:avLst/>
+          </a:prstGeom>
+          <a:noFill/>
+          <a:ln/>
+        </p:spPr>
+        <p:txBody>
+          <a:bodyPr wrap="square" lIns="0" tIns="0" rIns="0" bIns="0" rtlCol="0" anchor="ctr"/>
+          <a:lstStyle/>
+          <a:p>
+            <a:pPr algn="l" indent="0" marL="0">
               <a:buNone/>
             </a:pPr>
             <a:r>
@@ -12795,25 +13352,7 @@
                 <a:ea typeface="+mn-lt" pitchFamily="34" charset="-122"/>
                 <a:cs typeface="+mn-lt" pitchFamily="34" charset="-120"/>
               </a:rPr>
-              <a:t>4,4 ₽ — предварительная оценка переменных расходов: налог 6% (2,4 ₽), эквайринг и поддержка (≈2 ₽). Электричество оплачивает владелец: </a:t>
-            </a:r>
-            <a:br/>
-            <a:pPr algn="l" indent="0" marL="0">
-              <a:lnSpc>
-                <a:spcPts val="1680"/>
-              </a:lnSpc>
-              <a:buNone/>
-            </a:pPr>
-            <a:r>
-              <a:rPr lang="ru-RU" altLang="en-US" sz="1200" dirty="0">
-                <a:solidFill>
-                  <a:srgbClr val="7A6E5F"/>
-                </a:solidFill>
-                <a:latin typeface="+mn-lt" pitchFamily="34" charset="0"/>
-                <a:ea typeface="+mn-lt" pitchFamily="34" charset="-122"/>
-                <a:cs typeface="+mn-lt" pitchFamily="34" charset="-120"/>
-              </a:rPr>
-              <a:t>≈2–3 ₽ в час, зависит от потребления системы и тарифа.</a:t>
+              <a:t>4,4 ₽ — налог 6% (2,4 ₽) и прочие переменные расходы (≈2 ₽). Электричество, CPU, RAM, накопитель и сеть обеспечивает владелец.</a:t>
             </a:r>
             <a:endParaRPr lang="en-US" sz="1200" dirty="0"/>
           </a:p>
@@ -12827,307 +13366,12 @@
         </p:nvSpPr>
         <p:spPr>
           <a:xfrm>
-            <a:off x="812800" y="3282156"/>
-            <a:ext cx="5200650" cy="1959967"/>
+            <a:off x="815975" y="2651919"/>
+            <a:ext cx="7359650" cy="2771775"/>
           </a:xfrm>
           <a:prstGeom prst="roundRect">
             <a:avLst>
-              <a:gd name="adj" fmla="val 7776"/>
-            </a:avLst>
-          </a:prstGeom>
-          <a:solidFill>
-            <a:schemeClr val="tx1"/>
-          </a:solidFill>
-          <a:ln/>
-        </p:spPr>
-      </p:sp>
-      <p:sp>
-        <p:nvSpPr>
-          <p:cNvPr id="12" name="Text 10"/>
-          <p:cNvSpPr txBox="1"/>
-          <p:nvPr/>
-        </p:nvSpPr>
-        <p:spPr>
-          <a:xfrm>
-            <a:off x="1041400" y="3466306"/>
-            <a:ext cx="4885754" cy="266700"/>
-          </a:xfrm>
-          <a:prstGeom prst="rect">
-            <a:avLst/>
-          </a:prstGeom>
-          <a:noFill/>
-          <a:ln/>
-        </p:spPr>
-        <p:txBody>
-          <a:bodyPr wrap="square" lIns="0" tIns="0" rIns="0" bIns="0" rtlCol="0" anchor="ctr"/>
-          <a:lstStyle/>
-          <a:p>
-            <a:pPr algn="l" indent="0" marL="0">
-              <a:buNone/>
-            </a:pPr>
-            <a:r>
-              <a:rPr lang="ru-RU" altLang="en-US" sz="1400" b="1" dirty="0">
-                <a:solidFill>
-                  <a:schemeClr val="bg1"/>
-                </a:solidFill>
-                <a:latin typeface="+mn-lt" pitchFamily="34" charset="0"/>
-                <a:ea typeface="+mn-lt" pitchFamily="34" charset="-122"/>
-                <a:cs typeface="+mn-lt" pitchFamily="34" charset="-120"/>
-              </a:rPr>
-              <a:t>Базовый сценарий: круглосуточная ферма</a:t>
-            </a:r>
-            <a:endParaRPr lang="en-US" sz="1400" dirty="0"/>
-          </a:p>
-        </p:txBody>
-      </p:sp>
-      <p:sp>
-        <p:nvSpPr>
-          <p:cNvPr id="13" name="Text 11"/>
-          <p:cNvSpPr txBox="1"/>
-          <p:nvPr/>
-        </p:nvSpPr>
-        <p:spPr>
-          <a:xfrm>
-            <a:off x="1041400" y="3760887"/>
-            <a:ext cx="4885754" cy="234950"/>
-          </a:xfrm>
-          <a:prstGeom prst="rect">
-            <a:avLst/>
-          </a:prstGeom>
-          <a:noFill/>
-          <a:ln/>
-        </p:spPr>
-        <p:txBody>
-          <a:bodyPr wrap="square" lIns="0" tIns="0" rIns="0" bIns="0" rtlCol="0" anchor="ctr"/>
-          <a:lstStyle/>
-          <a:p>
-            <a:pPr algn="l" indent="0" marL="0">
-              <a:buNone/>
-            </a:pPr>
-            <a:r>
-              <a:rPr lang="ru-RU" altLang="en-US" sz="1200" dirty="0">
-                <a:solidFill>
-                  <a:schemeClr val="accent5"/>
-                </a:solidFill>
-                <a:latin typeface="+mn-lt" pitchFamily="34" charset="0"/>
-                <a:ea typeface="+mn-lt" pitchFamily="34" charset="-122"/>
-                <a:cs typeface="+mn-lt" pitchFamily="34" charset="-120"/>
-              </a:rPr>
-              <a:t>Доступна 24 ч в сутки, платная загрузка 50%</a:t>
-            </a:r>
-            <a:endParaRPr lang="en-US" sz="1200" dirty="0"/>
-          </a:p>
-        </p:txBody>
-      </p:sp>
-      <p:sp>
-        <p:nvSpPr>
-          <p:cNvPr id="14" name="Text 12"/>
-          <p:cNvSpPr txBox="1"/>
-          <p:nvPr/>
-        </p:nvSpPr>
-        <p:spPr>
-          <a:xfrm>
-            <a:off x="1041400" y="4061817"/>
-            <a:ext cx="1533823" cy="438150"/>
-          </a:xfrm>
-          <a:prstGeom prst="rect">
-            <a:avLst/>
-          </a:prstGeom>
-          <a:noFill/>
-          <a:ln/>
-        </p:spPr>
-        <p:txBody>
-          <a:bodyPr wrap="square" lIns="0" tIns="0" rIns="0" bIns="0" rtlCol="0" anchor="ctr"/>
-          <a:lstStyle/>
-          <a:p>
-            <a:pPr algn="l" indent="0" marL="0">
-              <a:buNone/>
-            </a:pPr>
-            <a:r>
-              <a:rPr lang="ru-RU" altLang="en-US" sz="2600" spc="-50" kern="0" dirty="0">
-                <a:solidFill>
-                  <a:schemeClr val="accent1"/>
-                </a:solidFill>
-                <a:latin typeface="+mj-lt" pitchFamily="34" charset="0"/>
-                <a:ea typeface="+mj-lt" pitchFamily="34" charset="-122"/>
-                <a:cs typeface="+mj-lt" pitchFamily="34" charset="-120"/>
-              </a:rPr>
-              <a:t>360 ч</a:t>
-            </a:r>
-            <a:endParaRPr lang="en-US" sz="2600" dirty="0"/>
-          </a:p>
-        </p:txBody>
-      </p:sp>
-      <p:sp>
-        <p:nvSpPr>
-          <p:cNvPr id="15" name="Text 13"/>
-          <p:cNvSpPr txBox="1"/>
-          <p:nvPr/>
-        </p:nvSpPr>
-        <p:spPr>
-          <a:xfrm>
-            <a:off x="1041400" y="4473853"/>
-            <a:ext cx="1533823" cy="238760"/>
-          </a:xfrm>
-          <a:prstGeom prst="rect">
-            <a:avLst/>
-          </a:prstGeom>
-          <a:noFill/>
-          <a:ln/>
-        </p:spPr>
-        <p:txBody>
-          <a:bodyPr wrap="square" lIns="0" tIns="0" rIns="0" bIns="0" rtlCol="0" anchor="ctr"/>
-          <a:lstStyle/>
-          <a:p>
-            <a:pPr algn="l" indent="0" marL="0">
-              <a:buNone/>
-            </a:pPr>
-            <a:r>
-              <a:rPr lang="ru-RU" altLang="en-US" sz="1200" dirty="0">
-                <a:solidFill>
-                  <a:schemeClr val="accent5"/>
-                </a:solidFill>
-                <a:latin typeface="+mn-lt" pitchFamily="34" charset="0"/>
-                <a:ea typeface="+mn-lt" pitchFamily="34" charset="-122"/>
-                <a:cs typeface="+mn-lt" pitchFamily="34" charset="-120"/>
-              </a:rPr>
-              <a:t>оплаченных в месяц</a:t>
-            </a:r>
-            <a:endParaRPr lang="en-US" sz="1200" dirty="0"/>
-          </a:p>
-        </p:txBody>
-      </p:sp>
-      <p:sp>
-        <p:nvSpPr>
-          <p:cNvPr id="16" name="Text 14"/>
-          <p:cNvSpPr txBox="1"/>
-          <p:nvPr/>
-        </p:nvSpPr>
-        <p:spPr>
-          <a:xfrm>
-            <a:off x="2778423" y="4061817"/>
-            <a:ext cx="2199039" cy="438150"/>
-          </a:xfrm>
-          <a:prstGeom prst="rect">
-            <a:avLst/>
-          </a:prstGeom>
-          <a:noFill/>
-          <a:ln/>
-        </p:spPr>
-        <p:txBody>
-          <a:bodyPr wrap="square" lIns="0" tIns="0" rIns="0" bIns="0" rtlCol="0" anchor="ctr"/>
-          <a:lstStyle/>
-          <a:p>
-            <a:pPr algn="l" indent="0" marL="0">
-              <a:buNone/>
-            </a:pPr>
-            <a:r>
-              <a:rPr lang="ru-RU" altLang="en-US" sz="2600" spc="-50" kern="0" dirty="0">
-                <a:solidFill>
-                  <a:schemeClr val="bg1"/>
-                </a:solidFill>
-                <a:latin typeface="+mj-lt" pitchFamily="34" charset="0"/>
-                <a:ea typeface="+mj-lt" pitchFamily="34" charset="-122"/>
-                <a:cs typeface="+mj-lt" pitchFamily="34" charset="-120"/>
-              </a:rPr>
-              <a:t>5 616 ₽</a:t>
-            </a:r>
-            <a:endParaRPr lang="en-US" sz="2600" dirty="0"/>
-          </a:p>
-        </p:txBody>
-      </p:sp>
-      <p:sp>
-        <p:nvSpPr>
-          <p:cNvPr id="17" name="Text 15"/>
-          <p:cNvSpPr txBox="1"/>
-          <p:nvPr/>
-        </p:nvSpPr>
-        <p:spPr>
-          <a:xfrm>
-            <a:off x="2778423" y="4473853"/>
-            <a:ext cx="2199039" cy="238760"/>
-          </a:xfrm>
-          <a:prstGeom prst="rect">
-            <a:avLst/>
-          </a:prstGeom>
-          <a:noFill/>
-          <a:ln/>
-        </p:spPr>
-        <p:txBody>
-          <a:bodyPr wrap="square" lIns="0" tIns="0" rIns="0" bIns="0" rtlCol="0" anchor="ctr"/>
-          <a:lstStyle/>
-          <a:p>
-            <a:pPr algn="l" indent="0" marL="0">
-              <a:buNone/>
-            </a:pPr>
-            <a:r>
-              <a:rPr lang="ru-RU" altLang="en-US" sz="1200" dirty="0">
-                <a:solidFill>
-                  <a:schemeClr val="accent5"/>
-                </a:solidFill>
-                <a:latin typeface="+mn-lt" pitchFamily="34" charset="0"/>
-                <a:ea typeface="+mn-lt" pitchFamily="34" charset="-122"/>
-                <a:cs typeface="+mn-lt" pitchFamily="34" charset="-120"/>
-              </a:rPr>
-              <a:t>маржинальный доход с карты</a:t>
-            </a:r>
-            <a:endParaRPr lang="en-US" sz="1200" dirty="0"/>
-          </a:p>
-        </p:txBody>
-      </p:sp>
-      <p:sp>
-        <p:nvSpPr>
-          <p:cNvPr id="18" name="Text 16"/>
-          <p:cNvSpPr txBox="1"/>
-          <p:nvPr/>
-        </p:nvSpPr>
-        <p:spPr>
-          <a:xfrm>
-            <a:off x="1041400" y="4784328"/>
-            <a:ext cx="4885754" cy="254000"/>
-          </a:xfrm>
-          <a:prstGeom prst="rect">
-            <a:avLst/>
-          </a:prstGeom>
-          <a:noFill/>
-          <a:ln/>
-        </p:spPr>
-        <p:txBody>
-          <a:bodyPr wrap="square" lIns="0" tIns="0" rIns="0" bIns="0" rtlCol="0" anchor="ctr"/>
-          <a:lstStyle/>
-          <a:p>
-            <a:pPr algn="l" indent="0" marL="0">
-              <a:buNone/>
-            </a:pPr>
-            <a:r>
-              <a:rPr lang="ru-RU" altLang="en-US" sz="1300" b="1" dirty="0">
-                <a:solidFill>
-                  <a:schemeClr val="bg1"/>
-                </a:solidFill>
-                <a:latin typeface="+mn-lt" pitchFamily="34" charset="0"/>
-                <a:ea typeface="+mn-lt" pitchFamily="34" charset="-122"/>
-                <a:cs typeface="+mn-lt" pitchFamily="34" charset="-120"/>
-              </a:rPr>
-              <a:t>≈45 карт покрывают 250 тыс. ₽ расходов</a:t>
-            </a:r>
-            <a:endParaRPr lang="en-US" sz="1300" dirty="0"/>
-          </a:p>
-        </p:txBody>
-      </p:sp>
-      <p:sp>
-        <p:nvSpPr>
-          <p:cNvPr id="19" name="Shape 17"/>
-          <p:cNvSpPr/>
-          <p:nvPr/>
-        </p:nvSpPr>
-        <p:spPr>
-          <a:xfrm>
-            <a:off x="6169025" y="3285331"/>
-            <a:ext cx="5207000" cy="1953617"/>
-          </a:xfrm>
-          <a:prstGeom prst="roundRect">
-            <a:avLst>
-              <a:gd name="adj" fmla="val 7801"/>
+              <a:gd name="adj" fmla="val 5498"/>
             </a:avLst>
           </a:prstGeom>
           <a:solidFill>
@@ -13143,14 +13387,331 @@
       </p:sp>
       <p:sp>
         <p:nvSpPr>
+          <p:cNvPr id="12" name="Text 10"/>
+          <p:cNvSpPr txBox="1"/>
+          <p:nvPr/>
+        </p:nvSpPr>
+        <p:spPr>
+          <a:xfrm>
+            <a:off x="1022350" y="2788444"/>
+            <a:ext cx="7099300" cy="234950"/>
+          </a:xfrm>
+          <a:prstGeom prst="rect">
+            <a:avLst/>
+          </a:prstGeom>
+          <a:noFill/>
+          <a:ln/>
+        </p:spPr>
+        <p:txBody>
+          <a:bodyPr wrap="square" lIns="0" tIns="0" rIns="0" bIns="0" rtlCol="0" anchor="ctr"/>
+          <a:lstStyle/>
+          <a:p>
+            <a:pPr algn="l" indent="0" marL="0">
+              <a:buNone/>
+            </a:pPr>
+            <a:r>
+              <a:rPr lang="ru-RU" altLang="en-US" sz="1200" b="1" dirty="0">
+                <a:solidFill>
+                  <a:schemeClr val="tx2"/>
+                </a:solidFill>
+                <a:latin typeface="+mn-lt" pitchFamily="34" charset="0"/>
+                <a:ea typeface="+mn-lt" pitchFamily="34" charset="-122"/>
+                <a:cs typeface="+mn-lt" pitchFamily="34" charset="-120"/>
+              </a:rPr>
+              <a:t>Три сценария тарифа · карта доступна 24 ч, платная загрузка 50% = 360 ч в месяц</a:t>
+            </a:r>
+            <a:endParaRPr lang="en-US" sz="1200" dirty="0"/>
+          </a:p>
+        </p:txBody>
+      </p:sp>
+      <p:sp>
+        <p:nvSpPr>
+          <p:cNvPr id="13" name="Text 11"/>
+          <p:cNvSpPr txBox="1"/>
+          <p:nvPr/>
+        </p:nvSpPr>
+        <p:spPr>
+          <a:xfrm>
+            <a:off x="3438624" y="3138884"/>
+            <a:ext cx="1561009" cy="234950"/>
+          </a:xfrm>
+          <a:prstGeom prst="rect">
+            <a:avLst/>
+          </a:prstGeom>
+          <a:noFill/>
+          <a:ln/>
+        </p:spPr>
+        <p:txBody>
+          <a:bodyPr wrap="square" lIns="0" tIns="0" rIns="0" bIns="0" rtlCol="0" anchor="ctr"/>
+          <a:lstStyle/>
+          <a:p>
+            <a:pPr algn="l" indent="0" marL="0">
+              <a:buNone/>
+            </a:pPr>
+            <a:r>
+              <a:rPr lang="ru-RU" altLang="en-US" sz="1200" b="1" dirty="0">
+                <a:solidFill>
+                  <a:schemeClr val="accent2"/>
+                </a:solidFill>
+                <a:latin typeface="+mn-lt" pitchFamily="34" charset="0"/>
+                <a:ea typeface="+mn-lt" pitchFamily="34" charset="-122"/>
+                <a:cs typeface="+mn-lt" pitchFamily="34" charset="-120"/>
+              </a:rPr>
+              <a:t>Базовый</a:t>
+            </a:r>
+            <a:endParaRPr lang="en-US" sz="1200" dirty="0"/>
+          </a:p>
+        </p:txBody>
+      </p:sp>
+      <p:sp>
+        <p:nvSpPr>
+          <p:cNvPr id="14" name="Text 12"/>
+          <p:cNvSpPr txBox="1"/>
+          <p:nvPr/>
+        </p:nvSpPr>
+        <p:spPr>
+          <a:xfrm>
+            <a:off x="4948833" y="3138884"/>
+            <a:ext cx="1561009" cy="234950"/>
+          </a:xfrm>
+          <a:prstGeom prst="rect">
+            <a:avLst/>
+          </a:prstGeom>
+          <a:noFill/>
+          <a:ln/>
+        </p:spPr>
+        <p:txBody>
+          <a:bodyPr wrap="square" lIns="0" tIns="0" rIns="0" bIns="0" rtlCol="0" anchor="ctr"/>
+          <a:lstStyle/>
+          <a:p>
+            <a:pPr algn="l" indent="0" marL="0">
+              <a:buNone/>
+            </a:pPr>
+            <a:r>
+              <a:rPr lang="ru-RU" altLang="en-US" sz="1200" b="1" dirty="0">
+                <a:solidFill>
+                  <a:schemeClr val="tx2"/>
+                </a:solidFill>
+                <a:latin typeface="+mn-lt" pitchFamily="34" charset="0"/>
+                <a:ea typeface="+mn-lt" pitchFamily="34" charset="-122"/>
+                <a:cs typeface="+mn-lt" pitchFamily="34" charset="-120"/>
+              </a:rPr>
+              <a:t>Альтернатива</a:t>
+            </a:r>
+            <a:endParaRPr lang="en-US" sz="1200" dirty="0"/>
+          </a:p>
+        </p:txBody>
+      </p:sp>
+      <p:sp>
+        <p:nvSpPr>
+          <p:cNvPr id="15" name="Text 13"/>
+          <p:cNvSpPr txBox="1"/>
+          <p:nvPr/>
+        </p:nvSpPr>
+        <p:spPr>
+          <a:xfrm>
+            <a:off x="6459041" y="3069034"/>
+            <a:ext cx="1561009" cy="400050"/>
+          </a:xfrm>
+          <a:prstGeom prst="rect">
+            <a:avLst/>
+          </a:prstGeom>
+          <a:noFill/>
+          <a:ln/>
+        </p:spPr>
+        <p:txBody>
+          <a:bodyPr wrap="square" lIns="0" tIns="0" rIns="0" bIns="0" rtlCol="0" anchor="t"/>
+          <a:lstStyle/>
+          <a:p>
+            <a:pPr algn="l" indent="0" marL="0">
+              <a:lnSpc>
+                <a:spcPts val="1500"/>
+              </a:lnSpc>
+              <a:buNone/>
+            </a:pPr>
+            <a:r>
+              <a:rPr lang="ru-RU" altLang="en-US" sz="1200" b="1" dirty="0">
+                <a:solidFill>
+                  <a:schemeClr val="tx2"/>
+                </a:solidFill>
+                <a:latin typeface="+mn-lt" pitchFamily="34" charset="0"/>
+                <a:ea typeface="+mn-lt" pitchFamily="34" charset="-122"/>
+                <a:cs typeface="+mn-lt" pitchFamily="34" charset="-120"/>
+              </a:rPr>
+              <a:t>Ценовая </a:t>
+            </a:r>
+            <a:br/>
+            <a:pPr algn="l" indent="0" marL="0">
+              <a:lnSpc>
+                <a:spcPts val="1500"/>
+              </a:lnSpc>
+              <a:buNone/>
+            </a:pPr>
+            <a:r>
+              <a:rPr lang="ru-RU" altLang="en-US" sz="1200" b="1" dirty="0">
+                <a:solidFill>
+                  <a:schemeClr val="tx2"/>
+                </a:solidFill>
+                <a:latin typeface="+mn-lt" pitchFamily="34" charset="0"/>
+                <a:ea typeface="+mn-lt" pitchFamily="34" charset="-122"/>
+                <a:cs typeface="+mn-lt" pitchFamily="34" charset="-120"/>
+              </a:rPr>
+              <a:t>конкуренция</a:t>
+            </a:r>
+            <a:endParaRPr lang="en-US" sz="1200" dirty="0"/>
+          </a:p>
+        </p:txBody>
+      </p:sp>
+      <p:sp>
+        <p:nvSpPr>
+          <p:cNvPr id="16" name="Shape 14"/>
+          <p:cNvSpPr/>
+          <p:nvPr/>
+        </p:nvSpPr>
+        <p:spPr>
+          <a:xfrm>
+            <a:off x="1022350" y="3504009"/>
+            <a:ext cx="6946900" cy="0"/>
+          </a:xfrm>
+          <a:prstGeom prst="line">
+            <a:avLst/>
+          </a:prstGeom>
+          <a:noFill/>
+          <a:ln w="6350">
+            <a:solidFill>
+              <a:srgbClr val="E2D7C5"/>
+            </a:solidFill>
+            <a:prstDash val="solid"/>
+          </a:ln>
+        </p:spPr>
+      </p:sp>
+      <p:sp>
+        <p:nvSpPr>
+          <p:cNvPr id="17" name="Text 15"/>
+          <p:cNvSpPr txBox="1"/>
+          <p:nvPr/>
+        </p:nvSpPr>
+        <p:spPr>
+          <a:xfrm>
+            <a:off x="1022350" y="3555405"/>
+            <a:ext cx="2488762" cy="234950"/>
+          </a:xfrm>
+          <a:prstGeom prst="rect">
+            <a:avLst/>
+          </a:prstGeom>
+          <a:noFill/>
+          <a:ln/>
+        </p:spPr>
+        <p:txBody>
+          <a:bodyPr wrap="square" lIns="0" tIns="0" rIns="0" bIns="0" rtlCol="0" anchor="ctr"/>
+          <a:lstStyle/>
+          <a:p>
+            <a:pPr algn="l" indent="0" marL="0">
+              <a:buNone/>
+            </a:pPr>
+            <a:r>
+              <a:rPr lang="ru-RU" altLang="en-US" sz="1200" dirty="0">
+                <a:solidFill>
+                  <a:schemeClr val="accent6"/>
+                </a:solidFill>
+                <a:latin typeface="+mn-lt" pitchFamily="34" charset="0"/>
+                <a:ea typeface="+mn-lt" pitchFamily="34" charset="-122"/>
+                <a:cs typeface="+mn-lt" pitchFamily="34" charset="-120"/>
+              </a:rPr>
+              <a:t>Цена клиенту за час</a:t>
+            </a:r>
+            <a:endParaRPr lang="en-US" sz="1200" dirty="0"/>
+          </a:p>
+        </p:txBody>
+      </p:sp>
+      <p:sp>
+        <p:nvSpPr>
+          <p:cNvPr id="18" name="Text 16"/>
+          <p:cNvSpPr txBox="1"/>
+          <p:nvPr/>
+        </p:nvSpPr>
+        <p:spPr>
+          <a:xfrm>
+            <a:off x="3438624" y="3538934"/>
+            <a:ext cx="1561009" cy="266700"/>
+          </a:xfrm>
+          <a:prstGeom prst="rect">
+            <a:avLst/>
+          </a:prstGeom>
+          <a:noFill/>
+          <a:ln/>
+        </p:spPr>
+        <p:txBody>
+          <a:bodyPr wrap="square" lIns="0" tIns="0" rIns="0" bIns="0" rtlCol="0" anchor="ctr"/>
+          <a:lstStyle/>
+          <a:p>
+            <a:pPr algn="l" indent="0" marL="0">
+              <a:buNone/>
+            </a:pPr>
+            <a:r>
+              <a:rPr lang="ru-RU" altLang="en-US" sz="1400" b="1" dirty="0">
+                <a:solidFill>
+                  <a:schemeClr val="accent2"/>
+                </a:solidFill>
+                <a:latin typeface="+mn-lt" pitchFamily="34" charset="0"/>
+                <a:ea typeface="+mn-lt" pitchFamily="34" charset="-122"/>
+                <a:cs typeface="+mn-lt" pitchFamily="34" charset="-120"/>
+              </a:rPr>
+              <a:t>40 ₽</a:t>
+            </a:r>
+            <a:endParaRPr lang="en-US" sz="1400" dirty="0"/>
+          </a:p>
+        </p:txBody>
+      </p:sp>
+      <p:sp>
+        <p:nvSpPr>
+          <p:cNvPr id="19" name="Text 17"/>
+          <p:cNvSpPr txBox="1"/>
+          <p:nvPr/>
+        </p:nvSpPr>
+        <p:spPr>
+          <a:xfrm>
+            <a:off x="4948833" y="3538934"/>
+            <a:ext cx="1561009" cy="266700"/>
+          </a:xfrm>
+          <a:prstGeom prst="rect">
+            <a:avLst/>
+          </a:prstGeom>
+          <a:noFill/>
+          <a:ln/>
+        </p:spPr>
+        <p:txBody>
+          <a:bodyPr wrap="square" lIns="0" tIns="0" rIns="0" bIns="0" rtlCol="0" anchor="ctr"/>
+          <a:lstStyle/>
+          <a:p>
+            <a:pPr algn="l" indent="0" marL="0">
+              <a:buNone/>
+            </a:pPr>
+            <a:r>
+              <a:rPr lang="ru-RU" altLang="en-US" sz="1400" b="1" dirty="0">
+                <a:solidFill>
+                  <a:schemeClr val="tx2"/>
+                </a:solidFill>
+                <a:latin typeface="+mn-lt" pitchFamily="34" charset="0"/>
+                <a:ea typeface="+mn-lt" pitchFamily="34" charset="-122"/>
+                <a:cs typeface="+mn-lt" pitchFamily="34" charset="-120"/>
+              </a:rPr>
+              <a:t>35 ₽</a:t>
+            </a:r>
+            <a:endParaRPr lang="en-US" sz="1400" dirty="0"/>
+          </a:p>
+        </p:txBody>
+      </p:sp>
+      <p:sp>
+        <p:nvSpPr>
           <p:cNvPr id="20" name="Text 18"/>
           <p:cNvSpPr txBox="1"/>
           <p:nvPr/>
         </p:nvSpPr>
         <p:spPr>
           <a:xfrm>
-            <a:off x="6400800" y="3472656"/>
-            <a:ext cx="4885754" cy="266700"/>
+            <a:off x="6459041" y="3538934"/>
+            <a:ext cx="1561009" cy="266700"/>
           </a:xfrm>
           <a:prstGeom prst="rect">
             <a:avLst/>
@@ -13174,7 +13735,7 @@
                 <a:ea typeface="+mn-lt" pitchFamily="34" charset="-122"/>
                 <a:cs typeface="+mn-lt" pitchFamily="34" charset="-120"/>
               </a:rPr>
-              <a:t>Домашний ПК</a:t>
+              <a:t>30 ₽</a:t>
             </a:r>
             <a:endParaRPr lang="en-US" sz="1400" dirty="0"/>
           </a:p>
@@ -13182,14 +13743,37 @@
       </p:sp>
       <p:sp>
         <p:nvSpPr>
-          <p:cNvPr id="21" name="Text 19"/>
-          <p:cNvSpPr txBox="1"/>
-          <p:nvPr/>
-        </p:nvSpPr>
-        <p:spPr>
-          <a:xfrm>
-            <a:off x="6400800" y="3767237"/>
-            <a:ext cx="4885754" cy="234950"/>
+          <p:cNvPr id="21" name="Shape 19"/>
+          <p:cNvSpPr/>
+          <p:nvPr/>
+        </p:nvSpPr>
+        <p:spPr>
+          <a:xfrm>
+            <a:off x="1022350" y="3843040"/>
+            <a:ext cx="6946900" cy="0"/>
+          </a:xfrm>
+          <a:prstGeom prst="line">
+            <a:avLst/>
+          </a:prstGeom>
+          <a:noFill/>
+          <a:ln w="6350">
+            <a:solidFill>
+              <a:srgbClr val="E2D7C5"/>
+            </a:solidFill>
+            <a:prstDash val="solid"/>
+          </a:ln>
+        </p:spPr>
+      </p:sp>
+      <p:sp>
+        <p:nvSpPr>
+          <p:cNvPr id="22" name="Text 20"/>
+          <p:cNvSpPr txBox="1"/>
+          <p:nvPr/>
+        </p:nvSpPr>
+        <p:spPr>
+          <a:xfrm>
+            <a:off x="1022350" y="3894435"/>
+            <a:ext cx="2488762" cy="234950"/>
           </a:xfrm>
           <a:prstGeom prst="rect">
             <a:avLst/>
@@ -13213,7 +13797,7 @@
                 <a:ea typeface="+mn-lt" pitchFamily="34" charset="-122"/>
                 <a:cs typeface="+mn-lt" pitchFamily="34" charset="-120"/>
               </a:rPr>
-              <a:t>Доступен 8 ч в сутки, платная загрузка 50%</a:t>
+              <a:t>Выплата владельцу</a:t>
             </a:r>
             <a:endParaRPr lang="en-US" sz="1200" dirty="0"/>
           </a:p>
@@ -13221,14 +13805,14 @@
       </p:sp>
       <p:sp>
         <p:nvSpPr>
-          <p:cNvPr id="22" name="Text 20"/>
-          <p:cNvSpPr txBox="1"/>
-          <p:nvPr/>
-        </p:nvSpPr>
-        <p:spPr>
-          <a:xfrm>
-            <a:off x="6400800" y="4068167"/>
-            <a:ext cx="1533823" cy="438150"/>
+          <p:cNvPr id="23" name="Text 21"/>
+          <p:cNvSpPr txBox="1"/>
+          <p:nvPr/>
+        </p:nvSpPr>
+        <p:spPr>
+          <a:xfrm>
+            <a:off x="3438624" y="3877965"/>
+            <a:ext cx="1561009" cy="266700"/>
           </a:xfrm>
           <a:prstGeom prst="rect">
             <a:avLst/>
@@ -13244,54 +13828,725 @@
               <a:buNone/>
             </a:pPr>
             <a:r>
-              <a:rPr lang="ru-RU" altLang="en-US" sz="2600" spc="-50" kern="0" dirty="0">
+              <a:rPr lang="ru-RU" altLang="en-US" sz="1400" b="1" dirty="0">
                 <a:solidFill>
                   <a:schemeClr val="accent2"/>
+                </a:solidFill>
+                <a:latin typeface="+mn-lt" pitchFamily="34" charset="0"/>
+                <a:ea typeface="+mn-lt" pitchFamily="34" charset="-122"/>
+                <a:cs typeface="+mn-lt" pitchFamily="34" charset="-120"/>
+              </a:rPr>
+              <a:t>20 ₽</a:t>
+            </a:r>
+            <a:endParaRPr lang="en-US" sz="1400" dirty="0"/>
+          </a:p>
+        </p:txBody>
+      </p:sp>
+      <p:sp>
+        <p:nvSpPr>
+          <p:cNvPr id="24" name="Text 22"/>
+          <p:cNvSpPr txBox="1"/>
+          <p:nvPr/>
+        </p:nvSpPr>
+        <p:spPr>
+          <a:xfrm>
+            <a:off x="4948833" y="3877965"/>
+            <a:ext cx="1561009" cy="266700"/>
+          </a:xfrm>
+          <a:prstGeom prst="rect">
+            <a:avLst/>
+          </a:prstGeom>
+          <a:noFill/>
+          <a:ln/>
+        </p:spPr>
+        <p:txBody>
+          <a:bodyPr wrap="square" lIns="0" tIns="0" rIns="0" bIns="0" rtlCol="0" anchor="ctr"/>
+          <a:lstStyle/>
+          <a:p>
+            <a:pPr algn="l" indent="0" marL="0">
+              <a:buNone/>
+            </a:pPr>
+            <a:r>
+              <a:rPr lang="ru-RU" altLang="en-US" sz="1400" b="1" dirty="0">
+                <a:solidFill>
+                  <a:schemeClr val="tx2"/>
+                </a:solidFill>
+                <a:latin typeface="+mn-lt" pitchFamily="34" charset="0"/>
+                <a:ea typeface="+mn-lt" pitchFamily="34" charset="-122"/>
+                <a:cs typeface="+mn-lt" pitchFamily="34" charset="-120"/>
+              </a:rPr>
+              <a:t>16 ₽</a:t>
+            </a:r>
+            <a:endParaRPr lang="en-US" sz="1400" dirty="0"/>
+          </a:p>
+        </p:txBody>
+      </p:sp>
+      <p:sp>
+        <p:nvSpPr>
+          <p:cNvPr id="25" name="Text 23"/>
+          <p:cNvSpPr txBox="1"/>
+          <p:nvPr/>
+        </p:nvSpPr>
+        <p:spPr>
+          <a:xfrm>
+            <a:off x="6459041" y="3877965"/>
+            <a:ext cx="1561009" cy="266700"/>
+          </a:xfrm>
+          <a:prstGeom prst="rect">
+            <a:avLst/>
+          </a:prstGeom>
+          <a:noFill/>
+          <a:ln/>
+        </p:spPr>
+        <p:txBody>
+          <a:bodyPr wrap="square" lIns="0" tIns="0" rIns="0" bIns="0" rtlCol="0" anchor="ctr"/>
+          <a:lstStyle/>
+          <a:p>
+            <a:pPr algn="l" indent="0" marL="0">
+              <a:buNone/>
+            </a:pPr>
+            <a:r>
+              <a:rPr lang="ru-RU" altLang="en-US" sz="1400" b="1" dirty="0">
+                <a:solidFill>
+                  <a:schemeClr val="tx2"/>
+                </a:solidFill>
+                <a:latin typeface="+mn-lt" pitchFamily="34" charset="0"/>
+                <a:ea typeface="+mn-lt" pitchFamily="34" charset="-122"/>
+                <a:cs typeface="+mn-lt" pitchFamily="34" charset="-120"/>
+              </a:rPr>
+              <a:t>14 ₽</a:t>
+            </a:r>
+            <a:endParaRPr lang="en-US" sz="1400" dirty="0"/>
+          </a:p>
+        </p:txBody>
+      </p:sp>
+      <p:sp>
+        <p:nvSpPr>
+          <p:cNvPr id="26" name="Shape 24"/>
+          <p:cNvSpPr/>
+          <p:nvPr/>
+        </p:nvSpPr>
+        <p:spPr>
+          <a:xfrm>
+            <a:off x="1022350" y="4182070"/>
+            <a:ext cx="6946900" cy="0"/>
+          </a:xfrm>
+          <a:prstGeom prst="line">
+            <a:avLst/>
+          </a:prstGeom>
+          <a:noFill/>
+          <a:ln w="6350">
+            <a:solidFill>
+              <a:srgbClr val="E2D7C5"/>
+            </a:solidFill>
+            <a:prstDash val="solid"/>
+          </a:ln>
+        </p:spPr>
+      </p:sp>
+      <p:sp>
+        <p:nvSpPr>
+          <p:cNvPr id="27" name="Text 25"/>
+          <p:cNvSpPr txBox="1"/>
+          <p:nvPr/>
+        </p:nvSpPr>
+        <p:spPr>
+          <a:xfrm>
+            <a:off x="1022350" y="4233466"/>
+            <a:ext cx="2488762" cy="234950"/>
+          </a:xfrm>
+          <a:prstGeom prst="rect">
+            <a:avLst/>
+          </a:prstGeom>
+          <a:noFill/>
+          <a:ln/>
+        </p:spPr>
+        <p:txBody>
+          <a:bodyPr wrap="square" lIns="0" tIns="0" rIns="0" bIns="0" rtlCol="0" anchor="ctr"/>
+          <a:lstStyle/>
+          <a:p>
+            <a:pPr algn="l" indent="0" marL="0">
+              <a:buNone/>
+            </a:pPr>
+            <a:r>
+              <a:rPr lang="ru-RU" altLang="en-US" sz="1200" dirty="0">
+                <a:solidFill>
+                  <a:schemeClr val="accent6"/>
+                </a:solidFill>
+                <a:latin typeface="+mn-lt" pitchFamily="34" charset="0"/>
+                <a:ea typeface="+mn-lt" pitchFamily="34" charset="-122"/>
+                <a:cs typeface="+mn-lt" pitchFamily="34" charset="-120"/>
+              </a:rPr>
+              <a:t>Маржинальный доход с часа</a:t>
+            </a:r>
+            <a:endParaRPr lang="en-US" sz="1200" dirty="0"/>
+          </a:p>
+        </p:txBody>
+      </p:sp>
+      <p:sp>
+        <p:nvSpPr>
+          <p:cNvPr id="28" name="Text 26"/>
+          <p:cNvSpPr txBox="1"/>
+          <p:nvPr/>
+        </p:nvSpPr>
+        <p:spPr>
+          <a:xfrm>
+            <a:off x="3438624" y="4216995"/>
+            <a:ext cx="1561009" cy="266700"/>
+          </a:xfrm>
+          <a:prstGeom prst="rect">
+            <a:avLst/>
+          </a:prstGeom>
+          <a:noFill/>
+          <a:ln/>
+        </p:spPr>
+        <p:txBody>
+          <a:bodyPr wrap="square" lIns="0" tIns="0" rIns="0" bIns="0" rtlCol="0" anchor="ctr"/>
+          <a:lstStyle/>
+          <a:p>
+            <a:pPr algn="l" indent="0" marL="0">
+              <a:buNone/>
+            </a:pPr>
+            <a:r>
+              <a:rPr lang="ru-RU" altLang="en-US" sz="1400" b="1" dirty="0">
+                <a:solidFill>
+                  <a:schemeClr val="accent2"/>
+                </a:solidFill>
+                <a:latin typeface="+mn-lt" pitchFamily="34" charset="0"/>
+                <a:ea typeface="+mn-lt" pitchFamily="34" charset="-122"/>
+                <a:cs typeface="+mn-lt" pitchFamily="34" charset="-120"/>
+              </a:rPr>
+              <a:t>15,6 ₽</a:t>
+            </a:r>
+            <a:endParaRPr lang="en-US" sz="1400" dirty="0"/>
+          </a:p>
+        </p:txBody>
+      </p:sp>
+      <p:sp>
+        <p:nvSpPr>
+          <p:cNvPr id="29" name="Text 27"/>
+          <p:cNvSpPr txBox="1"/>
+          <p:nvPr/>
+        </p:nvSpPr>
+        <p:spPr>
+          <a:xfrm>
+            <a:off x="4948833" y="4216995"/>
+            <a:ext cx="1561009" cy="266700"/>
+          </a:xfrm>
+          <a:prstGeom prst="rect">
+            <a:avLst/>
+          </a:prstGeom>
+          <a:noFill/>
+          <a:ln/>
+        </p:spPr>
+        <p:txBody>
+          <a:bodyPr wrap="square" lIns="0" tIns="0" rIns="0" bIns="0" rtlCol="0" anchor="ctr"/>
+          <a:lstStyle/>
+          <a:p>
+            <a:pPr algn="l" indent="0" marL="0">
+              <a:buNone/>
+            </a:pPr>
+            <a:r>
+              <a:rPr lang="ru-RU" altLang="en-US" sz="1400" b="1" dirty="0">
+                <a:solidFill>
+                  <a:schemeClr val="tx2"/>
+                </a:solidFill>
+                <a:latin typeface="+mn-lt" pitchFamily="34" charset="0"/>
+                <a:ea typeface="+mn-lt" pitchFamily="34" charset="-122"/>
+                <a:cs typeface="+mn-lt" pitchFamily="34" charset="-120"/>
+              </a:rPr>
+              <a:t>14,9 ₽</a:t>
+            </a:r>
+            <a:endParaRPr lang="en-US" sz="1400" dirty="0"/>
+          </a:p>
+        </p:txBody>
+      </p:sp>
+      <p:sp>
+        <p:nvSpPr>
+          <p:cNvPr id="30" name="Text 28"/>
+          <p:cNvSpPr txBox="1"/>
+          <p:nvPr/>
+        </p:nvSpPr>
+        <p:spPr>
+          <a:xfrm>
+            <a:off x="6459041" y="4216995"/>
+            <a:ext cx="1561009" cy="266700"/>
+          </a:xfrm>
+          <a:prstGeom prst="rect">
+            <a:avLst/>
+          </a:prstGeom>
+          <a:noFill/>
+          <a:ln/>
+        </p:spPr>
+        <p:txBody>
+          <a:bodyPr wrap="square" lIns="0" tIns="0" rIns="0" bIns="0" rtlCol="0" anchor="ctr"/>
+          <a:lstStyle/>
+          <a:p>
+            <a:pPr algn="l" indent="0" marL="0">
+              <a:buNone/>
+            </a:pPr>
+            <a:r>
+              <a:rPr lang="ru-RU" altLang="en-US" sz="1400" b="1" dirty="0">
+                <a:solidFill>
+                  <a:schemeClr val="tx2"/>
+                </a:solidFill>
+                <a:latin typeface="+mn-lt" pitchFamily="34" charset="0"/>
+                <a:ea typeface="+mn-lt" pitchFamily="34" charset="-122"/>
+                <a:cs typeface="+mn-lt" pitchFamily="34" charset="-120"/>
+              </a:rPr>
+              <a:t>12,2 ₽</a:t>
+            </a:r>
+            <a:endParaRPr lang="en-US" sz="1400" dirty="0"/>
+          </a:p>
+        </p:txBody>
+      </p:sp>
+      <p:sp>
+        <p:nvSpPr>
+          <p:cNvPr id="31" name="Shape 29"/>
+          <p:cNvSpPr/>
+          <p:nvPr/>
+        </p:nvSpPr>
+        <p:spPr>
+          <a:xfrm>
+            <a:off x="1022350" y="4521101"/>
+            <a:ext cx="6946900" cy="0"/>
+          </a:xfrm>
+          <a:prstGeom prst="line">
+            <a:avLst/>
+          </a:prstGeom>
+          <a:noFill/>
+          <a:ln w="6350">
+            <a:solidFill>
+              <a:srgbClr val="E2D7C5"/>
+            </a:solidFill>
+            <a:prstDash val="solid"/>
+          </a:ln>
+        </p:spPr>
+      </p:sp>
+      <p:sp>
+        <p:nvSpPr>
+          <p:cNvPr id="32" name="Text 30"/>
+          <p:cNvSpPr txBox="1"/>
+          <p:nvPr/>
+        </p:nvSpPr>
+        <p:spPr>
+          <a:xfrm>
+            <a:off x="1022350" y="4572496"/>
+            <a:ext cx="2488762" cy="234950"/>
+          </a:xfrm>
+          <a:prstGeom prst="rect">
+            <a:avLst/>
+          </a:prstGeom>
+          <a:noFill/>
+          <a:ln/>
+        </p:spPr>
+        <p:txBody>
+          <a:bodyPr wrap="square" lIns="0" tIns="0" rIns="0" bIns="0" rtlCol="0" anchor="ctr"/>
+          <a:lstStyle/>
+          <a:p>
+            <a:pPr algn="l" indent="0" marL="0">
+              <a:buNone/>
+            </a:pPr>
+            <a:r>
+              <a:rPr lang="ru-RU" altLang="en-US" sz="1200" dirty="0">
+                <a:solidFill>
+                  <a:schemeClr val="accent6"/>
+                </a:solidFill>
+                <a:latin typeface="+mn-lt" pitchFamily="34" charset="0"/>
+                <a:ea typeface="+mn-lt" pitchFamily="34" charset="-122"/>
+                <a:cs typeface="+mn-lt" pitchFamily="34" charset="-120"/>
+              </a:rPr>
+              <a:t>Карт на 250 тыс. ₽ в месяц</a:t>
+            </a:r>
+            <a:endParaRPr lang="en-US" sz="1200" dirty="0"/>
+          </a:p>
+        </p:txBody>
+      </p:sp>
+      <p:sp>
+        <p:nvSpPr>
+          <p:cNvPr id="33" name="Text 31"/>
+          <p:cNvSpPr txBox="1"/>
+          <p:nvPr/>
+        </p:nvSpPr>
+        <p:spPr>
+          <a:xfrm>
+            <a:off x="3438624" y="4556026"/>
+            <a:ext cx="1561009" cy="266700"/>
+          </a:xfrm>
+          <a:prstGeom prst="rect">
+            <a:avLst/>
+          </a:prstGeom>
+          <a:noFill/>
+          <a:ln/>
+        </p:spPr>
+        <p:txBody>
+          <a:bodyPr wrap="square" lIns="0" tIns="0" rIns="0" bIns="0" rtlCol="0" anchor="ctr"/>
+          <a:lstStyle/>
+          <a:p>
+            <a:pPr algn="l" indent="0" marL="0">
+              <a:buNone/>
+            </a:pPr>
+            <a:r>
+              <a:rPr lang="ru-RU" altLang="en-US" sz="1400" b="1" dirty="0">
+                <a:solidFill>
+                  <a:schemeClr val="accent2"/>
+                </a:solidFill>
+                <a:latin typeface="+mn-lt" pitchFamily="34" charset="0"/>
+                <a:ea typeface="+mn-lt" pitchFamily="34" charset="-122"/>
+                <a:cs typeface="+mn-lt" pitchFamily="34" charset="-120"/>
+              </a:rPr>
+              <a:t>≈45</a:t>
+            </a:r>
+            <a:endParaRPr lang="en-US" sz="1400" dirty="0"/>
+          </a:p>
+        </p:txBody>
+      </p:sp>
+      <p:sp>
+        <p:nvSpPr>
+          <p:cNvPr id="34" name="Text 32"/>
+          <p:cNvSpPr txBox="1"/>
+          <p:nvPr/>
+        </p:nvSpPr>
+        <p:spPr>
+          <a:xfrm>
+            <a:off x="4948833" y="4556026"/>
+            <a:ext cx="1561009" cy="266700"/>
+          </a:xfrm>
+          <a:prstGeom prst="rect">
+            <a:avLst/>
+          </a:prstGeom>
+          <a:noFill/>
+          <a:ln/>
+        </p:spPr>
+        <p:txBody>
+          <a:bodyPr wrap="square" lIns="0" tIns="0" rIns="0" bIns="0" rtlCol="0" anchor="ctr"/>
+          <a:lstStyle/>
+          <a:p>
+            <a:pPr algn="l" indent="0" marL="0">
+              <a:buNone/>
+            </a:pPr>
+            <a:r>
+              <a:rPr lang="ru-RU" altLang="en-US" sz="1400" b="1" dirty="0">
+                <a:solidFill>
+                  <a:schemeClr val="tx2"/>
+                </a:solidFill>
+                <a:latin typeface="+mn-lt" pitchFamily="34" charset="0"/>
+                <a:ea typeface="+mn-lt" pitchFamily="34" charset="-122"/>
+                <a:cs typeface="+mn-lt" pitchFamily="34" charset="-120"/>
+              </a:rPr>
+              <a:t>≈47</a:t>
+            </a:r>
+            <a:endParaRPr lang="en-US" sz="1400" dirty="0"/>
+          </a:p>
+        </p:txBody>
+      </p:sp>
+      <p:sp>
+        <p:nvSpPr>
+          <p:cNvPr id="35" name="Text 33"/>
+          <p:cNvSpPr txBox="1"/>
+          <p:nvPr/>
+        </p:nvSpPr>
+        <p:spPr>
+          <a:xfrm>
+            <a:off x="6459041" y="4556026"/>
+            <a:ext cx="1561009" cy="266700"/>
+          </a:xfrm>
+          <a:prstGeom prst="rect">
+            <a:avLst/>
+          </a:prstGeom>
+          <a:noFill/>
+          <a:ln/>
+        </p:spPr>
+        <p:txBody>
+          <a:bodyPr wrap="square" lIns="0" tIns="0" rIns="0" bIns="0" rtlCol="0" anchor="ctr"/>
+          <a:lstStyle/>
+          <a:p>
+            <a:pPr algn="l" indent="0" marL="0">
+              <a:buNone/>
+            </a:pPr>
+            <a:r>
+              <a:rPr lang="ru-RU" altLang="en-US" sz="1400" b="1" dirty="0">
+                <a:solidFill>
+                  <a:schemeClr val="tx2"/>
+                </a:solidFill>
+                <a:latin typeface="+mn-lt" pitchFamily="34" charset="0"/>
+                <a:ea typeface="+mn-lt" pitchFamily="34" charset="-122"/>
+                <a:cs typeface="+mn-lt" pitchFamily="34" charset="-120"/>
+              </a:rPr>
+              <a:t>≈57</a:t>
+            </a:r>
+            <a:endParaRPr lang="en-US" sz="1400" dirty="0"/>
+          </a:p>
+        </p:txBody>
+      </p:sp>
+      <p:sp>
+        <p:nvSpPr>
+          <p:cNvPr id="36" name="Text 34"/>
+          <p:cNvSpPr txBox="1"/>
+          <p:nvPr/>
+        </p:nvSpPr>
+        <p:spPr>
+          <a:xfrm>
+            <a:off x="1022350" y="4901406"/>
+            <a:ext cx="7099300" cy="234950"/>
+          </a:xfrm>
+          <a:prstGeom prst="rect">
+            <a:avLst/>
+          </a:prstGeom>
+          <a:noFill/>
+          <a:ln/>
+        </p:spPr>
+        <p:txBody>
+          <a:bodyPr wrap="square" lIns="0" tIns="0" rIns="0" bIns="0" rtlCol="0" anchor="ctr"/>
+          <a:lstStyle/>
+          <a:p>
+            <a:pPr algn="l" indent="0" marL="0">
+              <a:buNone/>
+            </a:pPr>
+            <a:r>
+              <a:rPr lang="ru-RU" altLang="en-US" sz="1200" dirty="0">
+                <a:solidFill>
+                  <a:srgbClr val="7A6E5F"/>
+                </a:solidFill>
+                <a:latin typeface="+mn-lt" pitchFamily="34" charset="0"/>
+                <a:ea typeface="+mn-lt" pitchFamily="34" charset="-122"/>
+                <a:cs typeface="+mn-lt" pitchFamily="34" charset="-120"/>
+              </a:rPr>
+              <a:t>Маржинальный доход = цена × 0,94 − выплата − 2 ₽; допущения: УСН «Доходы» 6%, без НДС</a:t>
+            </a:r>
+            <a:endParaRPr lang="en-US" sz="1200" dirty="0"/>
+          </a:p>
+        </p:txBody>
+      </p:sp>
+      <p:sp>
+        <p:nvSpPr>
+          <p:cNvPr id="37" name="Shape 35"/>
+          <p:cNvSpPr/>
+          <p:nvPr/>
+        </p:nvSpPr>
+        <p:spPr>
+          <a:xfrm>
+            <a:off x="8331200" y="2648744"/>
+            <a:ext cx="3048000" cy="2778125"/>
+          </a:xfrm>
+          <a:prstGeom prst="roundRect">
+            <a:avLst>
+              <a:gd name="adj" fmla="val 5486"/>
+            </a:avLst>
+          </a:prstGeom>
+          <a:solidFill>
+            <a:schemeClr val="tx1"/>
+          </a:solidFill>
+          <a:ln/>
+        </p:spPr>
+      </p:sp>
+      <p:sp>
+        <p:nvSpPr>
+          <p:cNvPr id="38" name="Text 36"/>
+          <p:cNvSpPr txBox="1"/>
+          <p:nvPr/>
+        </p:nvSpPr>
+        <p:spPr>
+          <a:xfrm>
+            <a:off x="8534400" y="2801144"/>
+            <a:ext cx="2720848" cy="407591"/>
+          </a:xfrm>
+          <a:prstGeom prst="rect">
+            <a:avLst/>
+          </a:prstGeom>
+          <a:noFill/>
+          <a:ln/>
+        </p:spPr>
+        <p:txBody>
+          <a:bodyPr wrap="square" lIns="0" tIns="0" rIns="0" bIns="0" rtlCol="0" anchor="t"/>
+          <a:lstStyle/>
+          <a:p>
+            <a:pPr algn="l" indent="0" marL="0">
+              <a:lnSpc>
+                <a:spcPts val="1560"/>
+              </a:lnSpc>
+              <a:buNone/>
+            </a:pPr>
+            <a:r>
+              <a:rPr lang="ru-RU" altLang="en-US" sz="1200" b="1" dirty="0">
+                <a:solidFill>
+                  <a:schemeClr val="accent1"/>
+                </a:solidFill>
+                <a:latin typeface="+mn-lt" pitchFamily="34" charset="0"/>
+                <a:ea typeface="+mn-lt" pitchFamily="34" charset="-122"/>
+                <a:cs typeface="+mn-lt" pitchFamily="34" charset="-120"/>
+              </a:rPr>
+              <a:t>Ключевой показатель — объём </a:t>
+            </a:r>
+            <a:br/>
+            <a:pPr algn="l" indent="0" marL="0">
+              <a:lnSpc>
+                <a:spcPts val="1560"/>
+              </a:lnSpc>
+              <a:buNone/>
+            </a:pPr>
+            <a:r>
+              <a:rPr lang="ru-RU" altLang="en-US" sz="1200" b="1" dirty="0">
+                <a:solidFill>
+                  <a:schemeClr val="accent1"/>
+                </a:solidFill>
+                <a:latin typeface="+mn-lt" pitchFamily="34" charset="0"/>
+                <a:ea typeface="+mn-lt" pitchFamily="34" charset="-122"/>
+                <a:cs typeface="+mn-lt" pitchFamily="34" charset="-120"/>
+              </a:rPr>
+              <a:t>оплаченных GPU-часов</a:t>
+            </a:r>
+            <a:endParaRPr lang="en-US" sz="1200" dirty="0"/>
+          </a:p>
+        </p:txBody>
+      </p:sp>
+      <p:sp>
+        <p:nvSpPr>
+          <p:cNvPr id="39" name="Text 37"/>
+          <p:cNvSpPr txBox="1"/>
+          <p:nvPr/>
+        </p:nvSpPr>
+        <p:spPr>
+          <a:xfrm>
+            <a:off x="8534400" y="3216275"/>
+            <a:ext cx="2720848" cy="533400"/>
+          </a:xfrm>
+          <a:prstGeom prst="rect">
+            <a:avLst/>
+          </a:prstGeom>
+          <a:noFill/>
+          <a:ln/>
+        </p:spPr>
+        <p:txBody>
+          <a:bodyPr wrap="square" lIns="0" tIns="0" rIns="0" bIns="0" rtlCol="0" anchor="ctr"/>
+          <a:lstStyle/>
+          <a:p>
+            <a:pPr algn="l" indent="0" marL="0">
+              <a:buNone/>
+            </a:pPr>
+            <a:r>
+              <a:rPr lang="ru-RU" altLang="en-US" sz="3200" spc="-100" kern="0" dirty="0">
+                <a:solidFill>
+                  <a:schemeClr val="bg1"/>
                 </a:solidFill>
                 <a:latin typeface="+mj-lt" pitchFamily="34" charset="0"/>
                 <a:ea typeface="+mj-lt" pitchFamily="34" charset="-122"/>
                 <a:cs typeface="+mj-lt" pitchFamily="34" charset="-120"/>
               </a:rPr>
-              <a:t>120 ч</a:t>
-            </a:r>
-            <a:endParaRPr lang="en-US" sz="2600" dirty="0"/>
-          </a:p>
-        </p:txBody>
-      </p:sp>
-      <p:sp>
-        <p:nvSpPr>
-          <p:cNvPr id="23" name="Text 21"/>
-          <p:cNvSpPr txBox="1"/>
-          <p:nvPr/>
-        </p:nvSpPr>
-        <p:spPr>
-          <a:xfrm>
-            <a:off x="6400800" y="4480203"/>
-            <a:ext cx="1533823" cy="238760"/>
-          </a:xfrm>
-          <a:prstGeom prst="rect">
-            <a:avLst/>
-          </a:prstGeom>
-          <a:noFill/>
-          <a:ln/>
-        </p:spPr>
-        <p:txBody>
-          <a:bodyPr wrap="square" lIns="0" tIns="0" rIns="0" bIns="0" rtlCol="0" anchor="ctr"/>
-          <a:lstStyle/>
-          <a:p>
-            <a:pPr algn="l" indent="0" marL="0">
+              <a:t>≈16 тыс. ч</a:t>
+            </a:r>
+            <a:endParaRPr lang="en-US" sz="3200" dirty="0"/>
+          </a:p>
+        </p:txBody>
+      </p:sp>
+      <p:sp>
+        <p:nvSpPr>
+          <p:cNvPr id="40" name="Text 38"/>
+          <p:cNvSpPr txBox="1"/>
+          <p:nvPr/>
+        </p:nvSpPr>
+        <p:spPr>
+          <a:xfrm>
+            <a:off x="8534400" y="3771205"/>
+            <a:ext cx="2720848" cy="1032272"/>
+          </a:xfrm>
+          <a:prstGeom prst="rect">
+            <a:avLst/>
+          </a:prstGeom>
+          <a:noFill/>
+          <a:ln/>
+        </p:spPr>
+        <p:txBody>
+          <a:bodyPr wrap="square" lIns="0" tIns="0" rIns="0" bIns="0" rtlCol="0" anchor="t"/>
+          <a:lstStyle/>
+          <a:p>
+            <a:pPr algn="l" indent="0" marL="0">
+              <a:lnSpc>
+                <a:spcPts val="1620"/>
+              </a:lnSpc>
               <a:buNone/>
             </a:pPr>
             <a:r>
               <a:rPr lang="ru-RU" altLang="en-US" sz="1200" dirty="0">
                 <a:solidFill>
-                  <a:schemeClr val="accent6"/>
-                </a:solidFill>
-                <a:latin typeface="+mn-lt" pitchFamily="34" charset="0"/>
-                <a:ea typeface="+mn-lt" pitchFamily="34" charset="-122"/>
-                <a:cs typeface="+mn-lt" pitchFamily="34" charset="-120"/>
-              </a:rPr>
-              <a:t>оплаченных в месяц</a:t>
+                  <a:schemeClr val="bg1"/>
+                </a:solidFill>
+                <a:latin typeface="+mn-lt" pitchFamily="34" charset="0"/>
+                <a:ea typeface="+mn-lt" pitchFamily="34" charset="-122"/>
+                <a:cs typeface="+mn-lt" pitchFamily="34" charset="-120"/>
+              </a:rPr>
+              <a:t>в месяц нужно продать в базовом </a:t>
+            </a:r>
+            <a:br/>
+            <a:pPr algn="l" indent="0" marL="0">
+              <a:lnSpc>
+                <a:spcPts val="1620"/>
+              </a:lnSpc>
+              <a:buNone/>
+            </a:pPr>
+            <a:r>
+              <a:rPr lang="ru-RU" altLang="en-US" sz="1200" dirty="0">
+                <a:solidFill>
+                  <a:schemeClr val="bg1"/>
+                </a:solidFill>
+                <a:latin typeface="+mn-lt" pitchFamily="34" charset="0"/>
+                <a:ea typeface="+mn-lt" pitchFamily="34" charset="-122"/>
+                <a:cs typeface="+mn-lt" pitchFamily="34" charset="-120"/>
+              </a:rPr>
+              <a:t>сценарии для 250 тыс. ₽ </a:t>
+            </a:r>
+            <a:br/>
+            <a:pPr algn="l" indent="0" marL="0">
+              <a:lnSpc>
+                <a:spcPts val="1620"/>
+              </a:lnSpc>
+              <a:buNone/>
+            </a:pPr>
+            <a:r>
+              <a:rPr lang="ru-RU" altLang="en-US" sz="1200" dirty="0">
+                <a:solidFill>
+                  <a:schemeClr val="bg1"/>
+                </a:solidFill>
+                <a:latin typeface="+mn-lt" pitchFamily="34" charset="0"/>
+                <a:ea typeface="+mn-lt" pitchFamily="34" charset="-122"/>
+                <a:cs typeface="+mn-lt" pitchFamily="34" charset="-120"/>
+              </a:rPr>
+              <a:t>постоянных расходов — ≈160 </a:t>
+            </a:r>
+            <a:br/>
+            <a:pPr algn="l" indent="0" marL="0">
+              <a:lnSpc>
+                <a:spcPts val="1620"/>
+              </a:lnSpc>
+              <a:buNone/>
+            </a:pPr>
+            <a:r>
+              <a:rPr lang="ru-RU" altLang="en-US" sz="1200" dirty="0">
+                <a:solidFill>
+                  <a:schemeClr val="bg1"/>
+                </a:solidFill>
+                <a:latin typeface="+mn-lt" pitchFamily="34" charset="0"/>
+                <a:ea typeface="+mn-lt" pitchFamily="34" charset="-122"/>
+                <a:cs typeface="+mn-lt" pitchFamily="34" charset="-120"/>
+              </a:rPr>
+              <a:t>заказов по 100 часов или меньше </a:t>
+            </a:r>
+            <a:br/>
+            <a:pPr algn="l" indent="0" marL="0">
+              <a:lnSpc>
+                <a:spcPts val="1620"/>
+              </a:lnSpc>
+              <a:buNone/>
+            </a:pPr>
+            <a:r>
+              <a:rPr lang="ru-RU" altLang="en-US" sz="1200" dirty="0">
+                <a:solidFill>
+                  <a:schemeClr val="bg1"/>
+                </a:solidFill>
+                <a:latin typeface="+mn-lt" pitchFamily="34" charset="0"/>
+                <a:ea typeface="+mn-lt" pitchFamily="34" charset="-122"/>
+                <a:cs typeface="+mn-lt" pitchFamily="34" charset="-120"/>
+              </a:rPr>
+              <a:t>крупных клиентов</a:t>
             </a:r>
             <a:endParaRPr lang="en-US" sz="1200" dirty="0"/>
           </a:p>
@@ -13299,77 +14554,59 @@
       </p:sp>
       <p:sp>
         <p:nvSpPr>
-          <p:cNvPr id="24" name="Text 22"/>
-          <p:cNvSpPr txBox="1"/>
-          <p:nvPr/>
-        </p:nvSpPr>
-        <p:spPr>
-          <a:xfrm>
-            <a:off x="8137823" y="4068167"/>
-            <a:ext cx="2199039" cy="438150"/>
-          </a:xfrm>
-          <a:prstGeom prst="rect">
-            <a:avLst/>
-          </a:prstGeom>
-          <a:noFill/>
-          <a:ln/>
-        </p:spPr>
-        <p:txBody>
-          <a:bodyPr wrap="square" lIns="0" tIns="0" rIns="0" bIns="0" rtlCol="0" anchor="ctr"/>
-          <a:lstStyle/>
-          <a:p>
-            <a:pPr algn="l" indent="0" marL="0">
-              <a:buNone/>
-            </a:pPr>
-            <a:r>
-              <a:rPr lang="ru-RU" altLang="en-US" sz="2600" spc="-50" kern="0" dirty="0">
-                <a:solidFill>
-                  <a:schemeClr val="tx2"/>
-                </a:solidFill>
-                <a:latin typeface="+mj-lt" pitchFamily="34" charset="0"/>
-                <a:ea typeface="+mj-lt" pitchFamily="34" charset="-122"/>
-                <a:cs typeface="+mj-lt" pitchFamily="34" charset="-120"/>
-              </a:rPr>
-              <a:t>1 872 ₽</a:t>
-            </a:r>
-            <a:endParaRPr lang="en-US" sz="2600" dirty="0"/>
-          </a:p>
-        </p:txBody>
-      </p:sp>
-      <p:sp>
-        <p:nvSpPr>
-          <p:cNvPr id="25" name="Text 23"/>
-          <p:cNvSpPr txBox="1"/>
-          <p:nvPr/>
-        </p:nvSpPr>
-        <p:spPr>
-          <a:xfrm>
-            <a:off x="8137823" y="4480203"/>
-            <a:ext cx="2199039" cy="238760"/>
-          </a:xfrm>
-          <a:prstGeom prst="rect">
-            <a:avLst/>
-          </a:prstGeom>
-          <a:noFill/>
-          <a:ln/>
-        </p:spPr>
-        <p:txBody>
-          <a:bodyPr wrap="square" lIns="0" tIns="0" rIns="0" bIns="0" rtlCol="0" anchor="ctr"/>
-          <a:lstStyle/>
-          <a:p>
-            <a:pPr algn="l" indent="0" marL="0">
+          <p:cNvPr id="41" name="Text 39"/>
+          <p:cNvSpPr txBox="1"/>
+          <p:nvPr/>
+        </p:nvSpPr>
+        <p:spPr>
+          <a:xfrm>
+            <a:off x="8534400" y="4863108"/>
+            <a:ext cx="2720848" cy="415230"/>
+          </a:xfrm>
+          <a:prstGeom prst="rect">
+            <a:avLst/>
+          </a:prstGeom>
+          <a:noFill/>
+          <a:ln/>
+        </p:spPr>
+        <p:txBody>
+          <a:bodyPr wrap="square" lIns="0" tIns="0" rIns="0" bIns="0" rtlCol="0" anchor="t"/>
+          <a:lstStyle/>
+          <a:p>
+            <a:pPr algn="l" indent="0" marL="0">
+              <a:lnSpc>
+                <a:spcPts val="1620"/>
+              </a:lnSpc>
               <a:buNone/>
             </a:pPr>
             <a:r>
               <a:rPr lang="ru-RU" altLang="en-US" sz="1200" dirty="0">
                 <a:solidFill>
-                  <a:schemeClr val="accent6"/>
-                </a:solidFill>
-                <a:latin typeface="+mn-lt" pitchFamily="34" charset="0"/>
-                <a:ea typeface="+mn-lt" pitchFamily="34" charset="-122"/>
-                <a:cs typeface="+mn-lt" pitchFamily="34" charset="-120"/>
-              </a:rPr>
-              <a:t>маржинальный доход с карты</a:t>
+                  <a:schemeClr val="accent5"/>
+                </a:solidFill>
+                <a:latin typeface="+mn-lt" pitchFamily="34" charset="0"/>
+                <a:ea typeface="+mn-lt" pitchFamily="34" charset="-122"/>
+                <a:cs typeface="+mn-lt" pitchFamily="34" charset="-120"/>
+              </a:rPr>
+              <a:t>При 35 и 30 ₽ — ≈16,8 и ≈20,5 тыс. ч. </a:t>
+            </a:r>
+            <a:br/>
+            <a:pPr algn="l" indent="0" marL="0">
+              <a:lnSpc>
+                <a:spcPts val="1620"/>
+              </a:lnSpc>
+              <a:buNone/>
+            </a:pPr>
+            <a:r>
+              <a:rPr lang="ru-RU" altLang="en-US" sz="1200" dirty="0">
+                <a:solidFill>
+                  <a:schemeClr val="accent5"/>
+                </a:solidFill>
+                <a:latin typeface="+mn-lt" pitchFamily="34" charset="0"/>
+                <a:ea typeface="+mn-lt" pitchFamily="34" charset="-122"/>
+                <a:cs typeface="+mn-lt" pitchFamily="34" charset="-120"/>
+              </a:rPr>
+              <a:t>Спрос не подтверждён</a:t>
             </a:r>
             <a:endParaRPr lang="en-US" sz="1200" dirty="0"/>
           </a:p>
@@ -13377,52 +14614,13 @@
       </p:sp>
       <p:sp>
         <p:nvSpPr>
-          <p:cNvPr id="26" name="Text 24"/>
-          <p:cNvSpPr txBox="1"/>
-          <p:nvPr/>
-        </p:nvSpPr>
-        <p:spPr>
-          <a:xfrm>
-            <a:off x="6400800" y="4790678"/>
-            <a:ext cx="4885754" cy="254000"/>
-          </a:xfrm>
-          <a:prstGeom prst="rect">
-            <a:avLst/>
-          </a:prstGeom>
-          <a:noFill/>
-          <a:ln/>
-        </p:spPr>
-        <p:txBody>
-          <a:bodyPr wrap="square" lIns="0" tIns="0" rIns="0" bIns="0" rtlCol="0" anchor="ctr"/>
-          <a:lstStyle/>
-          <a:p>
-            <a:pPr algn="l" indent="0" marL="0">
-              <a:buNone/>
-            </a:pPr>
-            <a:r>
-              <a:rPr lang="ru-RU" altLang="en-US" sz="1300" b="1" dirty="0">
-                <a:solidFill>
-                  <a:schemeClr val="tx2"/>
-                </a:solidFill>
-                <a:latin typeface="+mn-lt" pitchFamily="34" charset="0"/>
-                <a:ea typeface="+mn-lt" pitchFamily="34" charset="-122"/>
-                <a:cs typeface="+mn-lt" pitchFamily="34" charset="-120"/>
-              </a:rPr>
-              <a:t>≈134 карты на те же 250 тыс. ₽</a:t>
-            </a:r>
-            <a:endParaRPr lang="en-US" sz="1300" dirty="0"/>
-          </a:p>
-        </p:txBody>
-      </p:sp>
-      <p:sp>
-        <p:nvSpPr>
-          <p:cNvPr id="27" name="Text 25"/>
-          <p:cNvSpPr txBox="1"/>
-          <p:nvPr/>
-        </p:nvSpPr>
-        <p:spPr>
-          <a:xfrm>
-            <a:off x="812800" y="5618361"/>
+          <p:cNvPr id="42" name="Text 40"/>
+          <p:cNvSpPr txBox="1"/>
+          <p:nvPr/>
+        </p:nvSpPr>
+        <p:spPr>
+          <a:xfrm>
+            <a:off x="812800" y="5618460"/>
             <a:ext cx="10718800" cy="426641"/>
           </a:xfrm>
           <a:prstGeom prst="rect">
@@ -13450,7 +14648,7 @@
                 <a:ea typeface="+mn-lt" pitchFamily="34" charset="-122"/>
                 <a:cs typeface="+mn-lt" pitchFamily="34" charset="-120"/>
               </a:rPr>
-              <a:t>Иллюстративные сценарии, а не прогноз: экономика зависит от доступности, спроса, простоев, перезапусков и затрат на инфраструктуру. </a:t>
+              <a:t>Расчёты предварительные, не прогноз: не подтверждены платная загрузка, фактические затраты на инфраструктуру и обслуживание клиентов. </a:t>
             </a:r>
             <a:br/>
             <a:pPr algn="l" indent="0" marL="0">
@@ -13468,7 +14666,7 @@
                 <a:ea typeface="+mn-lt" pitchFamily="34" charset="-122"/>
                 <a:cs typeface="+mn-lt" pitchFamily="34" charset="-120"/>
               </a:rPr>
-              <a:t>Ориентиры для фермы: 500 тыс. ₽ расходов — ≈90 карт, 1,7–2,2 млн ₽ — ≈300–390 карт.</a:t>
+              <a:t>250 тыс. ₽ в месяц — условные постоянные расходы работающего сервиса, а не бюджет пилота.</a:t>
             </a:r>
             <a:endParaRPr lang="en-US" sz="1200" dirty="0"/>
           </a:p>
@@ -13991,7 +15189,7 @@
         <p:spPr>
           <a:xfrm>
             <a:off x="4571504" y="2094111"/>
-            <a:ext cx="3067086" cy="639961"/>
+            <a:ext cx="3067086" cy="853281"/>
           </a:xfrm>
           <a:prstGeom prst="rect">
             <a:avLst/>
@@ -14018,7 +15216,7 @@
                 <a:ea typeface="+mn-lt" pitchFamily="34" charset="-122"/>
                 <a:cs typeface="+mn-lt" pitchFamily="34" charset="-120"/>
               </a:rPr>
-              <a:t>20 проблемных интервью. Сигнал — </a:t>
+              <a:t>Хватит ли оплаченных часов: базовому </a:t>
             </a:r>
             <a:br/>
             <a:pPr algn="l" indent="0" marL="0">
@@ -14036,7 +15234,7 @@
                 <a:ea typeface="+mn-lt" pitchFamily="34" charset="-122"/>
                 <a:cs typeface="+mn-lt" pitchFamily="34" charset="-120"/>
               </a:rPr>
-              <a:t>готовность заплатить за пилот, а не </a:t>
+              <a:t>сценарию нужно ≈16 тыс. в месяц. В 20 </a:t>
             </a:r>
             <a:br/>
             <a:pPr algn="l" indent="0" marL="0">
@@ -14054,7 +15252,25 @@
                 <a:ea typeface="+mn-lt" pitchFamily="34" charset="-122"/>
                 <a:cs typeface="+mn-lt" pitchFamily="34" charset="-120"/>
               </a:rPr>
-              <a:t>просто интерес</a:t>
+              <a:t>интервью выясняем объём часов и </a:t>
+            </a:r>
+            <a:br/>
+            <a:pPr algn="l" indent="0" marL="0">
+              <a:lnSpc>
+                <a:spcPts val="1680"/>
+              </a:lnSpc>
+              <a:buNone/>
+            </a:pPr>
+            <a:r>
+              <a:rPr lang="ru-RU" altLang="en-US" sz="1200" dirty="0">
+                <a:solidFill>
+                  <a:schemeClr val="accent5"/>
+                </a:solidFill>
+                <a:latin typeface="+mn-lt" pitchFamily="34" charset="0"/>
+                <a:ea typeface="+mn-lt" pitchFamily="34" charset="-122"/>
+                <a:cs typeface="+mn-lt" pitchFamily="34" charset="-120"/>
+              </a:rPr>
+              <a:t>готовность платить</a:t>
             </a:r>
             <a:endParaRPr lang="en-US" sz="1200" dirty="0"/>
           </a:p>
@@ -14254,7 +15470,7 @@
         <p:spPr>
           <a:xfrm>
             <a:off x="8127107" y="2374702"/>
-            <a:ext cx="3127279" cy="853281"/>
+            <a:ext cx="3127279" cy="1066602"/>
           </a:xfrm>
           <a:prstGeom prst="rect">
             <a:avLst/>
@@ -14281,7 +15497,7 @@
                 <a:ea typeface="+mn-lt" pitchFamily="34" charset="-122"/>
                 <a:cs typeface="+mn-lt" pitchFamily="34" charset="-120"/>
               </a:rPr>
-              <a:t>Владелец может не согласиться на цену, </a:t>
+              <a:t>Уже есть площадки с RTX 3090 дешевле </a:t>
             </a:r>
             <a:br/>
             <a:pPr algn="l" indent="0" marL="0">
@@ -14299,7 +15515,7 @@
                 <a:ea typeface="+mn-lt" pitchFamily="34" charset="-122"/>
                 <a:cs typeface="+mn-lt" pitchFamily="34" charset="-120"/>
               </a:rPr>
-              <a:t>при которой Улей выгоден клиенту. </a:t>
+              <a:t>40 ₽. Владелец может не согласиться на </a:t>
             </a:r>
             <a:br/>
             <a:pPr algn="l" indent="0" marL="0">
@@ -14317,7 +15533,7 @@
                 <a:ea typeface="+mn-lt" pitchFamily="34" charset="-122"/>
                 <a:cs typeface="+mn-lt" pitchFamily="34" charset="-120"/>
               </a:rPr>
-              <a:t>Обсуждаем условия с 15 владельцами и </a:t>
+              <a:t>выплату, при которой цена Улья </a:t>
             </a:r>
             <a:br/>
             <a:pPr algn="l" indent="0" marL="0">
@@ -14335,7 +15551,25 @@
                 <a:ea typeface="+mn-lt" pitchFamily="34" charset="-122"/>
                 <a:cs typeface="+mn-lt" pitchFamily="34" charset="-120"/>
               </a:rPr>
-              <a:t>считаем затраты</a:t>
+              <a:t>конкурентна. Обсуждаем с 15 </a:t>
+            </a:r>
+            <a:br/>
+            <a:pPr algn="l" indent="0" marL="0">
+              <a:lnSpc>
+                <a:spcPts val="1680"/>
+              </a:lnSpc>
+              <a:buNone/>
+            </a:pPr>
+            <a:r>
+              <a:rPr lang="ru-RU" altLang="en-US" sz="1200" dirty="0">
+                <a:solidFill>
+                  <a:schemeClr val="accent5"/>
+                </a:solidFill>
+                <a:latin typeface="+mn-lt" pitchFamily="34" charset="0"/>
+                <a:ea typeface="+mn-lt" pitchFamily="34" charset="-122"/>
+                <a:cs typeface="+mn-lt" pitchFamily="34" charset="-120"/>
+              </a:rPr>
+              <a:t>владельцами</a:t>
             </a:r>
             <a:endParaRPr lang="en-US" sz="1200" dirty="0"/>
           </a:p>

--- a/Улей — презентация для преакселератора ВШМ.pptx
+++ b/Улей — презентация для преакселератора ВШМ.pptx
@@ -117,32 +117,32 @@
   <p:extLst>
     <p:ext uri="{521415D9-36F7-43E2-AB2F-B90AF26B5E84}">
       <p14:sectionLst xmlns:p14="http://schemas.microsoft.com/office/powerpoint/2010/main">
-        <p14:section name="Обложка" id="{3edd790e-a6f3-aec8-2719-a2a1a334f4c1}">
+        <p14:section name="Обложка" id="{d3880070-060a-cdce-1b7d-7b9010af4a6d}">
           <p14:sldIdLst>
             <p14:sldId id="256"/>
           </p14:sldIdLst>
         </p14:section>
-        <p14:section name="Проблема и решение" id="{3035298b-4b1c-322b-b280-228e8ab753f4}">
+        <p14:section name="Проблема и решение" id="{cce734b3-1994-97c5-07be-007c67a75055}">
           <p14:sldIdLst>
             <p14:sldId id="257"/>
             <p14:sldId id="258"/>
             <p14:sldId id="259"/>
           </p14:sldIdLst>
         </p14:section>
-        <p14:section name="Клиенты и рынок" id="{df0c558d-3005-983a-ca3b-063871f2381b}">
+        <p14:section name="Клиенты и рынок" id="{2f402a59-fd09-a5c8-ddaa-52f38c127562}">
           <p14:sldIdLst>
             <p14:sldId id="260"/>
             <p14:sldId id="261"/>
             <p14:sldId id="262"/>
           </p14:sldIdLst>
         </p14:section>
-        <p14:section name="Экономика и риски" id="{d831602f-f5fd-0ac6-5c74-b8567684f23e}">
+        <p14:section name="Экономика и риски" id="{bf9649b5-be0c-345e-bd33-54961f12d6f9}">
           <p14:sldIdLst>
             <p14:sldId id="263"/>
             <p14:sldId id="264"/>
           </p14:sldIdLst>
         </p14:section>
-        <p14:section name="План и команда" id="{7e1e3d9b-330d-ecd0-46ed-878b0735cb76}">
+        <p14:section name="План и команда" id="{fdceaaff-be8a-fabf-55f9-55e18e7b66eb}">
           <p14:sldIdLst>
             <p14:sldId id="265"/>
             <p14:sldId id="266"/>
@@ -2252,12 +2252,12 @@
         </p:nvSpPr>
         <p:spPr>
           <a:xfrm>
-            <a:off x="815975" y="1525687"/>
-            <a:ext cx="3414216" cy="2804716"/>
+            <a:off x="815975" y="1417737"/>
+            <a:ext cx="3414216" cy="2931716"/>
           </a:xfrm>
           <a:prstGeom prst="roundRect">
             <a:avLst>
-              <a:gd name="adj" fmla="val 5434"/>
+              <a:gd name="adj" fmla="val 5198"/>
             </a:avLst>
           </a:prstGeom>
           <a:solidFill>
@@ -2273,13 +2273,36 @@
       </p:sp>
       <p:sp>
         <p:nvSpPr>
-          <p:cNvPr id="4" name="Text 2"/>
-          <p:cNvSpPr txBox="1"/>
-          <p:nvPr/>
-        </p:nvSpPr>
-        <p:spPr>
-          <a:xfrm>
-            <a:off x="1009650" y="1643162"/>
+          <p:cNvPr id="4" name="Shape 2"/>
+          <p:cNvSpPr/>
+          <p:nvPr/>
+        </p:nvSpPr>
+        <p:spPr>
+          <a:xfrm>
+            <a:off x="1009650" y="2088852"/>
+            <a:ext cx="3026866" cy="0"/>
+          </a:xfrm>
+          <a:prstGeom prst="line">
+            <a:avLst/>
+          </a:prstGeom>
+          <a:noFill/>
+          <a:ln w="12700">
+            <a:solidFill>
+              <a:srgbClr val="E2D7C5"/>
+            </a:solidFill>
+            <a:prstDash val="solid"/>
+          </a:ln>
+        </p:spPr>
+      </p:sp>
+      <p:sp>
+        <p:nvSpPr>
+          <p:cNvPr id="5" name="Text 3"/>
+          <p:cNvSpPr txBox="1"/>
+          <p:nvPr/>
+        </p:nvSpPr>
+        <p:spPr>
+          <a:xfrm>
+            <a:off x="1009650" y="1535212"/>
             <a:ext cx="3117672" cy="266700"/>
           </a:xfrm>
           <a:prstGeom prst="rect">
@@ -2312,13 +2335,13 @@
       </p:sp>
       <p:sp>
         <p:nvSpPr>
-          <p:cNvPr id="5" name="Text 3"/>
-          <p:cNvSpPr txBox="1"/>
-          <p:nvPr/>
-        </p:nvSpPr>
-        <p:spPr>
-          <a:xfrm>
-            <a:off x="1009650" y="1897162"/>
+          <p:cNvPr id="6" name="Text 4"/>
+          <p:cNvSpPr txBox="1"/>
+          <p:nvPr/>
+        </p:nvSpPr>
+        <p:spPr>
+          <a:xfrm>
+            <a:off x="1009650" y="1789212"/>
             <a:ext cx="3117672" cy="234950"/>
           </a:xfrm>
           <a:prstGeom prst="rect">
@@ -2351,13 +2374,52 @@
       </p:sp>
       <p:sp>
         <p:nvSpPr>
-          <p:cNvPr id="6" name="Shape 4"/>
+          <p:cNvPr id="7" name="Text 5"/>
+          <p:cNvSpPr txBox="1"/>
+          <p:nvPr/>
+        </p:nvSpPr>
+        <p:spPr>
+          <a:xfrm>
+            <a:off x="1009650" y="2152352"/>
+            <a:ext cx="3117672" cy="234950"/>
+          </a:xfrm>
+          <a:prstGeom prst="rect">
+            <a:avLst/>
+          </a:prstGeom>
+          <a:noFill/>
+          <a:ln/>
+        </p:spPr>
+        <p:txBody>
+          <a:bodyPr wrap="square" lIns="0" tIns="0" rIns="0" bIns="0" rtlCol="0" anchor="ctr"/>
+          <a:lstStyle/>
+          <a:p>
+            <a:pPr algn="l" indent="0" marL="0">
+              <a:buNone/>
+            </a:pPr>
+            <a:r>
+              <a:rPr lang="ru-RU" altLang="en-US" sz="1200" dirty="0">
+                <a:solidFill>
+                  <a:schemeClr val="tx2"/>
+                </a:solidFill>
+                <a:latin typeface="+mn-lt" pitchFamily="34" charset="0"/>
+                <a:ea typeface="+mn-lt" pitchFamily="34" charset="-122"/>
+                <a:cs typeface="+mn-lt" pitchFamily="34" charset="-120"/>
+              </a:rPr>
+              <a:t>15–20 интервью с B2B-клиентами</a:t>
+            </a:r>
+            <a:endParaRPr lang="en-US" sz="1200" dirty="0"/>
+          </a:p>
+        </p:txBody>
+      </p:sp>
+      <p:sp>
+        <p:nvSpPr>
+          <p:cNvPr id="8" name="Shape 6"/>
           <p:cNvSpPr/>
           <p:nvPr/>
         </p:nvSpPr>
         <p:spPr>
           <a:xfrm>
-            <a:off x="1009650" y="2142827"/>
+            <a:off x="1009650" y="2398018"/>
             <a:ext cx="3026866" cy="0"/>
           </a:xfrm>
           <a:prstGeom prst="line">
@@ -2374,13 +2436,13 @@
       </p:sp>
       <p:sp>
         <p:nvSpPr>
-          <p:cNvPr id="7" name="Text 5"/>
-          <p:cNvSpPr txBox="1"/>
-          <p:nvPr/>
-        </p:nvSpPr>
-        <p:spPr>
-          <a:xfrm>
-            <a:off x="1009650" y="2165052"/>
+          <p:cNvPr id="9" name="Text 7"/>
+          <p:cNvSpPr txBox="1"/>
+          <p:nvPr/>
+        </p:nvSpPr>
+        <p:spPr>
+          <a:xfrm>
+            <a:off x="1009650" y="2407543"/>
             <a:ext cx="3117672" cy="234950"/>
           </a:xfrm>
           <a:prstGeom prst="rect">
@@ -2405,7 +2467,7 @@
                 <a:ea typeface="+mn-lt" pitchFamily="34" charset="-122"/>
                 <a:cs typeface="+mn-lt" pitchFamily="34" charset="-120"/>
               </a:rPr>
-              <a:t>15–20 интервью с B2B-клиентами</a:t>
+              <a:t>Их GPU-затраты и объём потребления</a:t>
             </a:r>
             <a:endParaRPr lang="en-US" sz="1200" dirty="0"/>
           </a:p>
@@ -2413,13 +2475,13 @@
       </p:sp>
       <p:sp>
         <p:nvSpPr>
-          <p:cNvPr id="8" name="Shape 6"/>
+          <p:cNvPr id="10" name="Shape 8"/>
           <p:cNvSpPr/>
           <p:nvPr/>
         </p:nvSpPr>
         <p:spPr>
           <a:xfrm>
-            <a:off x="1009650" y="2410718"/>
+            <a:off x="1009650" y="2653209"/>
             <a:ext cx="3026866" cy="0"/>
           </a:xfrm>
           <a:prstGeom prst="line">
@@ -2436,13 +2498,13 @@
       </p:sp>
       <p:sp>
         <p:nvSpPr>
-          <p:cNvPr id="9" name="Text 7"/>
-          <p:cNvSpPr txBox="1"/>
-          <p:nvPr/>
-        </p:nvSpPr>
-        <p:spPr>
-          <a:xfrm>
-            <a:off x="1009650" y="2432943"/>
+          <p:cNvPr id="11" name="Text 9"/>
+          <p:cNvSpPr txBox="1"/>
+          <p:nvPr/>
+        </p:nvSpPr>
+        <p:spPr>
+          <a:xfrm>
+            <a:off x="1009650" y="2662734"/>
             <a:ext cx="3117672" cy="234950"/>
           </a:xfrm>
           <a:prstGeom prst="rect">
@@ -2467,7 +2529,7 @@
                 <a:ea typeface="+mn-lt" pitchFamily="34" charset="-122"/>
                 <a:cs typeface="+mn-lt" pitchFamily="34" charset="-120"/>
               </a:rPr>
-              <a:t>Их GPU-затраты и объём потребления</a:t>
+              <a:t>Поиск 3–5 партнёрских ферм</a:t>
             </a:r>
             <a:endParaRPr lang="en-US" sz="1200" dirty="0"/>
           </a:p>
@@ -2475,13 +2537,13 @@
       </p:sp>
       <p:sp>
         <p:nvSpPr>
-          <p:cNvPr id="10" name="Shape 8"/>
+          <p:cNvPr id="12" name="Shape 10"/>
           <p:cNvSpPr/>
           <p:nvPr/>
         </p:nvSpPr>
         <p:spPr>
           <a:xfrm>
-            <a:off x="1009650" y="2678609"/>
+            <a:off x="1009650" y="2908399"/>
             <a:ext cx="3026866" cy="0"/>
           </a:xfrm>
           <a:prstGeom prst="line">
@@ -2498,13 +2560,13 @@
       </p:sp>
       <p:sp>
         <p:nvSpPr>
-          <p:cNvPr id="11" name="Text 9"/>
-          <p:cNvSpPr txBox="1"/>
-          <p:nvPr/>
-        </p:nvSpPr>
-        <p:spPr>
-          <a:xfrm>
-            <a:off x="1009650" y="2700834"/>
+          <p:cNvPr id="13" name="Text 11"/>
+          <p:cNvSpPr txBox="1"/>
+          <p:nvPr/>
+        </p:nvSpPr>
+        <p:spPr>
+          <a:xfrm>
+            <a:off x="1009650" y="2917924"/>
             <a:ext cx="3117672" cy="234950"/>
           </a:xfrm>
           <a:prstGeom prst="rect">
@@ -2529,7 +2591,7 @@
                 <a:ea typeface="+mn-lt" pitchFamily="34" charset="-122"/>
                 <a:cs typeface="+mn-lt" pitchFamily="34" charset="-120"/>
               </a:rPr>
-              <a:t>Поиск 3–5 партнёрских ферм</a:t>
+              <a:t>Переговоры о цене и доступности</a:t>
             </a:r>
             <a:endParaRPr lang="en-US" sz="1200" dirty="0"/>
           </a:p>
@@ -2537,13 +2599,13 @@
       </p:sp>
       <p:sp>
         <p:nvSpPr>
-          <p:cNvPr id="12" name="Shape 10"/>
+          <p:cNvPr id="14" name="Shape 12"/>
           <p:cNvSpPr/>
           <p:nvPr/>
         </p:nvSpPr>
         <p:spPr>
           <a:xfrm>
-            <a:off x="1009650" y="2946499"/>
+            <a:off x="1009650" y="3163590"/>
             <a:ext cx="3026866" cy="0"/>
           </a:xfrm>
           <a:prstGeom prst="line">
@@ -2560,13 +2622,13 @@
       </p:sp>
       <p:sp>
         <p:nvSpPr>
-          <p:cNvPr id="13" name="Text 11"/>
-          <p:cNvSpPr txBox="1"/>
-          <p:nvPr/>
-        </p:nvSpPr>
-        <p:spPr>
-          <a:xfrm>
-            <a:off x="1009650" y="2968724"/>
+          <p:cNvPr id="15" name="Text 13"/>
+          <p:cNvSpPr txBox="1"/>
+          <p:nvPr/>
+        </p:nvSpPr>
+        <p:spPr>
+          <a:xfrm>
+            <a:off x="1009650" y="3173115"/>
             <a:ext cx="3117672" cy="234950"/>
           </a:xfrm>
           <a:prstGeom prst="rect">
@@ -2591,7 +2653,7 @@
                 <a:ea typeface="+mn-lt" pitchFamily="34" charset="-122"/>
                 <a:cs typeface="+mn-lt" pitchFamily="34" charset="-120"/>
               </a:rPr>
-              <a:t>Переговоры о цене и доступности</a:t>
+              <a:t>Цены и качество конкурентов</a:t>
             </a:r>
             <a:endParaRPr lang="en-US" sz="1200" dirty="0"/>
           </a:p>
@@ -2599,13 +2661,13 @@
       </p:sp>
       <p:sp>
         <p:nvSpPr>
-          <p:cNvPr id="14" name="Shape 12"/>
+          <p:cNvPr id="16" name="Shape 14"/>
           <p:cNvSpPr/>
           <p:nvPr/>
         </p:nvSpPr>
         <p:spPr>
           <a:xfrm>
-            <a:off x="1009650" y="3214390"/>
+            <a:off x="1009650" y="3418780"/>
             <a:ext cx="3026866" cy="0"/>
           </a:xfrm>
           <a:prstGeom prst="line">
@@ -2622,13 +2684,13 @@
       </p:sp>
       <p:sp>
         <p:nvSpPr>
-          <p:cNvPr id="15" name="Text 13"/>
-          <p:cNvSpPr txBox="1"/>
-          <p:nvPr/>
-        </p:nvSpPr>
-        <p:spPr>
-          <a:xfrm>
-            <a:off x="1009650" y="3236615"/>
+          <p:cNvPr id="17" name="Text 15"/>
+          <p:cNvSpPr txBox="1"/>
+          <p:nvPr/>
+        </p:nvSpPr>
+        <p:spPr>
+          <a:xfrm>
+            <a:off x="1009650" y="3428305"/>
             <a:ext cx="3117672" cy="234950"/>
           </a:xfrm>
           <a:prstGeom prst="rect">
@@ -2653,7 +2715,7 @@
                 <a:ea typeface="+mn-lt" pitchFamily="34" charset="-122"/>
                 <a:cs typeface="+mn-lt" pitchFamily="34" charset="-120"/>
               </a:rPr>
-              <a:t>Цены и качество конкурентов</a:t>
+              <a:t>Предварительная экономика заказа</a:t>
             </a:r>
             <a:endParaRPr lang="en-US" sz="1200" dirty="0"/>
           </a:p>
@@ -2661,20 +2723,20 @@
       </p:sp>
       <p:sp>
         <p:nvSpPr>
-          <p:cNvPr id="16" name="Shape 14"/>
+          <p:cNvPr id="18" name="Shape 16"/>
           <p:cNvSpPr/>
           <p:nvPr/>
         </p:nvSpPr>
         <p:spPr>
           <a:xfrm>
-            <a:off x="1009650" y="3482280"/>
+            <a:off x="1009650" y="3740646"/>
             <a:ext cx="3026866" cy="0"/>
           </a:xfrm>
           <a:prstGeom prst="line">
             <a:avLst/>
           </a:prstGeom>
           <a:noFill/>
-          <a:ln w="6350">
+          <a:ln w="12700">
             <a:solidFill>
               <a:srgbClr val="E2D7C5"/>
             </a:solidFill>
@@ -2684,75 +2746,13 @@
       </p:sp>
       <p:sp>
         <p:nvSpPr>
-          <p:cNvPr id="17" name="Text 15"/>
-          <p:cNvSpPr txBox="1"/>
-          <p:nvPr/>
-        </p:nvSpPr>
-        <p:spPr>
-          <a:xfrm>
-            <a:off x="1009650" y="3504505"/>
-            <a:ext cx="3117672" cy="234950"/>
-          </a:xfrm>
-          <a:prstGeom prst="rect">
-            <a:avLst/>
-          </a:prstGeom>
-          <a:noFill/>
-          <a:ln/>
-        </p:spPr>
-        <p:txBody>
-          <a:bodyPr wrap="square" lIns="0" tIns="0" rIns="0" bIns="0" rtlCol="0" anchor="ctr"/>
-          <a:lstStyle/>
-          <a:p>
-            <a:pPr algn="l" indent="0" marL="0">
-              <a:buNone/>
-            </a:pPr>
-            <a:r>
-              <a:rPr lang="ru-RU" altLang="en-US" sz="1200" dirty="0">
-                <a:solidFill>
-                  <a:schemeClr val="tx2"/>
-                </a:solidFill>
-                <a:latin typeface="+mn-lt" pitchFamily="34" charset="0"/>
-                <a:ea typeface="+mn-lt" pitchFamily="34" charset="-122"/>
-                <a:cs typeface="+mn-lt" pitchFamily="34" charset="-120"/>
-              </a:rPr>
-              <a:t>Предварительная экономика заказа</a:t>
-            </a:r>
-            <a:endParaRPr lang="en-US" sz="1200" dirty="0"/>
-          </a:p>
-        </p:txBody>
-      </p:sp>
-      <p:sp>
-        <p:nvSpPr>
-          <p:cNvPr id="18" name="Shape 16"/>
-          <p:cNvSpPr/>
-          <p:nvPr/>
-        </p:nvSpPr>
-        <p:spPr>
-          <a:xfrm>
-            <a:off x="1009650" y="3750171"/>
-            <a:ext cx="3026866" cy="0"/>
-          </a:xfrm>
-          <a:prstGeom prst="line">
-            <a:avLst/>
-          </a:prstGeom>
-          <a:noFill/>
-          <a:ln w="6350">
-            <a:solidFill>
-              <a:srgbClr val="E2D7C5"/>
-            </a:solidFill>
-            <a:prstDash val="solid"/>
-          </a:ln>
-        </p:spPr>
-      </p:sp>
-      <p:sp>
-        <p:nvSpPr>
           <p:cNvPr id="19" name="Text 17"/>
           <p:cNvSpPr txBox="1"/>
           <p:nvPr/>
         </p:nvSpPr>
         <p:spPr>
           <a:xfrm>
-            <a:off x="1009650" y="3791446"/>
+            <a:off x="1009650" y="3810496"/>
             <a:ext cx="3117672" cy="407591"/>
           </a:xfrm>
           <a:prstGeom prst="rect">
@@ -2812,12 +2812,12 @@
         </p:nvSpPr>
         <p:spPr>
           <a:xfrm>
-            <a:off x="4388941" y="1525687"/>
-            <a:ext cx="3414216" cy="2804716"/>
+            <a:off x="4388941" y="1417737"/>
+            <a:ext cx="3414216" cy="2931716"/>
           </a:xfrm>
           <a:prstGeom prst="roundRect">
             <a:avLst>
-              <a:gd name="adj" fmla="val 5434"/>
+              <a:gd name="adj" fmla="val 5198"/>
             </a:avLst>
           </a:prstGeom>
           <a:solidFill>
@@ -2833,13 +2833,36 @@
       </p:sp>
       <p:sp>
         <p:nvSpPr>
-          <p:cNvPr id="21" name="Text 19"/>
-          <p:cNvSpPr txBox="1"/>
-          <p:nvPr/>
-        </p:nvSpPr>
-        <p:spPr>
-          <a:xfrm>
-            <a:off x="4582616" y="1643162"/>
+          <p:cNvPr id="21" name="Shape 19"/>
+          <p:cNvSpPr/>
+          <p:nvPr/>
+        </p:nvSpPr>
+        <p:spPr>
+          <a:xfrm>
+            <a:off x="4582616" y="2088852"/>
+            <a:ext cx="3026866" cy="0"/>
+          </a:xfrm>
+          <a:prstGeom prst="line">
+            <a:avLst/>
+          </a:prstGeom>
+          <a:noFill/>
+          <a:ln w="12700">
+            <a:solidFill>
+              <a:srgbClr val="E2D7C5"/>
+            </a:solidFill>
+            <a:prstDash val="solid"/>
+          </a:ln>
+        </p:spPr>
+      </p:sp>
+      <p:sp>
+        <p:nvSpPr>
+          <p:cNvPr id="22" name="Text 20"/>
+          <p:cNvSpPr txBox="1"/>
+          <p:nvPr/>
+        </p:nvSpPr>
+        <p:spPr>
+          <a:xfrm>
+            <a:off x="4582616" y="1535212"/>
             <a:ext cx="3117672" cy="266700"/>
           </a:xfrm>
           <a:prstGeom prst="rect">
@@ -2872,13 +2895,13 @@
       </p:sp>
       <p:sp>
         <p:nvSpPr>
-          <p:cNvPr id="22" name="Text 20"/>
-          <p:cNvSpPr txBox="1"/>
-          <p:nvPr/>
-        </p:nvSpPr>
-        <p:spPr>
-          <a:xfrm>
-            <a:off x="4582616" y="1897162"/>
+          <p:cNvPr id="23" name="Text 21"/>
+          <p:cNvSpPr txBox="1"/>
+          <p:nvPr/>
+        </p:nvSpPr>
+        <p:spPr>
+          <a:xfrm>
+            <a:off x="4582616" y="1789212"/>
             <a:ext cx="3117672" cy="234950"/>
           </a:xfrm>
           <a:prstGeom prst="rect">
@@ -2911,13 +2934,52 @@
       </p:sp>
       <p:sp>
         <p:nvSpPr>
-          <p:cNvPr id="23" name="Shape 21"/>
+          <p:cNvPr id="24" name="Text 22"/>
+          <p:cNvSpPr txBox="1"/>
+          <p:nvPr/>
+        </p:nvSpPr>
+        <p:spPr>
+          <a:xfrm>
+            <a:off x="4582616" y="2152352"/>
+            <a:ext cx="3117672" cy="234950"/>
+          </a:xfrm>
+          <a:prstGeom prst="rect">
+            <a:avLst/>
+          </a:prstGeom>
+          <a:noFill/>
+          <a:ln/>
+        </p:spPr>
+        <p:txBody>
+          <a:bodyPr wrap="square" lIns="0" tIns="0" rIns="0" bIns="0" rtlCol="0" anchor="ctr"/>
+          <a:lstStyle/>
+          <a:p>
+            <a:pPr algn="l" indent="0" marL="0">
+              <a:buNone/>
+            </a:pPr>
+            <a:r>
+              <a:rPr lang="ru-RU" altLang="en-US" sz="1200" dirty="0">
+                <a:solidFill>
+                  <a:schemeClr val="tx2"/>
+                </a:solidFill>
+                <a:latin typeface="+mn-lt" pitchFamily="34" charset="0"/>
+                <a:ea typeface="+mn-lt" pitchFamily="34" charset="-122"/>
+                <a:cs typeface="+mn-lt" pitchFamily="34" charset="-120"/>
+              </a:rPr>
+              <a:t>2–3 небольших пилотных заказа</a:t>
+            </a:r>
+            <a:endParaRPr lang="en-US" sz="1200" dirty="0"/>
+          </a:p>
+        </p:txBody>
+      </p:sp>
+      <p:sp>
+        <p:nvSpPr>
+          <p:cNvPr id="25" name="Shape 23"/>
           <p:cNvSpPr/>
           <p:nvPr/>
         </p:nvSpPr>
         <p:spPr>
           <a:xfrm>
-            <a:off x="4582616" y="2142827"/>
+            <a:off x="4582616" y="2398018"/>
             <a:ext cx="3026866" cy="0"/>
           </a:xfrm>
           <a:prstGeom prst="line">
@@ -2934,13 +2996,13 @@
       </p:sp>
       <p:sp>
         <p:nvSpPr>
-          <p:cNvPr id="24" name="Text 22"/>
-          <p:cNvSpPr txBox="1"/>
-          <p:nvPr/>
-        </p:nvSpPr>
-        <p:spPr>
-          <a:xfrm>
-            <a:off x="4582616" y="2165052"/>
+          <p:cNvPr id="26" name="Text 24"/>
+          <p:cNvSpPr txBox="1"/>
+          <p:nvPr/>
+        </p:nvSpPr>
+        <p:spPr>
+          <a:xfrm>
+            <a:off x="4582616" y="2407543"/>
             <a:ext cx="3117672" cy="234950"/>
           </a:xfrm>
           <a:prstGeom prst="rect">
@@ -2965,7 +3027,7 @@
                 <a:ea typeface="+mn-lt" pitchFamily="34" charset="-122"/>
                 <a:cs typeface="+mn-lt" pitchFamily="34" charset="-120"/>
               </a:rPr>
-              <a:t>2–3 небольших пилотных заказа</a:t>
+              <a:t>Работоспособность оборудования</a:t>
             </a:r>
             <a:endParaRPr lang="en-US" sz="1200" dirty="0"/>
           </a:p>
@@ -2973,13 +3035,13 @@
       </p:sp>
       <p:sp>
         <p:nvSpPr>
-          <p:cNvPr id="25" name="Shape 23"/>
+          <p:cNvPr id="27" name="Shape 25"/>
           <p:cNvSpPr/>
           <p:nvPr/>
         </p:nvSpPr>
         <p:spPr>
           <a:xfrm>
-            <a:off x="4582616" y="2410718"/>
+            <a:off x="4582616" y="2653209"/>
             <a:ext cx="3026866" cy="0"/>
           </a:xfrm>
           <a:prstGeom prst="line">
@@ -2996,13 +3058,13 @@
       </p:sp>
       <p:sp>
         <p:nvSpPr>
-          <p:cNvPr id="26" name="Text 24"/>
-          <p:cNvSpPr txBox="1"/>
-          <p:nvPr/>
-        </p:nvSpPr>
-        <p:spPr>
-          <a:xfrm>
-            <a:off x="4582616" y="2432943"/>
+          <p:cNvPr id="28" name="Text 26"/>
+          <p:cNvSpPr txBox="1"/>
+          <p:nvPr/>
+        </p:nvSpPr>
+        <p:spPr>
+          <a:xfrm>
+            <a:off x="4582616" y="2662734"/>
             <a:ext cx="3117672" cy="234950"/>
           </a:xfrm>
           <a:prstGeom prst="rect">
@@ -3027,7 +3089,7 @@
                 <a:ea typeface="+mn-lt" pitchFamily="34" charset="-122"/>
                 <a:cs typeface="+mn-lt" pitchFamily="34" charset="-120"/>
               </a:rPr>
-              <a:t>Работоспособность оборудования</a:t>
+              <a:t>Фактическая стоимость обслуживания</a:t>
             </a:r>
             <a:endParaRPr lang="en-US" sz="1200" dirty="0"/>
           </a:p>
@@ -3035,13 +3097,13 @@
       </p:sp>
       <p:sp>
         <p:nvSpPr>
-          <p:cNvPr id="27" name="Shape 25"/>
+          <p:cNvPr id="29" name="Shape 27"/>
           <p:cNvSpPr/>
           <p:nvPr/>
         </p:nvSpPr>
         <p:spPr>
           <a:xfrm>
-            <a:off x="4582616" y="2678609"/>
+            <a:off x="4582616" y="2908399"/>
             <a:ext cx="3026866" cy="0"/>
           </a:xfrm>
           <a:prstGeom prst="line">
@@ -3058,13 +3120,13 @@
       </p:sp>
       <p:sp>
         <p:nvSpPr>
-          <p:cNvPr id="28" name="Text 26"/>
-          <p:cNvSpPr txBox="1"/>
-          <p:nvPr/>
-        </p:nvSpPr>
-        <p:spPr>
-          <a:xfrm>
-            <a:off x="4582616" y="2700834"/>
+          <p:cNvPr id="30" name="Text 28"/>
+          <p:cNvSpPr txBox="1"/>
+          <p:nvPr/>
+        </p:nvSpPr>
+        <p:spPr>
+          <a:xfrm>
+            <a:off x="4582616" y="2917924"/>
             <a:ext cx="3117672" cy="234950"/>
           </a:xfrm>
           <a:prstGeom prst="rect">
@@ -3089,7 +3151,7 @@
                 <a:ea typeface="+mn-lt" pitchFamily="34" charset="-122"/>
                 <a:cs typeface="+mn-lt" pitchFamily="34" charset="-120"/>
               </a:rPr>
-              <a:t>Фактическая стоимость обслуживания</a:t>
+              <a:t>Качество и сроки исполнения</a:t>
             </a:r>
             <a:endParaRPr lang="en-US" sz="1200" dirty="0"/>
           </a:p>
@@ -3097,13 +3159,13 @@
       </p:sp>
       <p:sp>
         <p:nvSpPr>
-          <p:cNvPr id="29" name="Shape 27"/>
+          <p:cNvPr id="31" name="Shape 29"/>
           <p:cNvSpPr/>
           <p:nvPr/>
         </p:nvSpPr>
         <p:spPr>
           <a:xfrm>
-            <a:off x="4582616" y="2946499"/>
+            <a:off x="4582616" y="3163590"/>
             <a:ext cx="3026866" cy="0"/>
           </a:xfrm>
           <a:prstGeom prst="line">
@@ -3120,13 +3182,13 @@
       </p:sp>
       <p:sp>
         <p:nvSpPr>
-          <p:cNvPr id="30" name="Text 28"/>
-          <p:cNvSpPr txBox="1"/>
-          <p:nvPr/>
-        </p:nvSpPr>
-        <p:spPr>
-          <a:xfrm>
-            <a:off x="4582616" y="2968724"/>
+          <p:cNvPr id="32" name="Text 30"/>
+          <p:cNvSpPr txBox="1"/>
+          <p:nvPr/>
+        </p:nvSpPr>
+        <p:spPr>
+          <a:xfrm>
+            <a:off x="4582616" y="3173115"/>
             <a:ext cx="3117672" cy="234950"/>
           </a:xfrm>
           <a:prstGeom prst="rect">
@@ -3151,7 +3213,7 @@
                 <a:ea typeface="+mn-lt" pitchFamily="34" charset="-122"/>
                 <a:cs typeface="+mn-lt" pitchFamily="34" charset="-120"/>
               </a:rPr>
-              <a:t>Качество и сроки исполнения</a:t>
+              <a:t>Повторный спрос</a:t>
             </a:r>
             <a:endParaRPr lang="en-US" sz="1200" dirty="0"/>
           </a:p>
@@ -3159,13 +3221,13 @@
       </p:sp>
       <p:sp>
         <p:nvSpPr>
-          <p:cNvPr id="31" name="Shape 29"/>
+          <p:cNvPr id="33" name="Shape 31"/>
           <p:cNvSpPr/>
           <p:nvPr/>
         </p:nvSpPr>
         <p:spPr>
           <a:xfrm>
-            <a:off x="4582616" y="3214390"/>
+            <a:off x="4582616" y="3418780"/>
             <a:ext cx="3026866" cy="0"/>
           </a:xfrm>
           <a:prstGeom prst="line">
@@ -3182,13 +3244,13 @@
       </p:sp>
       <p:sp>
         <p:nvSpPr>
-          <p:cNvPr id="32" name="Text 30"/>
-          <p:cNvSpPr txBox="1"/>
-          <p:nvPr/>
-        </p:nvSpPr>
-        <p:spPr>
-          <a:xfrm>
-            <a:off x="4582616" y="3236615"/>
+          <p:cNvPr id="34" name="Text 32"/>
+          <p:cNvSpPr txBox="1"/>
+          <p:nvPr/>
+        </p:nvSpPr>
+        <p:spPr>
+          <a:xfrm>
+            <a:off x="4582616" y="3428305"/>
             <a:ext cx="3117672" cy="234950"/>
           </a:xfrm>
           <a:prstGeom prst="rect">
@@ -3213,7 +3275,7 @@
                 <a:ea typeface="+mn-lt" pitchFamily="34" charset="-122"/>
                 <a:cs typeface="+mn-lt" pitchFamily="34" charset="-120"/>
               </a:rPr>
-              <a:t>Повторный спрос</a:t>
+              <a:t>Возможно — первые платные сделки</a:t>
             </a:r>
             <a:endParaRPr lang="en-US" sz="1200" dirty="0"/>
           </a:p>
@@ -3221,20 +3283,20 @@
       </p:sp>
       <p:sp>
         <p:nvSpPr>
-          <p:cNvPr id="33" name="Shape 31"/>
+          <p:cNvPr id="35" name="Shape 33"/>
           <p:cNvSpPr/>
           <p:nvPr/>
         </p:nvSpPr>
         <p:spPr>
           <a:xfrm>
-            <a:off x="4582616" y="3482280"/>
+            <a:off x="4582616" y="3740646"/>
             <a:ext cx="3026866" cy="0"/>
           </a:xfrm>
           <a:prstGeom prst="line">
             <a:avLst/>
           </a:prstGeom>
           <a:noFill/>
-          <a:ln w="6350">
+          <a:ln w="12700">
             <a:solidFill>
               <a:srgbClr val="E2D7C5"/>
             </a:solidFill>
@@ -3244,75 +3306,13 @@
       </p:sp>
       <p:sp>
         <p:nvSpPr>
-          <p:cNvPr id="34" name="Text 32"/>
-          <p:cNvSpPr txBox="1"/>
-          <p:nvPr/>
-        </p:nvSpPr>
-        <p:spPr>
-          <a:xfrm>
-            <a:off x="4582616" y="3504505"/>
-            <a:ext cx="3117672" cy="234950"/>
-          </a:xfrm>
-          <a:prstGeom prst="rect">
-            <a:avLst/>
-          </a:prstGeom>
-          <a:noFill/>
-          <a:ln/>
-        </p:spPr>
-        <p:txBody>
-          <a:bodyPr wrap="square" lIns="0" tIns="0" rIns="0" bIns="0" rtlCol="0" anchor="ctr"/>
-          <a:lstStyle/>
-          <a:p>
-            <a:pPr algn="l" indent="0" marL="0">
-              <a:buNone/>
-            </a:pPr>
-            <a:r>
-              <a:rPr lang="ru-RU" altLang="en-US" sz="1200" dirty="0">
-                <a:solidFill>
-                  <a:schemeClr val="tx2"/>
-                </a:solidFill>
-                <a:latin typeface="+mn-lt" pitchFamily="34" charset="0"/>
-                <a:ea typeface="+mn-lt" pitchFamily="34" charset="-122"/>
-                <a:cs typeface="+mn-lt" pitchFamily="34" charset="-120"/>
-              </a:rPr>
-              <a:t>Возможно — первые платные сделки</a:t>
-            </a:r>
-            <a:endParaRPr lang="en-US" sz="1200" dirty="0"/>
-          </a:p>
-        </p:txBody>
-      </p:sp>
-      <p:sp>
-        <p:nvSpPr>
-          <p:cNvPr id="35" name="Shape 33"/>
-          <p:cNvSpPr/>
-          <p:nvPr/>
-        </p:nvSpPr>
-        <p:spPr>
-          <a:xfrm>
-            <a:off x="4582616" y="3750171"/>
-            <a:ext cx="3026866" cy="0"/>
-          </a:xfrm>
-          <a:prstGeom prst="line">
-            <a:avLst/>
-          </a:prstGeom>
-          <a:noFill/>
-          <a:ln w="6350">
-            <a:solidFill>
-              <a:srgbClr val="E2D7C5"/>
-            </a:solidFill>
-            <a:prstDash val="solid"/>
-          </a:ln>
-        </p:spPr>
-      </p:sp>
-      <p:sp>
-        <p:nvSpPr>
           <p:cNvPr id="36" name="Text 34"/>
           <p:cNvSpPr txBox="1"/>
           <p:nvPr/>
         </p:nvSpPr>
         <p:spPr>
           <a:xfrm>
-            <a:off x="4582616" y="3791446"/>
+            <a:off x="4582616" y="3810496"/>
             <a:ext cx="3117672" cy="407591"/>
           </a:xfrm>
           <a:prstGeom prst="rect">
@@ -3372,12 +3372,12 @@
         </p:nvSpPr>
         <p:spPr>
           <a:xfrm>
-            <a:off x="7961908" y="1525687"/>
-            <a:ext cx="3414216" cy="2804716"/>
+            <a:off x="7961908" y="1417737"/>
+            <a:ext cx="3414216" cy="2931716"/>
           </a:xfrm>
           <a:prstGeom prst="roundRect">
             <a:avLst>
-              <a:gd name="adj" fmla="val 5434"/>
+              <a:gd name="adj" fmla="val 5198"/>
             </a:avLst>
           </a:prstGeom>
           <a:solidFill>
@@ -3393,13 +3393,36 @@
       </p:sp>
       <p:sp>
         <p:nvSpPr>
-          <p:cNvPr id="38" name="Text 36"/>
-          <p:cNvSpPr txBox="1"/>
-          <p:nvPr/>
-        </p:nvSpPr>
-        <p:spPr>
-          <a:xfrm>
-            <a:off x="8155583" y="1643162"/>
+          <p:cNvPr id="38" name="Shape 36"/>
+          <p:cNvSpPr/>
+          <p:nvPr/>
+        </p:nvSpPr>
+        <p:spPr>
+          <a:xfrm>
+            <a:off x="8155583" y="2088852"/>
+            <a:ext cx="3026866" cy="0"/>
+          </a:xfrm>
+          <a:prstGeom prst="line">
+            <a:avLst/>
+          </a:prstGeom>
+          <a:noFill/>
+          <a:ln w="12700">
+            <a:solidFill>
+              <a:srgbClr val="E2D7C5"/>
+            </a:solidFill>
+            <a:prstDash val="solid"/>
+          </a:ln>
+        </p:spPr>
+      </p:sp>
+      <p:sp>
+        <p:nvSpPr>
+          <p:cNvPr id="39" name="Text 37"/>
+          <p:cNvSpPr txBox="1"/>
+          <p:nvPr/>
+        </p:nvSpPr>
+        <p:spPr>
+          <a:xfrm>
+            <a:off x="8155583" y="1535212"/>
             <a:ext cx="3117672" cy="266700"/>
           </a:xfrm>
           <a:prstGeom prst="rect">
@@ -3432,13 +3455,13 @@
       </p:sp>
       <p:sp>
         <p:nvSpPr>
-          <p:cNvPr id="39" name="Text 37"/>
-          <p:cNvSpPr txBox="1"/>
-          <p:nvPr/>
-        </p:nvSpPr>
-        <p:spPr>
-          <a:xfrm>
-            <a:off x="8155583" y="1897162"/>
+          <p:cNvPr id="40" name="Text 38"/>
+          <p:cNvSpPr txBox="1"/>
+          <p:nvPr/>
+        </p:nvSpPr>
+        <p:spPr>
+          <a:xfrm>
+            <a:off x="8155583" y="1789212"/>
             <a:ext cx="3117672" cy="234950"/>
           </a:xfrm>
           <a:prstGeom prst="rect">
@@ -3471,13 +3494,52 @@
       </p:sp>
       <p:sp>
         <p:nvSpPr>
-          <p:cNvPr id="40" name="Shape 38"/>
+          <p:cNvPr id="41" name="Text 39"/>
+          <p:cNvSpPr txBox="1"/>
+          <p:nvPr/>
+        </p:nvSpPr>
+        <p:spPr>
+          <a:xfrm>
+            <a:off x="8155583" y="2152352"/>
+            <a:ext cx="3117672" cy="234950"/>
+          </a:xfrm>
+          <a:prstGeom prst="rect">
+            <a:avLst/>
+          </a:prstGeom>
+          <a:noFill/>
+          <a:ln/>
+        </p:spPr>
+        <p:txBody>
+          <a:bodyPr wrap="square" lIns="0" tIns="0" rIns="0" bIns="0" rtlCol="0" anchor="ctr"/>
+          <a:lstStyle/>
+          <a:p>
+            <a:pPr algn="l" indent="0" marL="0">
+              <a:buNone/>
+            </a:pPr>
+            <a:r>
+              <a:rPr lang="ru-RU" altLang="en-US" sz="1200" dirty="0">
+                <a:solidFill>
+                  <a:schemeClr val="tx2"/>
+                </a:solidFill>
+                <a:latin typeface="+mn-lt" pitchFamily="34" charset="0"/>
+                <a:ea typeface="+mn-lt" pitchFamily="34" charset="-122"/>
+                <a:cs typeface="+mn-lt" pitchFamily="34" charset="-120"/>
+              </a:rPr>
+              <a:t>Больше партнёров и клиентов</a:t>
+            </a:r>
+            <a:endParaRPr lang="en-US" sz="1200" dirty="0"/>
+          </a:p>
+        </p:txBody>
+      </p:sp>
+      <p:sp>
+        <p:nvSpPr>
+          <p:cNvPr id="42" name="Shape 40"/>
           <p:cNvSpPr/>
           <p:nvPr/>
         </p:nvSpPr>
         <p:spPr>
           <a:xfrm>
-            <a:off x="8155583" y="2142827"/>
+            <a:off x="8155583" y="2398018"/>
             <a:ext cx="3026866" cy="0"/>
           </a:xfrm>
           <a:prstGeom prst="line">
@@ -3494,13 +3556,13 @@
       </p:sp>
       <p:sp>
         <p:nvSpPr>
-          <p:cNvPr id="41" name="Text 39"/>
-          <p:cNvSpPr txBox="1"/>
-          <p:nvPr/>
-        </p:nvSpPr>
-        <p:spPr>
-          <a:xfrm>
-            <a:off x="8155583" y="2165052"/>
+          <p:cNvPr id="43" name="Text 41"/>
+          <p:cNvSpPr txBox="1"/>
+          <p:nvPr/>
+        </p:nvSpPr>
+        <p:spPr>
+          <a:xfrm>
+            <a:off x="8155583" y="2407543"/>
             <a:ext cx="3117672" cy="234950"/>
           </a:xfrm>
           <a:prstGeom prst="rect">
@@ -3525,7 +3587,7 @@
                 <a:ea typeface="+mn-lt" pitchFamily="34" charset="-122"/>
                 <a:cs typeface="+mn-lt" pitchFamily="34" charset="-120"/>
               </a:rPr>
-              <a:t>Больше партнёров и клиентов</a:t>
+              <a:t>Автоматизация трудоёмких операций</a:t>
             </a:r>
             <a:endParaRPr lang="en-US" sz="1200" dirty="0"/>
           </a:p>
@@ -3533,13 +3595,13 @@
       </p:sp>
       <p:sp>
         <p:nvSpPr>
-          <p:cNvPr id="42" name="Shape 40"/>
+          <p:cNvPr id="44" name="Shape 42"/>
           <p:cNvSpPr/>
           <p:nvPr/>
         </p:nvSpPr>
         <p:spPr>
           <a:xfrm>
-            <a:off x="8155583" y="2410718"/>
+            <a:off x="8155583" y="2653209"/>
             <a:ext cx="3026866" cy="0"/>
           </a:xfrm>
           <a:prstGeom prst="line">
@@ -3556,13 +3618,13 @@
       </p:sp>
       <p:sp>
         <p:nvSpPr>
-          <p:cNvPr id="43" name="Text 41"/>
-          <p:cNvSpPr txBox="1"/>
-          <p:nvPr/>
-        </p:nvSpPr>
-        <p:spPr>
-          <a:xfrm>
-            <a:off x="8155583" y="2432943"/>
+          <p:cNvPr id="45" name="Text 43"/>
+          <p:cNvSpPr txBox="1"/>
+          <p:nvPr/>
+        </p:nvSpPr>
+        <p:spPr>
+          <a:xfrm>
+            <a:off x="8155583" y="2662734"/>
             <a:ext cx="3117672" cy="234950"/>
           </a:xfrm>
           <a:prstGeom prst="rect">
@@ -3587,7 +3649,7 @@
                 <a:ea typeface="+mn-lt" pitchFamily="34" charset="-122"/>
                 <a:cs typeface="+mn-lt" pitchFamily="34" charset="-120"/>
               </a:rPr>
-              <a:t>Автоматизация трудоёмких операций</a:t>
+              <a:t>Оценка разработки своей платформы</a:t>
             </a:r>
             <a:endParaRPr lang="en-US" sz="1200" dirty="0"/>
           </a:p>
@@ -3595,13 +3657,13 @@
       </p:sp>
       <p:sp>
         <p:nvSpPr>
-          <p:cNvPr id="44" name="Shape 42"/>
+          <p:cNvPr id="46" name="Shape 44"/>
           <p:cNvSpPr/>
           <p:nvPr/>
         </p:nvSpPr>
         <p:spPr>
           <a:xfrm>
-            <a:off x="8155583" y="2678609"/>
+            <a:off x="8155583" y="2908399"/>
             <a:ext cx="3026866" cy="0"/>
           </a:xfrm>
           <a:prstGeom prst="line">
@@ -3618,13 +3680,13 @@
       </p:sp>
       <p:sp>
         <p:nvSpPr>
-          <p:cNvPr id="45" name="Text 43"/>
-          <p:cNvSpPr txBox="1"/>
-          <p:nvPr/>
-        </p:nvSpPr>
-        <p:spPr>
-          <a:xfrm>
-            <a:off x="8155583" y="2700834"/>
+          <p:cNvPr id="47" name="Text 45"/>
+          <p:cNvSpPr txBox="1"/>
+          <p:nvPr/>
+        </p:nvSpPr>
+        <p:spPr>
+          <a:xfrm>
+            <a:off x="8155583" y="2917924"/>
             <a:ext cx="3117672" cy="234950"/>
           </a:xfrm>
           <a:prstGeom prst="rect">
@@ -3649,7 +3711,7 @@
                 <a:ea typeface="+mn-lt" pitchFamily="34" charset="-122"/>
                 <a:cs typeface="+mn-lt" pitchFamily="34" charset="-120"/>
               </a:rPr>
-              <a:t>Оценка разработки своей платформы</a:t>
+              <a:t>Поиск технического сооснователя</a:t>
             </a:r>
             <a:endParaRPr lang="en-US" sz="1200" dirty="0"/>
           </a:p>
@@ -3657,13 +3719,13 @@
       </p:sp>
       <p:sp>
         <p:nvSpPr>
-          <p:cNvPr id="46" name="Shape 44"/>
+          <p:cNvPr id="48" name="Shape 46"/>
           <p:cNvSpPr/>
           <p:nvPr/>
         </p:nvSpPr>
         <p:spPr>
           <a:xfrm>
-            <a:off x="8155583" y="2946499"/>
+            <a:off x="8155583" y="3163590"/>
             <a:ext cx="3026866" cy="0"/>
           </a:xfrm>
           <a:prstGeom prst="line">
@@ -3680,13 +3742,13 @@
       </p:sp>
       <p:sp>
         <p:nvSpPr>
-          <p:cNvPr id="47" name="Text 45"/>
-          <p:cNvSpPr txBox="1"/>
-          <p:nvPr/>
-        </p:nvSpPr>
-        <p:spPr>
-          <a:xfrm>
-            <a:off x="8155583" y="2968724"/>
+          <p:cNvPr id="49" name="Text 47"/>
+          <p:cNvSpPr txBox="1"/>
+          <p:nvPr/>
+        </p:nvSpPr>
+        <p:spPr>
+          <a:xfrm>
+            <a:off x="8155583" y="3173115"/>
             <a:ext cx="3117672" cy="234950"/>
           </a:xfrm>
           <a:prstGeom prst="rect">
@@ -3711,7 +3773,7 @@
                 <a:ea typeface="+mn-lt" pitchFamily="34" charset="-122"/>
                 <a:cs typeface="+mn-lt" pitchFamily="34" charset="-120"/>
               </a:rPr>
-              <a:t>Поиск технического сооснователя</a:t>
+              <a:t>Уточнение модели масштабирования</a:t>
             </a:r>
             <a:endParaRPr lang="en-US" sz="1200" dirty="0"/>
           </a:p>
@@ -3719,20 +3781,20 @@
       </p:sp>
       <p:sp>
         <p:nvSpPr>
-          <p:cNvPr id="48" name="Shape 46"/>
+          <p:cNvPr id="50" name="Shape 48"/>
           <p:cNvSpPr/>
           <p:nvPr/>
         </p:nvSpPr>
         <p:spPr>
           <a:xfrm>
-            <a:off x="8155583" y="3214390"/>
+            <a:off x="8155583" y="3740646"/>
             <a:ext cx="3026866" cy="0"/>
           </a:xfrm>
           <a:prstGeom prst="line">
             <a:avLst/>
           </a:prstGeom>
           <a:noFill/>
-          <a:ln w="6350">
+          <a:ln w="12700">
             <a:solidFill>
               <a:srgbClr val="E2D7C5"/>
             </a:solidFill>
@@ -3742,14 +3804,96 @@
       </p:sp>
       <p:sp>
         <p:nvSpPr>
-          <p:cNvPr id="49" name="Text 47"/>
-          <p:cNvSpPr txBox="1"/>
-          <p:nvPr/>
-        </p:nvSpPr>
-        <p:spPr>
-          <a:xfrm>
-            <a:off x="8155583" y="3236615"/>
-            <a:ext cx="3117672" cy="234950"/>
+          <p:cNvPr id="51" name="Text 49"/>
+          <p:cNvSpPr txBox="1"/>
+          <p:nvPr/>
+        </p:nvSpPr>
+        <p:spPr>
+          <a:xfrm>
+            <a:off x="8155583" y="3810496"/>
+            <a:ext cx="3117672" cy="407591"/>
+          </a:xfrm>
+          <a:prstGeom prst="rect">
+            <a:avLst/>
+          </a:prstGeom>
+          <a:noFill/>
+          <a:ln/>
+        </p:spPr>
+        <p:txBody>
+          <a:bodyPr wrap="square" lIns="0" tIns="0" rIns="0" bIns="0" rtlCol="0" anchor="t"/>
+          <a:lstStyle/>
+          <a:p>
+            <a:pPr algn="l" indent="0" marL="0">
+              <a:lnSpc>
+                <a:spcPts val="1560"/>
+              </a:lnSpc>
+              <a:buNone/>
+            </a:pPr>
+            <a:r>
+              <a:rPr lang="ru-RU" altLang="en-US" sz="1200" b="1" dirty="0">
+                <a:solidFill>
+                  <a:schemeClr val="accent2"/>
+                </a:solidFill>
+                <a:latin typeface="+mn-lt" pitchFamily="34" charset="0"/>
+                <a:ea typeface="+mn-lt" pitchFamily="34" charset="-122"/>
+                <a:cs typeface="+mn-lt" pitchFamily="34" charset="-120"/>
+              </a:rPr>
+              <a:t>Если нет — корректируем гипотезу или </a:t>
+            </a:r>
+            <a:br/>
+            <a:pPr algn="l" indent="0" marL="0">
+              <a:lnSpc>
+                <a:spcPts val="1560"/>
+              </a:lnSpc>
+              <a:buNone/>
+            </a:pPr>
+            <a:r>
+              <a:rPr lang="ru-RU" altLang="en-US" sz="1200" b="1" dirty="0">
+                <a:solidFill>
+                  <a:schemeClr val="accent2"/>
+                </a:solidFill>
+                <a:latin typeface="+mn-lt" pitchFamily="34" charset="0"/>
+                <a:ea typeface="+mn-lt" pitchFamily="34" charset="-122"/>
+                <a:cs typeface="+mn-lt" pitchFamily="34" charset="-120"/>
+              </a:rPr>
+              <a:t>отказываемся от неё</a:t>
+            </a:r>
+            <a:endParaRPr lang="en-US" sz="1200" dirty="0"/>
+          </a:p>
+        </p:txBody>
+      </p:sp>
+      <p:sp>
+        <p:nvSpPr>
+          <p:cNvPr id="52" name="Shape 50"/>
+          <p:cNvSpPr/>
+          <p:nvPr/>
+        </p:nvSpPr>
+        <p:spPr>
+          <a:xfrm>
+            <a:off x="812800" y="4563269"/>
+            <a:ext cx="10566400" cy="1481832"/>
+          </a:xfrm>
+          <a:prstGeom prst="roundRect">
+            <a:avLst>
+              <a:gd name="adj" fmla="val 10285"/>
+            </a:avLst>
+          </a:prstGeom>
+          <a:solidFill>
+            <a:schemeClr val="tx1"/>
+          </a:solidFill>
+          <a:ln/>
+        </p:spPr>
+      </p:sp>
+      <p:sp>
+        <p:nvSpPr>
+          <p:cNvPr id="53" name="Text 51"/>
+          <p:cNvSpPr txBox="1"/>
+          <p:nvPr/>
+        </p:nvSpPr>
+        <p:spPr>
+          <a:xfrm>
+            <a:off x="1066800" y="4722019"/>
+            <a:ext cx="2223770" cy="342900"/>
           </a:xfrm>
           <a:prstGeom prst="rect">
             <a:avLst/>
@@ -3765,15 +3909,93 @@
               <a:buNone/>
             </a:pPr>
             <a:r>
+              <a:rPr lang="ru-RU" altLang="en-US" sz="2000" spc="-50" kern="0" dirty="0">
+                <a:solidFill>
+                  <a:schemeClr val="accent1"/>
+                </a:solidFill>
+                <a:latin typeface="+mj-lt" pitchFamily="34" charset="0"/>
+                <a:ea typeface="+mj-lt" pitchFamily="34" charset="-122"/>
+                <a:cs typeface="+mj-lt" pitchFamily="34" charset="-120"/>
+              </a:rPr>
+              <a:t>Бюджет</a:t>
+            </a:r>
+            <a:endParaRPr lang="en-US" sz="2000" dirty="0"/>
+          </a:p>
+        </p:txBody>
+      </p:sp>
+      <p:sp>
+        <p:nvSpPr>
+          <p:cNvPr id="54" name="Text 52"/>
+          <p:cNvSpPr txBox="1"/>
+          <p:nvPr/>
+        </p:nvSpPr>
+        <p:spPr>
+          <a:xfrm>
+            <a:off x="1066800" y="5096669"/>
+            <a:ext cx="2223770" cy="620911"/>
+          </a:xfrm>
+          <a:prstGeom prst="rect">
+            <a:avLst/>
+          </a:prstGeom>
+          <a:noFill/>
+          <a:ln/>
+        </p:spPr>
+        <p:txBody>
+          <a:bodyPr wrap="square" lIns="0" tIns="0" rIns="0" bIns="0" rtlCol="0" anchor="t"/>
+          <a:lstStyle/>
+          <a:p>
+            <a:pPr algn="l" indent="0" marL="0">
+              <a:lnSpc>
+                <a:spcPts val="1620"/>
+              </a:lnSpc>
+              <a:buNone/>
+            </a:pPr>
+            <a:r>
               <a:rPr lang="ru-RU" altLang="en-US" sz="1200" dirty="0">
                 <a:solidFill>
-                  <a:schemeClr val="tx2"/>
-                </a:solidFill>
-                <a:latin typeface="+mn-lt" pitchFamily="34" charset="0"/>
-                <a:ea typeface="+mn-lt" pitchFamily="34" charset="-122"/>
-                <a:cs typeface="+mn-lt" pitchFamily="34" charset="-120"/>
-              </a:rPr>
-              <a:t>Уточнение модели масштабирования</a:t>
+                  <a:schemeClr val="bg1"/>
+                </a:solidFill>
+                <a:latin typeface="+mn-lt" pitchFamily="34" charset="0"/>
+                <a:ea typeface="+mn-lt" pitchFamily="34" charset="-122"/>
+                <a:cs typeface="+mn-lt" pitchFamily="34" charset="-120"/>
+              </a:rPr>
+              <a:t>в два этапа; суммы ручного </a:t>
+            </a:r>
+            <a:br/>
+            <a:pPr algn="l" indent="0" marL="0">
+              <a:lnSpc>
+                <a:spcPts val="1620"/>
+              </a:lnSpc>
+              <a:buNone/>
+            </a:pPr>
+            <a:r>
+              <a:rPr lang="ru-RU" altLang="en-US" sz="1200" dirty="0">
+                <a:solidFill>
+                  <a:schemeClr val="bg1"/>
+                </a:solidFill>
+                <a:latin typeface="+mn-lt" pitchFamily="34" charset="0"/>
+                <a:ea typeface="+mn-lt" pitchFamily="34" charset="-122"/>
+                <a:cs typeface="+mn-lt" pitchFamily="34" charset="-120"/>
+              </a:rPr>
+              <a:t>пилота уточним после </a:t>
+            </a:r>
+            <a:br/>
+            <a:pPr algn="l" indent="0" marL="0">
+              <a:lnSpc>
+                <a:spcPts val="1620"/>
+              </a:lnSpc>
+              <a:buNone/>
+            </a:pPr>
+            <a:r>
+              <a:rPr lang="ru-RU" altLang="en-US" sz="1200" dirty="0">
+                <a:solidFill>
+                  <a:schemeClr val="bg1"/>
+                </a:solidFill>
+                <a:latin typeface="+mn-lt" pitchFamily="34" charset="0"/>
+                <a:ea typeface="+mn-lt" pitchFamily="34" charset="-122"/>
+                <a:cs typeface="+mn-lt" pitchFamily="34" charset="-120"/>
+              </a:rPr>
+              <a:t>первого месяца</a:t>
             </a:r>
             <a:endParaRPr lang="en-US" sz="1200" dirty="0"/>
           </a:p>
@@ -3781,14 +4003,14 @@
       </p:sp>
       <p:sp>
         <p:nvSpPr>
-          <p:cNvPr id="50" name="Shape 48"/>
+          <p:cNvPr id="55" name="Shape 53"/>
           <p:cNvSpPr/>
           <p:nvPr/>
         </p:nvSpPr>
         <p:spPr>
           <a:xfrm>
-            <a:off x="8155583" y="3482280"/>
-            <a:ext cx="3026866" cy="0"/>
+            <a:off x="3482975" y="4753769"/>
+            <a:ext cx="0" cy="1100832"/>
           </a:xfrm>
           <a:prstGeom prst="line">
             <a:avLst/>
@@ -3796,7 +4018,7 @@
           <a:noFill/>
           <a:ln w="6350">
             <a:solidFill>
-              <a:srgbClr val="E2D7C5"/>
+              <a:schemeClr val="accent4"/>
             </a:solidFill>
             <a:prstDash val="solid"/>
           </a:ln>
@@ -3804,14 +4026,53 @@
       </p:sp>
       <p:sp>
         <p:nvSpPr>
-          <p:cNvPr id="51" name="Text 49"/>
-          <p:cNvSpPr txBox="1"/>
-          <p:nvPr/>
-        </p:nvSpPr>
-        <p:spPr>
-          <a:xfrm>
-            <a:off x="8155583" y="3523555"/>
-            <a:ext cx="3117672" cy="407591"/>
+          <p:cNvPr id="56" name="Text 54"/>
+          <p:cNvSpPr txBox="1"/>
+          <p:nvPr/>
+        </p:nvSpPr>
+        <p:spPr>
+          <a:xfrm>
+            <a:off x="3740150" y="4728369"/>
+            <a:ext cx="3538411" cy="254000"/>
+          </a:xfrm>
+          <a:prstGeom prst="rect">
+            <a:avLst/>
+          </a:prstGeom>
+          <a:noFill/>
+          <a:ln/>
+        </p:spPr>
+        <p:txBody>
+          <a:bodyPr wrap="square" lIns="0" tIns="0" rIns="0" bIns="0" rtlCol="0" anchor="ctr"/>
+          <a:lstStyle/>
+          <a:p>
+            <a:pPr algn="l" indent="0" marL="0">
+              <a:buNone/>
+            </a:pPr>
+            <a:r>
+              <a:rPr lang="ru-RU" altLang="en-US" sz="1300" b="1" dirty="0">
+                <a:solidFill>
+                  <a:schemeClr val="bg1"/>
+                </a:solidFill>
+                <a:latin typeface="+mn-lt" pitchFamily="34" charset="0"/>
+                <a:ea typeface="+mn-lt" pitchFamily="34" charset="-122"/>
+                <a:cs typeface="+mn-lt" pitchFamily="34" charset="-120"/>
+              </a:rPr>
+              <a:t>Коммерческая проверка</a:t>
+            </a:r>
+            <a:endParaRPr lang="en-US" sz="1300" dirty="0"/>
+          </a:p>
+        </p:txBody>
+      </p:sp>
+      <p:sp>
+        <p:nvSpPr>
+          <p:cNvPr id="57" name="Text 55"/>
+          <p:cNvSpPr txBox="1"/>
+          <p:nvPr/>
+        </p:nvSpPr>
+        <p:spPr>
+          <a:xfrm>
+            <a:off x="3740150" y="5031879"/>
+            <a:ext cx="3538411" cy="826591"/>
           </a:xfrm>
           <a:prstGeom prst="rect">
             <a:avLst/>
@@ -3825,38 +4086,74 @@
           <a:p>
             <a:pPr algn="l" indent="0" marL="0">
               <a:lnSpc>
-                <a:spcPts val="1560"/>
-              </a:lnSpc>
-              <a:buNone/>
-            </a:pPr>
-            <a:r>
-              <a:rPr lang="ru-RU" altLang="en-US" sz="1200" b="1" dirty="0">
-                <a:solidFill>
-                  <a:schemeClr val="accent2"/>
-                </a:solidFill>
-                <a:latin typeface="+mn-lt" pitchFamily="34" charset="0"/>
-                <a:ea typeface="+mn-lt" pitchFamily="34" charset="-122"/>
-                <a:cs typeface="+mn-lt" pitchFamily="34" charset="-120"/>
-              </a:rPr>
-              <a:t>Если нет — корректируем гипотезу или </a:t>
+                <a:spcPts val="1620"/>
+              </a:lnSpc>
+              <a:buNone/>
+            </a:pPr>
+            <a:r>
+              <a:rPr lang="ru-RU" altLang="en-US" sz="1200" dirty="0">
+                <a:solidFill>
+                  <a:schemeClr val="accent5"/>
+                </a:solidFill>
+                <a:latin typeface="+mn-lt" pitchFamily="34" charset="0"/>
+                <a:ea typeface="+mn-lt" pitchFamily="34" charset="-122"/>
+                <a:cs typeface="+mn-lt" pitchFamily="34" charset="-120"/>
+              </a:rPr>
+              <a:t>Интервью и продажи, тестовая аренда </a:t>
             </a:r>
             <a:br/>
             <a:pPr algn="l" indent="0" marL="0">
               <a:lnSpc>
-                <a:spcPts val="1560"/>
-              </a:lnSpc>
-              <a:buNone/>
-            </a:pPr>
-            <a:r>
-              <a:rPr lang="ru-RU" altLang="en-US" sz="1200" b="1" dirty="0">
-                <a:solidFill>
-                  <a:schemeClr val="accent2"/>
-                </a:solidFill>
-                <a:latin typeface="+mn-lt" pitchFamily="34" charset="0"/>
-                <a:ea typeface="+mn-lt" pitchFamily="34" charset="-122"/>
-                <a:cs typeface="+mn-lt" pitchFamily="34" charset="-120"/>
-              </a:rPr>
-              <a:t>отказываемся от неё</a:t>
+                <a:spcPts val="1620"/>
+              </a:lnSpc>
+              <a:buNone/>
+            </a:pPr>
+            <a:r>
+              <a:rPr lang="ru-RU" altLang="en-US" sz="1200" dirty="0">
+                <a:solidFill>
+                  <a:schemeClr val="accent5"/>
+                </a:solidFill>
+                <a:latin typeface="+mn-lt" pitchFamily="34" charset="0"/>
+                <a:ea typeface="+mn-lt" pitchFamily="34" charset="-122"/>
+                <a:cs typeface="+mn-lt" pitchFamily="34" charset="-120"/>
+              </a:rPr>
+              <a:t>оборудования, минимальные операционные </a:t>
+            </a:r>
+            <a:br/>
+            <a:pPr algn="l" indent="0" marL="0">
+              <a:lnSpc>
+                <a:spcPts val="1620"/>
+              </a:lnSpc>
+              <a:buNone/>
+            </a:pPr>
+            <a:r>
+              <a:rPr lang="ru-RU" altLang="en-US" sz="1200" dirty="0">
+                <a:solidFill>
+                  <a:schemeClr val="accent5"/>
+                </a:solidFill>
+                <a:latin typeface="+mn-lt" pitchFamily="34" charset="0"/>
+                <a:ea typeface="+mn-lt" pitchFamily="34" charset="-122"/>
+                <a:cs typeface="+mn-lt" pitchFamily="34" charset="-120"/>
+              </a:rPr>
+              <a:t>расходы, при необходимости — техническая </a:t>
+            </a:r>
+            <a:br/>
+            <a:pPr algn="l" indent="0" marL="0">
+              <a:lnSpc>
+                <a:spcPts val="1620"/>
+              </a:lnSpc>
+              <a:buNone/>
+            </a:pPr>
+            <a:r>
+              <a:rPr lang="ru-RU" altLang="en-US" sz="1200" dirty="0">
+                <a:solidFill>
+                  <a:schemeClr val="accent5"/>
+                </a:solidFill>
+                <a:latin typeface="+mn-lt" pitchFamily="34" charset="0"/>
+                <a:ea typeface="+mn-lt" pitchFamily="34" charset="-122"/>
+                <a:cs typeface="+mn-lt" pitchFamily="34" charset="-120"/>
+              </a:rPr>
+              <a:t>консультация</a:t>
             </a:r>
             <a:endParaRPr lang="en-US" sz="1200" dirty="0"/>
           </a:p>
@@ -3864,36 +4161,37 @@
       </p:sp>
       <p:sp>
         <p:nvSpPr>
-          <p:cNvPr id="52" name="Shape 50"/>
+          <p:cNvPr id="58" name="Shape 56"/>
           <p:cNvSpPr/>
           <p:nvPr/>
         </p:nvSpPr>
         <p:spPr>
           <a:xfrm>
-            <a:off x="812800" y="4652169"/>
-            <a:ext cx="10566400" cy="1392932"/>
-          </a:xfrm>
-          <a:prstGeom prst="roundRect">
-            <a:avLst>
-              <a:gd name="adj" fmla="val 10941"/>
-            </a:avLst>
-          </a:prstGeom>
-          <a:solidFill>
-            <a:schemeClr val="tx1"/>
-          </a:solidFill>
-          <a:ln/>
-        </p:spPr>
-      </p:sp>
-      <p:sp>
-        <p:nvSpPr>
-          <p:cNvPr id="53" name="Text 51"/>
-          <p:cNvSpPr txBox="1"/>
-          <p:nvPr/>
-        </p:nvSpPr>
-        <p:spPr>
-          <a:xfrm>
-            <a:off x="1066800" y="4772819"/>
-            <a:ext cx="2223770" cy="342900"/>
+            <a:off x="7432675" y="4753769"/>
+            <a:ext cx="0" cy="1100832"/>
+          </a:xfrm>
+          <a:prstGeom prst="line">
+            <a:avLst/>
+          </a:prstGeom>
+          <a:noFill/>
+          <a:ln w="6350">
+            <a:solidFill>
+              <a:schemeClr val="accent4"/>
+            </a:solidFill>
+            <a:prstDash val="solid"/>
+          </a:ln>
+        </p:spPr>
+      </p:sp>
+      <p:sp>
+        <p:nvSpPr>
+          <p:cNvPr id="59" name="Text 57"/>
+          <p:cNvSpPr txBox="1"/>
+          <p:nvPr/>
+        </p:nvSpPr>
+        <p:spPr>
+          <a:xfrm>
+            <a:off x="7689850" y="4728369"/>
+            <a:ext cx="3538411" cy="254000"/>
           </a:xfrm>
           <a:prstGeom prst="rect">
             <a:avLst/>
@@ -3909,30 +4207,30 @@
               <a:buNone/>
             </a:pPr>
             <a:r>
-              <a:rPr lang="ru-RU" altLang="en-US" sz="2000" spc="-50" kern="0" dirty="0">
-                <a:solidFill>
-                  <a:schemeClr val="accent1"/>
-                </a:solidFill>
-                <a:latin typeface="+mj-lt" pitchFamily="34" charset="0"/>
-                <a:ea typeface="+mj-lt" pitchFamily="34" charset="-122"/>
-                <a:cs typeface="+mj-lt" pitchFamily="34" charset="-120"/>
-              </a:rPr>
-              <a:t>Бюджет</a:t>
-            </a:r>
-            <a:endParaRPr lang="en-US" sz="2000" dirty="0"/>
-          </a:p>
-        </p:txBody>
-      </p:sp>
-      <p:sp>
-        <p:nvSpPr>
-          <p:cNvPr id="54" name="Text 52"/>
-          <p:cNvSpPr txBox="1"/>
-          <p:nvPr/>
-        </p:nvSpPr>
-        <p:spPr>
-          <a:xfrm>
-            <a:off x="1066800" y="5134769"/>
-            <a:ext cx="2223770" cy="620911"/>
+              <a:rPr lang="ru-RU" altLang="en-US" sz="1300" b="1" dirty="0">
+                <a:solidFill>
+                  <a:schemeClr val="bg1"/>
+                </a:solidFill>
+                <a:latin typeface="+mn-lt" pitchFamily="34" charset="0"/>
+                <a:ea typeface="+mn-lt" pitchFamily="34" charset="-122"/>
+                <a:cs typeface="+mn-lt" pitchFamily="34" charset="-120"/>
+              </a:rPr>
+              <a:t>Технологическое развитие</a:t>
+            </a:r>
+            <a:endParaRPr lang="en-US" sz="1300" dirty="0"/>
+          </a:p>
+        </p:txBody>
+      </p:sp>
+      <p:sp>
+        <p:nvSpPr>
+          <p:cNvPr id="60" name="Text 58"/>
+          <p:cNvSpPr txBox="1"/>
+          <p:nvPr/>
+        </p:nvSpPr>
+        <p:spPr>
+          <a:xfrm>
+            <a:off x="7689850" y="5031879"/>
+            <a:ext cx="3538411" cy="826591"/>
           </a:xfrm>
           <a:prstGeom prst="rect">
             <a:avLst/>
@@ -3953,13 +4251,13 @@
             <a:r>
               <a:rPr lang="ru-RU" altLang="en-US" sz="1200" dirty="0">
                 <a:solidFill>
-                  <a:schemeClr val="bg1"/>
-                </a:solidFill>
-                <a:latin typeface="+mn-lt" pitchFamily="34" charset="0"/>
-                <a:ea typeface="+mn-lt" pitchFamily="34" charset="-122"/>
-                <a:cs typeface="+mn-lt" pitchFamily="34" charset="-120"/>
-              </a:rPr>
-              <a:t>в два этапа; суммы ручного </a:t>
+                  <a:schemeClr val="accent5"/>
+                </a:solidFill>
+                <a:latin typeface="+mn-lt" pitchFamily="34" charset="0"/>
+                <a:ea typeface="+mn-lt" pitchFamily="34" charset="-122"/>
+                <a:cs typeface="+mn-lt" pitchFamily="34" charset="-120"/>
+              </a:rPr>
+              <a:t>Отдельный этап после подтверждения </a:t>
             </a:r>
             <a:br/>
             <a:pPr algn="l" indent="0" marL="0">
@@ -3971,13 +4269,13 @@
             <a:r>
               <a:rPr lang="ru-RU" altLang="en-US" sz="1200" dirty="0">
                 <a:solidFill>
-                  <a:schemeClr val="bg1"/>
-                </a:solidFill>
-                <a:latin typeface="+mn-lt" pitchFamily="34" charset="0"/>
-                <a:ea typeface="+mn-lt" pitchFamily="34" charset="-122"/>
-                <a:cs typeface="+mn-lt" pitchFamily="34" charset="-120"/>
-              </a:rPr>
-              <a:t>пилота уточним после </a:t>
+                  <a:schemeClr val="accent5"/>
+                </a:solidFill>
+                <a:latin typeface="+mn-lt" pitchFamily="34" charset="0"/>
+                <a:ea typeface="+mn-lt" pitchFamily="34" charset="-122"/>
+                <a:cs typeface="+mn-lt" pitchFamily="34" charset="-120"/>
+              </a:rPr>
+              <a:t>модели: своя платформа, автоматизация, </a:t>
             </a:r>
             <a:br/>
             <a:pPr algn="l" indent="0" marL="0">
@@ -3989,78 +4287,15 @@
             <a:r>
               <a:rPr lang="ru-RU" altLang="en-US" sz="1200" dirty="0">
                 <a:solidFill>
-                  <a:schemeClr val="bg1"/>
-                </a:solidFill>
-                <a:latin typeface="+mn-lt" pitchFamily="34" charset="0"/>
-                <a:ea typeface="+mn-lt" pitchFamily="34" charset="-122"/>
-                <a:cs typeface="+mn-lt" pitchFamily="34" charset="-120"/>
-              </a:rPr>
-              <a:t>первого месяца</a:t>
-            </a:r>
-            <a:endParaRPr lang="en-US" sz="1200" dirty="0"/>
-          </a:p>
-        </p:txBody>
-      </p:sp>
-      <p:sp>
-        <p:nvSpPr>
-          <p:cNvPr id="55" name="Text 53"/>
-          <p:cNvSpPr txBox="1"/>
-          <p:nvPr/>
-        </p:nvSpPr>
-        <p:spPr>
-          <a:xfrm>
-            <a:off x="3479800" y="4779169"/>
-            <a:ext cx="3806571" cy="254000"/>
-          </a:xfrm>
-          <a:prstGeom prst="rect">
-            <a:avLst/>
-          </a:prstGeom>
-          <a:noFill/>
-          <a:ln/>
-        </p:spPr>
-        <p:txBody>
-          <a:bodyPr wrap="square" lIns="0" tIns="0" rIns="0" bIns="0" rtlCol="0" anchor="ctr"/>
-          <a:lstStyle/>
-          <a:p>
-            <a:pPr algn="l" indent="0" marL="0">
-              <a:buNone/>
-            </a:pPr>
-            <a:r>
-              <a:rPr lang="ru-RU" altLang="en-US" sz="1300" b="1" dirty="0">
-                <a:solidFill>
-                  <a:schemeClr val="bg1"/>
-                </a:solidFill>
-                <a:latin typeface="+mn-lt" pitchFamily="34" charset="0"/>
-                <a:ea typeface="+mn-lt" pitchFamily="34" charset="-122"/>
-                <a:cs typeface="+mn-lt" pitchFamily="34" charset="-120"/>
-              </a:rPr>
-              <a:t>Коммерческая проверка</a:t>
-            </a:r>
-            <a:endParaRPr lang="en-US" sz="1300" dirty="0"/>
-          </a:p>
-        </p:txBody>
-      </p:sp>
-      <p:sp>
-        <p:nvSpPr>
-          <p:cNvPr id="56" name="Text 54"/>
-          <p:cNvSpPr txBox="1"/>
-          <p:nvPr/>
-        </p:nvSpPr>
-        <p:spPr>
-          <a:xfrm>
-            <a:off x="3479800" y="5069979"/>
-            <a:ext cx="3806571" cy="826591"/>
-          </a:xfrm>
-          <a:prstGeom prst="rect">
-            <a:avLst/>
-          </a:prstGeom>
-          <a:noFill/>
-          <a:ln/>
-        </p:spPr>
-        <p:txBody>
-          <a:bodyPr wrap="square" lIns="0" tIns="0" rIns="0" bIns="0" rtlCol="0" anchor="t"/>
-          <a:lstStyle/>
-          <a:p>
+                  <a:schemeClr val="accent5"/>
+                </a:solidFill>
+                <a:latin typeface="+mn-lt" pitchFamily="34" charset="0"/>
+                <a:ea typeface="+mn-lt" pitchFamily="34" charset="-122"/>
+                <a:cs typeface="+mn-lt" pitchFamily="34" charset="-120"/>
+              </a:rPr>
+              <a:t>инфраструктура, специалисты. Грант — </a:t>
+            </a:r>
+            <a:br/>
             <a:pPr algn="l" indent="0" marL="0">
               <a:lnSpc>
                 <a:spcPts val="1620"/>
@@ -4076,196 +4311,7 @@
                 <a:ea typeface="+mn-lt" pitchFamily="34" charset="-122"/>
                 <a:cs typeface="+mn-lt" pitchFamily="34" charset="-120"/>
               </a:rPr>
-              <a:t>Интервью и продажи, тестовая аренда </a:t>
-            </a:r>
-            <a:br/>
-            <a:pPr algn="l" indent="0" marL="0">
-              <a:lnSpc>
-                <a:spcPts val="1620"/>
-              </a:lnSpc>
-              <a:buNone/>
-            </a:pPr>
-            <a:r>
-              <a:rPr lang="ru-RU" altLang="en-US" sz="1200" dirty="0">
-                <a:solidFill>
-                  <a:schemeClr val="accent5"/>
-                </a:solidFill>
-                <a:latin typeface="+mn-lt" pitchFamily="34" charset="0"/>
-                <a:ea typeface="+mn-lt" pitchFamily="34" charset="-122"/>
-                <a:cs typeface="+mn-lt" pitchFamily="34" charset="-120"/>
-              </a:rPr>
-              <a:t>оборудования, минимальные операционные </a:t>
-            </a:r>
-            <a:br/>
-            <a:pPr algn="l" indent="0" marL="0">
-              <a:lnSpc>
-                <a:spcPts val="1620"/>
-              </a:lnSpc>
-              <a:buNone/>
-            </a:pPr>
-            <a:r>
-              <a:rPr lang="ru-RU" altLang="en-US" sz="1200" dirty="0">
-                <a:solidFill>
-                  <a:schemeClr val="accent5"/>
-                </a:solidFill>
-                <a:latin typeface="+mn-lt" pitchFamily="34" charset="0"/>
-                <a:ea typeface="+mn-lt" pitchFamily="34" charset="-122"/>
-                <a:cs typeface="+mn-lt" pitchFamily="34" charset="-120"/>
-              </a:rPr>
-              <a:t>расходы, при необходимости — техническая </a:t>
-            </a:r>
-            <a:br/>
-            <a:pPr algn="l" indent="0" marL="0">
-              <a:lnSpc>
-                <a:spcPts val="1620"/>
-              </a:lnSpc>
-              <a:buNone/>
-            </a:pPr>
-            <a:r>
-              <a:rPr lang="ru-RU" altLang="en-US" sz="1200" dirty="0">
-                <a:solidFill>
-                  <a:schemeClr val="accent5"/>
-                </a:solidFill>
-                <a:latin typeface="+mn-lt" pitchFamily="34" charset="0"/>
-                <a:ea typeface="+mn-lt" pitchFamily="34" charset="-122"/>
-                <a:cs typeface="+mn-lt" pitchFamily="34" charset="-120"/>
-              </a:rPr>
-              <a:t>консультация</a:t>
-            </a:r>
-            <a:endParaRPr lang="en-US" sz="1200" dirty="0"/>
-          </a:p>
-        </p:txBody>
-      </p:sp>
-      <p:sp>
-        <p:nvSpPr>
-          <p:cNvPr id="57" name="Text 55"/>
-          <p:cNvSpPr txBox="1"/>
-          <p:nvPr/>
-        </p:nvSpPr>
-        <p:spPr>
-          <a:xfrm>
-            <a:off x="7429500" y="4779169"/>
-            <a:ext cx="3806571" cy="254000"/>
-          </a:xfrm>
-          <a:prstGeom prst="rect">
-            <a:avLst/>
-          </a:prstGeom>
-          <a:noFill/>
-          <a:ln/>
-        </p:spPr>
-        <p:txBody>
-          <a:bodyPr wrap="square" lIns="0" tIns="0" rIns="0" bIns="0" rtlCol="0" anchor="ctr"/>
-          <a:lstStyle/>
-          <a:p>
-            <a:pPr algn="l" indent="0" marL="0">
-              <a:buNone/>
-            </a:pPr>
-            <a:r>
-              <a:rPr lang="ru-RU" altLang="en-US" sz="1300" b="1" dirty="0">
-                <a:solidFill>
-                  <a:schemeClr val="bg1"/>
-                </a:solidFill>
-                <a:latin typeface="+mn-lt" pitchFamily="34" charset="0"/>
-                <a:ea typeface="+mn-lt" pitchFamily="34" charset="-122"/>
-                <a:cs typeface="+mn-lt" pitchFamily="34" charset="-120"/>
-              </a:rPr>
-              <a:t>Технологическое развитие</a:t>
-            </a:r>
-            <a:endParaRPr lang="en-US" sz="1300" dirty="0"/>
-          </a:p>
-        </p:txBody>
-      </p:sp>
-      <p:sp>
-        <p:nvSpPr>
-          <p:cNvPr id="58" name="Text 56"/>
-          <p:cNvSpPr txBox="1"/>
-          <p:nvPr/>
-        </p:nvSpPr>
-        <p:spPr>
-          <a:xfrm>
-            <a:off x="7429500" y="5069979"/>
-            <a:ext cx="3806571" cy="826591"/>
-          </a:xfrm>
-          <a:prstGeom prst="rect">
-            <a:avLst/>
-          </a:prstGeom>
-          <a:noFill/>
-          <a:ln/>
-        </p:spPr>
-        <p:txBody>
-          <a:bodyPr wrap="square" lIns="0" tIns="0" rIns="0" bIns="0" rtlCol="0" anchor="t"/>
-          <a:lstStyle/>
-          <a:p>
-            <a:pPr algn="l" indent="0" marL="0">
-              <a:lnSpc>
-                <a:spcPts val="1620"/>
-              </a:lnSpc>
-              <a:buNone/>
-            </a:pPr>
-            <a:r>
-              <a:rPr lang="ru-RU" altLang="en-US" sz="1200" dirty="0">
-                <a:solidFill>
-                  <a:schemeClr val="accent5"/>
-                </a:solidFill>
-                <a:latin typeface="+mn-lt" pitchFamily="34" charset="0"/>
-                <a:ea typeface="+mn-lt" pitchFamily="34" charset="-122"/>
-                <a:cs typeface="+mn-lt" pitchFamily="34" charset="-120"/>
-              </a:rPr>
-              <a:t>Отдельный этап после подтверждения модели: </a:t>
-            </a:r>
-            <a:br/>
-            <a:pPr algn="l" indent="0" marL="0">
-              <a:lnSpc>
-                <a:spcPts val="1620"/>
-              </a:lnSpc>
-              <a:buNone/>
-            </a:pPr>
-            <a:r>
-              <a:rPr lang="ru-RU" altLang="en-US" sz="1200" dirty="0">
-                <a:solidFill>
-                  <a:schemeClr val="accent5"/>
-                </a:solidFill>
-                <a:latin typeface="+mn-lt" pitchFamily="34" charset="0"/>
-                <a:ea typeface="+mn-lt" pitchFamily="34" charset="-122"/>
-                <a:cs typeface="+mn-lt" pitchFamily="34" charset="-120"/>
-              </a:rPr>
-              <a:t>своя платформа, автоматизация, инфраструктура, </a:t>
-            </a:r>
-            <a:br/>
-            <a:pPr algn="l" indent="0" marL="0">
-              <a:lnSpc>
-                <a:spcPts val="1620"/>
-              </a:lnSpc>
-              <a:buNone/>
-            </a:pPr>
-            <a:r>
-              <a:rPr lang="ru-RU" altLang="en-US" sz="1200" dirty="0">
-                <a:solidFill>
-                  <a:schemeClr val="accent5"/>
-                </a:solidFill>
-                <a:latin typeface="+mn-lt" pitchFamily="34" charset="0"/>
-                <a:ea typeface="+mn-lt" pitchFamily="34" charset="-122"/>
-                <a:cs typeface="+mn-lt" pitchFamily="34" charset="-120"/>
-              </a:rPr>
-              <a:t>специалисты. Грант — возможный источник, не </a:t>
-            </a:r>
-            <a:br/>
-            <a:pPr algn="l" indent="0" marL="0">
-              <a:lnSpc>
-                <a:spcPts val="1620"/>
-              </a:lnSpc>
-              <a:buNone/>
-            </a:pPr>
-            <a:r>
-              <a:rPr lang="ru-RU" altLang="en-US" sz="1200" dirty="0">
-                <a:solidFill>
-                  <a:schemeClr val="accent5"/>
-                </a:solidFill>
-                <a:latin typeface="+mn-lt" pitchFamily="34" charset="0"/>
-                <a:ea typeface="+mn-lt" pitchFamily="34" charset="-122"/>
-                <a:cs typeface="+mn-lt" pitchFamily="34" charset="-120"/>
-              </a:rPr>
-              <a:t>гарантирован</a:t>
+              <a:t>возможный источник, не гарантирован</a:t>
             </a:r>
             <a:endParaRPr lang="en-US" sz="1200" dirty="0"/>
           </a:p>
@@ -4347,7 +4393,7 @@
           </a:xfrm>
           <a:prstGeom prst="roundRect">
             <a:avLst>
-              <a:gd name="adj" fmla="val 9741"/>
+              <a:gd name="adj" fmla="val 8349"/>
             </a:avLst>
           </a:prstGeom>
           <a:solidFill>
@@ -4556,7 +4602,7 @@
                 <a:ea typeface="+mn-lt" pitchFamily="34" charset="-122"/>
                 <a:cs typeface="+mn-lt" pitchFamily="34" charset="-120"/>
               </a:rPr>
-              <a:t>условия сервиса, технические требования и </a:t>
+              <a:t>условия сервиса, технические требования </a:t>
             </a:r>
             <a:br/>
             <a:pPr algn="l" indent="0" marL="0">
@@ -4574,7 +4620,7 @@
                 <a:ea typeface="+mn-lt" pitchFamily="34" charset="-122"/>
                 <a:cs typeface="+mn-lt" pitchFamily="34" charset="-120"/>
               </a:rPr>
-              <a:t>план развития продукта</a:t>
+              <a:t>и план развития продукта</a:t>
             </a:r>
             <a:endParaRPr lang="en-US" sz="1200" dirty="0"/>
           </a:p>
@@ -4593,7 +4639,7 @@
           </a:xfrm>
           <a:prstGeom prst="roundRect">
             <a:avLst>
-              <a:gd name="adj" fmla="val 9741"/>
+              <a:gd name="adj" fmla="val 8349"/>
             </a:avLst>
           </a:prstGeom>
           <a:solidFill>
@@ -4784,7 +4830,7 @@
                 <a:ea typeface="+mn-lt" pitchFamily="34" charset="-122"/>
                 <a:cs typeface="+mn-lt" pitchFamily="34" charset="-120"/>
               </a:rPr>
-              <a:t>Интервью с заказчиками, проверка их </a:t>
+              <a:t>Интервью с заказчиками, проверка </a:t>
             </a:r>
             <a:br/>
             <a:pPr algn="l" indent="0" marL="0">
@@ -4802,7 +4848,7 @@
                 <a:ea typeface="+mn-lt" pitchFamily="34" charset="-122"/>
                 <a:cs typeface="+mn-lt" pitchFamily="34" charset="-120"/>
               </a:rPr>
-              <a:t>потребностей, поиск первых пилотных клиентов, </a:t>
+              <a:t>их потребностей, поиск первых пилотных </a:t>
             </a:r>
             <a:br/>
             <a:pPr algn="l" indent="0" marL="0">
@@ -4820,7 +4866,7 @@
                 <a:ea typeface="+mn-lt" pitchFamily="34" charset="-122"/>
                 <a:cs typeface="+mn-lt" pitchFamily="34" charset="-120"/>
               </a:rPr>
-              <a:t>продажи и обратная связь</a:t>
+              <a:t>клиентов, продажи и обратная связь</a:t>
             </a:r>
             <a:endParaRPr lang="en-US" sz="1200" dirty="0"/>
           </a:p>
@@ -4839,7 +4885,7 @@
           </a:xfrm>
           <a:prstGeom prst="roundRect">
             <a:avLst>
-              <a:gd name="adj" fmla="val 4660"/>
+              <a:gd name="adj" fmla="val 3994"/>
             </a:avLst>
           </a:prstGeom>
           <a:solidFill>
@@ -5471,7 +5517,7 @@
         <p:spPr>
           <a:xfrm>
             <a:off x="812800" y="1757859"/>
-            <a:ext cx="4807268" cy="838200"/>
+            <a:ext cx="3012718" cy="838200"/>
           </a:xfrm>
           <a:prstGeom prst="rect">
             <a:avLst/>
@@ -5615,7 +5661,7 @@
                 <a:ea typeface="+mn-lt" pitchFamily="34" charset="-122"/>
                 <a:cs typeface="+mn-lt" pitchFamily="34" charset="-120"/>
               </a:rPr>
-              <a:t>Небольшим командам важна не только цена, но и </a:t>
+              <a:t>Небольшим командам важна не только цена, </a:t>
             </a:r>
             <a:br/>
             <a:pPr algn="l" indent="0" marL="0">
@@ -5633,7 +5679,7 @@
                 <a:ea typeface="+mn-lt" pitchFamily="34" charset="-122"/>
                 <a:cs typeface="+mn-lt" pitchFamily="34" charset="-120"/>
               </a:rPr>
-              <a:t>доступность нужной карты, простая аренда и </a:t>
+              <a:t>но и доступность нужной карты, простая аренда </a:t>
             </a:r>
             <a:br/>
             <a:pPr algn="l" indent="0" marL="0">
@@ -5651,7 +5697,7 @@
                 <a:ea typeface="+mn-lt" pitchFamily="34" charset="-122"/>
                 <a:cs typeface="+mn-lt" pitchFamily="34" charset="-120"/>
               </a:rPr>
-              <a:t>предсказуемые условия.</a:t>
+              <a:t>и предсказуемые условия.</a:t>
             </a:r>
             <a:endParaRPr lang="en-US" sz="1400" dirty="0"/>
           </a:p>
@@ -5685,8 +5731,8 @@
         </p:nvSpPr>
         <p:spPr>
           <a:xfrm>
-            <a:off x="6711950" y="1757859"/>
-            <a:ext cx="4807268" cy="838200"/>
+            <a:off x="6711950" y="1891209"/>
+            <a:ext cx="1781877" cy="692150"/>
           </a:xfrm>
           <a:prstGeom prst="rect">
             <a:avLst/>
@@ -5702,9 +5748,9 @@
               <a:buNone/>
             </a:pPr>
             <a:r>
-              <a:rPr lang="ru-RU" altLang="en-US" sz="5200" spc="-150" kern="0" dirty="0">
-                <a:solidFill>
-                  <a:schemeClr val="tx2"/>
+              <a:rPr lang="ru-RU" altLang="en-US" sz="4200" spc="-150" kern="0" dirty="0">
+                <a:solidFill>
+                  <a:schemeClr val="accent6"/>
                 </a:solidFill>
                 <a:latin typeface="+mj-lt" pitchFamily="34" charset="0"/>
                 <a:ea typeface="+mj-lt" pitchFamily="34" charset="-122"/>
@@ -5712,7 +5758,7 @@
               </a:rPr>
               <a:t>2022</a:t>
             </a:r>
-            <a:endParaRPr lang="en-US" sz="5200" dirty="0"/>
+            <a:endParaRPr lang="en-US" sz="4200" dirty="0"/>
           </a:p>
         </p:txBody>
       </p:sp>
@@ -5752,7 +5798,7 @@
                 <a:ea typeface="+mn-lt" pitchFamily="34" charset="-122"/>
                 <a:cs typeface="+mn-lt" pitchFamily="34" charset="-120"/>
               </a:rPr>
-              <a:t>Ethereum отказался от майнинга на </a:t>
+              <a:t>Ethereum отказался от майнинга </a:t>
             </a:r>
             <a:br/>
             <a:pPr algn="l" indent="0" marL="0">
@@ -5770,7 +5816,7 @@
                 <a:ea typeface="+mn-lt" pitchFamily="34" charset="-122"/>
                 <a:cs typeface="+mn-lt" pitchFamily="34" charset="-120"/>
               </a:rPr>
-              <a:t>видеокартах</a:t>
+              <a:t>на видеокартах</a:t>
             </a:r>
             <a:endParaRPr lang="en-US" sz="1600" dirty="0"/>
           </a:p>
@@ -5785,7 +5831,7 @@
         <p:spPr>
           <a:xfrm>
             <a:off x="6711950" y="3289399"/>
-            <a:ext cx="4807268" cy="746522"/>
+            <a:ext cx="4807268" cy="995363"/>
           </a:xfrm>
           <a:prstGeom prst="rect">
             <a:avLst/>
@@ -5812,7 +5858,7 @@
                 <a:ea typeface="+mn-lt" pitchFamily="34" charset="-122"/>
                 <a:cs typeface="+mn-lt" pitchFamily="34" charset="-120"/>
               </a:rPr>
-              <a:t>Часть ферм и владельцев мощных ПК загружена не </a:t>
+              <a:t>Часть ферм и владельцев мощных ПК загружена </a:t>
             </a:r>
             <a:br/>
             <a:pPr algn="l" indent="0" marL="0">
@@ -5830,7 +5876,7 @@
                 <a:ea typeface="+mn-lt" pitchFamily="34" charset="-122"/>
                 <a:cs typeface="+mn-lt" pitchFamily="34" charset="-120"/>
               </a:rPr>
-              <a:t>полностью. Для них дополнительные заказы — способ </a:t>
+              <a:t>не полностью. Для них дополнительные заказы — </a:t>
             </a:r>
             <a:br/>
             <a:pPr algn="l" indent="0" marL="0">
@@ -5848,7 +5894,25 @@
                 <a:ea typeface="+mn-lt" pitchFamily="34" charset="-122"/>
                 <a:cs typeface="+mn-lt" pitchFamily="34" charset="-120"/>
               </a:rPr>
-              <a:t>лучше использовать уже купленное оборудование.</a:t>
+              <a:t>способ лучше использовать уже купленное </a:t>
+            </a:r>
+            <a:br/>
+            <a:pPr algn="l" indent="0" marL="0">
+              <a:lnSpc>
+                <a:spcPts val="1960"/>
+              </a:lnSpc>
+              <a:buNone/>
+            </a:pPr>
+            <a:r>
+              <a:rPr lang="ru-RU" altLang="en-US" sz="1400" dirty="0">
+                <a:solidFill>
+                  <a:schemeClr val="accent6"/>
+                </a:solidFill>
+                <a:latin typeface="+mn-lt" pitchFamily="34" charset="0"/>
+                <a:ea typeface="+mn-lt" pitchFamily="34" charset="-122"/>
+                <a:cs typeface="+mn-lt" pitchFamily="34" charset="-120"/>
+              </a:rPr>
+              <a:t>оборудование.</a:t>
             </a:r>
             <a:endParaRPr lang="en-US" sz="1400" dirty="0"/>
           </a:p>
@@ -5959,7 +6023,7 @@
             <a:r>
               <a:rPr lang="ru-RU" altLang="en-US" sz="1200" dirty="0">
                 <a:solidFill>
-                  <a:srgbClr val="7A6E5F"/>
+                  <a:srgbClr val="6A5E4F"/>
                 </a:solidFill>
                 <a:latin typeface="+mn-lt" pitchFamily="34" charset="0"/>
                 <a:ea typeface="+mn-lt" pitchFamily="34" charset="-122"/>
@@ -6043,7 +6107,7 @@
         <p:spPr>
           <a:xfrm>
             <a:off x="812800" y="1381720"/>
-            <a:ext cx="10718800" cy="481310"/>
+            <a:ext cx="9550400" cy="481310"/>
           </a:xfrm>
           <a:prstGeom prst="rect">
             <a:avLst/>
@@ -6070,9 +6134,26 @@
                 <a:ea typeface="+mn-lt" pitchFamily="34" charset="-122"/>
                 <a:cs typeface="+mn-lt" pitchFamily="34" charset="-120"/>
               </a:rPr>
-              <a:t>Улей соединяет небольшие технологические команды с владельцами GPU-мощностей. На первом этапе проверяем </a:t>
+              <a:t>Улей соединяет небольшие технологические команды с владельцами GPU-мощностей. На первом этапе </a:t>
             </a:r>
             <a:br/>
+            <a:pPr algn="l" indent="0" marL="0">
+              <a:lnSpc>
+                <a:spcPts val="1890"/>
+              </a:lnSpc>
+              <a:buNone/>
+            </a:pPr>
+            <a:r>
+              <a:rPr lang="ru-RU" altLang="en-US" sz="1400" dirty="0">
+                <a:solidFill>
+                  <a:schemeClr val="bg1"/>
+                </a:solidFill>
+                <a:latin typeface="+mn-lt" pitchFamily="34" charset="0"/>
+                <a:ea typeface="+mn-lt" pitchFamily="34" charset="-122"/>
+                <a:cs typeface="+mn-lt" pitchFamily="34" charset="-120"/>
+              </a:rPr>
+              <a:t>проверяем </a:t>
+            </a:r>
             <a:pPr algn="l" indent="0" marL="0">
               <a:lnSpc>
                 <a:spcPts val="1890"/>
@@ -6124,7 +6205,7 @@
           </a:xfrm>
           <a:prstGeom prst="roundRect">
             <a:avLst>
-              <a:gd name="adj" fmla="val 6914"/>
+              <a:gd name="adj" fmla="val 5926"/>
             </a:avLst>
           </a:prstGeom>
           <a:solidFill>
@@ -6234,7 +6315,7 @@
                 <a:ea typeface="+mn-lt" pitchFamily="34" charset="-122"/>
                 <a:cs typeface="+mn-lt" pitchFamily="34" charset="-120"/>
               </a:rPr>
-              <a:t>Дают оборудование и </a:t>
+              <a:t>Дают оборудование </a:t>
             </a:r>
             <a:br/>
             <a:pPr algn="l" indent="0" marL="0">
@@ -6252,7 +6333,7 @@
                 <a:ea typeface="+mn-lt" pitchFamily="34" charset="-122"/>
                 <a:cs typeface="+mn-lt" pitchFamily="34" charset="-120"/>
               </a:rPr>
-              <a:t>вычислительные </a:t>
+              <a:t>и вычислительные </a:t>
             </a:r>
             <a:br/>
             <a:pPr algn="l" indent="0" marL="0">
@@ -6516,7 +6597,7 @@
           </a:xfrm>
           <a:prstGeom prst="roundRect">
             <a:avLst>
-              <a:gd name="adj" fmla="val 6931"/>
+              <a:gd name="adj" fmla="val 5941"/>
             </a:avLst>
           </a:prstGeom>
           <a:solidFill>
@@ -6882,7 +6963,7 @@
           </a:xfrm>
           <a:prstGeom prst="roundRect">
             <a:avLst>
-              <a:gd name="adj" fmla="val 6914"/>
+              <a:gd name="adj" fmla="val 5926"/>
             </a:avLst>
           </a:prstGeom>
           <a:solidFill>
@@ -7325,7 +7406,7 @@
                 <a:ea typeface="+mn-lt" pitchFamily="34" charset="-122"/>
                 <a:cs typeface="+mn-lt" pitchFamily="34" charset="-120"/>
               </a:rPr>
-              <a:t> за CPU, RAM, накопители, сеть, доступность и </a:t>
+              <a:t> за CPU, RAM, накопители, сеть, доступность </a:t>
             </a:r>
             <a:br/>
             <a:pPr algn="l" indent="0" marL="0">
@@ -7343,7 +7424,7 @@
                 <a:ea typeface="+mn-lt" pitchFamily="34" charset="-122"/>
                 <a:cs typeface="+mn-lt" pitchFamily="34" charset="-120"/>
               </a:rPr>
-              <a:t>обслуживание, определим в условиях партнёрства.</a:t>
+              <a:t>и обслуживание, определим в условиях партнёрства.</a:t>
             </a:r>
             <a:endParaRPr lang="en-US" sz="1200" dirty="0"/>
           </a:p>
@@ -7420,7 +7501,7 @@
         </p:nvSpPr>
         <p:spPr>
           <a:xfrm>
-            <a:off x="815975" y="1506736"/>
+            <a:off x="815975" y="1494036"/>
             <a:ext cx="2520950" cy="1596231"/>
           </a:xfrm>
           <a:prstGeom prst="roundRect">
@@ -7447,7 +7528,7 @@
         </p:nvSpPr>
         <p:spPr>
           <a:xfrm>
-            <a:off x="996950" y="1662311"/>
+            <a:off x="996950" y="1649611"/>
             <a:ext cx="330200" cy="330200"/>
           </a:xfrm>
           <a:prstGeom prst="ellipse">
@@ -7467,7 +7548,7 @@
         </p:nvSpPr>
         <p:spPr>
           <a:xfrm>
-            <a:off x="1120180" y="1713111"/>
+            <a:off x="1120180" y="1700411"/>
             <a:ext cx="134541" cy="228600"/>
           </a:xfrm>
           <a:prstGeom prst="rect">
@@ -7506,8 +7587,8 @@
         </p:nvSpPr>
         <p:spPr>
           <a:xfrm>
-            <a:off x="996950" y="2094111"/>
-            <a:ext cx="2223770" cy="639961"/>
+            <a:off x="996950" y="2081411"/>
+            <a:ext cx="2223770" cy="853281"/>
           </a:xfrm>
           <a:prstGeom prst="rect">
             <a:avLst/>
@@ -7534,7 +7615,7 @@
                 <a:ea typeface="+mn-lt" pitchFamily="34" charset="-122"/>
                 <a:cs typeface="+mn-lt" pitchFamily="34" charset="-120"/>
               </a:rPr>
-              <a:t>Компания обращается с </a:t>
+              <a:t>Компания обращается </a:t>
             </a:r>
             <a:br/>
             <a:pPr algn="l" indent="0" marL="0">
@@ -7552,7 +7633,7 @@
                 <a:ea typeface="+mn-lt" pitchFamily="34" charset="-122"/>
                 <a:cs typeface="+mn-lt" pitchFamily="34" charset="-120"/>
               </a:rPr>
-              <a:t>запросом на </a:t>
+              <a:t>с запросом </a:t>
             </a:r>
             <a:br/>
             <a:pPr algn="l" indent="0" marL="0">
@@ -7570,7 +7651,25 @@
                 <a:ea typeface="+mn-lt" pitchFamily="34" charset="-122"/>
                 <a:cs typeface="+mn-lt" pitchFamily="34" charset="-120"/>
               </a:rPr>
-              <a:t>вычислительные мощности</a:t>
+              <a:t>на вычислительные </a:t>
+            </a:r>
+            <a:br/>
+            <a:pPr algn="l" indent="0" marL="0">
+              <a:lnSpc>
+                <a:spcPts val="1680"/>
+              </a:lnSpc>
+              <a:buNone/>
+            </a:pPr>
+            <a:r>
+              <a:rPr lang="ru-RU" altLang="en-US" sz="1200" dirty="0">
+                <a:solidFill>
+                  <a:schemeClr val="tx2"/>
+                </a:solidFill>
+                <a:latin typeface="+mn-lt" pitchFamily="34" charset="0"/>
+                <a:ea typeface="+mn-lt" pitchFamily="34" charset="-122"/>
+                <a:cs typeface="+mn-lt" pitchFamily="34" charset="-120"/>
+              </a:rPr>
+              <a:t>мощности</a:t>
             </a:r>
             <a:endParaRPr lang="en-US" sz="1200" dirty="0"/>
           </a:p>
@@ -7584,7 +7683,7 @@
         </p:nvSpPr>
         <p:spPr>
           <a:xfrm>
-            <a:off x="3495675" y="1506736"/>
+            <a:off x="3495675" y="1494036"/>
             <a:ext cx="2520950" cy="1596231"/>
           </a:xfrm>
           <a:prstGeom prst="roundRect">
@@ -7611,7 +7710,7 @@
         </p:nvSpPr>
         <p:spPr>
           <a:xfrm>
-            <a:off x="3676650" y="1662311"/>
+            <a:off x="3676650" y="1649611"/>
             <a:ext cx="330200" cy="330200"/>
           </a:xfrm>
           <a:prstGeom prst="ellipse">
@@ -7631,7 +7730,7 @@
         </p:nvSpPr>
         <p:spPr>
           <a:xfrm>
-            <a:off x="3773785" y="1713111"/>
+            <a:off x="3773785" y="1700411"/>
             <a:ext cx="186730" cy="228600"/>
           </a:xfrm>
           <a:prstGeom prst="rect">
@@ -7670,7 +7769,7 @@
         </p:nvSpPr>
         <p:spPr>
           <a:xfrm>
-            <a:off x="3676650" y="2094111"/>
+            <a:off x="3676650" y="2081411"/>
             <a:ext cx="2223770" cy="639961"/>
           </a:xfrm>
           <a:prstGeom prst="rect">
@@ -7716,7 +7815,7 @@
                 <a:ea typeface="+mn-lt" pitchFamily="34" charset="-122"/>
                 <a:cs typeface="+mn-lt" pitchFamily="34" charset="-120"/>
               </a:rPr>
-              <a:t>конфигурацию у </a:t>
+              <a:t>конфигурацию </a:t>
             </a:r>
             <a:br/>
             <a:pPr algn="l" indent="0" marL="0">
@@ -7734,7 +7833,7 @@
                 <a:ea typeface="+mn-lt" pitchFamily="34" charset="-122"/>
                 <a:cs typeface="+mn-lt" pitchFamily="34" charset="-120"/>
               </a:rPr>
-              <a:t>партнёрской фермы</a:t>
+              <a:t>у партнёрской фермы</a:t>
             </a:r>
             <a:endParaRPr lang="en-US" sz="1200" dirty="0"/>
           </a:p>
@@ -7748,7 +7847,7 @@
         </p:nvSpPr>
         <p:spPr>
           <a:xfrm>
-            <a:off x="6175375" y="1506736"/>
+            <a:off x="6175375" y="1494036"/>
             <a:ext cx="2520950" cy="1596231"/>
           </a:xfrm>
           <a:prstGeom prst="roundRect">
@@ -7775,7 +7874,7 @@
         </p:nvSpPr>
         <p:spPr>
           <a:xfrm>
-            <a:off x="6356350" y="1662311"/>
+            <a:off x="6356350" y="1649611"/>
             <a:ext cx="330200" cy="330200"/>
           </a:xfrm>
           <a:prstGeom prst="ellipse">
@@ -7795,7 +7894,7 @@
         </p:nvSpPr>
         <p:spPr>
           <a:xfrm>
-            <a:off x="6452890" y="1713111"/>
+            <a:off x="6452890" y="1700411"/>
             <a:ext cx="187920" cy="228600"/>
           </a:xfrm>
           <a:prstGeom prst="rect">
@@ -7834,7 +7933,7 @@
         </p:nvSpPr>
         <p:spPr>
           <a:xfrm>
-            <a:off x="6356350" y="2094111"/>
+            <a:off x="6356350" y="2081411"/>
             <a:ext cx="2223770" cy="853281"/>
           </a:xfrm>
           <a:prstGeom prst="rect">
@@ -7898,7 +7997,7 @@
                 <a:ea typeface="+mn-lt" pitchFamily="34" charset="-122"/>
                 <a:cs typeface="+mn-lt" pitchFamily="34" charset="-120"/>
               </a:rPr>
-              <a:t>сопровождает заказ в </a:t>
+              <a:t>сопровождает заказ </a:t>
             </a:r>
             <a:br/>
             <a:pPr algn="l" indent="0" marL="0">
@@ -7916,7 +8015,7 @@
                 <a:ea typeface="+mn-lt" pitchFamily="34" charset="-122"/>
                 <a:cs typeface="+mn-lt" pitchFamily="34" charset="-120"/>
               </a:rPr>
-              <a:t>согласованных пределах</a:t>
+              <a:t>в согласованных пределах</a:t>
             </a:r>
             <a:endParaRPr lang="en-US" sz="1200" dirty="0"/>
           </a:p>
@@ -7930,7 +8029,7 @@
         </p:nvSpPr>
         <p:spPr>
           <a:xfrm>
-            <a:off x="8855075" y="1506736"/>
+            <a:off x="8855075" y="1494036"/>
             <a:ext cx="2520950" cy="1596231"/>
           </a:xfrm>
           <a:prstGeom prst="roundRect">
@@ -7957,7 +8056,7 @@
         </p:nvSpPr>
         <p:spPr>
           <a:xfrm>
-            <a:off x="9036050" y="1662311"/>
+            <a:off x="9036050" y="1649611"/>
             <a:ext cx="330200" cy="330200"/>
           </a:xfrm>
           <a:prstGeom prst="ellipse">
@@ -7977,7 +8076,7 @@
         </p:nvSpPr>
         <p:spPr>
           <a:xfrm>
-            <a:off x="9131300" y="1713111"/>
+            <a:off x="9131300" y="1700411"/>
             <a:ext cx="190500" cy="228600"/>
           </a:xfrm>
           <a:prstGeom prst="rect">
@@ -8016,7 +8115,7 @@
         </p:nvSpPr>
         <p:spPr>
           <a:xfrm>
-            <a:off x="9036050" y="2094111"/>
+            <a:off x="9036050" y="2081411"/>
             <a:ext cx="2223770" cy="853281"/>
           </a:xfrm>
           <a:prstGeom prst="rect">
@@ -8112,12 +8211,12 @@
         </p:nvSpPr>
         <p:spPr>
           <a:xfrm>
-            <a:off x="812800" y="3405783"/>
-            <a:ext cx="5812730" cy="2639318"/>
+            <a:off x="812800" y="3380383"/>
+            <a:ext cx="5812730" cy="2664718"/>
           </a:xfrm>
           <a:prstGeom prst="roundRect">
             <a:avLst>
-              <a:gd name="adj" fmla="val 6737"/>
+              <a:gd name="adj" fmla="val 5719"/>
             </a:avLst>
           </a:prstGeom>
           <a:solidFill>
@@ -8134,7 +8233,7 @@
         </p:nvSpPr>
         <p:spPr>
           <a:xfrm>
-            <a:off x="1066800" y="3558183"/>
+            <a:off x="1066800" y="3545483"/>
             <a:ext cx="5457130" cy="260350"/>
           </a:xfrm>
           <a:prstGeom prst="rect">
@@ -8173,7 +8272,7 @@
         </p:nvSpPr>
         <p:spPr>
           <a:xfrm>
-            <a:off x="1066800" y="3878858"/>
+            <a:off x="1066800" y="3866158"/>
             <a:ext cx="5457130" cy="426641"/>
           </a:xfrm>
           <a:prstGeom prst="rect">
@@ -8233,8 +8332,8 @@
         </p:nvSpPr>
         <p:spPr>
           <a:xfrm>
-            <a:off x="1066800" y="4337248"/>
-            <a:ext cx="2223770" cy="406400"/>
+            <a:off x="1066800" y="4324548"/>
+            <a:ext cx="2027555" cy="406400"/>
           </a:xfrm>
           <a:prstGeom prst="rect">
             <a:avLst/>
@@ -8272,8 +8371,8 @@
         </p:nvSpPr>
         <p:spPr>
           <a:xfrm>
-            <a:off x="1066800" y="4739779"/>
-            <a:ext cx="2223770" cy="415230"/>
+            <a:off x="1066800" y="4727079"/>
+            <a:ext cx="2027555" cy="415230"/>
           </a:xfrm>
           <a:prstGeom prst="rect">
             <a:avLst/>
@@ -8326,14 +8425,37 @@
       </p:sp>
       <p:sp>
         <p:nvSpPr>
-          <p:cNvPr id="24" name="Text 22"/>
-          <p:cNvSpPr txBox="1"/>
-          <p:nvPr/>
-        </p:nvSpPr>
-        <p:spPr>
-          <a:xfrm>
-            <a:off x="3479800" y="4337248"/>
-            <a:ext cx="2978482" cy="406400"/>
+          <p:cNvPr id="24" name="Shape 22"/>
+          <p:cNvSpPr/>
+          <p:nvPr/>
+        </p:nvSpPr>
+        <p:spPr>
+          <a:xfrm>
+            <a:off x="3292475" y="4368998"/>
+            <a:ext cx="0" cy="769441"/>
+          </a:xfrm>
+          <a:prstGeom prst="line">
+            <a:avLst/>
+          </a:prstGeom>
+          <a:noFill/>
+          <a:ln w="6350">
+            <a:solidFill>
+              <a:schemeClr val="accent4"/>
+            </a:solidFill>
+            <a:prstDash val="solid"/>
+          </a:ln>
+        </p:spPr>
+      </p:sp>
+      <p:sp>
+        <p:nvSpPr>
+          <p:cNvPr id="25" name="Text 23"/>
+          <p:cNvSpPr txBox="1"/>
+          <p:nvPr/>
+        </p:nvSpPr>
+        <p:spPr>
+          <a:xfrm>
+            <a:off x="3549650" y="4324548"/>
+            <a:ext cx="2906537" cy="406400"/>
           </a:xfrm>
           <a:prstGeom prst="rect">
             <a:avLst/>
@@ -8365,14 +8487,14 @@
       </p:sp>
       <p:sp>
         <p:nvSpPr>
-          <p:cNvPr id="25" name="Text 23"/>
-          <p:cNvSpPr txBox="1"/>
-          <p:nvPr/>
-        </p:nvSpPr>
-        <p:spPr>
-          <a:xfrm>
-            <a:off x="3479800" y="4739779"/>
-            <a:ext cx="2978482" cy="415230"/>
+          <p:cNvPr id="26" name="Text 24"/>
+          <p:cNvSpPr txBox="1"/>
+          <p:nvPr/>
+        </p:nvSpPr>
+        <p:spPr>
+          <a:xfrm>
+            <a:off x="3549650" y="4727079"/>
+            <a:ext cx="2906537" cy="415230"/>
           </a:xfrm>
           <a:prstGeom prst="rect">
             <a:avLst/>
@@ -8399,7 +8521,7 @@
                 <a:ea typeface="+mn-lt" pitchFamily="34" charset="-122"/>
                 <a:cs typeface="+mn-lt" pitchFamily="34" charset="-120"/>
               </a:rPr>
-              <a:t>GPU-облако Immers.cloud: 63–71 ₽ за </a:t>
+              <a:t>GPU-облако Immers.cloud: 63–71 ₽ </a:t>
             </a:r>
             <a:br/>
             <a:pPr algn="l" indent="0" marL="0">
@@ -8417,7 +8539,7 @@
                 <a:ea typeface="+mn-lt" pitchFamily="34" charset="-122"/>
                 <a:cs typeface="+mn-lt" pitchFamily="34" charset="-120"/>
               </a:rPr>
-              <a:t>час, в цену входят vCPU, RAM и диск</a:t>
+              <a:t>за час, в цену входят vCPU, RAM и диск</a:t>
             </a:r>
             <a:endParaRPr lang="en-US" sz="1200" dirty="0"/>
           </a:p>
@@ -8425,13 +8547,13 @@
       </p:sp>
       <p:sp>
         <p:nvSpPr>
-          <p:cNvPr id="26" name="Text 24"/>
-          <p:cNvSpPr txBox="1"/>
-          <p:nvPr/>
-        </p:nvSpPr>
-        <p:spPr>
-          <a:xfrm>
-            <a:off x="1066800" y="5227340"/>
+          <p:cNvPr id="27" name="Text 25"/>
+          <p:cNvSpPr txBox="1"/>
+          <p:nvPr/>
+        </p:nvSpPr>
+        <p:spPr>
+          <a:xfrm>
+            <a:off x="1066800" y="5214640"/>
             <a:ext cx="5457130" cy="639961"/>
           </a:xfrm>
           <a:prstGeom prst="rect">
@@ -8477,7 +8599,7 @@
                 <a:ea typeface="+mn-lt" pitchFamily="34" charset="-122"/>
                 <a:cs typeface="+mn-lt" pitchFamily="34" charset="-120"/>
               </a:rPr>
-              <a:t>предполагается не только в цене, но и в организации аренды для </a:t>
+              <a:t>предполагается не только в цене, но и в организации аренды </a:t>
             </a:r>
             <a:br/>
             <a:pPr algn="l" indent="0" marL="0">
@@ -8495,6 +8617,23 @@
                 <a:ea typeface="+mn-lt" pitchFamily="34" charset="-122"/>
                 <a:cs typeface="+mn-lt" pitchFamily="34" charset="-120"/>
               </a:rPr>
+              <a:t>для </a:t>
+            </a:r>
+            <a:pPr algn="l" indent="0" marL="0">
+              <a:lnSpc>
+                <a:spcPts val="1680"/>
+              </a:lnSpc>
+              <a:buNone/>
+            </a:pPr>
+            <a:r>
+              <a:rPr lang="ru-RU" altLang="en-US" sz="1200" dirty="0">
+                <a:solidFill>
+                  <a:schemeClr val="bg1"/>
+                </a:solidFill>
+                <a:latin typeface="+mn-lt" pitchFamily="34" charset="0"/>
+                <a:ea typeface="+mn-lt" pitchFamily="34" charset="-122"/>
+                <a:cs typeface="+mn-lt" pitchFamily="34" charset="-120"/>
+              </a:rPr>
               <a:t>B2B-клиентов.</a:t>
             </a:r>
             <a:pPr algn="l" indent="0" marL="0">
@@ -8537,18 +8676,18 @@
       </p:sp>
       <p:sp>
         <p:nvSpPr>
-          <p:cNvPr id="27" name="Shape 25"/>
+          <p:cNvPr id="28" name="Shape 26"/>
           <p:cNvSpPr/>
           <p:nvPr/>
         </p:nvSpPr>
         <p:spPr>
           <a:xfrm>
-            <a:off x="6781105" y="3408958"/>
-            <a:ext cx="4594920" cy="2632968"/>
+            <a:off x="6781105" y="3383558"/>
+            <a:ext cx="4594920" cy="2658368"/>
           </a:xfrm>
           <a:prstGeom prst="roundRect">
             <a:avLst>
-              <a:gd name="adj" fmla="val 6753"/>
+              <a:gd name="adj" fmla="val 5733"/>
             </a:avLst>
           </a:prstGeom>
           <a:solidFill>
@@ -8564,13 +8703,13 @@
       </p:sp>
       <p:sp>
         <p:nvSpPr>
-          <p:cNvPr id="28" name="Text 26"/>
-          <p:cNvSpPr txBox="1"/>
-          <p:nvPr/>
-        </p:nvSpPr>
-        <p:spPr>
-          <a:xfrm>
-            <a:off x="7038280" y="3564533"/>
+          <p:cNvPr id="29" name="Text 27"/>
+          <p:cNvSpPr txBox="1"/>
+          <p:nvPr/>
+        </p:nvSpPr>
+        <p:spPr>
+          <a:xfrm>
+            <a:off x="7038280" y="3551833"/>
             <a:ext cx="4202987" cy="260350"/>
           </a:xfrm>
           <a:prstGeom prst="rect">
@@ -8603,13 +8742,13 @@
       </p:sp>
       <p:sp>
         <p:nvSpPr>
-          <p:cNvPr id="29" name="Text 27"/>
-          <p:cNvSpPr txBox="1"/>
-          <p:nvPr/>
-        </p:nvSpPr>
-        <p:spPr>
-          <a:xfrm>
-            <a:off x="7038280" y="3897908"/>
+          <p:cNvPr id="30" name="Text 28"/>
+          <p:cNvSpPr txBox="1"/>
+          <p:nvPr/>
+        </p:nvSpPr>
+        <p:spPr>
+          <a:xfrm>
+            <a:off x="7038280" y="3885208"/>
             <a:ext cx="4202987" cy="426641"/>
           </a:xfrm>
           <a:prstGeom prst="rect">
@@ -8680,13 +8819,13 @@
       </p:sp>
       <p:sp>
         <p:nvSpPr>
-          <p:cNvPr id="30" name="Text 28"/>
-          <p:cNvSpPr txBox="1"/>
-          <p:nvPr/>
-        </p:nvSpPr>
-        <p:spPr>
-          <a:xfrm>
-            <a:off x="7038280" y="4413448"/>
+          <p:cNvPr id="31" name="Text 29"/>
+          <p:cNvSpPr txBox="1"/>
+          <p:nvPr/>
+        </p:nvSpPr>
+        <p:spPr>
+          <a:xfrm>
+            <a:off x="7038280" y="4400748"/>
             <a:ext cx="4202987" cy="426641"/>
           </a:xfrm>
           <a:prstGeom prst="rect">
@@ -8731,7 +8870,7 @@
                 <a:ea typeface="+mn-lt" pitchFamily="34" charset="-122"/>
                 <a:cs typeface="+mn-lt" pitchFamily="34" charset="-120"/>
               </a:rPr>
-              <a:t> оборудование и вычислительная среда — по </a:t>
+              <a:t> оборудование и вычислительная среда — </a:t>
             </a:r>
             <a:br/>
             <a:pPr algn="l" indent="0" marL="0">
@@ -8749,7 +8888,7 @@
                 <a:ea typeface="+mn-lt" pitchFamily="34" charset="-122"/>
                 <a:cs typeface="+mn-lt" pitchFamily="34" charset="-120"/>
               </a:rPr>
-              <a:t>условиям партнёрства.</a:t>
+              <a:t>по условиям партнёрства.</a:t>
             </a:r>
             <a:endParaRPr lang="en-US" sz="1200" dirty="0"/>
           </a:p>
@@ -8757,13 +8896,13 @@
       </p:sp>
       <p:sp>
         <p:nvSpPr>
-          <p:cNvPr id="31" name="Text 29"/>
-          <p:cNvSpPr txBox="1"/>
-          <p:nvPr/>
-        </p:nvSpPr>
-        <p:spPr>
-          <a:xfrm>
-            <a:off x="7038280" y="4928989"/>
+          <p:cNvPr id="32" name="Text 30"/>
+          <p:cNvSpPr txBox="1"/>
+          <p:nvPr/>
+        </p:nvSpPr>
+        <p:spPr>
+          <a:xfrm>
+            <a:off x="7038280" y="4916289"/>
             <a:ext cx="4202987" cy="426641"/>
           </a:xfrm>
           <a:prstGeom prst="rect">
@@ -8908,7 +9047,7 @@
           </a:xfrm>
           <a:prstGeom prst="roundRect">
             <a:avLst>
-              <a:gd name="adj" fmla="val 3930"/>
+              <a:gd name="adj" fmla="val 3369"/>
             </a:avLst>
           </a:prstGeom>
           <a:ln w="12700">
@@ -8966,7 +9105,7 @@
         </p:nvSpPr>
         <p:spPr>
           <a:xfrm>
-            <a:off x="1104900" y="2005211"/>
+            <a:off x="1104900" y="2017911"/>
             <a:ext cx="5799336" cy="323850"/>
           </a:xfrm>
           <a:prstGeom prst="rect">
@@ -9019,7 +9158,7 @@
         </p:nvSpPr>
         <p:spPr>
           <a:xfrm>
-            <a:off x="1104900" y="2399209"/>
+            <a:off x="1104900" y="2424609"/>
             <a:ext cx="5646936" cy="0"/>
           </a:xfrm>
           <a:prstGeom prst="line">
@@ -9042,7 +9181,7 @@
         </p:nvSpPr>
         <p:spPr>
           <a:xfrm>
-            <a:off x="1104900" y="2472234"/>
+            <a:off x="1104900" y="2497634"/>
             <a:ext cx="5799336" cy="234950"/>
           </a:xfrm>
           <a:prstGeom prst="rect">
@@ -9081,7 +9220,7 @@
         </p:nvSpPr>
         <p:spPr>
           <a:xfrm>
-            <a:off x="1104900" y="2708374"/>
+            <a:off x="1104900" y="2733774"/>
             <a:ext cx="5799336" cy="254000"/>
           </a:xfrm>
           <a:prstGeom prst="rect">
@@ -9120,7 +9259,7 @@
         </p:nvSpPr>
         <p:spPr>
           <a:xfrm>
-            <a:off x="1104900" y="3042345"/>
+            <a:off x="1104900" y="3080445"/>
             <a:ext cx="5646936" cy="0"/>
           </a:xfrm>
           <a:prstGeom prst="line">
@@ -9143,7 +9282,7 @@
         </p:nvSpPr>
         <p:spPr>
           <a:xfrm>
-            <a:off x="1104900" y="3115370"/>
+            <a:off x="1104900" y="3153470"/>
             <a:ext cx="5799336" cy="234950"/>
           </a:xfrm>
           <a:prstGeom prst="rect">
@@ -9182,7 +9321,7 @@
         </p:nvSpPr>
         <p:spPr>
           <a:xfrm>
-            <a:off x="1104900" y="3351510"/>
+            <a:off x="1104900" y="3389610"/>
             <a:ext cx="5799336" cy="254000"/>
           </a:xfrm>
           <a:prstGeom prst="rect">
@@ -9221,7 +9360,7 @@
         </p:nvSpPr>
         <p:spPr>
           <a:xfrm>
-            <a:off x="1104900" y="3685480"/>
+            <a:off x="1104900" y="3736280"/>
             <a:ext cx="5646936" cy="0"/>
           </a:xfrm>
           <a:prstGeom prst="line">
@@ -9244,7 +9383,7 @@
         </p:nvSpPr>
         <p:spPr>
           <a:xfrm>
-            <a:off x="1104900" y="3758505"/>
+            <a:off x="1104900" y="3809305"/>
             <a:ext cx="5799336" cy="234950"/>
           </a:xfrm>
           <a:prstGeom prst="rect">
@@ -9283,7 +9422,7 @@
         </p:nvSpPr>
         <p:spPr>
           <a:xfrm>
-            <a:off x="1104900" y="4013696"/>
+            <a:off x="1104900" y="4064496"/>
             <a:ext cx="5799336" cy="674291"/>
           </a:xfrm>
           <a:prstGeom prst="rect">
@@ -9361,7 +9500,7 @@
         </p:nvSpPr>
         <p:spPr>
           <a:xfrm>
-            <a:off x="1104900" y="4774307"/>
+            <a:off x="1104900" y="4837807"/>
             <a:ext cx="5646936" cy="0"/>
           </a:xfrm>
           <a:prstGeom prst="line">
@@ -9384,7 +9523,7 @@
         </p:nvSpPr>
         <p:spPr>
           <a:xfrm>
-            <a:off x="1104900" y="4847332"/>
+            <a:off x="1104900" y="4910832"/>
             <a:ext cx="5799336" cy="234950"/>
           </a:xfrm>
           <a:prstGeom prst="rect">
@@ -9423,7 +9562,7 @@
         </p:nvSpPr>
         <p:spPr>
           <a:xfrm>
-            <a:off x="1104900" y="5102523"/>
+            <a:off x="1104900" y="5166023"/>
             <a:ext cx="5799336" cy="451445"/>
           </a:xfrm>
           <a:prstGeom prst="rect">
@@ -9451,7 +9590,7 @@
                 <a:ea typeface="+mn-lt" pitchFamily="34" charset="-122"/>
                 <a:cs typeface="+mn-lt" pitchFamily="34" charset="-120"/>
               </a:rPr>
-              <a:t>Готовы ли команды платить за подбор и сопровождение, а не только за </a:t>
+              <a:t>Готовы ли команды платить за подбор и сопровождение, а не только </a:t>
             </a:r>
             <a:br/>
             <a:pPr algn="l" indent="0" marL="0">
@@ -9469,7 +9608,7 @@
                 <a:ea typeface="+mn-lt" pitchFamily="34" charset="-122"/>
                 <a:cs typeface="+mn-lt" pitchFamily="34" charset="-120"/>
               </a:rPr>
-              <a:t>цену часа</a:t>
+              <a:t>за цену часа</a:t>
             </a:r>
             <a:endParaRPr lang="en-US" sz="1300" dirty="0"/>
           </a:p>
@@ -9577,7 +9716,7 @@
                 <a:ea typeface="+mj-lt" pitchFamily="34" charset="-122"/>
                 <a:cs typeface="+mj-lt" pitchFamily="34" charset="-120"/>
               </a:rPr>
-              <a:t>Пакетная обработка аудио и </a:t>
+              <a:t>Пакетная обработка аудио </a:t>
             </a:r>
             <a:br/>
             <a:pPr algn="l" indent="0" marL="0">
@@ -9595,7 +9734,7 @@
                 <a:ea typeface="+mj-lt" pitchFamily="34" charset="-122"/>
                 <a:cs typeface="+mj-lt" pitchFamily="34" charset="-120"/>
               </a:rPr>
-              <a:t>видео</a:t>
+              <a:t>и видео</a:t>
             </a:r>
             <a:endParaRPr lang="en-US" sz="1500" dirty="0"/>
           </a:p>
@@ -9742,7 +9881,7 @@
                 <a:ea typeface="+mj-lt" pitchFamily="34" charset="-122"/>
                 <a:cs typeface="+mj-lt" pitchFamily="34" charset="-120"/>
               </a:rPr>
-              <a:t>Обработка изображений и </a:t>
+              <a:t>Обработка изображений </a:t>
             </a:r>
             <a:br/>
             <a:pPr algn="l" indent="0" marL="0">
@@ -9760,7 +9899,7 @@
                 <a:ea typeface="+mj-lt" pitchFamily="34" charset="-122"/>
                 <a:cs typeface="+mj-lt" pitchFamily="34" charset="-120"/>
               </a:rPr>
-              <a:t>документов</a:t>
+              <a:t>и документов</a:t>
             </a:r>
             <a:endParaRPr lang="en-US" sz="1500" dirty="0"/>
           </a:p>
@@ -10017,7 +10156,7 @@
                 <a:ea typeface="+mn-lt" pitchFamily="34" charset="-122"/>
                 <a:cs typeface="+mn-lt" pitchFamily="34" charset="-120"/>
               </a:rPr>
-              <a:t>потратили компании в России на облачные серверы с </a:t>
+              <a:t>потратили компании в России на облачные серверы </a:t>
             </a:r>
             <a:br/>
             <a:pPr algn="l" indent="0" marL="0">
@@ -10035,7 +10174,7 @@
                 <a:ea typeface="+mn-lt" pitchFamily="34" charset="-122"/>
                 <a:cs typeface="+mn-lt" pitchFamily="34" charset="-120"/>
               </a:rPr>
-              <a:t>видеокартами в 2025 году</a:t>
+              <a:t>с видеокартами в 2025 году</a:t>
             </a:r>
             <a:endParaRPr lang="en-US" sz="1500" dirty="0"/>
           </a:p>
@@ -10549,7 +10688,7 @@
                 <a:ea typeface="+mn-lt" pitchFamily="34" charset="-122"/>
                 <a:cs typeface="+mn-lt" pitchFamily="34" charset="-120"/>
               </a:rPr>
-              <a:t>которым нужны GPU-мощности для </a:t>
+              <a:t>которым нужны GPU-мощности </a:t>
             </a:r>
             <a:br/>
             <a:pPr algn="l" indent="0" marL="0">
@@ -10567,7 +10706,7 @@
                 <a:ea typeface="+mn-lt" pitchFamily="34" charset="-122"/>
                 <a:cs typeface="+mn-lt" pitchFamily="34" charset="-120"/>
               </a:rPr>
-              <a:t>несрочных задач и понятное </a:t>
+              <a:t>для несрочных задач и понятное </a:t>
             </a:r>
             <a:br/>
             <a:pPr algn="l" indent="0" marL="0">
@@ -10755,14 +10894,60 @@
       </p:sp>
       <p:sp>
         <p:nvSpPr>
-          <p:cNvPr id="3" name="Text 1"/>
-          <p:cNvSpPr txBox="1"/>
-          <p:nvPr/>
-        </p:nvSpPr>
-        <p:spPr>
-          <a:xfrm>
-            <a:off x="2311400" y="1542951"/>
-            <a:ext cx="2151825" cy="365720"/>
+          <p:cNvPr id="3" name="Shape 1"/>
+          <p:cNvSpPr/>
+          <p:nvPr/>
+        </p:nvSpPr>
+        <p:spPr>
+          <a:xfrm>
+            <a:off x="812800" y="2150170"/>
+            <a:ext cx="1447800" cy="0"/>
+          </a:xfrm>
+          <a:prstGeom prst="line">
+            <a:avLst/>
+          </a:prstGeom>
+          <a:noFill/>
+          <a:ln w="12700">
+            <a:solidFill>
+              <a:schemeClr val="accent4"/>
+            </a:solidFill>
+            <a:prstDash val="solid"/>
+          </a:ln>
+        </p:spPr>
+      </p:sp>
+      <p:sp>
+        <p:nvSpPr>
+          <p:cNvPr id="4" name="Shape 2"/>
+          <p:cNvSpPr/>
+          <p:nvPr/>
+        </p:nvSpPr>
+        <p:spPr>
+          <a:xfrm>
+            <a:off x="2260600" y="2150170"/>
+            <a:ext cx="2279650" cy="0"/>
+          </a:xfrm>
+          <a:prstGeom prst="line">
+            <a:avLst/>
+          </a:prstGeom>
+          <a:noFill/>
+          <a:ln w="12700">
+            <a:solidFill>
+              <a:schemeClr val="accent4"/>
+            </a:solidFill>
+            <a:prstDash val="solid"/>
+          </a:ln>
+        </p:spPr>
+      </p:sp>
+      <p:sp>
+        <p:nvSpPr>
+          <p:cNvPr id="5" name="Text 3"/>
+          <p:cNvSpPr txBox="1"/>
+          <p:nvPr/>
+        </p:nvSpPr>
+        <p:spPr>
+          <a:xfrm>
+            <a:off x="2349500" y="1475879"/>
+            <a:ext cx="2164906" cy="365720"/>
           </a:xfrm>
           <a:prstGeom prst="rect">
             <a:avLst/>
@@ -10815,14 +11000,14 @@
       </p:sp>
       <p:sp>
         <p:nvSpPr>
-          <p:cNvPr id="4" name="Text 2"/>
-          <p:cNvSpPr txBox="1"/>
-          <p:nvPr/>
-        </p:nvSpPr>
-        <p:spPr>
-          <a:xfrm>
-            <a:off x="2311400" y="1912441"/>
-            <a:ext cx="2151825" cy="234950"/>
+          <p:cNvPr id="6" name="Text 4"/>
+          <p:cNvSpPr txBox="1"/>
+          <p:nvPr/>
+        </p:nvSpPr>
+        <p:spPr>
+          <a:xfrm>
+            <a:off x="2349500" y="1839020"/>
+            <a:ext cx="2164906" cy="234950"/>
           </a:xfrm>
           <a:prstGeom prst="rect">
             <a:avLst/>
@@ -10854,14 +11039,37 @@
       </p:sp>
       <p:sp>
         <p:nvSpPr>
-          <p:cNvPr id="5" name="Text 3"/>
-          <p:cNvSpPr txBox="1"/>
-          <p:nvPr/>
-        </p:nvSpPr>
-        <p:spPr>
-          <a:xfrm>
-            <a:off x="4603750" y="1542951"/>
-            <a:ext cx="2151825" cy="365720"/>
+          <p:cNvPr id="7" name="Shape 5"/>
+          <p:cNvSpPr/>
+          <p:nvPr/>
+        </p:nvSpPr>
+        <p:spPr>
+          <a:xfrm>
+            <a:off x="4540250" y="2150170"/>
+            <a:ext cx="2279650" cy="0"/>
+          </a:xfrm>
+          <a:prstGeom prst="line">
+            <a:avLst/>
+          </a:prstGeom>
+          <a:noFill/>
+          <a:ln w="12700">
+            <a:solidFill>
+              <a:schemeClr val="accent4"/>
+            </a:solidFill>
+            <a:prstDash val="solid"/>
+          </a:ln>
+        </p:spPr>
+      </p:sp>
+      <p:sp>
+        <p:nvSpPr>
+          <p:cNvPr id="8" name="Text 6"/>
+          <p:cNvSpPr txBox="1"/>
+          <p:nvPr/>
+        </p:nvSpPr>
+        <p:spPr>
+          <a:xfrm>
+            <a:off x="4629150" y="1475879"/>
+            <a:ext cx="2164906" cy="365720"/>
           </a:xfrm>
           <a:prstGeom prst="rect">
             <a:avLst/>
@@ -10914,14 +11122,14 @@
       </p:sp>
       <p:sp>
         <p:nvSpPr>
-          <p:cNvPr id="6" name="Text 4"/>
-          <p:cNvSpPr txBox="1"/>
-          <p:nvPr/>
-        </p:nvSpPr>
-        <p:spPr>
-          <a:xfrm>
-            <a:off x="4603750" y="1912441"/>
-            <a:ext cx="2151825" cy="234950"/>
+          <p:cNvPr id="9" name="Text 7"/>
+          <p:cNvSpPr txBox="1"/>
+          <p:nvPr/>
+        </p:nvSpPr>
+        <p:spPr>
+          <a:xfrm>
+            <a:off x="4629150" y="1839020"/>
+            <a:ext cx="2164906" cy="234950"/>
           </a:xfrm>
           <a:prstGeom prst="rect">
             <a:avLst/>
@@ -10953,14 +11161,37 @@
       </p:sp>
       <p:sp>
         <p:nvSpPr>
-          <p:cNvPr id="7" name="Text 5"/>
-          <p:cNvSpPr txBox="1"/>
-          <p:nvPr/>
-        </p:nvSpPr>
-        <p:spPr>
-          <a:xfrm>
-            <a:off x="6896100" y="1542951"/>
-            <a:ext cx="2151825" cy="365720"/>
+          <p:cNvPr id="10" name="Shape 8"/>
+          <p:cNvSpPr/>
+          <p:nvPr/>
+        </p:nvSpPr>
+        <p:spPr>
+          <a:xfrm>
+            <a:off x="6819900" y="2150170"/>
+            <a:ext cx="2279650" cy="0"/>
+          </a:xfrm>
+          <a:prstGeom prst="line">
+            <a:avLst/>
+          </a:prstGeom>
+          <a:noFill/>
+          <a:ln w="12700">
+            <a:solidFill>
+              <a:schemeClr val="accent4"/>
+            </a:solidFill>
+            <a:prstDash val="solid"/>
+          </a:ln>
+        </p:spPr>
+      </p:sp>
+      <p:sp>
+        <p:nvSpPr>
+          <p:cNvPr id="11" name="Text 9"/>
+          <p:cNvSpPr txBox="1"/>
+          <p:nvPr/>
+        </p:nvSpPr>
+        <p:spPr>
+          <a:xfrm>
+            <a:off x="6908800" y="1475879"/>
+            <a:ext cx="2164906" cy="365720"/>
           </a:xfrm>
           <a:prstGeom prst="rect">
             <a:avLst/>
@@ -11013,14 +11244,14 @@
       </p:sp>
       <p:sp>
         <p:nvSpPr>
-          <p:cNvPr id="8" name="Text 6"/>
-          <p:cNvSpPr txBox="1"/>
-          <p:nvPr/>
-        </p:nvSpPr>
-        <p:spPr>
-          <a:xfrm>
-            <a:off x="6896100" y="1912441"/>
-            <a:ext cx="2151825" cy="234950"/>
+          <p:cNvPr id="12" name="Text 10"/>
+          <p:cNvSpPr txBox="1"/>
+          <p:nvPr/>
+        </p:nvSpPr>
+        <p:spPr>
+          <a:xfrm>
+            <a:off x="6908800" y="1839020"/>
+            <a:ext cx="2164906" cy="234950"/>
           </a:xfrm>
           <a:prstGeom prst="rect">
             <a:avLst/>
@@ -11052,14 +11283,14 @@
       </p:sp>
       <p:sp>
         <p:nvSpPr>
-          <p:cNvPr id="9" name="Shape 7"/>
+          <p:cNvPr id="13" name="Shape 11"/>
           <p:cNvSpPr/>
           <p:nvPr/>
         </p:nvSpPr>
         <p:spPr>
           <a:xfrm>
-            <a:off x="9086850" y="1428651"/>
-            <a:ext cx="2292350" cy="777081"/>
+            <a:off x="9099550" y="1369120"/>
+            <a:ext cx="2279650" cy="787400"/>
           </a:xfrm>
           <a:prstGeom prst="round2SameRect">
             <a:avLst/>
@@ -11072,14 +11303,37 @@
       </p:sp>
       <p:sp>
         <p:nvSpPr>
-          <p:cNvPr id="10" name="Text 8"/>
-          <p:cNvSpPr txBox="1"/>
-          <p:nvPr/>
-        </p:nvSpPr>
-        <p:spPr>
-          <a:xfrm>
-            <a:off x="9188450" y="1517551"/>
-            <a:ext cx="2151825" cy="215900"/>
+          <p:cNvPr id="14" name="Shape 12"/>
+          <p:cNvSpPr/>
+          <p:nvPr/>
+        </p:nvSpPr>
+        <p:spPr>
+          <a:xfrm>
+            <a:off x="9099550" y="2150170"/>
+            <a:ext cx="2279650" cy="0"/>
+          </a:xfrm>
+          <a:prstGeom prst="line">
+            <a:avLst/>
+          </a:prstGeom>
+          <a:noFill/>
+          <a:ln w="12700">
+            <a:solidFill>
+              <a:schemeClr val="accent4"/>
+            </a:solidFill>
+            <a:prstDash val="solid"/>
+          </a:ln>
+        </p:spPr>
+      </p:sp>
+      <p:sp>
+        <p:nvSpPr>
+          <p:cNvPr id="15" name="Text 13"/>
+          <p:cNvSpPr txBox="1"/>
+          <p:nvPr/>
+        </p:nvSpPr>
+        <p:spPr>
+          <a:xfrm>
+            <a:off x="9188450" y="1625699"/>
+            <a:ext cx="526058" cy="215900"/>
           </a:xfrm>
           <a:prstGeom prst="rect">
             <a:avLst/>
@@ -11111,14 +11365,14 @@
       </p:sp>
       <p:sp>
         <p:nvSpPr>
-          <p:cNvPr id="11" name="Text 9"/>
-          <p:cNvSpPr txBox="1"/>
-          <p:nvPr/>
-        </p:nvSpPr>
-        <p:spPr>
-          <a:xfrm>
-            <a:off x="9188450" y="1737221"/>
-            <a:ext cx="2151825" cy="234950"/>
+          <p:cNvPr id="16" name="Text 14"/>
+          <p:cNvSpPr txBox="1"/>
+          <p:nvPr/>
+        </p:nvSpPr>
+        <p:spPr>
+          <a:xfrm>
+            <a:off x="9188450" y="1839020"/>
+            <a:ext cx="2164906" cy="234950"/>
           </a:xfrm>
           <a:prstGeom prst="rect">
             <a:avLst/>
@@ -11150,14 +11404,313 @@
       </p:sp>
       <p:sp>
         <p:nvSpPr>
-          <p:cNvPr id="12" name="Shape 10"/>
+          <p:cNvPr id="17" name="Text 15"/>
+          <p:cNvSpPr txBox="1"/>
+          <p:nvPr/>
+        </p:nvSpPr>
+        <p:spPr>
+          <a:xfrm>
+            <a:off x="812800" y="2226370"/>
+            <a:ext cx="1409700" cy="400050"/>
+          </a:xfrm>
+          <a:prstGeom prst="rect">
+            <a:avLst/>
+          </a:prstGeom>
+          <a:noFill/>
+          <a:ln/>
+        </p:spPr>
+        <p:txBody>
+          <a:bodyPr wrap="square" lIns="0" tIns="0" rIns="0" bIns="0" rtlCol="0" anchor="t"/>
+          <a:lstStyle/>
+          <a:p>
+            <a:pPr algn="l" indent="0" marL="0">
+              <a:lnSpc>
+                <a:spcPts val="1500"/>
+              </a:lnSpc>
+              <a:buNone/>
+            </a:pPr>
+            <a:r>
+              <a:rPr lang="ru-RU" altLang="en-US" sz="1200" b="1" dirty="0">
+                <a:solidFill>
+                  <a:schemeClr val="accent5"/>
+                </a:solidFill>
+                <a:latin typeface="+mn-lt" pitchFamily="34" charset="0"/>
+                <a:ea typeface="+mn-lt" pitchFamily="34" charset="-122"/>
+                <a:cs typeface="+mn-lt" pitchFamily="34" charset="-120"/>
+              </a:rPr>
+              <a:t>Цена RTX 3090 </a:t>
+            </a:r>
+            <a:br/>
+            <a:pPr algn="l" indent="0" marL="0">
+              <a:lnSpc>
+                <a:spcPts val="1500"/>
+              </a:lnSpc>
+              <a:buNone/>
+            </a:pPr>
+            <a:r>
+              <a:rPr lang="ru-RU" altLang="en-US" sz="1200" b="1" dirty="0">
+                <a:solidFill>
+                  <a:schemeClr val="accent5"/>
+                </a:solidFill>
+                <a:latin typeface="+mn-lt" pitchFamily="34" charset="0"/>
+                <a:ea typeface="+mn-lt" pitchFamily="34" charset="-122"/>
+                <a:cs typeface="+mn-lt" pitchFamily="34" charset="-120"/>
+              </a:rPr>
+              <a:t>за час</a:t>
+            </a:r>
+            <a:endParaRPr lang="en-US" sz="1200" dirty="0"/>
+          </a:p>
+        </p:txBody>
+      </p:sp>
+      <p:sp>
+        <p:nvSpPr>
+          <p:cNvPr id="18" name="Text 16"/>
+          <p:cNvSpPr txBox="1"/>
+          <p:nvPr/>
+        </p:nvSpPr>
+        <p:spPr>
+          <a:xfrm>
+            <a:off x="2349500" y="2226370"/>
+            <a:ext cx="2164906" cy="400050"/>
+          </a:xfrm>
+          <a:prstGeom prst="rect">
+            <a:avLst/>
+          </a:prstGeom>
+          <a:noFill/>
+          <a:ln/>
+        </p:spPr>
+        <p:txBody>
+          <a:bodyPr wrap="square" lIns="0" tIns="0" rIns="0" bIns="0" rtlCol="0" anchor="t"/>
+          <a:lstStyle/>
+          <a:p>
+            <a:pPr algn="l" indent="0" marL="0">
+              <a:lnSpc>
+                <a:spcPts val="1500"/>
+              </a:lnSpc>
+              <a:buNone/>
+            </a:pPr>
+            <a:r>
+              <a:rPr lang="ru-RU" altLang="en-US" sz="1200" dirty="0">
+                <a:solidFill>
+                  <a:schemeClr val="bg1"/>
+                </a:solidFill>
+                <a:latin typeface="+mn-lt" pitchFamily="34" charset="0"/>
+                <a:ea typeface="+mn-lt" pitchFamily="34" charset="-122"/>
+                <a:cs typeface="+mn-lt" pitchFamily="34" charset="-120"/>
+              </a:rPr>
+              <a:t>63–71 ₽ у Immers.cloud, </a:t>
+            </a:r>
+            <a:br/>
+            <a:pPr algn="l" indent="0" marL="0">
+              <a:lnSpc>
+                <a:spcPts val="1500"/>
+              </a:lnSpc>
+              <a:buNone/>
+            </a:pPr>
+            <a:r>
+              <a:rPr lang="ru-RU" altLang="en-US" sz="1200" dirty="0">
+                <a:solidFill>
+                  <a:schemeClr val="bg1"/>
+                </a:solidFill>
+                <a:latin typeface="+mn-lt" pitchFamily="34" charset="0"/>
+                <a:ea typeface="+mn-lt" pitchFamily="34" charset="-122"/>
+                <a:cs typeface="+mn-lt" pitchFamily="34" charset="-120"/>
+              </a:rPr>
+              <a:t>у других бывает дешевле</a:t>
+            </a:r>
+            <a:endParaRPr lang="en-US" sz="1200" dirty="0"/>
+          </a:p>
+        </p:txBody>
+      </p:sp>
+      <p:sp>
+        <p:nvSpPr>
+          <p:cNvPr id="19" name="Text 17"/>
+          <p:cNvSpPr txBox="1"/>
+          <p:nvPr/>
+        </p:nvSpPr>
+        <p:spPr>
+          <a:xfrm>
+            <a:off x="4629150" y="2226370"/>
+            <a:ext cx="2164906" cy="400050"/>
+          </a:xfrm>
+          <a:prstGeom prst="rect">
+            <a:avLst/>
+          </a:prstGeom>
+          <a:noFill/>
+          <a:ln/>
+        </p:spPr>
+        <p:txBody>
+          <a:bodyPr wrap="square" lIns="0" tIns="0" rIns="0" bIns="0" rtlCol="0" anchor="t"/>
+          <a:lstStyle/>
+          <a:p>
+            <a:pPr algn="l" indent="0" marL="0">
+              <a:lnSpc>
+                <a:spcPts val="1500"/>
+              </a:lnSpc>
+              <a:buNone/>
+            </a:pPr>
+            <a:r>
+              <a:rPr lang="ru-RU" altLang="en-US" sz="1200" dirty="0">
+                <a:solidFill>
+                  <a:schemeClr val="bg1"/>
+                </a:solidFill>
+                <a:latin typeface="+mn-lt" pitchFamily="34" charset="0"/>
+                <a:ea typeface="+mn-lt" pitchFamily="34" charset="-122"/>
+                <a:cs typeface="+mn-lt" pitchFamily="34" charset="-120"/>
+              </a:rPr>
+              <a:t>≈22–31 ₽ в опубликованных </a:t>
+            </a:r>
+            <a:br/>
+            <a:pPr algn="l" indent="0" marL="0">
+              <a:lnSpc>
+                <a:spcPts val="1500"/>
+              </a:lnSpc>
+              <a:buNone/>
+            </a:pPr>
+            <a:r>
+              <a:rPr lang="ru-RU" altLang="en-US" sz="1200" dirty="0">
+                <a:solidFill>
+                  <a:schemeClr val="bg1"/>
+                </a:solidFill>
+                <a:latin typeface="+mn-lt" pitchFamily="34" charset="0"/>
+                <a:ea typeface="+mn-lt" pitchFamily="34" charset="-122"/>
+                <a:cs typeface="+mn-lt" pitchFamily="34" charset="-120"/>
+              </a:rPr>
+              <a:t>предложениях</a:t>
+            </a:r>
+            <a:endParaRPr lang="en-US" sz="1200" dirty="0"/>
+          </a:p>
+        </p:txBody>
+      </p:sp>
+      <p:sp>
+        <p:nvSpPr>
+          <p:cNvPr id="20" name="Text 18"/>
+          <p:cNvSpPr txBox="1"/>
+          <p:nvPr/>
+        </p:nvSpPr>
+        <p:spPr>
+          <a:xfrm>
+            <a:off x="6908800" y="2226370"/>
+            <a:ext cx="2164906" cy="400050"/>
+          </a:xfrm>
+          <a:prstGeom prst="rect">
+            <a:avLst/>
+          </a:prstGeom>
+          <a:noFill/>
+          <a:ln/>
+        </p:spPr>
+        <p:txBody>
+          <a:bodyPr wrap="square" lIns="0" tIns="0" rIns="0" bIns="0" rtlCol="0" anchor="t"/>
+          <a:lstStyle/>
+          <a:p>
+            <a:pPr algn="l" indent="0" marL="0">
+              <a:lnSpc>
+                <a:spcPts val="1500"/>
+              </a:lnSpc>
+              <a:buNone/>
+            </a:pPr>
+            <a:r>
+              <a:rPr lang="ru-RU" altLang="en-US" sz="1200" dirty="0">
+                <a:solidFill>
+                  <a:schemeClr val="bg1"/>
+                </a:solidFill>
+                <a:latin typeface="+mn-lt" pitchFamily="34" charset="0"/>
+                <a:ea typeface="+mn-lt" pitchFamily="34" charset="-122"/>
+                <a:cs typeface="+mn-lt" pitchFamily="34" charset="-120"/>
+              </a:rPr>
+              <a:t>RunPod $0,22–0,50, Salad </a:t>
+            </a:r>
+            <a:br/>
+            <a:pPr algn="l" indent="0" marL="0">
+              <a:lnSpc>
+                <a:spcPts val="1500"/>
+              </a:lnSpc>
+              <a:buNone/>
+            </a:pPr>
+            <a:r>
+              <a:rPr lang="ru-RU" altLang="en-US" sz="1200" dirty="0">
+                <a:solidFill>
+                  <a:schemeClr val="bg1"/>
+                </a:solidFill>
+                <a:latin typeface="+mn-lt" pitchFamily="34" charset="0"/>
+                <a:ea typeface="+mn-lt" pitchFamily="34" charset="-122"/>
+                <a:cs typeface="+mn-lt" pitchFamily="34" charset="-120"/>
+              </a:rPr>
+              <a:t>$0,09–0,17, Vast.ai — по хосту</a:t>
+            </a:r>
+            <a:endParaRPr lang="en-US" sz="1200" dirty="0"/>
+          </a:p>
+        </p:txBody>
+      </p:sp>
+      <p:sp>
+        <p:nvSpPr>
+          <p:cNvPr id="21" name="Shape 19"/>
           <p:cNvSpPr/>
           <p:nvPr/>
         </p:nvSpPr>
         <p:spPr>
           <a:xfrm>
-            <a:off x="812800" y="2208907"/>
-            <a:ext cx="1397000" cy="0"/>
+            <a:off x="9099550" y="2156520"/>
+            <a:ext cx="2279650" cy="520700"/>
+          </a:xfrm>
+          <a:prstGeom prst="rect">
+            <a:avLst/>
+          </a:prstGeom>
+          <a:solidFill>
+            <a:schemeClr val="accent3"/>
+          </a:solidFill>
+          <a:ln/>
+        </p:spPr>
+      </p:sp>
+      <p:sp>
+        <p:nvSpPr>
+          <p:cNvPr id="22" name="Text 20"/>
+          <p:cNvSpPr txBox="1"/>
+          <p:nvPr/>
+        </p:nvSpPr>
+        <p:spPr>
+          <a:xfrm>
+            <a:off x="9188450" y="2200970"/>
+            <a:ext cx="2164906" cy="234950"/>
+          </a:xfrm>
+          <a:prstGeom prst="rect">
+            <a:avLst/>
+          </a:prstGeom>
+          <a:noFill/>
+          <a:ln/>
+        </p:spPr>
+        <p:txBody>
+          <a:bodyPr wrap="square" lIns="0" tIns="0" rIns="0" bIns="0" rtlCol="0" anchor="ctr"/>
+          <a:lstStyle/>
+          <a:p>
+            <a:pPr algn="l" indent="0" marL="0">
+              <a:buNone/>
+            </a:pPr>
+            <a:r>
+              <a:rPr lang="ru-RU" altLang="en-US" sz="1200" b="1" dirty="0">
+                <a:solidFill>
+                  <a:schemeClr val="accent1"/>
+                </a:solidFill>
+                <a:latin typeface="+mn-lt" pitchFamily="34" charset="0"/>
+                <a:ea typeface="+mn-lt" pitchFamily="34" charset="-122"/>
+                <a:cs typeface="+mn-lt" pitchFamily="34" charset="-120"/>
+              </a:rPr>
+              <a:t>Цель — около 35 ₽</a:t>
+            </a:r>
+            <a:endParaRPr lang="en-US" sz="1200" dirty="0"/>
+          </a:p>
+        </p:txBody>
+      </p:sp>
+      <p:sp>
+        <p:nvSpPr>
+          <p:cNvPr id="23" name="Shape 21"/>
+          <p:cNvSpPr/>
+          <p:nvPr/>
+        </p:nvSpPr>
+        <p:spPr>
+          <a:xfrm>
+            <a:off x="812800" y="2680395"/>
+            <a:ext cx="1447800" cy="0"/>
           </a:xfrm>
           <a:prstGeom prst="line">
             <a:avLst/>
@@ -11173,29 +11726,26 @@
       </p:sp>
       <p:sp>
         <p:nvSpPr>
-          <p:cNvPr id="13" name="Text 11"/>
-          <p:cNvSpPr txBox="1"/>
-          <p:nvPr/>
-        </p:nvSpPr>
-        <p:spPr>
-          <a:xfrm>
-            <a:off x="812800" y="2262882"/>
-            <a:ext cx="1346200" cy="407591"/>
-          </a:xfrm>
-          <a:prstGeom prst="rect">
-            <a:avLst/>
-          </a:prstGeom>
-          <a:noFill/>
-          <a:ln/>
-        </p:spPr>
-        <p:txBody>
-          <a:bodyPr wrap="square" lIns="0" tIns="0" rIns="0" bIns="0" rtlCol="0" anchor="t"/>
-          <a:lstStyle/>
-          <a:p>
-            <a:pPr algn="l" indent="0" marL="0">
-              <a:lnSpc>
-                <a:spcPts val="1560"/>
-              </a:lnSpc>
+          <p:cNvPr id="24" name="Text 22"/>
+          <p:cNvSpPr txBox="1"/>
+          <p:nvPr/>
+        </p:nvSpPr>
+        <p:spPr>
+          <a:xfrm>
+            <a:off x="812800" y="2728020"/>
+            <a:ext cx="1409700" cy="234950"/>
+          </a:xfrm>
+          <a:prstGeom prst="rect">
+            <a:avLst/>
+          </a:prstGeom>
+          <a:noFill/>
+          <a:ln/>
+        </p:spPr>
+        <p:txBody>
+          <a:bodyPr wrap="square" lIns="0" tIns="0" rIns="0" bIns="0" rtlCol="0" anchor="ctr"/>
+          <a:lstStyle/>
+          <a:p>
+            <a:pPr algn="l" indent="0" marL="0">
               <a:buNone/>
             </a:pPr>
             <a:r>
@@ -11207,25 +11757,7 @@
                 <a:ea typeface="+mn-lt" pitchFamily="34" charset="-122"/>
                 <a:cs typeface="+mn-lt" pitchFamily="34" charset="-120"/>
               </a:rPr>
-              <a:t>Цена RTX 3090 </a:t>
-            </a:r>
-            <a:br/>
-            <a:pPr algn="l" indent="0" marL="0">
-              <a:lnSpc>
-                <a:spcPts val="1560"/>
-              </a:lnSpc>
-              <a:buNone/>
-            </a:pPr>
-            <a:r>
-              <a:rPr lang="ru-RU" altLang="en-US" sz="1200" b="1" dirty="0">
-                <a:solidFill>
-                  <a:schemeClr val="accent5"/>
-                </a:solidFill>
-                <a:latin typeface="+mn-lt" pitchFamily="34" charset="0"/>
-                <a:ea typeface="+mn-lt" pitchFamily="34" charset="-122"/>
-                <a:cs typeface="+mn-lt" pitchFamily="34" charset="-120"/>
-              </a:rPr>
-              <a:t>за час</a:t>
+              <a:t>Формат</a:t>
             </a:r>
             <a:endParaRPr lang="en-US" sz="1200" dirty="0"/>
           </a:p>
@@ -11233,14 +11765,14 @@
       </p:sp>
       <p:sp>
         <p:nvSpPr>
-          <p:cNvPr id="14" name="Shape 12"/>
+          <p:cNvPr id="25" name="Shape 23"/>
           <p:cNvSpPr/>
           <p:nvPr/>
         </p:nvSpPr>
         <p:spPr>
           <a:xfrm>
-            <a:off x="2209800" y="2208907"/>
-            <a:ext cx="2292350" cy="0"/>
+            <a:off x="2260600" y="2680395"/>
+            <a:ext cx="2279650" cy="0"/>
           </a:xfrm>
           <a:prstGeom prst="line">
             <a:avLst/>
@@ -11256,14 +11788,14 @@
       </p:sp>
       <p:sp>
         <p:nvSpPr>
-          <p:cNvPr id="15" name="Text 13"/>
-          <p:cNvSpPr txBox="1"/>
-          <p:nvPr/>
-        </p:nvSpPr>
-        <p:spPr>
-          <a:xfrm>
-            <a:off x="2311400" y="2262882"/>
-            <a:ext cx="2151825" cy="407591"/>
+          <p:cNvPr id="26" name="Text 24"/>
+          <p:cNvSpPr txBox="1"/>
+          <p:nvPr/>
+        </p:nvSpPr>
+        <p:spPr>
+          <a:xfrm>
+            <a:off x="2349500" y="2753420"/>
+            <a:ext cx="2164906" cy="400050"/>
           </a:xfrm>
           <a:prstGeom prst="rect">
             <a:avLst/>
@@ -11277,7 +11809,7 @@
           <a:p>
             <a:pPr algn="l" indent="0" marL="0">
               <a:lnSpc>
-                <a:spcPts val="1560"/>
+                <a:spcPts val="1500"/>
               </a:lnSpc>
               <a:buNone/>
             </a:pPr>
@@ -11290,12 +11822,12 @@
                 <a:ea typeface="+mn-lt" pitchFamily="34" charset="-122"/>
                 <a:cs typeface="+mn-lt" pitchFamily="34" charset="-120"/>
               </a:rPr>
-              <a:t>63–71 ₽ у Immers.cloud, у </a:t>
+              <a:t>Облачные серверы с vCPU, </a:t>
             </a:r>
             <a:br/>
             <a:pPr algn="l" indent="0" marL="0">
               <a:lnSpc>
-                <a:spcPts val="1560"/>
+                <a:spcPts val="1500"/>
               </a:lnSpc>
               <a:buNone/>
             </a:pPr>
@@ -11308,7 +11840,7 @@
                 <a:ea typeface="+mn-lt" pitchFamily="34" charset="-122"/>
                 <a:cs typeface="+mn-lt" pitchFamily="34" charset="-120"/>
               </a:rPr>
-              <a:t>других бывает дешевле</a:t>
+              <a:t>RAM и диском</a:t>
             </a:r>
             <a:endParaRPr lang="en-US" sz="1200" dirty="0"/>
           </a:p>
@@ -11316,14 +11848,14 @@
       </p:sp>
       <p:sp>
         <p:nvSpPr>
-          <p:cNvPr id="16" name="Shape 14"/>
+          <p:cNvPr id="27" name="Shape 25"/>
           <p:cNvSpPr/>
           <p:nvPr/>
         </p:nvSpPr>
         <p:spPr>
           <a:xfrm>
-            <a:off x="4502150" y="2208907"/>
-            <a:ext cx="2292350" cy="0"/>
+            <a:off x="4540250" y="2680395"/>
+            <a:ext cx="2279650" cy="0"/>
           </a:xfrm>
           <a:prstGeom prst="line">
             <a:avLst/>
@@ -11339,14 +11871,14 @@
       </p:sp>
       <p:sp>
         <p:nvSpPr>
-          <p:cNvPr id="17" name="Text 15"/>
-          <p:cNvSpPr txBox="1"/>
-          <p:nvPr/>
-        </p:nvSpPr>
-        <p:spPr>
-          <a:xfrm>
-            <a:off x="4603750" y="2262882"/>
-            <a:ext cx="2151825" cy="407591"/>
+          <p:cNvPr id="28" name="Text 26"/>
+          <p:cNvSpPr txBox="1"/>
+          <p:nvPr/>
+        </p:nvSpPr>
+        <p:spPr>
+          <a:xfrm>
+            <a:off x="4629150" y="2753420"/>
+            <a:ext cx="2164906" cy="400050"/>
           </a:xfrm>
           <a:prstGeom prst="rect">
             <a:avLst/>
@@ -11360,7 +11892,7 @@
           <a:p>
             <a:pPr algn="l" indent="0" marL="0">
               <a:lnSpc>
-                <a:spcPts val="1560"/>
+                <a:spcPts val="1500"/>
               </a:lnSpc>
               <a:buNone/>
             </a:pPr>
@@ -11373,12 +11905,12 @@
                 <a:ea typeface="+mn-lt" pitchFamily="34" charset="-122"/>
                 <a:cs typeface="+mn-lt" pitchFamily="34" charset="-120"/>
               </a:rPr>
-              <a:t>≈22–31 ₽ в опубликованных </a:t>
+              <a:t>Площадка с картами </a:t>
             </a:r>
             <a:br/>
             <a:pPr algn="l" indent="0" marL="0">
               <a:lnSpc>
-                <a:spcPts val="1560"/>
+                <a:spcPts val="1500"/>
               </a:lnSpc>
               <a:buNone/>
             </a:pPr>
@@ -11391,7 +11923,7 @@
                 <a:ea typeface="+mn-lt" pitchFamily="34" charset="-122"/>
                 <a:cs typeface="+mn-lt" pitchFamily="34" charset="-120"/>
               </a:rPr>
-              <a:t>предложениях</a:t>
+              <a:t>частных владельцев</a:t>
             </a:r>
             <a:endParaRPr lang="en-US" sz="1200" dirty="0"/>
           </a:p>
@@ -11399,14 +11931,14 @@
       </p:sp>
       <p:sp>
         <p:nvSpPr>
-          <p:cNvPr id="18" name="Shape 16"/>
+          <p:cNvPr id="29" name="Shape 27"/>
           <p:cNvSpPr/>
           <p:nvPr/>
         </p:nvSpPr>
         <p:spPr>
           <a:xfrm>
-            <a:off x="6794500" y="2208907"/>
-            <a:ext cx="2292350" cy="0"/>
+            <a:off x="6819900" y="2680395"/>
+            <a:ext cx="2279650" cy="0"/>
           </a:xfrm>
           <a:prstGeom prst="line">
             <a:avLst/>
@@ -11422,14 +11954,14 @@
       </p:sp>
       <p:sp>
         <p:nvSpPr>
-          <p:cNvPr id="19" name="Text 17"/>
-          <p:cNvSpPr txBox="1"/>
-          <p:nvPr/>
-        </p:nvSpPr>
-        <p:spPr>
-          <a:xfrm>
-            <a:off x="6896100" y="2262882"/>
-            <a:ext cx="2151825" cy="407591"/>
+          <p:cNvPr id="30" name="Text 28"/>
+          <p:cNvSpPr txBox="1"/>
+          <p:nvPr/>
+        </p:nvSpPr>
+        <p:spPr>
+          <a:xfrm>
+            <a:off x="6908800" y="2753420"/>
+            <a:ext cx="2164906" cy="400050"/>
           </a:xfrm>
           <a:prstGeom prst="rect">
             <a:avLst/>
@@ -11443,7 +11975,7 @@
           <a:p>
             <a:pPr algn="l" indent="0" marL="0">
               <a:lnSpc>
-                <a:spcPts val="1560"/>
+                <a:spcPts val="1500"/>
               </a:lnSpc>
               <a:buNone/>
             </a:pPr>
@@ -11456,12 +11988,12 @@
                 <a:ea typeface="+mn-lt" pitchFamily="34" charset="-122"/>
                 <a:cs typeface="+mn-lt" pitchFamily="34" charset="-120"/>
               </a:rPr>
-              <a:t>RunPod $0,22–0,50, Salad </a:t>
+              <a:t>Маркетплейсы: инстансы </a:t>
             </a:r>
             <a:br/>
             <a:pPr algn="l" indent="0" marL="0">
               <a:lnSpc>
-                <a:spcPts val="1560"/>
+                <a:spcPts val="1500"/>
               </a:lnSpc>
               <a:buNone/>
             </a:pPr>
@@ -11474,7 +12006,7 @@
                 <a:ea typeface="+mn-lt" pitchFamily="34" charset="-122"/>
                 <a:cs typeface="+mn-lt" pitchFamily="34" charset="-120"/>
               </a:rPr>
-              <a:t>$0,09–0,17, Vast.ai — по хосту</a:t>
+              <a:t>и контейнеры</a:t>
             </a:r>
             <a:endParaRPr lang="en-US" sz="1200" dirty="0"/>
           </a:p>
@@ -11482,14 +12014,14 @@
       </p:sp>
       <p:sp>
         <p:nvSpPr>
-          <p:cNvPr id="20" name="Shape 18"/>
+          <p:cNvPr id="31" name="Shape 29"/>
           <p:cNvSpPr/>
           <p:nvPr/>
         </p:nvSpPr>
         <p:spPr>
           <a:xfrm>
-            <a:off x="9086850" y="2205732"/>
-            <a:ext cx="2292350" cy="504031"/>
+            <a:off x="9099550" y="2677220"/>
+            <a:ext cx="2279650" cy="527050"/>
           </a:xfrm>
           <a:prstGeom prst="rect">
             <a:avLst/>
@@ -11502,14 +12034,14 @@
       </p:sp>
       <p:sp>
         <p:nvSpPr>
-          <p:cNvPr id="21" name="Shape 19"/>
+          <p:cNvPr id="32" name="Shape 30"/>
           <p:cNvSpPr/>
           <p:nvPr/>
         </p:nvSpPr>
         <p:spPr>
           <a:xfrm>
-            <a:off x="9086850" y="2208907"/>
-            <a:ext cx="2292350" cy="0"/>
+            <a:off x="9099550" y="2680395"/>
+            <a:ext cx="2279650" cy="0"/>
           </a:xfrm>
           <a:prstGeom prst="line">
             <a:avLst/>
@@ -11525,26 +12057,29 @@
       </p:sp>
       <p:sp>
         <p:nvSpPr>
-          <p:cNvPr id="22" name="Text 20"/>
-          <p:cNvSpPr txBox="1"/>
-          <p:nvPr/>
-        </p:nvSpPr>
-        <p:spPr>
-          <a:xfrm>
-            <a:off x="9188450" y="2243832"/>
-            <a:ext cx="2151825" cy="234950"/>
-          </a:xfrm>
-          <a:prstGeom prst="rect">
-            <a:avLst/>
-          </a:prstGeom>
-          <a:noFill/>
-          <a:ln/>
-        </p:spPr>
-        <p:txBody>
-          <a:bodyPr wrap="square" lIns="0" tIns="0" rIns="0" bIns="0" rtlCol="0" anchor="ctr"/>
-          <a:lstStyle/>
-          <a:p>
-            <a:pPr algn="l" indent="0" marL="0">
+          <p:cNvPr id="33" name="Text 31"/>
+          <p:cNvSpPr txBox="1"/>
+          <p:nvPr/>
+        </p:nvSpPr>
+        <p:spPr>
+          <a:xfrm>
+            <a:off x="9188450" y="2753420"/>
+            <a:ext cx="2164906" cy="400050"/>
+          </a:xfrm>
+          <a:prstGeom prst="rect">
+            <a:avLst/>
+          </a:prstGeom>
+          <a:noFill/>
+          <a:ln/>
+        </p:spPr>
+        <p:txBody>
+          <a:bodyPr wrap="square" lIns="0" tIns="0" rIns="0" bIns="0" rtlCol="0" anchor="t"/>
+          <a:lstStyle/>
+          <a:p>
+            <a:pPr algn="l" indent="0" marL="0">
+              <a:lnSpc>
+                <a:spcPts val="1500"/>
+              </a:lnSpc>
               <a:buNone/>
             </a:pPr>
             <a:r>
@@ -11556,7 +12091,25 @@
                 <a:ea typeface="+mn-lt" pitchFamily="34" charset="-122"/>
                 <a:cs typeface="+mn-lt" pitchFamily="34" charset="-120"/>
               </a:rPr>
-              <a:t>Цель — около 35 ₽</a:t>
+              <a:t>B2B-сервис через </a:t>
+            </a:r>
+            <a:br/>
+            <a:pPr algn="l" indent="0" marL="0">
+              <a:lnSpc>
+                <a:spcPts val="1500"/>
+              </a:lnSpc>
+              <a:buNone/>
+            </a:pPr>
+            <a:r>
+              <a:rPr lang="ru-RU" altLang="en-US" sz="1200" b="1" dirty="0">
+                <a:solidFill>
+                  <a:schemeClr val="accent1"/>
+                </a:solidFill>
+                <a:latin typeface="+mn-lt" pitchFamily="34" charset="0"/>
+                <a:ea typeface="+mn-lt" pitchFamily="34" charset="-122"/>
+                <a:cs typeface="+mn-lt" pitchFamily="34" charset="-120"/>
+              </a:rPr>
+              <a:t>партнёрские фермы</a:t>
             </a:r>
             <a:endParaRPr lang="en-US" sz="1200" dirty="0"/>
           </a:p>
@@ -11564,14 +12117,14 @@
       </p:sp>
       <p:sp>
         <p:nvSpPr>
-          <p:cNvPr id="23" name="Shape 21"/>
+          <p:cNvPr id="34" name="Shape 32"/>
           <p:cNvSpPr/>
           <p:nvPr/>
         </p:nvSpPr>
         <p:spPr>
           <a:xfrm>
-            <a:off x="812800" y="2712938"/>
-            <a:ext cx="1397000" cy="0"/>
+            <a:off x="812800" y="3207445"/>
+            <a:ext cx="1447800" cy="0"/>
           </a:xfrm>
           <a:prstGeom prst="line">
             <a:avLst/>
@@ -11587,26 +12140,29 @@
       </p:sp>
       <p:sp>
         <p:nvSpPr>
-          <p:cNvPr id="24" name="Text 22"/>
-          <p:cNvSpPr txBox="1"/>
-          <p:nvPr/>
-        </p:nvSpPr>
-        <p:spPr>
-          <a:xfrm>
-            <a:off x="812800" y="2747863"/>
-            <a:ext cx="1346200" cy="234950"/>
-          </a:xfrm>
-          <a:prstGeom prst="rect">
-            <a:avLst/>
-          </a:prstGeom>
-          <a:noFill/>
-          <a:ln/>
-        </p:spPr>
-        <p:txBody>
-          <a:bodyPr wrap="square" lIns="0" tIns="0" rIns="0" bIns="0" rtlCol="0" anchor="ctr"/>
-          <a:lstStyle/>
-          <a:p>
-            <a:pPr algn="l" indent="0" marL="0">
+          <p:cNvPr id="35" name="Text 33"/>
+          <p:cNvSpPr txBox="1"/>
+          <p:nvPr/>
+        </p:nvSpPr>
+        <p:spPr>
+          <a:xfrm>
+            <a:off x="812800" y="3280470"/>
+            <a:ext cx="1409700" cy="400050"/>
+          </a:xfrm>
+          <a:prstGeom prst="rect">
+            <a:avLst/>
+          </a:prstGeom>
+          <a:noFill/>
+          <a:ln/>
+        </p:spPr>
+        <p:txBody>
+          <a:bodyPr wrap="square" lIns="0" tIns="0" rIns="0" bIns="0" rtlCol="0" anchor="t"/>
+          <a:lstStyle/>
+          <a:p>
+            <a:pPr algn="l" indent="0" marL="0">
+              <a:lnSpc>
+                <a:spcPts val="1500"/>
+              </a:lnSpc>
               <a:buNone/>
             </a:pPr>
             <a:r>
@@ -11618,7 +12174,25 @@
                 <a:ea typeface="+mn-lt" pitchFamily="34" charset="-122"/>
                 <a:cs typeface="+mn-lt" pitchFamily="34" charset="-120"/>
               </a:rPr>
-              <a:t>Формат</a:t>
+              <a:t>Подбор </a:t>
+            </a:r>
+            <a:br/>
+            <a:pPr algn="l" indent="0" marL="0">
+              <a:lnSpc>
+                <a:spcPts val="1500"/>
+              </a:lnSpc>
+              <a:buNone/>
+            </a:pPr>
+            <a:r>
+              <a:rPr lang="ru-RU" altLang="en-US" sz="1200" b="1" dirty="0">
+                <a:solidFill>
+                  <a:schemeClr val="accent5"/>
+                </a:solidFill>
+                <a:latin typeface="+mn-lt" pitchFamily="34" charset="0"/>
+                <a:ea typeface="+mn-lt" pitchFamily="34" charset="-122"/>
+                <a:cs typeface="+mn-lt" pitchFamily="34" charset="-120"/>
+              </a:rPr>
+              <a:t>и сопровождение</a:t>
             </a:r>
             <a:endParaRPr lang="en-US" sz="1200" dirty="0"/>
           </a:p>
@@ -11626,14 +12200,14 @@
       </p:sp>
       <p:sp>
         <p:nvSpPr>
-          <p:cNvPr id="25" name="Shape 23"/>
+          <p:cNvPr id="36" name="Shape 34"/>
           <p:cNvSpPr/>
           <p:nvPr/>
         </p:nvSpPr>
         <p:spPr>
           <a:xfrm>
-            <a:off x="2209800" y="2712938"/>
-            <a:ext cx="2292350" cy="0"/>
+            <a:off x="2260600" y="3207445"/>
+            <a:ext cx="2279650" cy="0"/>
           </a:xfrm>
           <a:prstGeom prst="line">
             <a:avLst/>
@@ -11649,29 +12223,26 @@
       </p:sp>
       <p:sp>
         <p:nvSpPr>
-          <p:cNvPr id="26" name="Text 24"/>
-          <p:cNvSpPr txBox="1"/>
-          <p:nvPr/>
-        </p:nvSpPr>
-        <p:spPr>
-          <a:xfrm>
-            <a:off x="2311400" y="2766913"/>
-            <a:ext cx="2151825" cy="407591"/>
-          </a:xfrm>
-          <a:prstGeom prst="rect">
-            <a:avLst/>
-          </a:prstGeom>
-          <a:noFill/>
-          <a:ln/>
-        </p:spPr>
-        <p:txBody>
-          <a:bodyPr wrap="square" lIns="0" tIns="0" rIns="0" bIns="0" rtlCol="0" anchor="t"/>
-          <a:lstStyle/>
-          <a:p>
-            <a:pPr algn="l" indent="0" marL="0">
-              <a:lnSpc>
-                <a:spcPts val="1560"/>
-              </a:lnSpc>
+          <p:cNvPr id="37" name="Text 35"/>
+          <p:cNvSpPr txBox="1"/>
+          <p:nvPr/>
+        </p:nvSpPr>
+        <p:spPr>
+          <a:xfrm>
+            <a:off x="2349500" y="3255070"/>
+            <a:ext cx="2164906" cy="234950"/>
+          </a:xfrm>
+          <a:prstGeom prst="rect">
+            <a:avLst/>
+          </a:prstGeom>
+          <a:noFill/>
+          <a:ln/>
+        </p:spPr>
+        <p:txBody>
+          <a:bodyPr wrap="square" lIns="0" tIns="0" rIns="0" bIns="0" rtlCol="0" anchor="ctr"/>
+          <a:lstStyle/>
+          <a:p>
+            <a:pPr algn="l" indent="0" marL="0">
               <a:buNone/>
             </a:pPr>
             <a:r>
@@ -11683,25 +12254,7 @@
                 <a:ea typeface="+mn-lt" pitchFamily="34" charset="-122"/>
                 <a:cs typeface="+mn-lt" pitchFamily="34" charset="-120"/>
               </a:rPr>
-              <a:t>Облачные серверы с vCPU, </a:t>
-            </a:r>
-            <a:br/>
-            <a:pPr algn="l" indent="0" marL="0">
-              <a:lnSpc>
-                <a:spcPts val="1560"/>
-              </a:lnSpc>
-              <a:buNone/>
-            </a:pPr>
-            <a:r>
-              <a:rPr lang="ru-RU" altLang="en-US" sz="1200" dirty="0">
-                <a:solidFill>
-                  <a:schemeClr val="bg1"/>
-                </a:solidFill>
-                <a:latin typeface="+mn-lt" pitchFamily="34" charset="0"/>
-                <a:ea typeface="+mn-lt" pitchFamily="34" charset="-122"/>
-                <a:cs typeface="+mn-lt" pitchFamily="34" charset="-120"/>
-              </a:rPr>
-              <a:t>RAM и диском</a:t>
+              <a:t>Поддержка провайдера</a:t>
             </a:r>
             <a:endParaRPr lang="en-US" sz="1200" dirty="0"/>
           </a:p>
@@ -11709,14 +12262,14 @@
       </p:sp>
       <p:sp>
         <p:nvSpPr>
-          <p:cNvPr id="27" name="Shape 25"/>
+          <p:cNvPr id="38" name="Shape 36"/>
           <p:cNvSpPr/>
           <p:nvPr/>
         </p:nvSpPr>
         <p:spPr>
           <a:xfrm>
-            <a:off x="4502150" y="2712938"/>
-            <a:ext cx="2292350" cy="0"/>
+            <a:off x="4540250" y="3207445"/>
+            <a:ext cx="2279650" cy="0"/>
           </a:xfrm>
           <a:prstGeom prst="line">
             <a:avLst/>
@@ -11732,29 +12285,26 @@
       </p:sp>
       <p:sp>
         <p:nvSpPr>
-          <p:cNvPr id="28" name="Text 26"/>
-          <p:cNvSpPr txBox="1"/>
-          <p:nvPr/>
-        </p:nvSpPr>
-        <p:spPr>
-          <a:xfrm>
-            <a:off x="4603750" y="2766913"/>
-            <a:ext cx="2151825" cy="407591"/>
-          </a:xfrm>
-          <a:prstGeom prst="rect">
-            <a:avLst/>
-          </a:prstGeom>
-          <a:noFill/>
-          <a:ln/>
-        </p:spPr>
-        <p:txBody>
-          <a:bodyPr wrap="square" lIns="0" tIns="0" rIns="0" bIns="0" rtlCol="0" anchor="t"/>
-          <a:lstStyle/>
-          <a:p>
-            <a:pPr algn="l" indent="0" marL="0">
-              <a:lnSpc>
-                <a:spcPts val="1560"/>
-              </a:lnSpc>
+          <p:cNvPr id="39" name="Text 37"/>
+          <p:cNvSpPr txBox="1"/>
+          <p:nvPr/>
+        </p:nvSpPr>
+        <p:spPr>
+          <a:xfrm>
+            <a:off x="4629150" y="3255070"/>
+            <a:ext cx="2164906" cy="234950"/>
+          </a:xfrm>
+          <a:prstGeom prst="rect">
+            <a:avLst/>
+          </a:prstGeom>
+          <a:noFill/>
+          <a:ln/>
+        </p:spPr>
+        <p:txBody>
+          <a:bodyPr wrap="square" lIns="0" tIns="0" rIns="0" bIns="0" rtlCol="0" anchor="ctr"/>
+          <a:lstStyle/>
+          <a:p>
+            <a:pPr algn="l" indent="0" marL="0">
               <a:buNone/>
             </a:pPr>
             <a:r>
@@ -11766,25 +12316,7 @@
                 <a:ea typeface="+mn-lt" pitchFamily="34" charset="-122"/>
                 <a:cs typeface="+mn-lt" pitchFamily="34" charset="-120"/>
               </a:rPr>
-              <a:t>Площадка с картами </a:t>
-            </a:r>
-            <a:br/>
-            <a:pPr algn="l" indent="0" marL="0">
-              <a:lnSpc>
-                <a:spcPts val="1560"/>
-              </a:lnSpc>
-              <a:buNone/>
-            </a:pPr>
-            <a:r>
-              <a:rPr lang="ru-RU" altLang="en-US" sz="1200" dirty="0">
-                <a:solidFill>
-                  <a:schemeClr val="bg1"/>
-                </a:solidFill>
-                <a:latin typeface="+mn-lt" pitchFamily="34" charset="0"/>
-                <a:ea typeface="+mn-lt" pitchFamily="34" charset="-122"/>
-                <a:cs typeface="+mn-lt" pitchFamily="34" charset="-120"/>
-              </a:rPr>
-              <a:t>частных владельцев</a:t>
+              <a:t>Нужно уточнить</a:t>
             </a:r>
             <a:endParaRPr lang="en-US" sz="1200" dirty="0"/>
           </a:p>
@@ -11792,14 +12324,14 @@
       </p:sp>
       <p:sp>
         <p:nvSpPr>
-          <p:cNvPr id="29" name="Shape 27"/>
+          <p:cNvPr id="40" name="Shape 38"/>
           <p:cNvSpPr/>
           <p:nvPr/>
         </p:nvSpPr>
         <p:spPr>
           <a:xfrm>
-            <a:off x="6794500" y="2712938"/>
-            <a:ext cx="2292350" cy="0"/>
+            <a:off x="6819900" y="3207445"/>
+            <a:ext cx="2279650" cy="0"/>
           </a:xfrm>
           <a:prstGeom prst="line">
             <a:avLst/>
@@ -11815,14 +12347,14 @@
       </p:sp>
       <p:sp>
         <p:nvSpPr>
-          <p:cNvPr id="30" name="Text 28"/>
-          <p:cNvSpPr txBox="1"/>
-          <p:nvPr/>
-        </p:nvSpPr>
-        <p:spPr>
-          <a:xfrm>
-            <a:off x="6896100" y="2766913"/>
-            <a:ext cx="2151825" cy="407591"/>
+          <p:cNvPr id="41" name="Text 39"/>
+          <p:cNvSpPr txBox="1"/>
+          <p:nvPr/>
+        </p:nvSpPr>
+        <p:spPr>
+          <a:xfrm>
+            <a:off x="6908800" y="3280470"/>
+            <a:ext cx="2164906" cy="400050"/>
           </a:xfrm>
           <a:prstGeom prst="rect">
             <a:avLst/>
@@ -11836,7 +12368,7 @@
           <a:p>
             <a:pPr algn="l" indent="0" marL="0">
               <a:lnSpc>
-                <a:spcPts val="1560"/>
+                <a:spcPts val="1500"/>
               </a:lnSpc>
               <a:buNone/>
             </a:pPr>
@@ -11849,12 +12381,12 @@
                 <a:ea typeface="+mn-lt" pitchFamily="34" charset="-122"/>
                 <a:cs typeface="+mn-lt" pitchFamily="34" charset="-120"/>
               </a:rPr>
-              <a:t>Маркетплейсы: инстансы и </a:t>
+              <a:t>В основном </a:t>
             </a:r>
             <a:br/>
             <a:pPr algn="l" indent="0" marL="0">
               <a:lnSpc>
-                <a:spcPts val="1560"/>
+                <a:spcPts val="1500"/>
               </a:lnSpc>
               <a:buNone/>
             </a:pPr>
@@ -11867,7 +12399,7 @@
                 <a:ea typeface="+mn-lt" pitchFamily="34" charset="-122"/>
                 <a:cs typeface="+mn-lt" pitchFamily="34" charset="-120"/>
               </a:rPr>
-              <a:t>контейнеры</a:t>
+              <a:t>самообслуживание</a:t>
             </a:r>
             <a:endParaRPr lang="en-US" sz="1200" dirty="0"/>
           </a:p>
@@ -11875,14 +12407,14 @@
       </p:sp>
       <p:sp>
         <p:nvSpPr>
-          <p:cNvPr id="31" name="Shape 29"/>
+          <p:cNvPr id="42" name="Shape 40"/>
           <p:cNvSpPr/>
           <p:nvPr/>
         </p:nvSpPr>
         <p:spPr>
           <a:xfrm>
-            <a:off x="9086850" y="2709763"/>
-            <a:ext cx="2292350" cy="504031"/>
+            <a:off x="9099550" y="3204270"/>
+            <a:ext cx="2279650" cy="527050"/>
           </a:xfrm>
           <a:prstGeom prst="rect">
             <a:avLst/>
@@ -11895,14 +12427,14 @@
       </p:sp>
       <p:sp>
         <p:nvSpPr>
-          <p:cNvPr id="32" name="Shape 30"/>
+          <p:cNvPr id="43" name="Shape 41"/>
           <p:cNvSpPr/>
           <p:nvPr/>
         </p:nvSpPr>
         <p:spPr>
           <a:xfrm>
-            <a:off x="9086850" y="2712938"/>
-            <a:ext cx="2292350" cy="0"/>
+            <a:off x="9099550" y="3207445"/>
+            <a:ext cx="2279650" cy="0"/>
           </a:xfrm>
           <a:prstGeom prst="line">
             <a:avLst/>
@@ -11918,59 +12450,38 @@
       </p:sp>
       <p:sp>
         <p:nvSpPr>
-          <p:cNvPr id="33" name="Text 31"/>
-          <p:cNvSpPr txBox="1"/>
-          <p:nvPr/>
-        </p:nvSpPr>
-        <p:spPr>
-          <a:xfrm>
-            <a:off x="9188450" y="2766913"/>
-            <a:ext cx="2151825" cy="407591"/>
-          </a:xfrm>
-          <a:prstGeom prst="rect">
-            <a:avLst/>
-          </a:prstGeom>
-          <a:noFill/>
-          <a:ln/>
-        </p:spPr>
-        <p:txBody>
-          <a:bodyPr wrap="square" lIns="0" tIns="0" rIns="0" bIns="0" rtlCol="0" anchor="t"/>
-          <a:lstStyle/>
-          <a:p>
-            <a:pPr algn="l" indent="0" marL="0">
-              <a:lnSpc>
-                <a:spcPts val="1560"/>
-              </a:lnSpc>
-              <a:buNone/>
-            </a:pPr>
-            <a:r>
-              <a:rPr lang="ru-RU" altLang="en-US" sz="1200" b="1" dirty="0">
-                <a:solidFill>
-                  <a:schemeClr val="accent1"/>
-                </a:solidFill>
-                <a:latin typeface="+mn-lt" pitchFamily="34" charset="0"/>
-                <a:ea typeface="+mn-lt" pitchFamily="34" charset="-122"/>
-                <a:cs typeface="+mn-lt" pitchFamily="34" charset="-120"/>
-              </a:rPr>
-              <a:t>B2B-сервис через </a:t>
-            </a:r>
-            <a:br/>
-            <a:pPr algn="l" indent="0" marL="0">
-              <a:lnSpc>
-                <a:spcPts val="1560"/>
-              </a:lnSpc>
-              <a:buNone/>
-            </a:pPr>
-            <a:r>
-              <a:rPr lang="ru-RU" altLang="en-US" sz="1200" b="1" dirty="0">
-                <a:solidFill>
-                  <a:schemeClr val="accent1"/>
-                </a:solidFill>
-                <a:latin typeface="+mn-lt" pitchFamily="34" charset="0"/>
-                <a:ea typeface="+mn-lt" pitchFamily="34" charset="-122"/>
-                <a:cs typeface="+mn-lt" pitchFamily="34" charset="-120"/>
-              </a:rPr>
-              <a:t>партнёрские фермы</a:t>
+          <p:cNvPr id="44" name="Text 42"/>
+          <p:cNvSpPr txBox="1"/>
+          <p:nvPr/>
+        </p:nvSpPr>
+        <p:spPr>
+          <a:xfrm>
+            <a:off x="9188450" y="3255070"/>
+            <a:ext cx="2164906" cy="234950"/>
+          </a:xfrm>
+          <a:prstGeom prst="rect">
+            <a:avLst/>
+          </a:prstGeom>
+          <a:noFill/>
+          <a:ln/>
+        </p:spPr>
+        <p:txBody>
+          <a:bodyPr wrap="square" lIns="0" tIns="0" rIns="0" bIns="0" rtlCol="0" anchor="ctr"/>
+          <a:lstStyle/>
+          <a:p>
+            <a:pPr algn="l" indent="0" marL="0">
+              <a:buNone/>
+            </a:pPr>
+            <a:r>
+              <a:rPr lang="ru-RU" altLang="en-US" sz="1200" dirty="0">
+                <a:solidFill>
+                  <a:schemeClr val="bg1"/>
+                </a:solidFill>
+                <a:latin typeface="+mn-lt" pitchFamily="34" charset="0"/>
+                <a:ea typeface="+mn-lt" pitchFamily="34" charset="-122"/>
+                <a:cs typeface="+mn-lt" pitchFamily="34" charset="-120"/>
+              </a:rPr>
+              <a:t>Проверяемая гипотеза</a:t>
             </a:r>
             <a:endParaRPr lang="en-US" sz="1200" dirty="0"/>
           </a:p>
@@ -11978,14 +12489,14 @@
       </p:sp>
       <p:sp>
         <p:nvSpPr>
-          <p:cNvPr id="34" name="Shape 32"/>
+          <p:cNvPr id="45" name="Shape 43"/>
           <p:cNvSpPr/>
           <p:nvPr/>
         </p:nvSpPr>
         <p:spPr>
           <a:xfrm>
-            <a:off x="812800" y="3216970"/>
-            <a:ext cx="1397000" cy="0"/>
+            <a:off x="812800" y="3734495"/>
+            <a:ext cx="1447800" cy="0"/>
           </a:xfrm>
           <a:prstGeom prst="line">
             <a:avLst/>
@@ -12001,29 +12512,26 @@
       </p:sp>
       <p:sp>
         <p:nvSpPr>
-          <p:cNvPr id="35" name="Text 33"/>
-          <p:cNvSpPr txBox="1"/>
-          <p:nvPr/>
-        </p:nvSpPr>
-        <p:spPr>
-          <a:xfrm>
-            <a:off x="812800" y="3270945"/>
-            <a:ext cx="1346200" cy="407591"/>
-          </a:xfrm>
-          <a:prstGeom prst="rect">
-            <a:avLst/>
-          </a:prstGeom>
-          <a:noFill/>
-          <a:ln/>
-        </p:spPr>
-        <p:txBody>
-          <a:bodyPr wrap="square" lIns="0" tIns="0" rIns="0" bIns="0" rtlCol="0" anchor="t"/>
-          <a:lstStyle/>
-          <a:p>
-            <a:pPr algn="l" indent="0" marL="0">
-              <a:lnSpc>
-                <a:spcPts val="1560"/>
-              </a:lnSpc>
+          <p:cNvPr id="46" name="Text 44"/>
+          <p:cNvSpPr txBox="1"/>
+          <p:nvPr/>
+        </p:nvSpPr>
+        <p:spPr>
+          <a:xfrm>
+            <a:off x="812800" y="3782120"/>
+            <a:ext cx="1409700" cy="234950"/>
+          </a:xfrm>
+          <a:prstGeom prst="rect">
+            <a:avLst/>
+          </a:prstGeom>
+          <a:noFill/>
+          <a:ln/>
+        </p:spPr>
+        <p:txBody>
+          <a:bodyPr wrap="square" lIns="0" tIns="0" rIns="0" bIns="0" rtlCol="0" anchor="ctr"/>
+          <a:lstStyle/>
+          <a:p>
+            <a:pPr algn="l" indent="0" marL="0">
               <a:buNone/>
             </a:pPr>
             <a:r>
@@ -12035,25 +12543,7 @@
                 <a:ea typeface="+mn-lt" pitchFamily="34" charset="-122"/>
                 <a:cs typeface="+mn-lt" pitchFamily="34" charset="-120"/>
               </a:rPr>
-              <a:t>Подбор и </a:t>
-            </a:r>
-            <a:br/>
-            <a:pPr algn="l" indent="0" marL="0">
-              <a:lnSpc>
-                <a:spcPts val="1560"/>
-              </a:lnSpc>
-              <a:buNone/>
-            </a:pPr>
-            <a:r>
-              <a:rPr lang="ru-RU" altLang="en-US" sz="1200" b="1" dirty="0">
-                <a:solidFill>
-                  <a:schemeClr val="accent5"/>
-                </a:solidFill>
-                <a:latin typeface="+mn-lt" pitchFamily="34" charset="0"/>
-                <a:ea typeface="+mn-lt" pitchFamily="34" charset="-122"/>
-                <a:cs typeface="+mn-lt" pitchFamily="34" charset="-120"/>
-              </a:rPr>
-              <a:t>сопровождение</a:t>
+              <a:t>Надёжность</a:t>
             </a:r>
             <a:endParaRPr lang="en-US" sz="1200" dirty="0"/>
           </a:p>
@@ -12061,14 +12551,14 @@
       </p:sp>
       <p:sp>
         <p:nvSpPr>
-          <p:cNvPr id="36" name="Shape 34"/>
+          <p:cNvPr id="47" name="Shape 45"/>
           <p:cNvSpPr/>
           <p:nvPr/>
         </p:nvSpPr>
         <p:spPr>
           <a:xfrm>
-            <a:off x="2209800" y="3216970"/>
-            <a:ext cx="2292350" cy="0"/>
+            <a:off x="2260600" y="3734495"/>
+            <a:ext cx="2279650" cy="0"/>
           </a:xfrm>
           <a:prstGeom prst="line">
             <a:avLst/>
@@ -12084,26 +12574,29 @@
       </p:sp>
       <p:sp>
         <p:nvSpPr>
-          <p:cNvPr id="37" name="Text 35"/>
-          <p:cNvSpPr txBox="1"/>
-          <p:nvPr/>
-        </p:nvSpPr>
-        <p:spPr>
-          <a:xfrm>
-            <a:off x="2311400" y="3251895"/>
-            <a:ext cx="2151825" cy="234950"/>
-          </a:xfrm>
-          <a:prstGeom prst="rect">
-            <a:avLst/>
-          </a:prstGeom>
-          <a:noFill/>
-          <a:ln/>
-        </p:spPr>
-        <p:txBody>
-          <a:bodyPr wrap="square" lIns="0" tIns="0" rIns="0" bIns="0" rtlCol="0" anchor="ctr"/>
-          <a:lstStyle/>
-          <a:p>
-            <a:pPr algn="l" indent="0" marL="0">
+          <p:cNvPr id="48" name="Text 46"/>
+          <p:cNvSpPr txBox="1"/>
+          <p:nvPr/>
+        </p:nvSpPr>
+        <p:spPr>
+          <a:xfrm>
+            <a:off x="2349500" y="3807520"/>
+            <a:ext cx="2164906" cy="400050"/>
+          </a:xfrm>
+          <a:prstGeom prst="rect">
+            <a:avLst/>
+          </a:prstGeom>
+          <a:noFill/>
+          <a:ln/>
+        </p:spPr>
+        <p:txBody>
+          <a:bodyPr wrap="square" lIns="0" tIns="0" rIns="0" bIns="0" rtlCol="0" anchor="t"/>
+          <a:lstStyle/>
+          <a:p>
+            <a:pPr algn="l" indent="0" marL="0">
+              <a:lnSpc>
+                <a:spcPts val="1500"/>
+              </a:lnSpc>
               <a:buNone/>
             </a:pPr>
             <a:r>
@@ -12115,7 +12608,25 @@
                 <a:ea typeface="+mn-lt" pitchFamily="34" charset="-122"/>
                 <a:cs typeface="+mn-lt" pitchFamily="34" charset="-120"/>
               </a:rPr>
-              <a:t>Поддержка провайдера</a:t>
+              <a:t>Дата-центры, гарантии </a:t>
+            </a:r>
+            <a:br/>
+            <a:pPr algn="l" indent="0" marL="0">
+              <a:lnSpc>
+                <a:spcPts val="1500"/>
+              </a:lnSpc>
+              <a:buNone/>
+            </a:pPr>
+            <a:r>
+              <a:rPr lang="ru-RU" altLang="en-US" sz="1200" dirty="0">
+                <a:solidFill>
+                  <a:schemeClr val="bg1"/>
+                </a:solidFill>
+                <a:latin typeface="+mn-lt" pitchFamily="34" charset="0"/>
+                <a:ea typeface="+mn-lt" pitchFamily="34" charset="-122"/>
+                <a:cs typeface="+mn-lt" pitchFamily="34" charset="-120"/>
+              </a:rPr>
+              <a:t>доступности</a:t>
             </a:r>
             <a:endParaRPr lang="en-US" sz="1200" dirty="0"/>
           </a:p>
@@ -12123,14 +12634,14 @@
       </p:sp>
       <p:sp>
         <p:nvSpPr>
-          <p:cNvPr id="38" name="Shape 36"/>
+          <p:cNvPr id="49" name="Shape 47"/>
           <p:cNvSpPr/>
           <p:nvPr/>
         </p:nvSpPr>
         <p:spPr>
           <a:xfrm>
-            <a:off x="4502150" y="3216970"/>
-            <a:ext cx="2292350" cy="0"/>
+            <a:off x="4540250" y="3734495"/>
+            <a:ext cx="2279650" cy="0"/>
           </a:xfrm>
           <a:prstGeom prst="line">
             <a:avLst/>
@@ -12146,14 +12657,14 @@
       </p:sp>
       <p:sp>
         <p:nvSpPr>
-          <p:cNvPr id="39" name="Text 37"/>
-          <p:cNvSpPr txBox="1"/>
-          <p:nvPr/>
-        </p:nvSpPr>
-        <p:spPr>
-          <a:xfrm>
-            <a:off x="4603750" y="3251895"/>
-            <a:ext cx="2151825" cy="234950"/>
+          <p:cNvPr id="50" name="Text 48"/>
+          <p:cNvSpPr txBox="1"/>
+          <p:nvPr/>
+        </p:nvSpPr>
+        <p:spPr>
+          <a:xfrm>
+            <a:off x="4629150" y="3782120"/>
+            <a:ext cx="2164906" cy="234950"/>
           </a:xfrm>
           <a:prstGeom prst="rect">
             <a:avLst/>
@@ -12177,7 +12688,7 @@
                 <a:ea typeface="+mn-lt" pitchFamily="34" charset="-122"/>
                 <a:cs typeface="+mn-lt" pitchFamily="34" charset="-120"/>
               </a:rPr>
-              <a:t>Нужно уточнить</a:t>
+              <a:t>Зависит от владельца карты</a:t>
             </a:r>
             <a:endParaRPr lang="en-US" sz="1200" dirty="0"/>
           </a:p>
@@ -12185,14 +12696,14 @@
       </p:sp>
       <p:sp>
         <p:nvSpPr>
-          <p:cNvPr id="40" name="Shape 38"/>
+          <p:cNvPr id="51" name="Shape 49"/>
           <p:cNvSpPr/>
           <p:nvPr/>
         </p:nvSpPr>
         <p:spPr>
           <a:xfrm>
-            <a:off x="6794500" y="3216970"/>
-            <a:ext cx="2292350" cy="0"/>
+            <a:off x="6819900" y="3734495"/>
+            <a:ext cx="2279650" cy="0"/>
           </a:xfrm>
           <a:prstGeom prst="line">
             <a:avLst/>
@@ -12208,29 +12719,26 @@
       </p:sp>
       <p:sp>
         <p:nvSpPr>
-          <p:cNvPr id="41" name="Text 39"/>
-          <p:cNvSpPr txBox="1"/>
-          <p:nvPr/>
-        </p:nvSpPr>
-        <p:spPr>
-          <a:xfrm>
-            <a:off x="6896100" y="3270945"/>
-            <a:ext cx="2151825" cy="407591"/>
-          </a:xfrm>
-          <a:prstGeom prst="rect">
-            <a:avLst/>
-          </a:prstGeom>
-          <a:noFill/>
-          <a:ln/>
-        </p:spPr>
-        <p:txBody>
-          <a:bodyPr wrap="square" lIns="0" tIns="0" rIns="0" bIns="0" rtlCol="0" anchor="t"/>
-          <a:lstStyle/>
-          <a:p>
-            <a:pPr algn="l" indent="0" marL="0">
-              <a:lnSpc>
-                <a:spcPts val="1560"/>
-              </a:lnSpc>
+          <p:cNvPr id="52" name="Text 50"/>
+          <p:cNvSpPr txBox="1"/>
+          <p:nvPr/>
+        </p:nvSpPr>
+        <p:spPr>
+          <a:xfrm>
+            <a:off x="6908800" y="3782120"/>
+            <a:ext cx="2164906" cy="234950"/>
+          </a:xfrm>
+          <a:prstGeom prst="rect">
+            <a:avLst/>
+          </a:prstGeom>
+          <a:noFill/>
+          <a:ln/>
+        </p:spPr>
+        <p:txBody>
+          <a:bodyPr wrap="square" lIns="0" tIns="0" rIns="0" bIns="0" rtlCol="0" anchor="ctr"/>
+          <a:lstStyle/>
+          <a:p>
+            <a:pPr algn="l" indent="0" marL="0">
               <a:buNone/>
             </a:pPr>
             <a:r>
@@ -12242,25 +12750,7 @@
                 <a:ea typeface="+mn-lt" pitchFamily="34" charset="-122"/>
                 <a:cs typeface="+mn-lt" pitchFamily="34" charset="-120"/>
               </a:rPr>
-              <a:t>В основном </a:t>
-            </a:r>
-            <a:br/>
-            <a:pPr algn="l" indent="0" marL="0">
-              <a:lnSpc>
-                <a:spcPts val="1560"/>
-              </a:lnSpc>
-              <a:buNone/>
-            </a:pPr>
-            <a:r>
-              <a:rPr lang="ru-RU" altLang="en-US" sz="1200" dirty="0">
-                <a:solidFill>
-                  <a:schemeClr val="bg1"/>
-                </a:solidFill>
-                <a:latin typeface="+mn-lt" pitchFamily="34" charset="0"/>
-                <a:ea typeface="+mn-lt" pitchFamily="34" charset="-122"/>
-                <a:cs typeface="+mn-lt" pitchFamily="34" charset="-120"/>
-              </a:rPr>
-              <a:t>самообслуживание</a:t>
+              <a:t>Зависит от хоста и тарифа</a:t>
             </a:r>
             <a:endParaRPr lang="en-US" sz="1200" dirty="0"/>
           </a:p>
@@ -12268,14 +12758,14 @@
       </p:sp>
       <p:sp>
         <p:nvSpPr>
-          <p:cNvPr id="42" name="Shape 40"/>
+          <p:cNvPr id="53" name="Shape 51"/>
           <p:cNvSpPr/>
           <p:nvPr/>
         </p:nvSpPr>
         <p:spPr>
           <a:xfrm>
-            <a:off x="9086850" y="3213795"/>
-            <a:ext cx="2292350" cy="504031"/>
+            <a:off x="9099550" y="3731320"/>
+            <a:ext cx="2279650" cy="527050"/>
           </a:xfrm>
           <a:prstGeom prst="rect">
             <a:avLst/>
@@ -12288,14 +12778,14 @@
       </p:sp>
       <p:sp>
         <p:nvSpPr>
-          <p:cNvPr id="43" name="Shape 41"/>
+          <p:cNvPr id="54" name="Shape 52"/>
           <p:cNvSpPr/>
           <p:nvPr/>
         </p:nvSpPr>
         <p:spPr>
           <a:xfrm>
-            <a:off x="9086850" y="3216970"/>
-            <a:ext cx="2292350" cy="0"/>
+            <a:off x="9099550" y="3734495"/>
+            <a:ext cx="2279650" cy="0"/>
           </a:xfrm>
           <a:prstGeom prst="line">
             <a:avLst/>
@@ -12311,14 +12801,14 @@
       </p:sp>
       <p:sp>
         <p:nvSpPr>
-          <p:cNvPr id="44" name="Text 42"/>
-          <p:cNvSpPr txBox="1"/>
-          <p:nvPr/>
-        </p:nvSpPr>
-        <p:spPr>
-          <a:xfrm>
-            <a:off x="9188450" y="3251895"/>
-            <a:ext cx="2151825" cy="234950"/>
+          <p:cNvPr id="55" name="Text 53"/>
+          <p:cNvSpPr txBox="1"/>
+          <p:nvPr/>
+        </p:nvSpPr>
+        <p:spPr>
+          <a:xfrm>
+            <a:off x="9188450" y="3782120"/>
+            <a:ext cx="2164906" cy="234950"/>
           </a:xfrm>
           <a:prstGeom prst="rect">
             <a:avLst/>
@@ -12334,15 +12824,15 @@
               <a:buNone/>
             </a:pPr>
             <a:r>
-              <a:rPr lang="ru-RU" altLang="en-US" sz="1200" b="1" dirty="0">
-                <a:solidFill>
-                  <a:schemeClr val="accent1"/>
-                </a:solidFill>
-                <a:latin typeface="+mn-lt" pitchFamily="34" charset="0"/>
-                <a:ea typeface="+mn-lt" pitchFamily="34" charset="-122"/>
-                <a:cs typeface="+mn-lt" pitchFamily="34" charset="-120"/>
-              </a:rPr>
-              <a:t>Проверяемая гипотеза</a:t>
+              <a:rPr lang="ru-RU" altLang="en-US" sz="1200" dirty="0">
+                <a:solidFill>
+                  <a:schemeClr val="bg1"/>
+                </a:solidFill>
+                <a:latin typeface="+mn-lt" pitchFamily="34" charset="0"/>
+                <a:ea typeface="+mn-lt" pitchFamily="34" charset="-122"/>
+                <a:cs typeface="+mn-lt" pitchFamily="34" charset="-120"/>
+              </a:rPr>
+              <a:t>Зависит от партнёров</a:t>
             </a:r>
             <a:endParaRPr lang="en-US" sz="1200" dirty="0"/>
           </a:p>
@@ -12350,14 +12840,14 @@
       </p:sp>
       <p:sp>
         <p:nvSpPr>
-          <p:cNvPr id="45" name="Shape 43"/>
+          <p:cNvPr id="56" name="Shape 54"/>
           <p:cNvSpPr/>
           <p:nvPr/>
         </p:nvSpPr>
         <p:spPr>
           <a:xfrm>
-            <a:off x="812800" y="3721001"/>
-            <a:ext cx="1397000" cy="0"/>
+            <a:off x="812800" y="4261545"/>
+            <a:ext cx="1447800" cy="0"/>
           </a:xfrm>
           <a:prstGeom prst="line">
             <a:avLst/>
@@ -12373,14 +12863,14 @@
       </p:sp>
       <p:sp>
         <p:nvSpPr>
-          <p:cNvPr id="46" name="Text 44"/>
-          <p:cNvSpPr txBox="1"/>
-          <p:nvPr/>
-        </p:nvSpPr>
-        <p:spPr>
-          <a:xfrm>
-            <a:off x="812800" y="3755926"/>
-            <a:ext cx="1346200" cy="234950"/>
+          <p:cNvPr id="57" name="Text 55"/>
+          <p:cNvSpPr txBox="1"/>
+          <p:nvPr/>
+        </p:nvSpPr>
+        <p:spPr>
+          <a:xfrm>
+            <a:off x="812800" y="4309170"/>
+            <a:ext cx="1409700" cy="234950"/>
           </a:xfrm>
           <a:prstGeom prst="rect">
             <a:avLst/>
@@ -12404,7 +12894,7 @@
                 <a:ea typeface="+mn-lt" pitchFamily="34" charset="-122"/>
                 <a:cs typeface="+mn-lt" pitchFamily="34" charset="-120"/>
               </a:rPr>
-              <a:t>Надёжность</a:t>
+              <a:t>Оплата из России</a:t>
             </a:r>
             <a:endParaRPr lang="en-US" sz="1200" dirty="0"/>
           </a:p>
@@ -12412,14 +12902,14 @@
       </p:sp>
       <p:sp>
         <p:nvSpPr>
-          <p:cNvPr id="47" name="Shape 45"/>
+          <p:cNvPr id="58" name="Shape 56"/>
           <p:cNvSpPr/>
           <p:nvPr/>
         </p:nvSpPr>
         <p:spPr>
           <a:xfrm>
-            <a:off x="2209800" y="3721001"/>
-            <a:ext cx="2292350" cy="0"/>
+            <a:off x="2260600" y="4261545"/>
+            <a:ext cx="2279650" cy="0"/>
           </a:xfrm>
           <a:prstGeom prst="line">
             <a:avLst/>
@@ -12435,29 +12925,26 @@
       </p:sp>
       <p:sp>
         <p:nvSpPr>
-          <p:cNvPr id="48" name="Text 46"/>
-          <p:cNvSpPr txBox="1"/>
-          <p:nvPr/>
-        </p:nvSpPr>
-        <p:spPr>
-          <a:xfrm>
-            <a:off x="2311400" y="3774976"/>
-            <a:ext cx="2151825" cy="407591"/>
-          </a:xfrm>
-          <a:prstGeom prst="rect">
-            <a:avLst/>
-          </a:prstGeom>
-          <a:noFill/>
-          <a:ln/>
-        </p:spPr>
-        <p:txBody>
-          <a:bodyPr wrap="square" lIns="0" tIns="0" rIns="0" bIns="0" rtlCol="0" anchor="t"/>
-          <a:lstStyle/>
-          <a:p>
-            <a:pPr algn="l" indent="0" marL="0">
-              <a:lnSpc>
-                <a:spcPts val="1560"/>
-              </a:lnSpc>
+          <p:cNvPr id="59" name="Text 57"/>
+          <p:cNvSpPr txBox="1"/>
+          <p:nvPr/>
+        </p:nvSpPr>
+        <p:spPr>
+          <a:xfrm>
+            <a:off x="2349500" y="4309170"/>
+            <a:ext cx="2164906" cy="234950"/>
+          </a:xfrm>
+          <a:prstGeom prst="rect">
+            <a:avLst/>
+          </a:prstGeom>
+          <a:noFill/>
+          <a:ln/>
+        </p:spPr>
+        <p:txBody>
+          <a:bodyPr wrap="square" lIns="0" tIns="0" rIns="0" bIns="0" rtlCol="0" anchor="ctr"/>
+          <a:lstStyle/>
+          <a:p>
+            <a:pPr algn="l" indent="0" marL="0">
               <a:buNone/>
             </a:pPr>
             <a:r>
@@ -12469,25 +12956,7 @@
                 <a:ea typeface="+mn-lt" pitchFamily="34" charset="-122"/>
                 <a:cs typeface="+mn-lt" pitchFamily="34" charset="-120"/>
               </a:rPr>
-              <a:t>Дата-центры, гарантии </a:t>
-            </a:r>
-            <a:br/>
-            <a:pPr algn="l" indent="0" marL="0">
-              <a:lnSpc>
-                <a:spcPts val="1560"/>
-              </a:lnSpc>
-              <a:buNone/>
-            </a:pPr>
-            <a:r>
-              <a:rPr lang="ru-RU" altLang="en-US" sz="1200" dirty="0">
-                <a:solidFill>
-                  <a:schemeClr val="bg1"/>
-                </a:solidFill>
-                <a:latin typeface="+mn-lt" pitchFamily="34" charset="0"/>
-                <a:ea typeface="+mn-lt" pitchFamily="34" charset="-122"/>
-                <a:cs typeface="+mn-lt" pitchFamily="34" charset="-120"/>
-              </a:rPr>
-              <a:t>доступности</a:t>
+              <a:t>В рублях, по договору</a:t>
             </a:r>
             <a:endParaRPr lang="en-US" sz="1200" dirty="0"/>
           </a:p>
@@ -12495,14 +12964,14 @@
       </p:sp>
       <p:sp>
         <p:nvSpPr>
-          <p:cNvPr id="49" name="Shape 47"/>
+          <p:cNvPr id="60" name="Shape 58"/>
           <p:cNvSpPr/>
           <p:nvPr/>
         </p:nvSpPr>
         <p:spPr>
           <a:xfrm>
-            <a:off x="4502150" y="3721001"/>
-            <a:ext cx="2292350" cy="0"/>
+            <a:off x="4540250" y="4261545"/>
+            <a:ext cx="2279650" cy="0"/>
           </a:xfrm>
           <a:prstGeom prst="line">
             <a:avLst/>
@@ -12518,14 +12987,14 @@
       </p:sp>
       <p:sp>
         <p:nvSpPr>
-          <p:cNvPr id="50" name="Text 48"/>
-          <p:cNvSpPr txBox="1"/>
-          <p:nvPr/>
-        </p:nvSpPr>
-        <p:spPr>
-          <a:xfrm>
-            <a:off x="4603750" y="3755926"/>
-            <a:ext cx="2151825" cy="234950"/>
+          <p:cNvPr id="61" name="Text 59"/>
+          <p:cNvSpPr txBox="1"/>
+          <p:nvPr/>
+        </p:nvSpPr>
+        <p:spPr>
+          <a:xfrm>
+            <a:off x="4629150" y="4309170"/>
+            <a:ext cx="2164906" cy="234950"/>
           </a:xfrm>
           <a:prstGeom prst="rect">
             <a:avLst/>
@@ -12549,7 +13018,7 @@
                 <a:ea typeface="+mn-lt" pitchFamily="34" charset="-122"/>
                 <a:cs typeface="+mn-lt" pitchFamily="34" charset="-120"/>
               </a:rPr>
-              <a:t>Зависит от владельца карты</a:t>
+              <a:t>В рублях</a:t>
             </a:r>
             <a:endParaRPr lang="en-US" sz="1200" dirty="0"/>
           </a:p>
@@ -12557,14 +13026,14 @@
       </p:sp>
       <p:sp>
         <p:nvSpPr>
-          <p:cNvPr id="51" name="Shape 49"/>
+          <p:cNvPr id="62" name="Shape 60"/>
           <p:cNvSpPr/>
           <p:nvPr/>
         </p:nvSpPr>
         <p:spPr>
           <a:xfrm>
-            <a:off x="6794500" y="3721001"/>
-            <a:ext cx="2292350" cy="0"/>
+            <a:off x="6819900" y="4261545"/>
+            <a:ext cx="2279650" cy="0"/>
           </a:xfrm>
           <a:prstGeom prst="line">
             <a:avLst/>
@@ -12580,26 +13049,29 @@
       </p:sp>
       <p:sp>
         <p:nvSpPr>
-          <p:cNvPr id="52" name="Text 50"/>
-          <p:cNvSpPr txBox="1"/>
-          <p:nvPr/>
-        </p:nvSpPr>
-        <p:spPr>
-          <a:xfrm>
-            <a:off x="6896100" y="3755926"/>
-            <a:ext cx="2151825" cy="234950"/>
-          </a:xfrm>
-          <a:prstGeom prst="rect">
-            <a:avLst/>
-          </a:prstGeom>
-          <a:noFill/>
-          <a:ln/>
-        </p:spPr>
-        <p:txBody>
-          <a:bodyPr wrap="square" lIns="0" tIns="0" rIns="0" bIns="0" rtlCol="0" anchor="ctr"/>
-          <a:lstStyle/>
-          <a:p>
-            <a:pPr algn="l" indent="0" marL="0">
+          <p:cNvPr id="63" name="Text 61"/>
+          <p:cNvSpPr txBox="1"/>
+          <p:nvPr/>
+        </p:nvSpPr>
+        <p:spPr>
+          <a:xfrm>
+            <a:off x="6908800" y="4334570"/>
+            <a:ext cx="2164906" cy="400050"/>
+          </a:xfrm>
+          <a:prstGeom prst="rect">
+            <a:avLst/>
+          </a:prstGeom>
+          <a:noFill/>
+          <a:ln/>
+        </p:spPr>
+        <p:txBody>
+          <a:bodyPr wrap="square" lIns="0" tIns="0" rIns="0" bIns="0" rtlCol="0" anchor="t"/>
+          <a:lstStyle/>
+          <a:p>
+            <a:pPr algn="l" indent="0" marL="0">
+              <a:lnSpc>
+                <a:spcPts val="1500"/>
+              </a:lnSpc>
               <a:buNone/>
             </a:pPr>
             <a:r>
@@ -12611,7 +13083,25 @@
                 <a:ea typeface="+mn-lt" pitchFamily="34" charset="-122"/>
                 <a:cs typeface="+mn-lt" pitchFamily="34" charset="-120"/>
               </a:rPr>
-              <a:t>Зависит от хоста и тарифа</a:t>
+              <a:t>В долларах, российские </a:t>
+            </a:r>
+            <a:br/>
+            <a:pPr algn="l" indent="0" marL="0">
+              <a:lnSpc>
+                <a:spcPts val="1500"/>
+              </a:lnSpc>
+              <a:buNone/>
+            </a:pPr>
+            <a:r>
+              <a:rPr lang="ru-RU" altLang="en-US" sz="1200" dirty="0">
+                <a:solidFill>
+                  <a:schemeClr val="bg1"/>
+                </a:solidFill>
+                <a:latin typeface="+mn-lt" pitchFamily="34" charset="0"/>
+                <a:ea typeface="+mn-lt" pitchFamily="34" charset="-122"/>
+                <a:cs typeface="+mn-lt" pitchFamily="34" charset="-120"/>
+              </a:rPr>
+              <a:t>карты обычно не проходят</a:t>
             </a:r>
             <a:endParaRPr lang="en-US" sz="1200" dirty="0"/>
           </a:p>
@@ -12619,16 +13109,16 @@
       </p:sp>
       <p:sp>
         <p:nvSpPr>
-          <p:cNvPr id="53" name="Shape 51"/>
+          <p:cNvPr id="64" name="Shape 62"/>
           <p:cNvSpPr/>
           <p:nvPr/>
         </p:nvSpPr>
         <p:spPr>
-          <a:xfrm>
-            <a:off x="9086850" y="3717826"/>
-            <a:ext cx="2292350" cy="504031"/>
-          </a:xfrm>
-          <a:prstGeom prst="rect">
+          <a:xfrm rot="10800000">
+            <a:off x="9099550" y="4258370"/>
+            <a:ext cx="2279650" cy="527050"/>
+          </a:xfrm>
+          <a:prstGeom prst="round2SameRect">
             <a:avLst/>
           </a:prstGeom>
           <a:solidFill>
@@ -12639,14 +13129,14 @@
       </p:sp>
       <p:sp>
         <p:nvSpPr>
-          <p:cNvPr id="54" name="Shape 52"/>
+          <p:cNvPr id="65" name="Shape 63"/>
           <p:cNvSpPr/>
           <p:nvPr/>
         </p:nvSpPr>
         <p:spPr>
           <a:xfrm>
-            <a:off x="9086850" y="3721001"/>
-            <a:ext cx="2292350" cy="0"/>
+            <a:off x="9099550" y="4261545"/>
+            <a:ext cx="2279650" cy="0"/>
           </a:xfrm>
           <a:prstGeom prst="line">
             <a:avLst/>
@@ -12662,14 +13152,14 @@
       </p:sp>
       <p:sp>
         <p:nvSpPr>
-          <p:cNvPr id="55" name="Text 53"/>
-          <p:cNvSpPr txBox="1"/>
-          <p:nvPr/>
-        </p:nvSpPr>
-        <p:spPr>
-          <a:xfrm>
-            <a:off x="9188450" y="3755926"/>
-            <a:ext cx="2151825" cy="234950"/>
+          <p:cNvPr id="66" name="Text 64"/>
+          <p:cNvSpPr txBox="1"/>
+          <p:nvPr/>
+        </p:nvSpPr>
+        <p:spPr>
+          <a:xfrm>
+            <a:off x="9188450" y="4309170"/>
+            <a:ext cx="2164906" cy="234950"/>
           </a:xfrm>
           <a:prstGeom prst="rect">
             <a:avLst/>
@@ -12685,381 +13175,9 @@
               <a:buNone/>
             </a:pPr>
             <a:r>
-              <a:rPr lang="ru-RU" altLang="en-US" sz="1200" b="1" dirty="0">
-                <a:solidFill>
-                  <a:schemeClr val="accent1"/>
-                </a:solidFill>
-                <a:latin typeface="+mn-lt" pitchFamily="34" charset="0"/>
-                <a:ea typeface="+mn-lt" pitchFamily="34" charset="-122"/>
-                <a:cs typeface="+mn-lt" pitchFamily="34" charset="-120"/>
-              </a:rPr>
-              <a:t>Зависит от партнёров</a:t>
-            </a:r>
-            <a:endParaRPr lang="en-US" sz="1200" dirty="0"/>
-          </a:p>
-        </p:txBody>
-      </p:sp>
-      <p:sp>
-        <p:nvSpPr>
-          <p:cNvPr id="56" name="Shape 54"/>
-          <p:cNvSpPr/>
-          <p:nvPr/>
-        </p:nvSpPr>
-        <p:spPr>
-          <a:xfrm>
-            <a:off x="812800" y="4225032"/>
-            <a:ext cx="1397000" cy="0"/>
-          </a:xfrm>
-          <a:prstGeom prst="line">
-            <a:avLst/>
-          </a:prstGeom>
-          <a:noFill/>
-          <a:ln w="6350">
-            <a:solidFill>
-              <a:schemeClr val="accent4"/>
-            </a:solidFill>
-            <a:prstDash val="solid"/>
-          </a:ln>
-        </p:spPr>
-      </p:sp>
-      <p:sp>
-        <p:nvSpPr>
-          <p:cNvPr id="57" name="Text 55"/>
-          <p:cNvSpPr txBox="1"/>
-          <p:nvPr/>
-        </p:nvSpPr>
-        <p:spPr>
-          <a:xfrm>
-            <a:off x="812800" y="4279007"/>
-            <a:ext cx="1346200" cy="407591"/>
-          </a:xfrm>
-          <a:prstGeom prst="rect">
-            <a:avLst/>
-          </a:prstGeom>
-          <a:noFill/>
-          <a:ln/>
-        </p:spPr>
-        <p:txBody>
-          <a:bodyPr wrap="square" lIns="0" tIns="0" rIns="0" bIns="0" rtlCol="0" anchor="t"/>
-          <a:lstStyle/>
-          <a:p>
-            <a:pPr algn="l" indent="0" marL="0">
-              <a:lnSpc>
-                <a:spcPts val="1560"/>
-              </a:lnSpc>
-              <a:buNone/>
-            </a:pPr>
-            <a:r>
-              <a:rPr lang="ru-RU" altLang="en-US" sz="1200" b="1" dirty="0">
-                <a:solidFill>
-                  <a:schemeClr val="accent5"/>
-                </a:solidFill>
-                <a:latin typeface="+mn-lt" pitchFamily="34" charset="0"/>
-                <a:ea typeface="+mn-lt" pitchFamily="34" charset="-122"/>
-                <a:cs typeface="+mn-lt" pitchFamily="34" charset="-120"/>
-              </a:rPr>
-              <a:t>Оплата из </a:t>
-            </a:r>
-            <a:br/>
-            <a:pPr algn="l" indent="0" marL="0">
-              <a:lnSpc>
-                <a:spcPts val="1560"/>
-              </a:lnSpc>
-              <a:buNone/>
-            </a:pPr>
-            <a:r>
-              <a:rPr lang="ru-RU" altLang="en-US" sz="1200" b="1" dirty="0">
-                <a:solidFill>
-                  <a:schemeClr val="accent5"/>
-                </a:solidFill>
-                <a:latin typeface="+mn-lt" pitchFamily="34" charset="0"/>
-                <a:ea typeface="+mn-lt" pitchFamily="34" charset="-122"/>
-                <a:cs typeface="+mn-lt" pitchFamily="34" charset="-120"/>
-              </a:rPr>
-              <a:t>России</a:t>
-            </a:r>
-            <a:endParaRPr lang="en-US" sz="1200" dirty="0"/>
-          </a:p>
-        </p:txBody>
-      </p:sp>
-      <p:sp>
-        <p:nvSpPr>
-          <p:cNvPr id="58" name="Shape 56"/>
-          <p:cNvSpPr/>
-          <p:nvPr/>
-        </p:nvSpPr>
-        <p:spPr>
-          <a:xfrm>
-            <a:off x="2209800" y="4225032"/>
-            <a:ext cx="2292350" cy="0"/>
-          </a:xfrm>
-          <a:prstGeom prst="line">
-            <a:avLst/>
-          </a:prstGeom>
-          <a:noFill/>
-          <a:ln w="6350">
-            <a:solidFill>
-              <a:schemeClr val="accent4"/>
-            </a:solidFill>
-            <a:prstDash val="solid"/>
-          </a:ln>
-        </p:spPr>
-      </p:sp>
-      <p:sp>
-        <p:nvSpPr>
-          <p:cNvPr id="59" name="Text 57"/>
-          <p:cNvSpPr txBox="1"/>
-          <p:nvPr/>
-        </p:nvSpPr>
-        <p:spPr>
-          <a:xfrm>
-            <a:off x="2311400" y="4259957"/>
-            <a:ext cx="2151825" cy="234950"/>
-          </a:xfrm>
-          <a:prstGeom prst="rect">
-            <a:avLst/>
-          </a:prstGeom>
-          <a:noFill/>
-          <a:ln/>
-        </p:spPr>
-        <p:txBody>
-          <a:bodyPr wrap="square" lIns="0" tIns="0" rIns="0" bIns="0" rtlCol="0" anchor="ctr"/>
-          <a:lstStyle/>
-          <a:p>
-            <a:pPr algn="l" indent="0" marL="0">
-              <a:buNone/>
-            </a:pPr>
-            <a:r>
               <a:rPr lang="ru-RU" altLang="en-US" sz="1200" dirty="0">
                 <a:solidFill>
                   <a:schemeClr val="bg1"/>
-                </a:solidFill>
-                <a:latin typeface="+mn-lt" pitchFamily="34" charset="0"/>
-                <a:ea typeface="+mn-lt" pitchFamily="34" charset="-122"/>
-                <a:cs typeface="+mn-lt" pitchFamily="34" charset="-120"/>
-              </a:rPr>
-              <a:t>В рублях, по договору</a:t>
-            </a:r>
-            <a:endParaRPr lang="en-US" sz="1200" dirty="0"/>
-          </a:p>
-        </p:txBody>
-      </p:sp>
-      <p:sp>
-        <p:nvSpPr>
-          <p:cNvPr id="60" name="Shape 58"/>
-          <p:cNvSpPr/>
-          <p:nvPr/>
-        </p:nvSpPr>
-        <p:spPr>
-          <a:xfrm>
-            <a:off x="4502150" y="4225032"/>
-            <a:ext cx="2292350" cy="0"/>
-          </a:xfrm>
-          <a:prstGeom prst="line">
-            <a:avLst/>
-          </a:prstGeom>
-          <a:noFill/>
-          <a:ln w="6350">
-            <a:solidFill>
-              <a:schemeClr val="accent4"/>
-            </a:solidFill>
-            <a:prstDash val="solid"/>
-          </a:ln>
-        </p:spPr>
-      </p:sp>
-      <p:sp>
-        <p:nvSpPr>
-          <p:cNvPr id="61" name="Text 59"/>
-          <p:cNvSpPr txBox="1"/>
-          <p:nvPr/>
-        </p:nvSpPr>
-        <p:spPr>
-          <a:xfrm>
-            <a:off x="4603750" y="4259957"/>
-            <a:ext cx="2151825" cy="234950"/>
-          </a:xfrm>
-          <a:prstGeom prst="rect">
-            <a:avLst/>
-          </a:prstGeom>
-          <a:noFill/>
-          <a:ln/>
-        </p:spPr>
-        <p:txBody>
-          <a:bodyPr wrap="square" lIns="0" tIns="0" rIns="0" bIns="0" rtlCol="0" anchor="ctr"/>
-          <a:lstStyle/>
-          <a:p>
-            <a:pPr algn="l" indent="0" marL="0">
-              <a:buNone/>
-            </a:pPr>
-            <a:r>
-              <a:rPr lang="ru-RU" altLang="en-US" sz="1200" dirty="0">
-                <a:solidFill>
-                  <a:schemeClr val="bg1"/>
-                </a:solidFill>
-                <a:latin typeface="+mn-lt" pitchFamily="34" charset="0"/>
-                <a:ea typeface="+mn-lt" pitchFamily="34" charset="-122"/>
-                <a:cs typeface="+mn-lt" pitchFamily="34" charset="-120"/>
-              </a:rPr>
-              <a:t>В рублях</a:t>
-            </a:r>
-            <a:endParaRPr lang="en-US" sz="1200" dirty="0"/>
-          </a:p>
-        </p:txBody>
-      </p:sp>
-      <p:sp>
-        <p:nvSpPr>
-          <p:cNvPr id="62" name="Shape 60"/>
-          <p:cNvSpPr/>
-          <p:nvPr/>
-        </p:nvSpPr>
-        <p:spPr>
-          <a:xfrm>
-            <a:off x="6794500" y="4225032"/>
-            <a:ext cx="2292350" cy="0"/>
-          </a:xfrm>
-          <a:prstGeom prst="line">
-            <a:avLst/>
-          </a:prstGeom>
-          <a:noFill/>
-          <a:ln w="6350">
-            <a:solidFill>
-              <a:schemeClr val="accent4"/>
-            </a:solidFill>
-            <a:prstDash val="solid"/>
-          </a:ln>
-        </p:spPr>
-      </p:sp>
-      <p:sp>
-        <p:nvSpPr>
-          <p:cNvPr id="63" name="Text 61"/>
-          <p:cNvSpPr txBox="1"/>
-          <p:nvPr/>
-        </p:nvSpPr>
-        <p:spPr>
-          <a:xfrm>
-            <a:off x="6896100" y="4279007"/>
-            <a:ext cx="2151825" cy="407591"/>
-          </a:xfrm>
-          <a:prstGeom prst="rect">
-            <a:avLst/>
-          </a:prstGeom>
-          <a:noFill/>
-          <a:ln/>
-        </p:spPr>
-        <p:txBody>
-          <a:bodyPr wrap="square" lIns="0" tIns="0" rIns="0" bIns="0" rtlCol="0" anchor="t"/>
-          <a:lstStyle/>
-          <a:p>
-            <a:pPr algn="l" indent="0" marL="0">
-              <a:lnSpc>
-                <a:spcPts val="1560"/>
-              </a:lnSpc>
-              <a:buNone/>
-            </a:pPr>
-            <a:r>
-              <a:rPr lang="ru-RU" altLang="en-US" sz="1200" dirty="0">
-                <a:solidFill>
-                  <a:schemeClr val="bg1"/>
-                </a:solidFill>
-                <a:latin typeface="+mn-lt" pitchFamily="34" charset="0"/>
-                <a:ea typeface="+mn-lt" pitchFamily="34" charset="-122"/>
-                <a:cs typeface="+mn-lt" pitchFamily="34" charset="-120"/>
-              </a:rPr>
-              <a:t>В долларах, российские </a:t>
-            </a:r>
-            <a:br/>
-            <a:pPr algn="l" indent="0" marL="0">
-              <a:lnSpc>
-                <a:spcPts val="1560"/>
-              </a:lnSpc>
-              <a:buNone/>
-            </a:pPr>
-            <a:r>
-              <a:rPr lang="ru-RU" altLang="en-US" sz="1200" dirty="0">
-                <a:solidFill>
-                  <a:schemeClr val="bg1"/>
-                </a:solidFill>
-                <a:latin typeface="+mn-lt" pitchFamily="34" charset="0"/>
-                <a:ea typeface="+mn-lt" pitchFamily="34" charset="-122"/>
-                <a:cs typeface="+mn-lt" pitchFamily="34" charset="-120"/>
-              </a:rPr>
-              <a:t>карты обычно не проходят</a:t>
-            </a:r>
-            <a:endParaRPr lang="en-US" sz="1200" dirty="0"/>
-          </a:p>
-        </p:txBody>
-      </p:sp>
-      <p:sp>
-        <p:nvSpPr>
-          <p:cNvPr id="64" name="Shape 62"/>
-          <p:cNvSpPr/>
-          <p:nvPr/>
-        </p:nvSpPr>
-        <p:spPr>
-          <a:xfrm rot="10800000">
-            <a:off x="9086850" y="4221857"/>
-            <a:ext cx="2292350" cy="504031"/>
-          </a:xfrm>
-          <a:prstGeom prst="round2SameRect">
-            <a:avLst/>
-          </a:prstGeom>
-          <a:solidFill>
-            <a:schemeClr val="accent3"/>
-          </a:solidFill>
-          <a:ln/>
-        </p:spPr>
-      </p:sp>
-      <p:sp>
-        <p:nvSpPr>
-          <p:cNvPr id="65" name="Shape 63"/>
-          <p:cNvSpPr/>
-          <p:nvPr/>
-        </p:nvSpPr>
-        <p:spPr>
-          <a:xfrm>
-            <a:off x="9086850" y="4225032"/>
-            <a:ext cx="2292350" cy="0"/>
-          </a:xfrm>
-          <a:prstGeom prst="line">
-            <a:avLst/>
-          </a:prstGeom>
-          <a:noFill/>
-          <a:ln w="6350">
-            <a:solidFill>
-              <a:schemeClr val="accent4"/>
-            </a:solidFill>
-            <a:prstDash val="solid"/>
-          </a:ln>
-        </p:spPr>
-      </p:sp>
-      <p:sp>
-        <p:nvSpPr>
-          <p:cNvPr id="66" name="Text 64"/>
-          <p:cNvSpPr txBox="1"/>
-          <p:nvPr/>
-        </p:nvSpPr>
-        <p:spPr>
-          <a:xfrm>
-            <a:off x="9188450" y="4259957"/>
-            <a:ext cx="2151825" cy="234950"/>
-          </a:xfrm>
-          <a:prstGeom prst="rect">
-            <a:avLst/>
-          </a:prstGeom>
-          <a:noFill/>
-          <a:ln/>
-        </p:spPr>
-        <p:txBody>
-          <a:bodyPr wrap="square" lIns="0" tIns="0" rIns="0" bIns="0" rtlCol="0" anchor="ctr"/>
-          <a:lstStyle/>
-          <a:p>
-            <a:pPr algn="l" indent="0" marL="0">
-              <a:buNone/>
-            </a:pPr>
-            <a:r>
-              <a:rPr lang="ru-RU" altLang="en-US" sz="1200" b="1" dirty="0">
-                <a:solidFill>
-                  <a:schemeClr val="accent1"/>
                 </a:solidFill>
                 <a:latin typeface="+mn-lt" pitchFamily="34" charset="0"/>
                 <a:ea typeface="+mn-lt" pitchFamily="34" charset="-122"/>
@@ -13141,7 +13259,7 @@
                 <a:ea typeface="+mj-lt" pitchFamily="34" charset="-122"/>
                 <a:cs typeface="+mj-lt" pitchFamily="34" charset="-120"/>
               </a:rPr>
-              <a:t>. Мы проверяем спрос на </a:t>
+              <a:t>. Мы проверяем спрос </a:t>
             </a:r>
             <a:br/>
             <a:pPr algn="l" indent="0" marL="0">
@@ -13159,7 +13277,7 @@
                 <a:ea typeface="+mj-lt" pitchFamily="34" charset="-122"/>
                 <a:cs typeface="+mj-lt" pitchFamily="34" charset="-120"/>
               </a:rPr>
-              <a:t>удобное предоставление вычислительных мощностей небольшим B2B-клиентам.</a:t>
+              <a:t>на удобное предоставление вычислительных мощностей небольшим B2B-клиентам.</a:t>
             </a:r>
             <a:endParaRPr lang="en-US" sz="1400" dirty="0"/>
           </a:p>
@@ -13201,7 +13319,7 @@
                 <a:ea typeface="+mn-lt" pitchFamily="34" charset="-122"/>
                 <a:cs typeface="+mn-lt" pitchFamily="34" charset="-120"/>
               </a:rPr>
-              <a:t>Более дешёвые предложения уже есть, а подбор и сопровождение могут предлагать и конкуренты. Задача пилота — выяснить, есть ли </a:t>
+              <a:t>Более дешёвые предложения уже есть, а подбор и сопровождение могут предлагать и конкуренты. Задача пилота — выяснить, есть </a:t>
             </a:r>
             <a:br/>
             <a:pPr algn="l" indent="0" marL="0">
@@ -13219,7 +13337,7 @@
                 <a:ea typeface="+mn-lt" pitchFamily="34" charset="-122"/>
                 <a:cs typeface="+mn-lt" pitchFamily="34" charset="-120"/>
               </a:rPr>
-              <a:t>неудовлетворённый спрос; автоматизация — только после его подтверждения.</a:t>
+              <a:t>ли неудовлетворённый спрос; автоматизация — только после его подтверждения.</a:t>
             </a:r>
             <a:endParaRPr lang="en-US" sz="1200" dirty="0"/>
           </a:p>
@@ -13335,7 +13453,7 @@
         </p:nvSpPr>
         <p:spPr>
           <a:xfrm>
-            <a:off x="812800" y="1331317"/>
+            <a:off x="812800" y="1338957"/>
             <a:ext cx="10718800" cy="304800"/>
           </a:xfrm>
           <a:prstGeom prst="rect">
@@ -13374,12 +13492,12 @@
         </p:nvSpPr>
         <p:spPr>
           <a:xfrm>
-            <a:off x="812800" y="1709738"/>
-            <a:ext cx="4629150" cy="406400"/>
+            <a:off x="812800" y="1717377"/>
+            <a:ext cx="4629150" cy="457200"/>
           </a:xfrm>
           <a:prstGeom prst="roundRect">
             <a:avLst>
-              <a:gd name="adj" fmla="val 25000"/>
+              <a:gd name="adj" fmla="val 22222"/>
             </a:avLst>
           </a:prstGeom>
           <a:solidFill>
@@ -13396,8 +13514,8 @@
         </p:nvSpPr>
         <p:spPr>
           <a:xfrm>
-            <a:off x="965200" y="1782167"/>
-            <a:ext cx="2058929" cy="254000"/>
+            <a:off x="990600" y="1812627"/>
+            <a:ext cx="2204966" cy="266700"/>
           </a:xfrm>
           <a:prstGeom prst="rect">
             <a:avLst/>
@@ -13413,6 +13531,20 @@
               <a:buNone/>
             </a:pPr>
             <a:r>
+              <a:rPr lang="ru-RU" altLang="en-US" sz="1500" dirty="0">
+                <a:solidFill>
+                  <a:schemeClr val="tx2"/>
+                </a:solidFill>
+                <a:latin typeface="+mj-lt" pitchFamily="34" charset="0"/>
+                <a:ea typeface="+mj-lt" pitchFamily="34" charset="-122"/>
+                <a:cs typeface="+mj-lt" pitchFamily="34" charset="-120"/>
+              </a:rPr>
+              <a:t>15 ₽</a:t>
+            </a:r>
+            <a:pPr algn="l" indent="0" marL="0">
+              <a:buNone/>
+            </a:pPr>
+            <a:r>
               <a:rPr lang="ru-RU" altLang="en-US" sz="1300" b="1" dirty="0">
                 <a:solidFill>
                   <a:schemeClr val="tx2"/>
@@ -13421,9 +13553,9 @@
                 <a:ea typeface="+mn-lt" pitchFamily="34" charset="-122"/>
                 <a:cs typeface="+mn-lt" pitchFamily="34" charset="-120"/>
               </a:rPr>
-              <a:t>15 ₽ партнёрской ферме</a:t>
-            </a:r>
-            <a:endParaRPr lang="en-US" sz="1300" dirty="0"/>
+              <a:t> партнёрской ферме</a:t>
+            </a:r>
+            <a:endParaRPr lang="en-US" sz="1500" dirty="0"/>
           </a:p>
         </p:txBody>
       </p:sp>
@@ -13435,12 +13567,12 @@
         </p:nvSpPr>
         <p:spPr>
           <a:xfrm>
-            <a:off x="6146800" y="1709738"/>
-            <a:ext cx="5232400" cy="406400"/>
+            <a:off x="6146800" y="1717377"/>
+            <a:ext cx="5232400" cy="457200"/>
           </a:xfrm>
           <a:prstGeom prst="roundRect">
             <a:avLst>
-              <a:gd name="adj" fmla="val 25000"/>
+              <a:gd name="adj" fmla="val 22222"/>
             </a:avLst>
           </a:prstGeom>
           <a:solidFill>
@@ -13457,8 +13589,8 @@
         </p:nvSpPr>
         <p:spPr>
           <a:xfrm>
-            <a:off x="6400800" y="1782167"/>
-            <a:ext cx="3466567" cy="254000"/>
+            <a:off x="6426200" y="1812627"/>
+            <a:ext cx="3609845" cy="266700"/>
           </a:xfrm>
           <a:prstGeom prst="rect">
             <a:avLst/>
@@ -13474,6 +13606,20 @@
               <a:buNone/>
             </a:pPr>
             <a:r>
+              <a:rPr lang="ru-RU" altLang="en-US" sz="1500" dirty="0">
+                <a:solidFill>
+                  <a:schemeClr val="accent1"/>
+                </a:solidFill>
+                <a:latin typeface="+mj-lt" pitchFamily="34" charset="0"/>
+                <a:ea typeface="+mj-lt" pitchFamily="34" charset="-122"/>
+                <a:cs typeface="+mj-lt" pitchFamily="34" charset="-120"/>
+              </a:rPr>
+              <a:t>17 ₽</a:t>
+            </a:r>
+            <a:pPr algn="l" indent="0" marL="0">
+              <a:buNone/>
+            </a:pPr>
+            <a:r>
               <a:rPr lang="ru-RU" altLang="en-US" sz="1300" b="1" dirty="0">
                 <a:solidFill>
                   <a:schemeClr val="accent1"/>
@@ -13482,9 +13628,9 @@
                 <a:ea typeface="+mn-lt" pitchFamily="34" charset="-122"/>
                 <a:cs typeface="+mn-lt" pitchFamily="34" charset="-120"/>
               </a:rPr>
-              <a:t>17 ₽ — на постоянные расходы и прибыль</a:t>
-            </a:r>
-            <a:endParaRPr lang="en-US" sz="1300" dirty="0"/>
+              <a:t> — на постоянные расходы и прибыль</a:t>
+            </a:r>
+            <a:endParaRPr lang="en-US" sz="1500" dirty="0"/>
           </a:p>
         </p:txBody>
       </p:sp>
@@ -13496,8 +13642,8 @@
         </p:nvSpPr>
         <p:spPr>
           <a:xfrm>
-            <a:off x="5340350" y="1709738"/>
-            <a:ext cx="908050" cy="406400"/>
+            <a:off x="5340350" y="1717377"/>
+            <a:ext cx="908050" cy="457200"/>
           </a:xfrm>
           <a:prstGeom prst="rect">
             <a:avLst/>
@@ -13516,8 +13662,8 @@
         </p:nvSpPr>
         <p:spPr>
           <a:xfrm>
-            <a:off x="5441950" y="1782167"/>
-            <a:ext cx="292993" cy="254000"/>
+            <a:off x="5611217" y="1812627"/>
+            <a:ext cx="417016" cy="260350"/>
           </a:xfrm>
           <a:prstGeom prst="rect">
             <a:avLst/>
@@ -13533,17 +13679,17 @@
               <a:buNone/>
             </a:pPr>
             <a:r>
-              <a:rPr lang="ru-RU" altLang="en-US" sz="1300" b="1" dirty="0">
+              <a:rPr lang="ru-RU" altLang="en-US" sz="1500" dirty="0">
                 <a:solidFill>
                   <a:schemeClr val="tx2"/>
                 </a:solidFill>
-                <a:latin typeface="+mn-lt" pitchFamily="34" charset="0"/>
-                <a:ea typeface="+mn-lt" pitchFamily="34" charset="-122"/>
-                <a:cs typeface="+mn-lt" pitchFamily="34" charset="-120"/>
+                <a:latin typeface="+mj-lt" pitchFamily="34" charset="0"/>
+                <a:ea typeface="+mj-lt" pitchFamily="34" charset="-122"/>
+                <a:cs typeface="+mj-lt" pitchFamily="34" charset="-120"/>
               </a:rPr>
               <a:t>3 ₽</a:t>
             </a:r>
-            <a:endParaRPr lang="en-US" sz="1300" dirty="0"/>
+            <a:endParaRPr lang="en-US" sz="1500" dirty="0"/>
           </a:p>
         </p:txBody>
       </p:sp>
@@ -13555,8 +13701,8 @@
         </p:nvSpPr>
         <p:spPr>
           <a:xfrm>
-            <a:off x="812800" y="2205038"/>
-            <a:ext cx="10718800" cy="426641"/>
+            <a:off x="812800" y="2276177"/>
+            <a:ext cx="10718800" cy="415230"/>
           </a:xfrm>
           <a:prstGeom prst="rect">
             <a:avLst/>
@@ -13570,38 +13716,38 @@
           <a:p>
             <a:pPr algn="l" indent="0" marL="0">
               <a:lnSpc>
-                <a:spcPts val="1680"/>
+                <a:spcPts val="1620"/>
               </a:lnSpc>
               <a:buNone/>
             </a:pPr>
             <a:r>
               <a:rPr lang="ru-RU" altLang="en-US" sz="1200" dirty="0">
                 <a:solidFill>
-                  <a:srgbClr val="7A6E5F"/>
-                </a:solidFill>
-                <a:latin typeface="+mn-lt" pitchFamily="34" charset="0"/>
-                <a:ea typeface="+mn-lt" pitchFamily="34" charset="-122"/>
-                <a:cs typeface="+mn-lt" pitchFamily="34" charset="-120"/>
-              </a:rPr>
-              <a:t>15 ₽ — предполагаемая цена фермы за полноценную рабочую конфигурацию, а не только за видеокарту. 3 ₽ — условное допущение по </a:t>
+                  <a:schemeClr val="accent6"/>
+                </a:solidFill>
+                <a:latin typeface="+mn-lt" pitchFamily="34" charset="0"/>
+                <a:ea typeface="+mn-lt" pitchFamily="34" charset="-122"/>
+                <a:cs typeface="+mn-lt" pitchFamily="34" charset="-120"/>
+              </a:rPr>
+              <a:t>15 ₽ — предполагаемая цена фермы за полноценную рабочую конфигурацию, а не только за видеокарту. 3 ₽ — условное допущение </a:t>
             </a:r>
             <a:br/>
             <a:pPr algn="l" indent="0" marL="0">
               <a:lnSpc>
-                <a:spcPts val="1680"/>
+                <a:spcPts val="1620"/>
               </a:lnSpc>
               <a:buNone/>
             </a:pPr>
             <a:r>
               <a:rPr lang="ru-RU" altLang="en-US" sz="1200" dirty="0">
                 <a:solidFill>
-                  <a:srgbClr val="7A6E5F"/>
-                </a:solidFill>
-                <a:latin typeface="+mn-lt" pitchFamily="34" charset="0"/>
-                <a:ea typeface="+mn-lt" pitchFamily="34" charset="-122"/>
-                <a:cs typeface="+mn-lt" pitchFamily="34" charset="-120"/>
-              </a:rPr>
-              <a:t>переменным расходам.</a:t>
+                  <a:schemeClr val="accent6"/>
+                </a:solidFill>
+                <a:latin typeface="+mn-lt" pitchFamily="34" charset="0"/>
+                <a:ea typeface="+mn-lt" pitchFamily="34" charset="-122"/>
+                <a:cs typeface="+mn-lt" pitchFamily="34" charset="-120"/>
+              </a:rPr>
+              <a:t>по переменным расходам.</a:t>
             </a:r>
             <a:endParaRPr lang="en-US" sz="1200" dirty="0"/>
           </a:p>
@@ -13615,12 +13761,12 @@
         </p:nvSpPr>
         <p:spPr>
           <a:xfrm>
-            <a:off x="815975" y="2787650"/>
-            <a:ext cx="3418384" cy="2339082"/>
+            <a:off x="815975" y="2851150"/>
+            <a:ext cx="3418384" cy="2267942"/>
           </a:xfrm>
           <a:prstGeom prst="roundRect">
             <a:avLst>
-              <a:gd name="adj" fmla="val 6515"/>
+              <a:gd name="adj" fmla="val 6720"/>
             </a:avLst>
           </a:prstGeom>
           <a:solidFill>
@@ -13642,7 +13788,7 @@
         </p:nvSpPr>
         <p:spPr>
           <a:xfrm>
-            <a:off x="1022350" y="2917825"/>
+            <a:off x="1022350" y="2981325"/>
             <a:ext cx="3095803" cy="254000"/>
           </a:xfrm>
           <a:prstGeom prst="rect">
@@ -13681,7 +13827,7 @@
         </p:nvSpPr>
         <p:spPr>
           <a:xfrm>
-            <a:off x="1022350" y="3195935"/>
+            <a:off x="1022350" y="3259435"/>
             <a:ext cx="802184" cy="234950"/>
           </a:xfrm>
           <a:prstGeom prst="rect">
@@ -13700,7 +13846,7 @@
             <a:r>
               <a:rPr lang="ru-RU" altLang="en-US" sz="1200" b="1" dirty="0">
                 <a:solidFill>
-                  <a:srgbClr val="7A6E5F"/>
+                  <a:srgbClr val="6A5E4F"/>
                 </a:solidFill>
                 <a:latin typeface="+mn-lt" pitchFamily="34" charset="0"/>
                 <a:ea typeface="+mn-lt" pitchFamily="34" charset="-122"/>
@@ -13720,7 +13866,7 @@
         </p:nvSpPr>
         <p:spPr>
           <a:xfrm>
-            <a:off x="1773734" y="3195935"/>
+            <a:off x="1773734" y="3259435"/>
             <a:ext cx="802184" cy="234950"/>
           </a:xfrm>
           <a:prstGeom prst="rect">
@@ -13739,7 +13885,7 @@
             <a:r>
               <a:rPr lang="ru-RU" altLang="en-US" sz="1200" b="1" dirty="0">
                 <a:solidFill>
-                  <a:srgbClr val="7A6E5F"/>
+                  <a:srgbClr val="6A5E4F"/>
                 </a:solidFill>
                 <a:latin typeface="+mn-lt" pitchFamily="34" charset="0"/>
                 <a:ea typeface="+mn-lt" pitchFamily="34" charset="-122"/>
@@ -13759,7 +13905,7 @@
         </p:nvSpPr>
         <p:spPr>
           <a:xfrm>
-            <a:off x="2525117" y="3195935"/>
+            <a:off x="2525117" y="3259435"/>
             <a:ext cx="802184" cy="234950"/>
           </a:xfrm>
           <a:prstGeom prst="rect">
@@ -13778,7 +13924,7 @@
             <a:r>
               <a:rPr lang="ru-RU" altLang="en-US" sz="1200" b="1" dirty="0">
                 <a:solidFill>
-                  <a:srgbClr val="7A6E5F"/>
+                  <a:srgbClr val="6A5E4F"/>
                 </a:solidFill>
                 <a:latin typeface="+mn-lt" pitchFamily="34" charset="0"/>
                 <a:ea typeface="+mn-lt" pitchFamily="34" charset="-122"/>
@@ -13798,7 +13944,7 @@
         </p:nvSpPr>
         <p:spPr>
           <a:xfrm>
-            <a:off x="3276501" y="3195935"/>
+            <a:off x="3276501" y="3259435"/>
             <a:ext cx="802184" cy="234950"/>
           </a:xfrm>
           <a:prstGeom prst="rect">
@@ -13817,7 +13963,7 @@
             <a:r>
               <a:rPr lang="ru-RU" altLang="en-US" sz="1200" b="1" dirty="0">
                 <a:solidFill>
-                  <a:srgbClr val="7A6E5F"/>
+                  <a:srgbClr val="6A5E4F"/>
                 </a:solidFill>
                 <a:latin typeface="+mn-lt" pitchFamily="34" charset="0"/>
                 <a:ea typeface="+mn-lt" pitchFamily="34" charset="-122"/>
@@ -13837,7 +13983,7 @@
         </p:nvSpPr>
         <p:spPr>
           <a:xfrm>
-            <a:off x="1022350" y="3465810"/>
+            <a:off x="1022350" y="3529310"/>
             <a:ext cx="3005634" cy="0"/>
           </a:xfrm>
           <a:prstGeom prst="line">
@@ -13860,7 +14006,7 @@
         </p:nvSpPr>
         <p:spPr>
           <a:xfrm>
-            <a:off x="1022350" y="3500735"/>
+            <a:off x="1022350" y="3564235"/>
             <a:ext cx="802184" cy="266700"/>
           </a:xfrm>
           <a:prstGeom prst="rect">
@@ -13899,7 +14045,7 @@
         </p:nvSpPr>
         <p:spPr>
           <a:xfrm>
-            <a:off x="1773734" y="3500735"/>
+            <a:off x="1773734" y="3564235"/>
             <a:ext cx="802184" cy="266700"/>
           </a:xfrm>
           <a:prstGeom prst="rect">
@@ -13938,7 +14084,7 @@
         </p:nvSpPr>
         <p:spPr>
           <a:xfrm>
-            <a:off x="2525117" y="3500735"/>
+            <a:off x="2525117" y="3564235"/>
             <a:ext cx="802184" cy="266700"/>
           </a:xfrm>
           <a:prstGeom prst="rect">
@@ -13977,7 +14123,7 @@
         </p:nvSpPr>
         <p:spPr>
           <a:xfrm>
-            <a:off x="3276501" y="3500735"/>
+            <a:off x="3276501" y="3564235"/>
             <a:ext cx="802184" cy="266700"/>
           </a:xfrm>
           <a:prstGeom prst="rect">
@@ -14016,7 +14162,7 @@
         </p:nvSpPr>
         <p:spPr>
           <a:xfrm>
-            <a:off x="1022350" y="3804841"/>
+            <a:off x="1022350" y="3868341"/>
             <a:ext cx="3005634" cy="0"/>
           </a:xfrm>
           <a:prstGeom prst="line">
@@ -14039,7 +14185,7 @@
         </p:nvSpPr>
         <p:spPr>
           <a:xfrm>
-            <a:off x="1022350" y="3839766"/>
+            <a:off x="1022350" y="3903266"/>
             <a:ext cx="802184" cy="266700"/>
           </a:xfrm>
           <a:prstGeom prst="rect">
@@ -14078,7 +14224,7 @@
         </p:nvSpPr>
         <p:spPr>
           <a:xfrm>
-            <a:off x="1773734" y="3839766"/>
+            <a:off x="1773734" y="3903266"/>
             <a:ext cx="802184" cy="266700"/>
           </a:xfrm>
           <a:prstGeom prst="rect">
@@ -14117,7 +14263,7 @@
         </p:nvSpPr>
         <p:spPr>
           <a:xfrm>
-            <a:off x="2525117" y="3839766"/>
+            <a:off x="2525117" y="3903266"/>
             <a:ext cx="802184" cy="266700"/>
           </a:xfrm>
           <a:prstGeom prst="rect">
@@ -14156,7 +14302,7 @@
         </p:nvSpPr>
         <p:spPr>
           <a:xfrm>
-            <a:off x="3276501" y="3839766"/>
+            <a:off x="3276501" y="3903266"/>
             <a:ext cx="802184" cy="266700"/>
           </a:xfrm>
           <a:prstGeom prst="rect">
@@ -14195,7 +14341,7 @@
         </p:nvSpPr>
         <p:spPr>
           <a:xfrm>
-            <a:off x="1022350" y="4143871"/>
+            <a:off x="1022350" y="4207371"/>
             <a:ext cx="3005634" cy="0"/>
           </a:xfrm>
           <a:prstGeom prst="line">
@@ -14218,7 +14364,7 @@
         </p:nvSpPr>
         <p:spPr>
           <a:xfrm>
-            <a:off x="1022350" y="4178796"/>
+            <a:off x="1022350" y="4242296"/>
             <a:ext cx="802184" cy="266700"/>
           </a:xfrm>
           <a:prstGeom prst="rect">
@@ -14257,7 +14403,7 @@
         </p:nvSpPr>
         <p:spPr>
           <a:xfrm>
-            <a:off x="1773734" y="4178796"/>
+            <a:off x="1773734" y="4242296"/>
             <a:ext cx="802184" cy="266700"/>
           </a:xfrm>
           <a:prstGeom prst="rect">
@@ -14296,7 +14442,7 @@
         </p:nvSpPr>
         <p:spPr>
           <a:xfrm>
-            <a:off x="2525117" y="4178796"/>
+            <a:off x="2525117" y="4242296"/>
             <a:ext cx="802184" cy="266700"/>
           </a:xfrm>
           <a:prstGeom prst="rect">
@@ -14335,7 +14481,7 @@
         </p:nvSpPr>
         <p:spPr>
           <a:xfrm>
-            <a:off x="3276501" y="4178796"/>
+            <a:off x="3276501" y="4242296"/>
             <a:ext cx="802184" cy="266700"/>
           </a:xfrm>
           <a:prstGeom prst="rect">
@@ -14374,7 +14520,7 @@
         </p:nvSpPr>
         <p:spPr>
           <a:xfrm>
-            <a:off x="1022350" y="4524177"/>
+            <a:off x="1022350" y="4746427"/>
             <a:ext cx="3095803" cy="234950"/>
           </a:xfrm>
           <a:prstGeom prst="rect">
@@ -14393,7 +14539,7 @@
             <a:r>
               <a:rPr lang="ru-RU" altLang="en-US" sz="1200" dirty="0">
                 <a:solidFill>
-                  <a:srgbClr val="7A6E5F"/>
+                  <a:srgbClr val="6A5E4F"/>
                 </a:solidFill>
                 <a:latin typeface="+mn-lt" pitchFamily="34" charset="0"/>
                 <a:ea typeface="+mn-lt" pitchFamily="34" charset="-122"/>
@@ -14413,12 +14559,12 @@
         </p:nvSpPr>
         <p:spPr>
           <a:xfrm>
-            <a:off x="4393109" y="2787650"/>
-            <a:ext cx="3418384" cy="2339082"/>
+            <a:off x="4393109" y="2851150"/>
+            <a:ext cx="3418384" cy="2267942"/>
           </a:xfrm>
           <a:prstGeom prst="roundRect">
             <a:avLst>
-              <a:gd name="adj" fmla="val 6515"/>
+              <a:gd name="adj" fmla="val 6720"/>
             </a:avLst>
           </a:prstGeom>
           <a:solidFill>
@@ -14440,7 +14586,7 @@
         </p:nvSpPr>
         <p:spPr>
           <a:xfrm>
-            <a:off x="4599484" y="2917825"/>
+            <a:off x="4599484" y="2981325"/>
             <a:ext cx="3095803" cy="254000"/>
           </a:xfrm>
           <a:prstGeom prst="rect">
@@ -14479,7 +14625,7 @@
         </p:nvSpPr>
         <p:spPr>
           <a:xfrm>
-            <a:off x="4599484" y="3224510"/>
+            <a:off x="4599484" y="3288010"/>
             <a:ext cx="3005634" cy="0"/>
           </a:xfrm>
           <a:prstGeom prst="line">
@@ -14502,7 +14648,7 @@
         </p:nvSpPr>
         <p:spPr>
           <a:xfrm>
-            <a:off x="4599484" y="3259435"/>
+            <a:off x="4599484" y="3310235"/>
             <a:ext cx="657126" cy="234950"/>
           </a:xfrm>
           <a:prstGeom prst="rect">
@@ -14541,7 +14687,7 @@
         </p:nvSpPr>
         <p:spPr>
           <a:xfrm>
-            <a:off x="7015956" y="3253085"/>
+            <a:off x="7015956" y="3303885"/>
             <a:ext cx="639961" cy="254000"/>
           </a:xfrm>
           <a:prstGeom prst="rect">
@@ -14580,7 +14726,7 @@
         </p:nvSpPr>
         <p:spPr>
           <a:xfrm>
-            <a:off x="4599484" y="3547070"/>
+            <a:off x="4599484" y="3585170"/>
             <a:ext cx="3005634" cy="0"/>
           </a:xfrm>
           <a:prstGeom prst="line">
@@ -14603,7 +14749,7 @@
         </p:nvSpPr>
         <p:spPr>
           <a:xfrm>
-            <a:off x="4599484" y="3581995"/>
+            <a:off x="4599484" y="3607395"/>
             <a:ext cx="532904" cy="234950"/>
           </a:xfrm>
           <a:prstGeom prst="rect">
@@ -14642,7 +14788,7 @@
         </p:nvSpPr>
         <p:spPr>
           <a:xfrm>
-            <a:off x="6950472" y="3575645"/>
+            <a:off x="6950472" y="3601045"/>
             <a:ext cx="705445" cy="254000"/>
           </a:xfrm>
           <a:prstGeom prst="rect">
@@ -14681,7 +14827,7 @@
         </p:nvSpPr>
         <p:spPr>
           <a:xfrm>
-            <a:off x="4599484" y="3869630"/>
+            <a:off x="4599484" y="3882330"/>
             <a:ext cx="3005634" cy="0"/>
           </a:xfrm>
           <a:prstGeom prst="line">
@@ -14782,14 +14928,14 @@
         </p:nvSpPr>
         <p:spPr>
           <a:xfrm>
-            <a:off x="4599484" y="4192191"/>
+            <a:off x="4599484" y="4182666"/>
             <a:ext cx="3005634" cy="0"/>
           </a:xfrm>
           <a:prstGeom prst="line">
             <a:avLst/>
           </a:prstGeom>
           <a:noFill/>
-          <a:ln w="6350">
+          <a:ln w="12700">
             <a:solidFill>
               <a:srgbClr val="E2D7C5"/>
             </a:solidFill>
@@ -14805,7 +14951,7 @@
         </p:nvSpPr>
         <p:spPr>
           <a:xfrm>
-            <a:off x="4599484" y="4227116"/>
+            <a:off x="4599484" y="4284266"/>
             <a:ext cx="674787" cy="234950"/>
           </a:xfrm>
           <a:prstGeom prst="rect">
@@ -14844,8 +14990,8 @@
         </p:nvSpPr>
         <p:spPr>
           <a:xfrm>
-            <a:off x="7048302" y="4220766"/>
-            <a:ext cx="607616" cy="254000"/>
+            <a:off x="6639520" y="4220766"/>
+            <a:ext cx="1016397" cy="311150"/>
           </a:xfrm>
           <a:prstGeom prst="rect">
             <a:avLst/>
@@ -14861,17 +15007,17 @@
               <a:buNone/>
             </a:pPr>
             <a:r>
-              <a:rPr lang="ru-RU" altLang="en-US" sz="1300" b="1" dirty="0">
+              <a:rPr lang="ru-RU" altLang="en-US" sz="1800" spc="-50" kern="0" dirty="0">
                 <a:solidFill>
                   <a:schemeClr val="accent2"/>
                 </a:solidFill>
-                <a:latin typeface="+mn-lt" pitchFamily="34" charset="0"/>
-                <a:ea typeface="+mn-lt" pitchFamily="34" charset="-122"/>
-                <a:cs typeface="+mn-lt" pitchFamily="34" charset="-120"/>
+                <a:latin typeface="+mj-lt" pitchFamily="34" charset="0"/>
+                <a:ea typeface="+mj-lt" pitchFamily="34" charset="-122"/>
+                <a:cs typeface="+mj-lt" pitchFamily="34" charset="-120"/>
               </a:rPr>
               <a:t>1 700 ₽</a:t>
             </a:r>
-            <a:endParaRPr lang="en-US" sz="1300" dirty="0"/>
+            <a:endParaRPr lang="en-US" sz="1800" dirty="0"/>
           </a:p>
         </p:txBody>
       </p:sp>
@@ -14883,7 +15029,7 @@
         </p:nvSpPr>
         <p:spPr>
           <a:xfrm>
-            <a:off x="4599484" y="4575076"/>
+            <a:off x="4599484" y="4567436"/>
             <a:ext cx="3095803" cy="407591"/>
           </a:xfrm>
           <a:prstGeom prst="rect">
@@ -14905,13 +15051,13 @@
             <a:r>
               <a:rPr lang="ru-RU" altLang="en-US" sz="1200" dirty="0">
                 <a:solidFill>
-                  <a:srgbClr val="7A6E5F"/>
-                </a:solidFill>
-                <a:latin typeface="+mn-lt" pitchFamily="34" charset="0"/>
-                <a:ea typeface="+mn-lt" pitchFamily="34" charset="-122"/>
-                <a:cs typeface="+mn-lt" pitchFamily="34" charset="-120"/>
-              </a:rPr>
-              <a:t>до налогов и постоянных расходов — не </a:t>
+                  <a:srgbClr val="6A5E4F"/>
+                </a:solidFill>
+                <a:latin typeface="+mn-lt" pitchFamily="34" charset="0"/>
+                <a:ea typeface="+mn-lt" pitchFamily="34" charset="-122"/>
+                <a:cs typeface="+mn-lt" pitchFamily="34" charset="-120"/>
+              </a:rPr>
+              <a:t>до налогов и постоянных расходов — </a:t>
             </a:r>
             <a:br/>
             <a:pPr algn="l" indent="0" marL="0">
@@ -14923,13 +15069,13 @@
             <a:r>
               <a:rPr lang="ru-RU" altLang="en-US" sz="1200" dirty="0">
                 <a:solidFill>
-                  <a:srgbClr val="7A6E5F"/>
-                </a:solidFill>
-                <a:latin typeface="+mn-lt" pitchFamily="34" charset="0"/>
-                <a:ea typeface="+mn-lt" pitchFamily="34" charset="-122"/>
-                <a:cs typeface="+mn-lt" pitchFamily="34" charset="-120"/>
-              </a:rPr>
-              <a:t>чистая прибыль</a:t>
+                  <a:srgbClr val="6A5E4F"/>
+                </a:solidFill>
+                <a:latin typeface="+mn-lt" pitchFamily="34" charset="0"/>
+                <a:ea typeface="+mn-lt" pitchFamily="34" charset="-122"/>
+                <a:cs typeface="+mn-lt" pitchFamily="34" charset="-120"/>
+              </a:rPr>
+              <a:t>не чистая прибыль</a:t>
             </a:r>
             <a:endParaRPr lang="en-US" sz="1200" dirty="0"/>
           </a:p>
@@ -14943,12 +15089,12 @@
         </p:nvSpPr>
         <p:spPr>
           <a:xfrm>
-            <a:off x="7967067" y="2784475"/>
-            <a:ext cx="3412034" cy="2345432"/>
+            <a:off x="7967067" y="2847975"/>
+            <a:ext cx="3412034" cy="2274292"/>
           </a:xfrm>
           <a:prstGeom prst="roundRect">
             <a:avLst>
-              <a:gd name="adj" fmla="val 6498"/>
+              <a:gd name="adj" fmla="val 6701"/>
             </a:avLst>
           </a:prstGeom>
           <a:solidFill>
@@ -14965,7 +15111,7 @@
         </p:nvSpPr>
         <p:spPr>
           <a:xfrm>
-            <a:off x="8170267" y="2911475"/>
+            <a:off x="8170267" y="2974975"/>
             <a:ext cx="3095803" cy="254000"/>
           </a:xfrm>
           <a:prstGeom prst="rect">
@@ -15004,8 +15150,8 @@
         </p:nvSpPr>
         <p:spPr>
           <a:xfrm>
-            <a:off x="8170267" y="3170535"/>
-            <a:ext cx="3095803" cy="469900"/>
+            <a:off x="8170267" y="3240385"/>
+            <a:ext cx="3095803" cy="406400"/>
           </a:xfrm>
           <a:prstGeom prst="rect">
             <a:avLst/>
@@ -15021,7 +15167,7 @@
               <a:buNone/>
             </a:pPr>
             <a:r>
-              <a:rPr lang="ru-RU" altLang="en-US" sz="2800" spc="-100" kern="0" dirty="0">
+              <a:rPr lang="ru-RU" altLang="en-US" sz="2400" spc="-100" kern="0" dirty="0">
                 <a:solidFill>
                   <a:schemeClr val="bg1"/>
                 </a:solidFill>
@@ -15031,7 +15177,7 @@
               </a:rPr>
               <a:t>≈14,7 тыс. ч</a:t>
             </a:r>
-            <a:endParaRPr lang="en-US" sz="2800" dirty="0"/>
+            <a:endParaRPr lang="en-US" sz="2400" dirty="0"/>
           </a:p>
         </p:txBody>
       </p:sp>
@@ -15043,7 +15189,7 @@
         </p:nvSpPr>
         <p:spPr>
           <a:xfrm>
-            <a:off x="8170267" y="3669605"/>
+            <a:off x="8170267" y="3677245"/>
             <a:ext cx="3095803" cy="415230"/>
           </a:xfrm>
           <a:prstGeom prst="rect">
@@ -15103,7 +15249,7 @@
         </p:nvSpPr>
         <p:spPr>
           <a:xfrm>
-            <a:off x="8170267" y="4144466"/>
+            <a:off x="8170267" y="4352826"/>
             <a:ext cx="3095803" cy="620911"/>
           </a:xfrm>
           <a:prstGeom prst="rect">
@@ -15149,7 +15295,7 @@
                 <a:ea typeface="+mn-lt" pitchFamily="34" charset="-122"/>
                 <a:cs typeface="+mn-lt" pitchFamily="34" charset="-120"/>
               </a:rPr>
-              <a:t>развитого сервиса, а не бюджет и не </a:t>
+              <a:t>развитого сервиса, а не бюджет </a:t>
             </a:r>
             <a:br/>
             <a:pPr algn="l" indent="0" marL="0">
@@ -15167,7 +15313,7 @@
                 <a:ea typeface="+mn-lt" pitchFamily="34" charset="-122"/>
                 <a:cs typeface="+mn-lt" pitchFamily="34" charset="-120"/>
               </a:rPr>
-              <a:t>цель первого пилота</a:t>
+              <a:t>и не цель первого пилота</a:t>
             </a:r>
             <a:endParaRPr lang="en-US" sz="1200" dirty="0"/>
           </a:p>
@@ -15220,8 +15366,8 @@
         </p:nvSpPr>
         <p:spPr>
           <a:xfrm>
-            <a:off x="2843609" y="5341045"/>
-            <a:ext cx="279400" cy="279400"/>
+            <a:off x="2818209" y="5328345"/>
+            <a:ext cx="304800" cy="304800"/>
           </a:xfrm>
           <a:prstGeom prst="ellipse">
             <a:avLst/>
@@ -15240,7 +15386,7 @@
         </p:nvSpPr>
         <p:spPr>
           <a:xfrm>
-            <a:off x="2941439" y="5366445"/>
+            <a:off x="2928739" y="5366445"/>
             <a:ext cx="134541" cy="228600"/>
           </a:xfrm>
           <a:prstGeom prst="rect">
@@ -15339,8 +15485,8 @@
         </p:nvSpPr>
         <p:spPr>
           <a:xfrm>
-            <a:off x="5015607" y="5341045"/>
-            <a:ext cx="279400" cy="279400"/>
+            <a:off x="4990207" y="5328345"/>
+            <a:ext cx="304800" cy="304800"/>
           </a:xfrm>
           <a:prstGeom prst="ellipse">
             <a:avLst/>
@@ -15359,7 +15505,7 @@
         </p:nvSpPr>
         <p:spPr>
           <a:xfrm>
-            <a:off x="5087342" y="5366445"/>
+            <a:off x="5074642" y="5366445"/>
             <a:ext cx="186730" cy="228600"/>
           </a:xfrm>
           <a:prstGeom prst="rect">
@@ -15426,7 +15572,7 @@
                 <a:ea typeface="+mn-lt" pitchFamily="34" charset="-122"/>
                 <a:cs typeface="+mn-lt" pitchFamily="34" charset="-120"/>
               </a:rPr>
-              <a:t>Стоимость аренды у </a:t>
+              <a:t>Стоимость аренды </a:t>
             </a:r>
             <a:br/>
             <a:pPr algn="l" indent="0" marL="0">
@@ -15444,7 +15590,7 @@
                 <a:ea typeface="+mn-lt" pitchFamily="34" charset="-122"/>
                 <a:cs typeface="+mn-lt" pitchFamily="34" charset="-120"/>
               </a:rPr>
-              <a:t>фермы</a:t>
+              <a:t>у фермы</a:t>
             </a:r>
             <a:endParaRPr lang="en-US" sz="1200" dirty="0"/>
           </a:p>
@@ -15458,8 +15604,8 @@
         </p:nvSpPr>
         <p:spPr>
           <a:xfrm>
-            <a:off x="7187605" y="5341045"/>
-            <a:ext cx="279400" cy="279400"/>
+            <a:off x="7162205" y="5328345"/>
+            <a:ext cx="304800" cy="304800"/>
           </a:xfrm>
           <a:prstGeom prst="ellipse">
             <a:avLst/>
@@ -15478,7 +15624,7 @@
         </p:nvSpPr>
         <p:spPr>
           <a:xfrm>
-            <a:off x="7258745" y="5366445"/>
+            <a:off x="7246045" y="5366445"/>
             <a:ext cx="187920" cy="228600"/>
           </a:xfrm>
           <a:prstGeom prst="rect">
@@ -15577,8 +15723,8 @@
         </p:nvSpPr>
         <p:spPr>
           <a:xfrm>
-            <a:off x="9359602" y="5341045"/>
-            <a:ext cx="279400" cy="279400"/>
+            <a:off x="9334202" y="5328345"/>
+            <a:ext cx="304800" cy="304800"/>
           </a:xfrm>
           <a:prstGeom prst="ellipse">
             <a:avLst/>
@@ -15597,7 +15743,7 @@
         </p:nvSpPr>
         <p:spPr>
           <a:xfrm>
-            <a:off x="9429452" y="5366445"/>
+            <a:off x="9416752" y="5366445"/>
             <a:ext cx="190500" cy="228600"/>
           </a:xfrm>
           <a:prstGeom prst="rect">
@@ -15696,8 +15842,8 @@
         </p:nvSpPr>
         <p:spPr>
           <a:xfrm>
-            <a:off x="812800" y="5816977"/>
-            <a:ext cx="10718800" cy="238760"/>
+            <a:off x="812800" y="5820172"/>
+            <a:ext cx="10718800" cy="234950"/>
           </a:xfrm>
           <a:prstGeom prst="rect">
             <a:avLst/>
@@ -15715,7 +15861,7 @@
             <a:r>
               <a:rPr lang="ru-RU" altLang="en-US" sz="1200" dirty="0">
                 <a:solidFill>
-                  <a:srgbClr val="7A6E5F"/>
+                  <a:schemeClr val="accent6"/>
                 </a:solidFill>
                 <a:latin typeface="+mn-lt" pitchFamily="34" charset="0"/>
                 <a:ea typeface="+mn-lt" pitchFamily="34" charset="-122"/>
@@ -16011,7 +16157,7 @@
                 <a:ea typeface="+mn-lt" pitchFamily="34" charset="-122"/>
                 <a:cs typeface="+mn-lt" pitchFamily="34" charset="-120"/>
               </a:rPr>
-              <a:t>Готовы ли клиенты платить за подбор и </a:t>
+              <a:t>Готовы ли клиенты платить за подбор </a:t>
             </a:r>
             <a:br/>
             <a:pPr algn="l" indent="0" marL="0">
@@ -16029,7 +16175,7 @@
                 <a:ea typeface="+mn-lt" pitchFamily="34" charset="-122"/>
                 <a:cs typeface="+mn-lt" pitchFamily="34" charset="-120"/>
               </a:rPr>
-              <a:t>сопровождение, если есть более </a:t>
+              <a:t>и сопровождение, если есть более </a:t>
             </a:r>
             <a:br/>
             <a:pPr algn="l" indent="0" marL="0">
@@ -16478,18 +16624,18 @@
         </p:nvSpPr>
         <p:spPr>
           <a:xfrm>
-            <a:off x="7961809" y="1410295"/>
-            <a:ext cx="3414216" cy="2236490"/>
+            <a:off x="7964984" y="1413470"/>
+            <a:ext cx="3407866" cy="2230140"/>
           </a:xfrm>
           <a:prstGeom prst="roundRect">
             <a:avLst>
-              <a:gd name="adj" fmla="val 6814"/>
+              <a:gd name="adj" fmla="val 6834"/>
             </a:avLst>
           </a:prstGeom>
           <a:solidFill>
             <a:schemeClr val="accent3"/>
           </a:solidFill>
-          <a:ln w="6350">
+          <a:ln w="12700">
             <a:solidFill>
               <a:schemeClr val="accent4"/>
             </a:solidFill>
@@ -16505,7 +16651,7 @@
         </p:nvSpPr>
         <p:spPr>
           <a:xfrm>
-            <a:off x="8155484" y="1626791"/>
+            <a:off x="8161834" y="1633141"/>
             <a:ext cx="330200" cy="330200"/>
           </a:xfrm>
           <a:prstGeom prst="ellipse">
@@ -16525,7 +16671,7 @@
         </p:nvSpPr>
         <p:spPr>
           <a:xfrm>
-            <a:off x="8252023" y="1677591"/>
+            <a:off x="8258373" y="1683941"/>
             <a:ext cx="187920" cy="228600"/>
           </a:xfrm>
           <a:prstGeom prst="rect">
@@ -16564,8 +16710,8 @@
         </p:nvSpPr>
         <p:spPr>
           <a:xfrm>
-            <a:off x="8599984" y="1578570"/>
-            <a:ext cx="2659837" cy="435570"/>
+            <a:off x="8606334" y="1584920"/>
+            <a:ext cx="2646756" cy="435570"/>
           </a:xfrm>
           <a:prstGeom prst="rect">
             <a:avLst/>
@@ -16624,8 +16770,8 @@
         </p:nvSpPr>
         <p:spPr>
           <a:xfrm>
-            <a:off x="8155484" y="2068711"/>
-            <a:ext cx="3117672" cy="426641"/>
+            <a:off x="8161834" y="2075061"/>
+            <a:ext cx="3104591" cy="426641"/>
           </a:xfrm>
           <a:prstGeom prst="rect">
             <a:avLst/>
@@ -16652,7 +16798,7 @@
                 <a:ea typeface="+mn-lt" pitchFamily="34" charset="-122"/>
                 <a:cs typeface="+mn-lt" pitchFamily="34" charset="-120"/>
               </a:rPr>
-              <a:t>Есть ли у партнёров подходящие GPU и </a:t>
+              <a:t>Есть ли у партнёров подходящие GPU </a:t>
             </a:r>
             <a:br/>
             <a:pPr algn="l" indent="0" marL="0">
@@ -16670,7 +16816,7 @@
                 <a:ea typeface="+mn-lt" pitchFamily="34" charset="-122"/>
                 <a:cs typeface="+mn-lt" pitchFamily="34" charset="-120"/>
               </a:rPr>
-              <a:t>нужная инфраструктура?</a:t>
+              <a:t>и нужная инфраструктура?</a:t>
             </a:r>
             <a:endParaRPr lang="en-US" sz="1200" dirty="0"/>
           </a:p>
@@ -16684,8 +16830,8 @@
         </p:nvSpPr>
         <p:spPr>
           <a:xfrm>
-            <a:off x="8155484" y="2558852"/>
-            <a:ext cx="3117672" cy="426641"/>
+            <a:off x="8161834" y="2565202"/>
+            <a:ext cx="3104591" cy="426641"/>
           </a:xfrm>
           <a:prstGeom prst="rect">
             <a:avLst/>
@@ -16729,7 +16875,7 @@
                 <a:ea typeface="+mn-lt" pitchFamily="34" charset="-122"/>
                 <a:cs typeface="+mn-lt" pitchFamily="34" charset="-120"/>
               </a:rPr>
-              <a:t> изучение оборудования и </a:t>
+              <a:t> изучение оборудования </a:t>
             </a:r>
             <a:br/>
             <a:pPr algn="l" indent="0" marL="0">
@@ -16747,7 +16893,7 @@
                 <a:ea typeface="+mn-lt" pitchFamily="34" charset="-122"/>
                 <a:cs typeface="+mn-lt" pitchFamily="34" charset="-120"/>
               </a:rPr>
-              <a:t>реальные тесты</a:t>
+              <a:t>и реальные тесты</a:t>
             </a:r>
             <a:endParaRPr lang="en-US" sz="1200" dirty="0"/>
           </a:p>
@@ -17069,7 +17215,7 @@
                 <a:ea typeface="+mn-lt" pitchFamily="34" charset="-122"/>
                 <a:cs typeface="+mn-lt" pitchFamily="34" charset="-120"/>
               </a:rPr>
-              <a:t> учёт времени и затрат на </a:t>
+              <a:t> учёт времени и затрат </a:t>
             </a:r>
             <a:br/>
             <a:pPr algn="l" indent="0" marL="0">
@@ -17087,7 +17233,7 @@
                 <a:ea typeface="+mn-lt" pitchFamily="34" charset="-122"/>
                 <a:cs typeface="+mn-lt" pitchFamily="34" charset="-120"/>
               </a:rPr>
-              <a:t>каждый пилот</a:t>
+              <a:t>на каждый пилот</a:t>
             </a:r>
             <a:endParaRPr lang="en-US" sz="1200" dirty="0"/>
           </a:p>
@@ -17101,18 +17247,18 @@
         </p:nvSpPr>
         <p:spPr>
           <a:xfrm>
-            <a:off x="4388842" y="3805535"/>
-            <a:ext cx="3414216" cy="2236490"/>
+            <a:off x="4392017" y="3808710"/>
+            <a:ext cx="3407866" cy="2230140"/>
           </a:xfrm>
           <a:prstGeom prst="roundRect">
             <a:avLst>
-              <a:gd name="adj" fmla="val 6814"/>
+              <a:gd name="adj" fmla="val 6834"/>
             </a:avLst>
           </a:prstGeom>
           <a:solidFill>
             <a:schemeClr val="accent3"/>
           </a:solidFill>
-          <a:ln w="6350">
+          <a:ln w="12700">
             <a:solidFill>
               <a:schemeClr val="accent4"/>
             </a:solidFill>
@@ -17128,7 +17274,7 @@
         </p:nvSpPr>
         <p:spPr>
           <a:xfrm>
-            <a:off x="4582517" y="4022030"/>
+            <a:off x="4588867" y="4028380"/>
             <a:ext cx="330200" cy="330200"/>
           </a:xfrm>
           <a:prstGeom prst="ellipse">
@@ -17148,7 +17294,7 @@
         </p:nvSpPr>
         <p:spPr>
           <a:xfrm>
-            <a:off x="4681637" y="4072830"/>
+            <a:off x="4687987" y="4079180"/>
             <a:ext cx="182761" cy="228600"/>
           </a:xfrm>
           <a:prstGeom prst="rect">
@@ -17187,8 +17333,8 @@
         </p:nvSpPr>
         <p:spPr>
           <a:xfrm>
-            <a:off x="5027017" y="3973810"/>
-            <a:ext cx="2659837" cy="435570"/>
+            <a:off x="5033367" y="3980160"/>
+            <a:ext cx="2646756" cy="435570"/>
           </a:xfrm>
           <a:prstGeom prst="rect">
             <a:avLst/>
@@ -17247,8 +17393,8 @@
         </p:nvSpPr>
         <p:spPr>
           <a:xfrm>
-            <a:off x="4582517" y="4463951"/>
-            <a:ext cx="3117672" cy="639961"/>
+            <a:off x="4588867" y="4470301"/>
+            <a:ext cx="3104591" cy="639961"/>
           </a:xfrm>
           <a:prstGeom prst="rect">
             <a:avLst/>
@@ -17275,7 +17421,7 @@
                 <a:ea typeface="+mn-lt" pitchFamily="34" charset="-122"/>
                 <a:cs typeface="+mn-lt" pitchFamily="34" charset="-120"/>
               </a:rPr>
-              <a:t>Нужно определить правовую модель и </a:t>
+              <a:t>Нужно определить правовую модель </a:t>
             </a:r>
             <a:br/>
             <a:pPr algn="l" indent="0" marL="0">
@@ -17293,7 +17439,7 @@
                 <a:ea typeface="+mn-lt" pitchFamily="34" charset="-122"/>
                 <a:cs typeface="+mn-lt" pitchFamily="34" charset="-120"/>
               </a:rPr>
-              <a:t>правила работы с данными клиентов. В </a:t>
+              <a:t>и правила работы с данными клиентов. </a:t>
             </a:r>
             <a:br/>
             <a:pPr algn="l" indent="0" marL="0">
@@ -17311,7 +17457,7 @@
                 <a:ea typeface="+mn-lt" pitchFamily="34" charset="-122"/>
                 <a:cs typeface="+mn-lt" pitchFamily="34" charset="-120"/>
               </a:rPr>
-              <a:t>пилоте — тестовые данные</a:t>
+              <a:t>В пилоте — тестовые данные</a:t>
             </a:r>
             <a:endParaRPr lang="en-US" sz="1200" dirty="0"/>
           </a:p>
@@ -17325,18 +17471,18 @@
         </p:nvSpPr>
         <p:spPr>
           <a:xfrm>
-            <a:off x="7961809" y="3805535"/>
-            <a:ext cx="3414216" cy="2236490"/>
+            <a:off x="7964984" y="3808710"/>
+            <a:ext cx="3407866" cy="2230140"/>
           </a:xfrm>
           <a:prstGeom prst="roundRect">
             <a:avLst>
-              <a:gd name="adj" fmla="val 6814"/>
+              <a:gd name="adj" fmla="val 6834"/>
             </a:avLst>
           </a:prstGeom>
           <a:solidFill>
             <a:schemeClr val="accent3"/>
           </a:solidFill>
-          <a:ln w="6350">
+          <a:ln w="12700">
             <a:solidFill>
               <a:schemeClr val="accent4"/>
             </a:solidFill>
@@ -17352,7 +17498,7 @@
         </p:nvSpPr>
         <p:spPr>
           <a:xfrm>
-            <a:off x="8155484" y="4022030"/>
+            <a:off x="8161834" y="4028380"/>
             <a:ext cx="330200" cy="330200"/>
           </a:xfrm>
           <a:prstGeom prst="ellipse">
@@ -17372,7 +17518,7 @@
         </p:nvSpPr>
         <p:spPr>
           <a:xfrm>
-            <a:off x="8250436" y="4072830"/>
+            <a:off x="8256786" y="4079180"/>
             <a:ext cx="190996" cy="228600"/>
           </a:xfrm>
           <a:prstGeom prst="rect">
@@ -17411,8 +17557,8 @@
         </p:nvSpPr>
         <p:spPr>
           <a:xfrm>
-            <a:off x="8599984" y="3973810"/>
-            <a:ext cx="2659837" cy="435570"/>
+            <a:off x="8606334" y="3980160"/>
+            <a:ext cx="2646756" cy="435570"/>
           </a:xfrm>
           <a:prstGeom prst="rect">
             <a:avLst/>
@@ -17471,8 +17617,8 @@
         </p:nvSpPr>
         <p:spPr>
           <a:xfrm>
-            <a:off x="8155484" y="4463951"/>
-            <a:ext cx="3117672" cy="853281"/>
+            <a:off x="8161834" y="4470301"/>
+            <a:ext cx="3104591" cy="853281"/>
           </a:xfrm>
           <a:prstGeom prst="rect">
             <a:avLst/>
@@ -17535,7 +17681,7 @@
                 <a:ea typeface="+mn-lt" pitchFamily="34" charset="-122"/>
                 <a:cs typeface="+mn-lt" pitchFamily="34" charset="-120"/>
               </a:rPr>
-              <a:t>пилота он не обязателен, если ресурсы и </a:t>
+              <a:t>пилота он не обязателен, если ресурсы </a:t>
             </a:r>
             <a:br/>
             <a:pPr algn="l" indent="0" marL="0">
@@ -17553,7 +17699,7 @@
                 <a:ea typeface="+mn-lt" pitchFamily="34" charset="-122"/>
                 <a:cs typeface="+mn-lt" pitchFamily="34" charset="-120"/>
               </a:rPr>
-              <a:t>обслуживание обеспечивает партнёр</a:t>
+              <a:t>и обслуживание обеспечивает партнёр</a:t>
             </a:r>
             <a:endParaRPr lang="en-US" sz="1200" dirty="0"/>
           </a:p>
@@ -17596,7 +17742,7 @@
         <a:srgbClr val="3A3228"/>
       </a:accent4>
       <a:accent5>
-        <a:srgbClr val="BFB4A1"/>
+        <a:srgbClr val="CBC1AF"/>
       </a:accent5>
       <a:accent6>
         <a:srgbClr val="5A5044"/>
@@ -17605,7 +17751,7 @@
         <a:srgbClr val="8A5207"/>
       </a:hlink>
       <a:folHlink>
-        <a:srgbClr val="7A6E5F"/>
+        <a:srgbClr val="6A5E4F"/>
       </a:folHlink>
     </a:clrScheme>
     <a:fontScheme name="Улей">
